--- a/docs/06_presentations/DA-ZVAD_Phase2_Review.pptx
+++ b/docs/06_presentations/DA-ZVAD_Phase2_Review.pptx
@@ -24,6 +24,7 @@
     <p:sldId id="272" r:id="rId23"/>
     <p:sldId id="273" r:id="rId24"/>
     <p:sldId id="274" r:id="rId25"/>
+    <p:sldId id="275" r:id="rId26"/>
   </p:sldIdLst>
   <p:sldSz cx="12191695" cy="6858000" type="screen4x3"/>
   <p:notesSz cx="6858000" cy="9144000"/>
@@ -660,7 +661,7 @@
           <a:lstStyle/>
           <a:p>
             <a:r>
-              <a:t>The most interesting slide. Point at the two prompts on screen and let them see the shared words. Then deliver the punchline: the more accurate the description, the more damage it does. That is why the result inverted.</a:t>
+              <a:t>The most interesting slide. Point at the two prompts and let them see the shared words. Then the punchline: the more accurate the description, the more damage it does. That is why the result inverted.</a:t>
             </a:r>
           </a:p>
         </p:txBody>
@@ -730,7 +731,7 @@
           <a:lstStyle/>
           <a:p>
             <a:r>
-              <a:t>The headline. Point at the none column being identical in both rows - that is the control, and it proves only the injection point changed. Then point at 0.592 and say a wrong sentence costs ten points.</a:t>
+              <a:t>The headline. Point at the none column being identical in both rows - that is the control, and it proves only the injection point changed. Then point at 0.628 and say a wrong sentence costs ten points.</a:t>
             </a:r>
           </a:p>
         </p:txBody>
@@ -800,7 +801,7 @@
           <a:lstStyle/>
           <a:p>
             <a:r>
-              <a:t>Be scrupulous here. Say out loud that you do NOT claim the correct description improves detection - it gains 0.007, which is nothing. The claim rests entirely on the mismatched condition. Understating protects you.</a:t>
+              <a:t>Be scrupulous. The +0.027 is positive at every window but sits inside the spread, so we report direction and not magnitude. The claim rests on the mismatched penalty. Understating here protects you.</a:t>
             </a:r>
           </a:p>
         </p:txBody>
@@ -870,7 +871,7 @@
           <a:lstStyle/>
           <a:p>
             <a:r>
-              <a:t>Explain complementarity with the bicycle: a parked bicycle is not an anomaly, a brisk walk is not an anomaly, a bicycle at cycling speed on a footpath is. Then volunteer the awkward part about motion alone.</a:t>
+              <a:t>Volunteer the surprise: we expected motion to help and it does not. The pooled embedding already registers enough of it. Reporting the prediction that failed is stronger than reporting only the ones that held.</a:t>
             </a:r>
           </a:p>
         </p:txBody>
@@ -940,7 +941,7 @@
           <a:lstStyle/>
           <a:p>
             <a:r>
-              <a:t>Say why you are showing failures: anyone can report the runs that worked. If the panel suspects generated work, this slide is your best answer - a clean table is easy to fabricate, four diagnosed failures are not.</a:t>
+              <a:t>The most important slide in the deck. Detection transfers almost exactly; the adaptation does not. Give the honest reading - on Avenue a placeholder beats an accurate description, so that benefit cannot be domain adaptation. Then give the conjecture AND the experiment that would settle it.</a:t>
             </a:r>
           </a:p>
         </p:txBody>
@@ -1010,7 +1011,7 @@
           <a:lstStyle/>
           <a:p>
             <a:r>
-              <a:t>Pre-empt the obvious challenge. LAVAD is better and you say so. But it runs three large models per frame; you run one encoder and a sentence. You are not competing on accuracy and the paper states that.</a:t>
+              <a:t>Say why you are showing failures: the claim is that the minimal configuration is right, and that is only credible next to what was tried. If the panel suspects generated work, this slide is your best answer.</a:t>
             </a:r>
           </a:p>
         </p:txBody>
@@ -1080,7 +1081,7 @@
           <a:lstStyle/>
           <a:p>
             <a:r>
-              <a:t>Deliver these confidently rather than apologetically. Naming the single-domain limitation yourself is the point - if they raise it first you look like you had not noticed.</a:t>
+              <a:t>Anchor on the trained baseline, not on LAVAD. You match the benchmark's own 2018 baseline using none of its training data. Then concede LAVAD openly.</a:t>
             </a:r>
           </a:p>
         </p:txBody>
@@ -1150,7 +1151,7 @@
           <a:lstStyle/>
           <a:p>
             <a:r>
-              <a:t>Priority one is the second dataset because it tests the transfer claim, which is currently untested. Note that the infrastructure cost is now paid: 21 minutes of encoding buys unlimited scoring experiments.</a:t>
+              <a:t>Deliver these confidently rather than apologetically. The metric limitation is worth dwelling on - it is a real methodological point about a protocol the whole field uses, and we found it by chasing our own bug.</a:t>
             </a:r>
           </a:p>
         </p:txBody>
@@ -1220,7 +1221,7 @@
           <a:lstStyle/>
           <a:p>
             <a:r>
-              <a:t>Close on the finding rather than the number: where the description is injected dominates what it says. Then state the missing piece and hand over to questions.</a:t>
+              <a:t>Priority one is the within-view control because it turns our explanation from a conjecture into a result. Note the infrastructure cost is now paid.</a:t>
             </a:r>
           </a:p>
         </p:txBody>
@@ -1315,6 +1316,76 @@
 </p:notes>
 </file>
 
+<file path=ppt/notesSlides/notesSlide20.xml><?xml version="1.0" encoding="utf-8"?>
+<p:notes xmlns:a="http://schemas.openxmlformats.org/drawingml/2006/main" xmlns:p="http://schemas.openxmlformats.org/presentationml/2006/main" xmlns:r="http://schemas.openxmlformats.org/officeDocument/2006/relationships">
+  <p:cSld>
+    <p:spTree>
+      <p:nvGrpSpPr>
+        <p:cNvPr id="1" name=""/>
+        <p:cNvGrpSpPr/>
+        <p:nvPr/>
+      </p:nvGrpSpPr>
+      <p:grpSpPr>
+        <a:xfrm>
+          <a:off x="0" y="0"/>
+          <a:ext cx="0" cy="0"/>
+          <a:chOff x="0" y="0"/>
+          <a:chExt cx="0" cy="0"/>
+        </a:xfrm>
+      </p:grpSpPr>
+      <p:sp>
+        <p:nvSpPr>
+          <p:cNvPr id="2" name="Slide Image Placeholder 1"/>
+          <p:cNvSpPr>
+            <a:spLocks noGrp="1"/>
+          </p:cNvSpPr>
+          <p:nvPr>
+            <p:ph type="sldImg" idx="2"/>
+          </p:nvPr>
+        </p:nvSpPr>
+        <p:spPr/>
+      </p:sp>
+      <p:sp>
+        <p:nvSpPr>
+          <p:cNvPr id="3" name="Notes Placeholder 2"/>
+          <p:cNvSpPr>
+            <a:spLocks noGrp="1"/>
+          </p:cNvSpPr>
+          <p:nvPr>
+            <p:ph type="body" idx="3" sz="quarter"/>
+          </p:nvPr>
+        </p:nvSpPr>
+        <p:spPr/>
+        <p:txBody>
+          <a:bodyPr/>
+          <a:lstStyle/>
+          <a:p>
+            <a:r>
+              <a:t>Close on the boundary, not the number. The claim is scoped rather than abandoned, and we named the experiment that settles it. Then hand over.</a:t>
+            </a:r>
+          </a:p>
+        </p:txBody>
+      </p:sp>
+      <p:sp>
+        <p:nvSpPr>
+          <p:cNvPr id="4" name="Slide Number Placeholder 3"/>
+          <p:cNvSpPr>
+            <a:spLocks noGrp="1"/>
+          </p:cNvSpPr>
+          <p:nvPr>
+            <p:ph type="sldNum" idx="5" sz="quarter"/>
+          </p:nvPr>
+        </p:nvSpPr>
+        <p:spPr/>
+      </p:sp>
+    </p:spTree>
+  </p:cSld>
+  <p:clrMapOvr>
+    <a:masterClrMapping/>
+  </p:clrMapOvr>
+</p:notes>
+</file>
+
 <file path=ppt/notesSlides/notesSlide3.xml><?xml version="1.0" encoding="utf-8"?>
 <p:notes xmlns:a="http://schemas.openxmlformats.org/drawingml/2006/main" xmlns:p="http://schemas.openxmlformats.org/presentationml/2006/main" xmlns:r="http://schemas.openxmlformats.org/officeDocument/2006/relationships">
   <p:cSld>
@@ -1430,7 +1501,7 @@
           <a:lstStyle/>
           <a:p>
             <a:r>
-              <a:t>Now land the consequence. In anomaly detection normality IS the deployment context, so concept shift is not a corner case - it is the whole task. Appearance-alignment methods cannot help when the appearance is identical.</a:t>
+              <a:t>Land the consequence. In anomaly detection normality IS the deployment context. Mention the 2026 position paper yourself - an independent group reached the same premise, which answers 'did you invent this problem?'</a:t>
             </a:r>
           </a:p>
         </p:txBody>
@@ -1500,7 +1571,7 @@
           <a:lstStyle/>
           <a:p>
             <a:r>
-              <a:t>Walk the four modules left to right in about thirty seconds. Then stop on M3 - the orange box - and say that is the only place the domain enters, and the entire research question.</a:t>
+              <a:t>Walk the four modules left to right in about thirty seconds. Then stop on M3 - the orange box - and say that is the only place the domain enters.</a:t>
             </a:r>
           </a:p>
         </p:txBody>
@@ -1570,7 +1641,7 @@
           <a:lstStyle/>
           <a:p>
             <a:r>
-              <a:t>The strongest methodological point in the deck. Say it slowly. Because nothing can change except the text, any effect is attributable to the text. Methods that update weights cannot make that argument.</a:t>
+              <a:t>The strongest methodological point in the deck. Say it slowly. And note that the competing systems CANNOT run our experiment - their text is learned on source data, or entangled in an LLM prior, or paired with a trained adapter.</a:t>
             </a:r>
           </a:p>
         </p:txBody>
@@ -1640,7 +1711,7 @@
           <a:lstStyle/>
           <a:p>
             <a:r>
-              <a:t>Emphasise that the interpretation was fixed BEFORE any measurement, and that the mismatched condition is designed to refute us. A panel will respect a test you could have failed.</a:t>
+              <a:t>Emphasise that the interpretation was fixed BEFORE any measurement, and that the mismatched condition is designed to refute us. A panel will respect a test you could have failed - and later in the deck, one you partly did.</a:t>
             </a:r>
           </a:p>
         </p:txBody>
@@ -1710,7 +1781,7 @@
           <a:lstStyle/>
           <a:p>
             <a:r>
-              <a:t>Keep this brief - it is the credibility slide. If anyone doubts the work is yours, offer to open a manifest. It records the commit, the machine and the frame counts.</a:t>
+              <a:t>Keep this brief - it is the credibility slide. If anyone doubts the work is yours, offer to open a manifest. Five runs, all recorded.</a:t>
             </a:r>
           </a:p>
         </p:txBody>
@@ -1780,7 +1851,7 @@
           <a:lstStyle/>
           <a:p>
             <a:r>
-              <a:t>Do not rush past this and do not apologise for it. Say plainly: the first run was chance, and the key experiment came out backwards. Then pause. The next two slides are what makes this presentation worth listening to.</a:t>
+              <a:t>Do not rush past this and do not apologise for it. The first run was chance, and the key experiment came out backwards. Then pause. The next two slides are what makes this presentation worth listening to.</a:t>
             </a:r>
           </a:p>
         </p:txBody>
@@ -5187,7 +5258,7 @@
                 </a:solidFill>
                 <a:latin typeface="Segoe UI"/>
               </a:rPr>
-              <a:t>14 August 2026</a:t>
+              <a:t>18 August 2026</a:t>
             </a:r>
           </a:p>
         </p:txBody>
@@ -5925,7 +5996,7 @@
                 </a:solidFill>
                 <a:latin typeface="Segoe UI"/>
               </a:rPr>
-              <a:t>0.70</a:t>
+              <a:t>0.71</a:t>
             </a:r>
           </a:p>
         </p:txBody>
@@ -7216,7 +7287,7 @@
                 </a:solidFill>
                 <a:latin typeface="Segoe UI"/>
               </a:rPr>
-              <a:t>Per-clip normalised frame-level AUROC. Every model frozen; only the sentence and its injection point vary.</a:t>
+              <a:t>ShanghaiTech, all 107 clips, per-clip normalised. Every model frozen; only the sentence and its injection point vary.</a:t>
             </a:r>
           </a:p>
         </p:txBody>
@@ -7240,11 +7311,12 @@
                 <a:tableStyleId>{5C22544A-7EE6-4342-B048-85BDC9FD1C3A}</a:tableStyleId>
               </a:tblPr>
               <a:tblGrid>
-                <a:gridCol w="3319272"/>
-                <a:gridCol w="1828800"/>
-                <a:gridCol w="1828800"/>
-                <a:gridCol w="1828800"/>
-                <a:gridCol w="1828800"/>
+                <a:gridCol w="2953512"/>
+                <a:gridCol w="1536192"/>
+                <a:gridCol w="1536192"/>
+                <a:gridCol w="1536192"/>
+                <a:gridCol w="1536192"/>
+                <a:gridCol w="1536192"/>
               </a:tblGrid>
               <a:tr h="530352">
                 <a:tc>
@@ -7362,6 +7434,29 @@
                     </a:solidFill>
                   </a:tcPr>
                 </a:tc>
+                <a:tc>
+                  <a:txBody>
+                    <a:bodyPr wrap="square"/>
+                    <a:lstStyle/>
+                    <a:p>
+                      <a:pPr algn="r"/>
+                      <a:r>
+                        <a:rPr sz="1500" b="1">
+                          <a:solidFill>
+                            <a:srgbClr val="FFFFFF"/>
+                          </a:solidFill>
+                          <a:latin typeface="Segoe UI"/>
+                        </a:rPr>
+                        <a:t>gap</a:t>
+                      </a:r>
+                    </a:p>
+                  </a:txBody>
+                  <a:tcPr marL="128016" marR="128016" marT="45720" marB="45720" anchor="ctr">
+                    <a:solidFill>
+                      <a:srgbClr val="141C1E"/>
+                    </a:solidFill>
+                  </a:tcPr>
+                </a:tc>
               </a:tr>
               <a:tr h="530352">
                 <a:tc>
@@ -7400,7 +7495,7 @@
                           </a:solidFill>
                           <a:latin typeface="Consolas"/>
                         </a:rPr>
-                        <a:t>0.685</a:t>
+                        <a:t>0.707</a:t>
                       </a:r>
                     </a:p>
                   </a:txBody>
@@ -7423,7 +7518,7 @@
                           </a:solidFill>
                           <a:latin typeface="Consolas"/>
                         </a:rPr>
-                        <a:t>0.656</a:t>
+                        <a:t>0.670</a:t>
                       </a:r>
                     </a:p>
                   </a:txBody>
@@ -7446,7 +7541,7 @@
                           </a:solidFill>
                           <a:latin typeface="Consolas"/>
                         </a:rPr>
-                        <a:t>0.637</a:t>
+                        <a:t>0.666</a:t>
                       </a:r>
                     </a:p>
                   </a:txBody>
@@ -7469,7 +7564,30 @@
                           </a:solidFill>
                           <a:latin typeface="Consolas"/>
                         </a:rPr>
-                        <a:t>0.678</a:t>
+                        <a:t>0.695</a:t>
+                      </a:r>
+                    </a:p>
+                  </a:txBody>
+                  <a:tcPr marL="128016" marR="128016" marT="45720" marB="45720" anchor="ctr">
+                    <a:solidFill>
+                      <a:srgbClr val="FFFFFF"/>
+                    </a:solidFill>
+                  </a:tcPr>
+                </a:tc>
+                <a:tc>
+                  <a:txBody>
+                    <a:bodyPr wrap="square"/>
+                    <a:lstStyle/>
+                    <a:p>
+                      <a:pPr algn="r"/>
+                      <a:r>
+                        <a:rPr sz="1500" b="0">
+                          <a:solidFill>
+                            <a:srgbClr val="141C1E"/>
+                          </a:solidFill>
+                          <a:latin typeface="Consolas"/>
+                        </a:rPr>
+                        <a:t>−0.029</a:t>
                       </a:r>
                     </a:p>
                   </a:txBody>
@@ -7517,7 +7635,7 @@
                           </a:solidFill>
                           <a:latin typeface="Consolas"/>
                         </a:rPr>
-                        <a:t>0.685</a:t>
+                        <a:t>0.707</a:t>
                       </a:r>
                     </a:p>
                   </a:txBody>
@@ -7540,7 +7658,7 @@
                           </a:solidFill>
                           <a:latin typeface="Consolas"/>
                         </a:rPr>
-                        <a:t>0.677</a:t>
+                        <a:t>0.691</a:t>
                       </a:r>
                     </a:p>
                   </a:txBody>
@@ -7563,7 +7681,7 @@
                           </a:solidFill>
                           <a:latin typeface="Consolas"/>
                         </a:rPr>
-                        <a:t>0.692</a:t>
+                        <a:t>0.734</a:t>
                       </a:r>
                     </a:p>
                   </a:txBody>
@@ -7586,7 +7704,30 @@
                           </a:solidFill>
                           <a:latin typeface="Consolas"/>
                         </a:rPr>
-                        <a:t>0.592</a:t>
+                        <a:t>0.628</a:t>
+                      </a:r>
+                    </a:p>
+                  </a:txBody>
+                  <a:tcPr marL="128016" marR="128016" marT="45720" marB="45720" anchor="ctr">
+                    <a:solidFill>
+                      <a:srgbClr val="DDEDEB"/>
+                    </a:solidFill>
+                  </a:tcPr>
+                </a:tc>
+                <a:tc>
+                  <a:txBody>
+                    <a:bodyPr wrap="square"/>
+                    <a:lstStyle/>
+                    <a:p>
+                      <a:pPr algn="r"/>
+                      <a:r>
+                        <a:rPr sz="1500" b="1">
+                          <a:solidFill>
+                            <a:srgbClr val="141C1E"/>
+                          </a:solidFill>
+                          <a:latin typeface="Consolas"/>
+                        </a:rPr>
+                        <a:t>+0.105</a:t>
                       </a:r>
                     </a:p>
                   </a:txBody>
@@ -7718,7 +7859,7 @@
                 </a:solidFill>
                 <a:latin typeface="Segoe UI"/>
               </a:rPr>
-              <a:t>0.692</a:t>
+              <a:t>0.734</a:t>
             </a:r>
           </a:p>
         </p:txBody>
@@ -7840,7 +7981,7 @@
                 </a:solidFill>
                 <a:latin typeface="Segoe UI"/>
               </a:rPr>
-              <a:t>0.592</a:t>
+              <a:t>0.628</a:t>
             </a:r>
           </a:p>
         </p:txBody>
@@ -8224,7 +8365,7 @@
                 </a:solidFill>
                 <a:latin typeface="Segoe UI"/>
               </a:rPr>
-              <a:t>WHAT WE DO NOT CLAIM</a:t>
+              <a:t>THE WEAKER HALF</a:t>
             </a:r>
           </a:p>
         </p:txBody>
@@ -8257,14 +8398,14 @@
               </a:lnSpc>
             </a:pPr>
             <a:r>
-              <a:rPr sz="1550" b="0" i="0">
+              <a:rPr sz="1500" b="0" i="0">
                 <a:solidFill>
                   <a:srgbClr val="141C1E"/>
                 </a:solidFill>
                 <a:latin typeface="Segoe UI"/>
               </a:rPr>
-              <a:t>That a correct description improves detection.
-It beats no description by 0.007 — which is nothing.</a:t>
+              <a:t>A correct description beats none by +0.027.
+Positive at every window, but inside the ±0.036 split-to-split spread.</a:t>
             </a:r>
           </a:p>
         </p:txBody>
@@ -8347,7 +8488,7 @@
                 </a:solidFill>
                 <a:latin typeface="Segoe UI"/>
               </a:rPr>
-              <a:t>WHAT WE DO CLAIM</a:t>
+              <a:t>THE CLAIM WE MAKE</a:t>
             </a:r>
           </a:p>
         </p:txBody>
@@ -8380,14 +8521,14 @@
               </a:lnSpc>
             </a:pPr>
             <a:r>
-              <a:rPr sz="1550" b="0" i="0">
+              <a:rPr sz="1500" b="0" i="0">
                 <a:solidFill>
                   <a:srgbClr val="141C1E"/>
                 </a:solidFill>
                 <a:latin typeface="Segoe UI"/>
               </a:rPr>
-              <a:t>That the description is load-bearing.
-Corrupting it costs 0.100 — and nothing else could have caused that.</a:t>
+              <a:t>A WRONG description costs −0.105.
+Unambiguous, and nothing else could have caused it.</a:t>
             </a:r>
           </a:p>
         </p:txBody>
@@ -8553,7 +8694,7 @@
                 </a:solidFill>
                 <a:latin typeface="Segoe UI"/>
               </a:rPr>
-              <a:t>The description constrains a decision boundary rather than adding information. It does not lift performance when correct; it degrades performance sharply when misdirected.</a:t>
+              <a:t>The description constrains a decision boundary rather than adding information. It does not reliably lift performance when correct; it degrades performance sharply when misdirected.</a:t>
             </a:r>
           </a:p>
         </p:txBody>
@@ -8592,7 +8733,7 @@
                 </a:solidFill>
                 <a:latin typeface="Segoe UI"/>
               </a:rPr>
-              <a:t>A secondary finding, and one not present in the literature: WHERE the description is injected dominates WHAT it says — to the point of reversing the direction of the effect.</a:t>
+              <a:t>A secondary finding, not present in the literature: WHERE the description is injected dominates WHAT it says — to the point of reversing the direction of the effect.</a:t>
             </a:r>
           </a:p>
         </p:txBody>
@@ -8999,7 +9140,7 @@
                           </a:solidFill>
                           <a:latin typeface="Segoe UI"/>
                         </a:rPr>
-                        <a:t>Semantic — language only</a:t>
+                        <a:t>Semantic + scene-centre</a:t>
                       </a:r>
                     </a:p>
                   </a:txBody>
@@ -9022,7 +9163,7 @@
                           </a:solidFill>
                           <a:latin typeface="Consolas"/>
                         </a:rPr>
-                        <a:t>0.663 ± 0.021</a:t>
+                        <a:t>0.645 ± 0.034</a:t>
                       </a:r>
                     </a:p>
                   </a:txBody>
@@ -9045,7 +9186,7 @@
                           </a:solidFill>
                           <a:latin typeface="Consolas"/>
                         </a:rPr>
-                        <a:t>0.673</a:t>
+                        <a:t>0.640</a:t>
                       </a:r>
                     </a:p>
                   </a:txBody>
@@ -9093,7 +9234,7 @@
                           </a:solidFill>
                           <a:latin typeface="Consolas"/>
                         </a:rPr>
-                        <a:t>0.676 ± 0.012</a:t>
+                        <a:t>0.685 ± 0.015</a:t>
                       </a:r>
                     </a:p>
                   </a:txBody>
@@ -9116,7 +9257,7 @@
                           </a:solidFill>
                           <a:latin typeface="Consolas"/>
                         </a:rPr>
-                        <a:t>0.684</a:t>
+                        <a:t>0.686</a:t>
                       </a:r>
                     </a:p>
                   </a:txBody>
@@ -9141,7 +9282,7 @@
                           </a:solidFill>
                           <a:latin typeface="Segoe UI"/>
                         </a:rPr>
-                        <a:t>Semantic + scene-centre</a:t>
+                        <a:t>Semantic + kinematic</a:t>
                       </a:r>
                     </a:p>
                   </a:txBody>
@@ -9164,7 +9305,7 @@
                           </a:solidFill>
                           <a:latin typeface="Consolas"/>
                         </a:rPr>
-                        <a:t>0.649 ± 0.022</a:t>
+                        <a:t>0.711 ± 0.034</a:t>
                       </a:r>
                     </a:p>
                   </a:txBody>
@@ -9187,7 +9328,7 @@
                           </a:solidFill>
                           <a:latin typeface="Consolas"/>
                         </a:rPr>
-                        <a:t>0.657</a:t>
+                        <a:t>0.706</a:t>
                       </a:r>
                     </a:p>
                   </a:txBody>
@@ -9212,7 +9353,7 @@
                           </a:solidFill>
                           <a:latin typeface="Segoe UI"/>
                         </a:rPr>
-                        <a:t>Semantic + kinematic</a:t>
+                        <a:t>Semantic — language only</a:t>
                       </a:r>
                     </a:p>
                   </a:txBody>
@@ -9235,7 +9376,7 @@
                           </a:solidFill>
                           <a:latin typeface="Consolas"/>
                         </a:rPr>
-                        <a:t>0.699 ± 0.017</a:t>
+                        <a:t>0.718 ± 0.036</a:t>
                       </a:r>
                     </a:p>
                   </a:txBody>
@@ -9258,7 +9399,7 @@
                           </a:solidFill>
                           <a:latin typeface="Consolas"/>
                         </a:rPr>
-                        <a:t>0.706</a:t>
+                        <a:t>0.707</a:t>
                       </a:r>
                     </a:p>
                   </a:txBody>
@@ -9390,7 +9531,7 @@
                 </a:solidFill>
                 <a:latin typeface="Segoe UI"/>
               </a:rPr>
-              <a:t>Complementary.  </a:t>
+              <a:t>The language pathway alone is best.  </a:t>
             </a:r>
             <a:r>
               <a:rPr sz="1500">
@@ -9399,7 +9540,7 @@
                 </a:solidFill>
                 <a:latin typeface="Segoe UI"/>
               </a:rPr>
-              <a:t>Language notices a bicycle is present; motion notices something is moving oddly. A ShanghaiTech anomaly needs both — a parked bicycle is not an anomaly, nor is a brisk walk.</a:t>
+              <a:t>Adding a motion signal costs 0.001 on the full set; adding scene-centre normality costs 0.067.</a:t>
             </a:r>
           </a:p>
         </p:txBody>
@@ -9482,7 +9623,7 @@
                 </a:solidFill>
                 <a:latin typeface="Segoe UI"/>
               </a:rPr>
-              <a:t>Reported honestly.  </a:t>
+              <a:t>This was not the expected answer.  </a:t>
             </a:r>
             <a:r>
               <a:rPr sz="1500">
@@ -9491,7 +9632,7 @@
                 </a:solidFill>
                 <a:latin typeface="Segoe UI"/>
               </a:rPr>
-              <a:t>Motion alone nearly matches language alone. We state this rather than present the score as evidence of semantic understanding.</a:t>
+              <a:t>ShanghaiTech's anomalies look kinematic — a bicycle at cycling speed — so appearance and motion should be complementary. Measured here, they are not.</a:t>
             </a:r>
           </a:p>
         </p:txBody>
@@ -9592,7 +9733,7 @@
                 </a:solidFill>
                 <a:latin typeface="Segoe UI"/>
               </a:rPr>
-              <a:t>RESULTS  ·  NEGATIVE FINDINGS</a:t>
+              <a:t>RESULTS  ·  CROSS-DOMAIN</a:t>
             </a:r>
           </a:p>
         </p:txBody>
@@ -9631,7 +9772,7 @@
                 </a:solidFill>
                 <a:latin typeface="Segoe UI"/>
               </a:rPr>
-              <a:t>Four hypotheses that failed</a:t>
+              <a:t>A second domain — the replication test</a:t>
             </a:r>
           </a:p>
         </p:txBody>
@@ -9719,17 +9860,56 @@
           </a:p>
         </p:txBody>
       </p:sp>
+      <p:sp>
+        <p:nvSpPr>
+          <p:cNvPr id="7" name="TextBox 6"/>
+          <p:cNvSpPr txBox="1"/>
+          <p:nvPr/>
+        </p:nvSpPr>
+        <p:spPr>
+          <a:xfrm>
+            <a:off x="777240" y="1737360"/>
+            <a:ext cx="10637215" cy="320040"/>
+          </a:xfrm>
+          <a:prstGeom prst="rect">
+            <a:avLst/>
+          </a:prstGeom>
+          <a:noFill/>
+        </p:spPr>
+        <p:txBody>
+          <a:bodyPr wrap="square" lIns="0" rIns="0" tIns="0" bIns="0">
+            <a:spAutoFit/>
+          </a:bodyPr>
+          <a:lstStyle/>
+          <a:p>
+            <a:pPr algn="l">
+              <a:lnSpc>
+                <a:spcPct val="100000"/>
+              </a:lnSpc>
+            </a:pPr>
+            <a:r>
+              <a:rPr sz="1500" b="0" i="0">
+                <a:solidFill>
+                  <a:srgbClr val="3A4A4C"/>
+                </a:solidFill>
+                <a:latin typeface="Segoe UI"/>
+              </a:rPr>
+              <a:t>Identical frozen configuration applied to CUHK Avenue. Nothing retuned. Only the scene sentence changed.</a:t>
+            </a:r>
+          </a:p>
+        </p:txBody>
+      </p:sp>
       <p:graphicFrame>
         <p:nvGraphicFramePr>
-          <p:cNvPr id="7" name="Table 6"/>
+          <p:cNvPr id="8" name="Table 7"/>
           <p:cNvGraphicFramePr>
             <a:graphicFrameLocks noGrp="1"/>
           </p:cNvGraphicFramePr>
           <p:nvPr/>
         </p:nvGraphicFramePr>
         <p:xfrm>
-          <a:off x="777240" y="1920240"/>
-          <a:ext cx="10634472" cy="2651760"/>
+          <a:off x="777240" y="2286000"/>
+          <a:ext cx="10634472" cy="1591056"/>
         </p:xfrm>
         <a:graphic>
           <a:graphicData uri="http://schemas.openxmlformats.org/drawingml/2006/table">
@@ -9738,10 +9918,1847 @@
                 <a:tableStyleId>{5C22544A-7EE6-4342-B048-85BDC9FD1C3A}</a:tableStyleId>
               </a:tblPr>
               <a:tblGrid>
-                <a:gridCol w="6400800"/>
-                <a:gridCol w="4233672"/>
+                <a:gridCol w="2953512"/>
+                <a:gridCol w="1536192"/>
+                <a:gridCol w="1536192"/>
+                <a:gridCol w="1536192"/>
+                <a:gridCol w="1536192"/>
+                <a:gridCol w="1536192"/>
               </a:tblGrid>
               <a:tr h="530352">
+                <a:tc>
+                  <a:txBody>
+                    <a:bodyPr wrap="square"/>
+                    <a:lstStyle/>
+                    <a:p>
+                      <a:pPr algn="l"/>
+                      <a:r>
+                        <a:rPr sz="1500" b="1">
+                          <a:solidFill>
+                            <a:srgbClr val="FFFFFF"/>
+                          </a:solidFill>
+                          <a:latin typeface="Segoe UI"/>
+                        </a:rPr>
+                        <a:t>Dataset</a:t>
+                      </a:r>
+                    </a:p>
+                  </a:txBody>
+                  <a:tcPr marL="128016" marR="128016" marT="45720" marB="45720" anchor="ctr">
+                    <a:solidFill>
+                      <a:srgbClr val="141C1E"/>
+                    </a:solidFill>
+                  </a:tcPr>
+                </a:tc>
+                <a:tc>
+                  <a:txBody>
+                    <a:bodyPr wrap="square"/>
+                    <a:lstStyle/>
+                    <a:p>
+                      <a:pPr algn="r"/>
+                      <a:r>
+                        <a:rPr sz="1500" b="1">
+                          <a:solidFill>
+                            <a:srgbClr val="FFFFFF"/>
+                          </a:solidFill>
+                          <a:latin typeface="Segoe UI"/>
+                        </a:rPr>
+                        <a:t>none</a:t>
+                      </a:r>
+                    </a:p>
+                  </a:txBody>
+                  <a:tcPr marL="128016" marR="128016" marT="45720" marB="45720" anchor="ctr">
+                    <a:solidFill>
+                      <a:srgbClr val="141C1E"/>
+                    </a:solidFill>
+                  </a:tcPr>
+                </a:tc>
+                <a:tc>
+                  <a:txBody>
+                    <a:bodyPr wrap="square"/>
+                    <a:lstStyle/>
+                    <a:p>
+                      <a:pPr algn="r"/>
+                      <a:r>
+                        <a:rPr sz="1500" b="1">
+                          <a:solidFill>
+                            <a:srgbClr val="FFFFFF"/>
+                          </a:solidFill>
+                          <a:latin typeface="Segoe UI"/>
+                        </a:rPr>
+                        <a:t>generic</a:t>
+                      </a:r>
+                    </a:p>
+                  </a:txBody>
+                  <a:tcPr marL="128016" marR="128016" marT="45720" marB="45720" anchor="ctr">
+                    <a:solidFill>
+                      <a:srgbClr val="141C1E"/>
+                    </a:solidFill>
+                  </a:tcPr>
+                </a:tc>
+                <a:tc>
+                  <a:txBody>
+                    <a:bodyPr wrap="square"/>
+                    <a:lstStyle/>
+                    <a:p>
+                      <a:pPr algn="r"/>
+                      <a:r>
+                        <a:rPr sz="1500" b="1">
+                          <a:solidFill>
+                            <a:srgbClr val="FFFFFF"/>
+                          </a:solidFill>
+                          <a:latin typeface="Segoe UI"/>
+                        </a:rPr>
+                        <a:t>matched</a:t>
+                      </a:r>
+                    </a:p>
+                  </a:txBody>
+                  <a:tcPr marL="128016" marR="128016" marT="45720" marB="45720" anchor="ctr">
+                    <a:solidFill>
+                      <a:srgbClr val="141C1E"/>
+                    </a:solidFill>
+                  </a:tcPr>
+                </a:tc>
+                <a:tc>
+                  <a:txBody>
+                    <a:bodyPr wrap="square"/>
+                    <a:lstStyle/>
+                    <a:p>
+                      <a:pPr algn="r"/>
+                      <a:r>
+                        <a:rPr sz="1500" b="1">
+                          <a:solidFill>
+                            <a:srgbClr val="FFFFFF"/>
+                          </a:solidFill>
+                          <a:latin typeface="Segoe UI"/>
+                        </a:rPr>
+                        <a:t>mismatched</a:t>
+                      </a:r>
+                    </a:p>
+                  </a:txBody>
+                  <a:tcPr marL="128016" marR="128016" marT="45720" marB="45720" anchor="ctr">
+                    <a:solidFill>
+                      <a:srgbClr val="141C1E"/>
+                    </a:solidFill>
+                  </a:tcPr>
+                </a:tc>
+                <a:tc>
+                  <a:txBody>
+                    <a:bodyPr wrap="square"/>
+                    <a:lstStyle/>
+                    <a:p>
+                      <a:pPr algn="r"/>
+                      <a:r>
+                        <a:rPr sz="1500" b="1">
+                          <a:solidFill>
+                            <a:srgbClr val="FFFFFF"/>
+                          </a:solidFill>
+                          <a:latin typeface="Segoe UI"/>
+                        </a:rPr>
+                        <a:t>gap</a:t>
+                      </a:r>
+                    </a:p>
+                  </a:txBody>
+                  <a:tcPr marL="128016" marR="128016" marT="45720" marB="45720" anchor="ctr">
+                    <a:solidFill>
+                      <a:srgbClr val="141C1E"/>
+                    </a:solidFill>
+                  </a:tcPr>
+                </a:tc>
+              </a:tr>
+              <a:tr h="530352">
+                <a:tc>
+                  <a:txBody>
+                    <a:bodyPr wrap="square"/>
+                    <a:lstStyle/>
+                    <a:p>
+                      <a:pPr algn="l"/>
+                      <a:r>
+                        <a:rPr sz="1500" b="0">
+                          <a:solidFill>
+                            <a:srgbClr val="141C1E"/>
+                          </a:solidFill>
+                          <a:latin typeface="Segoe UI"/>
+                        </a:rPr>
+                        <a:t>ShanghaiTech  (13 views)</a:t>
+                      </a:r>
+                    </a:p>
+                  </a:txBody>
+                  <a:tcPr marL="128016" marR="128016" marT="45720" marB="45720" anchor="ctr">
+                    <a:solidFill>
+                      <a:srgbClr val="FFFFFF"/>
+                    </a:solidFill>
+                  </a:tcPr>
+                </a:tc>
+                <a:tc>
+                  <a:txBody>
+                    <a:bodyPr wrap="square"/>
+                    <a:lstStyle/>
+                    <a:p>
+                      <a:pPr algn="r"/>
+                      <a:r>
+                        <a:rPr sz="1500" b="0">
+                          <a:solidFill>
+                            <a:srgbClr val="141C1E"/>
+                          </a:solidFill>
+                          <a:latin typeface="Consolas"/>
+                        </a:rPr>
+                        <a:t>0.707</a:t>
+                      </a:r>
+                    </a:p>
+                  </a:txBody>
+                  <a:tcPr marL="128016" marR="128016" marT="45720" marB="45720" anchor="ctr">
+                    <a:solidFill>
+                      <a:srgbClr val="FFFFFF"/>
+                    </a:solidFill>
+                  </a:tcPr>
+                </a:tc>
+                <a:tc>
+                  <a:txBody>
+                    <a:bodyPr wrap="square"/>
+                    <a:lstStyle/>
+                    <a:p>
+                      <a:pPr algn="r"/>
+                      <a:r>
+                        <a:rPr sz="1500" b="0">
+                          <a:solidFill>
+                            <a:srgbClr val="141C1E"/>
+                          </a:solidFill>
+                          <a:latin typeface="Consolas"/>
+                        </a:rPr>
+                        <a:t>0.691</a:t>
+                      </a:r>
+                    </a:p>
+                  </a:txBody>
+                  <a:tcPr marL="128016" marR="128016" marT="45720" marB="45720" anchor="ctr">
+                    <a:solidFill>
+                      <a:srgbClr val="FFFFFF"/>
+                    </a:solidFill>
+                  </a:tcPr>
+                </a:tc>
+                <a:tc>
+                  <a:txBody>
+                    <a:bodyPr wrap="square"/>
+                    <a:lstStyle/>
+                    <a:p>
+                      <a:pPr algn="r"/>
+                      <a:r>
+                        <a:rPr sz="1500" b="0">
+                          <a:solidFill>
+                            <a:srgbClr val="141C1E"/>
+                          </a:solidFill>
+                          <a:latin typeface="Consolas"/>
+                        </a:rPr>
+                        <a:t>0.734</a:t>
+                      </a:r>
+                    </a:p>
+                  </a:txBody>
+                  <a:tcPr marL="128016" marR="128016" marT="45720" marB="45720" anchor="ctr">
+                    <a:solidFill>
+                      <a:srgbClr val="FFFFFF"/>
+                    </a:solidFill>
+                  </a:tcPr>
+                </a:tc>
+                <a:tc>
+                  <a:txBody>
+                    <a:bodyPr wrap="square"/>
+                    <a:lstStyle/>
+                    <a:p>
+                      <a:pPr algn="r"/>
+                      <a:r>
+                        <a:rPr sz="1500" b="0">
+                          <a:solidFill>
+                            <a:srgbClr val="141C1E"/>
+                          </a:solidFill>
+                          <a:latin typeface="Consolas"/>
+                        </a:rPr>
+                        <a:t>0.628</a:t>
+                      </a:r>
+                    </a:p>
+                  </a:txBody>
+                  <a:tcPr marL="128016" marR="128016" marT="45720" marB="45720" anchor="ctr">
+                    <a:solidFill>
+                      <a:srgbClr val="FFFFFF"/>
+                    </a:solidFill>
+                  </a:tcPr>
+                </a:tc>
+                <a:tc>
+                  <a:txBody>
+                    <a:bodyPr wrap="square"/>
+                    <a:lstStyle/>
+                    <a:p>
+                      <a:pPr algn="r"/>
+                      <a:r>
+                        <a:rPr sz="1500" b="0">
+                          <a:solidFill>
+                            <a:srgbClr val="141C1E"/>
+                          </a:solidFill>
+                          <a:latin typeface="Consolas"/>
+                        </a:rPr>
+                        <a:t>+0.105</a:t>
+                      </a:r>
+                    </a:p>
+                  </a:txBody>
+                  <a:tcPr marL="128016" marR="128016" marT="45720" marB="45720" anchor="ctr">
+                    <a:solidFill>
+                      <a:srgbClr val="FFFFFF"/>
+                    </a:solidFill>
+                  </a:tcPr>
+                </a:tc>
+              </a:tr>
+              <a:tr h="530352">
+                <a:tc>
+                  <a:txBody>
+                    <a:bodyPr wrap="square"/>
+                    <a:lstStyle/>
+                    <a:p>
+                      <a:pPr algn="l"/>
+                      <a:r>
+                        <a:rPr sz="1500" b="1">
+                          <a:solidFill>
+                            <a:srgbClr val="141C1E"/>
+                          </a:solidFill>
+                          <a:latin typeface="Segoe UI"/>
+                        </a:rPr>
+                        <a:t>CUHK Avenue  (1 view)</a:t>
+                      </a:r>
+                    </a:p>
+                  </a:txBody>
+                  <a:tcPr marL="128016" marR="128016" marT="45720" marB="45720" anchor="ctr">
+                    <a:solidFill>
+                      <a:srgbClr val="DDEDEB"/>
+                    </a:solidFill>
+                  </a:tcPr>
+                </a:tc>
+                <a:tc>
+                  <a:txBody>
+                    <a:bodyPr wrap="square"/>
+                    <a:lstStyle/>
+                    <a:p>
+                      <a:pPr algn="r"/>
+                      <a:r>
+                        <a:rPr sz="1500" b="1">
+                          <a:solidFill>
+                            <a:srgbClr val="141C1E"/>
+                          </a:solidFill>
+                          <a:latin typeface="Consolas"/>
+                        </a:rPr>
+                        <a:t>0.706</a:t>
+                      </a:r>
+                    </a:p>
+                  </a:txBody>
+                  <a:tcPr marL="128016" marR="128016" marT="45720" marB="45720" anchor="ctr">
+                    <a:solidFill>
+                      <a:srgbClr val="DDEDEB"/>
+                    </a:solidFill>
+                  </a:tcPr>
+                </a:tc>
+                <a:tc>
+                  <a:txBody>
+                    <a:bodyPr wrap="square"/>
+                    <a:lstStyle/>
+                    <a:p>
+                      <a:pPr algn="r"/>
+                      <a:r>
+                        <a:rPr sz="1500" b="1">
+                          <a:solidFill>
+                            <a:srgbClr val="141C1E"/>
+                          </a:solidFill>
+                          <a:latin typeface="Consolas"/>
+                        </a:rPr>
+                        <a:t>0.729</a:t>
+                      </a:r>
+                    </a:p>
+                  </a:txBody>
+                  <a:tcPr marL="128016" marR="128016" marT="45720" marB="45720" anchor="ctr">
+                    <a:solidFill>
+                      <a:srgbClr val="DDEDEB"/>
+                    </a:solidFill>
+                  </a:tcPr>
+                </a:tc>
+                <a:tc>
+                  <a:txBody>
+                    <a:bodyPr wrap="square"/>
+                    <a:lstStyle/>
+                    <a:p>
+                      <a:pPr algn="r"/>
+                      <a:r>
+                        <a:rPr sz="1500" b="1">
+                          <a:solidFill>
+                            <a:srgbClr val="141C1E"/>
+                          </a:solidFill>
+                          <a:latin typeface="Consolas"/>
+                        </a:rPr>
+                        <a:t>0.677</a:t>
+                      </a:r>
+                    </a:p>
+                  </a:txBody>
+                  <a:tcPr marL="128016" marR="128016" marT="45720" marB="45720" anchor="ctr">
+                    <a:solidFill>
+                      <a:srgbClr val="DDEDEB"/>
+                    </a:solidFill>
+                  </a:tcPr>
+                </a:tc>
+                <a:tc>
+                  <a:txBody>
+                    <a:bodyPr wrap="square"/>
+                    <a:lstStyle/>
+                    <a:p>
+                      <a:pPr algn="r"/>
+                      <a:r>
+                        <a:rPr sz="1500" b="1">
+                          <a:solidFill>
+                            <a:srgbClr val="141C1E"/>
+                          </a:solidFill>
+                          <a:latin typeface="Consolas"/>
+                        </a:rPr>
+                        <a:t>0.657</a:t>
+                      </a:r>
+                    </a:p>
+                  </a:txBody>
+                  <a:tcPr marL="128016" marR="128016" marT="45720" marB="45720" anchor="ctr">
+                    <a:solidFill>
+                      <a:srgbClr val="DDEDEB"/>
+                    </a:solidFill>
+                  </a:tcPr>
+                </a:tc>
+                <a:tc>
+                  <a:txBody>
+                    <a:bodyPr wrap="square"/>
+                    <a:lstStyle/>
+                    <a:p>
+                      <a:pPr algn="r"/>
+                      <a:r>
+                        <a:rPr sz="1500" b="1">
+                          <a:solidFill>
+                            <a:srgbClr val="141C1E"/>
+                          </a:solidFill>
+                          <a:latin typeface="Consolas"/>
+                        </a:rPr>
+                        <a:t>+0.020</a:t>
+                      </a:r>
+                    </a:p>
+                  </a:txBody>
+                  <a:tcPr marL="128016" marR="128016" marT="45720" marB="45720" anchor="ctr">
+                    <a:solidFill>
+                      <a:srgbClr val="DDEDEB"/>
+                    </a:solidFill>
+                  </a:tcPr>
+                </a:tc>
+              </a:tr>
+            </a:tbl>
+          </a:graphicData>
+        </a:graphic>
+      </p:graphicFrame>
+      <p:sp>
+        <p:nvSpPr>
+          <p:cNvPr id="9" name="Rectangle 8"/>
+          <p:cNvSpPr/>
+          <p:nvPr/>
+        </p:nvSpPr>
+        <p:spPr>
+          <a:xfrm>
+            <a:off x="777240" y="3977639"/>
+            <a:ext cx="5074920" cy="1371600"/>
+          </a:xfrm>
+          <a:prstGeom prst="rect">
+            <a:avLst/>
+          </a:prstGeom>
+          <a:solidFill>
+            <a:srgbClr val="DDEDEB"/>
+          </a:solidFill>
+          <a:ln>
+            <a:noFill/>
+          </a:ln>
+          <a:effectLst/>
+        </p:spPr>
+        <p:style>
+          <a:lnRef idx="1">
+            <a:schemeClr val="accent1"/>
+          </a:lnRef>
+          <a:fillRef idx="3">
+            <a:schemeClr val="accent1"/>
+          </a:fillRef>
+          <a:effectRef idx="2">
+            <a:schemeClr val="accent1"/>
+          </a:effectRef>
+          <a:fontRef idx="minor">
+            <a:schemeClr val="lt1"/>
+          </a:fontRef>
+        </p:style>
+        <p:txBody>
+          <a:bodyPr rtlCol="0" anchor="ctr"/>
+          <a:lstStyle/>
+          <a:p>
+            <a:pPr algn="ctr"/>
+          </a:p>
+        </p:txBody>
+      </p:sp>
+      <p:sp>
+        <p:nvSpPr>
+          <p:cNvPr id="10" name="TextBox 9"/>
+          <p:cNvSpPr txBox="1"/>
+          <p:nvPr/>
+        </p:nvSpPr>
+        <p:spPr>
+          <a:xfrm>
+            <a:off x="1097280" y="4160520"/>
+            <a:ext cx="4480560" cy="274320"/>
+          </a:xfrm>
+          <a:prstGeom prst="rect">
+            <a:avLst/>
+          </a:prstGeom>
+          <a:noFill/>
+        </p:spPr>
+        <p:txBody>
+          <a:bodyPr wrap="square" lIns="0" rIns="0" tIns="0" bIns="0">
+            <a:spAutoFit/>
+          </a:bodyPr>
+          <a:lstStyle/>
+          <a:p>
+            <a:pPr algn="l">
+              <a:lnSpc>
+                <a:spcPct val="100000"/>
+              </a:lnSpc>
+            </a:pPr>
+            <a:r>
+              <a:rPr sz="1150" b="1" i="0">
+                <a:solidFill>
+                  <a:srgbClr val="0D6B67"/>
+                </a:solidFill>
+                <a:latin typeface="Segoe UI"/>
+              </a:rPr>
+              <a:t>DETECTION TRANSFERS</a:t>
+            </a:r>
+          </a:p>
+        </p:txBody>
+      </p:sp>
+      <p:sp>
+        <p:nvSpPr>
+          <p:cNvPr id="11" name="TextBox 10"/>
+          <p:cNvSpPr txBox="1"/>
+          <p:nvPr/>
+        </p:nvSpPr>
+        <p:spPr>
+          <a:xfrm>
+            <a:off x="1097280" y="4480560"/>
+            <a:ext cx="4480560" cy="731520"/>
+          </a:xfrm>
+          <a:prstGeom prst="rect">
+            <a:avLst/>
+          </a:prstGeom>
+          <a:noFill/>
+        </p:spPr>
+        <p:txBody>
+          <a:bodyPr wrap="square" lIns="0" rIns="0" tIns="0" bIns="0">
+            <a:spAutoFit/>
+          </a:bodyPr>
+          <a:lstStyle/>
+          <a:p>
+            <a:pPr algn="l">
+              <a:lnSpc>
+                <a:spcPct val="130000"/>
+              </a:lnSpc>
+            </a:pPr>
+            <a:r>
+              <a:rPr sz="1500" b="0" i="0">
+                <a:solidFill>
+                  <a:srgbClr val="141C1E"/>
+                </a:solidFill>
+                <a:latin typeface="Segoe UI"/>
+              </a:rPr>
+              <a:t>0.706 vs 0.707 with no descriptor.
+The detector works equally well.</a:t>
+            </a:r>
+          </a:p>
+        </p:txBody>
+      </p:sp>
+      <p:sp>
+        <p:nvSpPr>
+          <p:cNvPr id="12" name="Rectangle 11"/>
+          <p:cNvSpPr/>
+          <p:nvPr/>
+        </p:nvSpPr>
+        <p:spPr>
+          <a:xfrm>
+            <a:off x="6217920" y="3977639"/>
+            <a:ext cx="5074920" cy="1371600"/>
+          </a:xfrm>
+          <a:prstGeom prst="rect">
+            <a:avLst/>
+          </a:prstGeom>
+          <a:solidFill>
+            <a:srgbClr val="F6E4E1"/>
+          </a:solidFill>
+          <a:ln>
+            <a:noFill/>
+          </a:ln>
+          <a:effectLst/>
+        </p:spPr>
+        <p:style>
+          <a:lnRef idx="1">
+            <a:schemeClr val="accent1"/>
+          </a:lnRef>
+          <a:fillRef idx="3">
+            <a:schemeClr val="accent1"/>
+          </a:fillRef>
+          <a:effectRef idx="2">
+            <a:schemeClr val="accent1"/>
+          </a:effectRef>
+          <a:fontRef idx="minor">
+            <a:schemeClr val="lt1"/>
+          </a:fontRef>
+        </p:style>
+        <p:txBody>
+          <a:bodyPr rtlCol="0" anchor="ctr"/>
+          <a:lstStyle/>
+          <a:p>
+            <a:pPr algn="ctr"/>
+          </a:p>
+        </p:txBody>
+      </p:sp>
+      <p:sp>
+        <p:nvSpPr>
+          <p:cNvPr id="13" name="TextBox 12"/>
+          <p:cNvSpPr txBox="1"/>
+          <p:nvPr/>
+        </p:nvSpPr>
+        <p:spPr>
+          <a:xfrm>
+            <a:off x="6537959" y="4160520"/>
+            <a:ext cx="4480560" cy="274320"/>
+          </a:xfrm>
+          <a:prstGeom prst="rect">
+            <a:avLst/>
+          </a:prstGeom>
+          <a:noFill/>
+        </p:spPr>
+        <p:txBody>
+          <a:bodyPr wrap="square" lIns="0" rIns="0" tIns="0" bIns="0">
+            <a:spAutoFit/>
+          </a:bodyPr>
+          <a:lstStyle/>
+          <a:p>
+            <a:pPr algn="l">
+              <a:lnSpc>
+                <a:spcPct val="100000"/>
+              </a:lnSpc>
+            </a:pPr>
+            <a:r>
+              <a:rPr sz="1150" b="1" i="0">
+                <a:solidFill>
+                  <a:srgbClr val="8C3A31"/>
+                </a:solidFill>
+                <a:latin typeface="Segoe UI"/>
+              </a:rPr>
+              <a:t>ADAPTATION DOES NOT</a:t>
+            </a:r>
+          </a:p>
+        </p:txBody>
+      </p:sp>
+      <p:sp>
+        <p:nvSpPr>
+          <p:cNvPr id="14" name="TextBox 13"/>
+          <p:cNvSpPr txBox="1"/>
+          <p:nvPr/>
+        </p:nvSpPr>
+        <p:spPr>
+          <a:xfrm>
+            <a:off x="6537959" y="4480560"/>
+            <a:ext cx="4480560" cy="731520"/>
+          </a:xfrm>
+          <a:prstGeom prst="rect">
+            <a:avLst/>
+          </a:prstGeom>
+          <a:noFill/>
+        </p:spPr>
+        <p:txBody>
+          <a:bodyPr wrap="square" lIns="0" rIns="0" tIns="0" bIns="0">
+            <a:spAutoFit/>
+          </a:bodyPr>
+          <a:lstStyle/>
+          <a:p>
+            <a:pPr algn="l">
+              <a:lnSpc>
+                <a:spcPct val="130000"/>
+              </a:lnSpc>
+            </a:pPr>
+            <a:r>
+              <a:rPr sz="1500" b="0" i="0">
+                <a:solidFill>
+                  <a:srgbClr val="141C1E"/>
+                </a:solidFill>
+                <a:latin typeface="Segoe UI"/>
+              </a:rPr>
+              <a:t>Gap 5× smaller, and the correct
+description scores BELOW none.</a:t>
+            </a:r>
+          </a:p>
+        </p:txBody>
+      </p:sp>
+      <p:sp>
+        <p:nvSpPr>
+          <p:cNvPr id="15" name="Rectangle 14"/>
+          <p:cNvSpPr/>
+          <p:nvPr/>
+        </p:nvSpPr>
+        <p:spPr>
+          <a:xfrm>
+            <a:off x="777240" y="5486400"/>
+            <a:ext cx="10637215" cy="1051560"/>
+          </a:xfrm>
+          <a:prstGeom prst="rect">
+            <a:avLst/>
+          </a:prstGeom>
+          <a:solidFill>
+            <a:srgbClr val="F6EBD8"/>
+          </a:solidFill>
+          <a:ln>
+            <a:noFill/>
+          </a:ln>
+          <a:effectLst/>
+        </p:spPr>
+        <p:style>
+          <a:lnRef idx="1">
+            <a:schemeClr val="accent1"/>
+          </a:lnRef>
+          <a:fillRef idx="3">
+            <a:schemeClr val="accent1"/>
+          </a:fillRef>
+          <a:effectRef idx="2">
+            <a:schemeClr val="accent1"/>
+          </a:effectRef>
+          <a:fontRef idx="minor">
+            <a:schemeClr val="lt1"/>
+          </a:fontRef>
+        </p:style>
+        <p:txBody>
+          <a:bodyPr rtlCol="0" anchor="ctr"/>
+          <a:lstStyle/>
+          <a:p>
+            <a:pPr algn="ctr"/>
+          </a:p>
+        </p:txBody>
+      </p:sp>
+      <p:sp>
+        <p:nvSpPr>
+          <p:cNvPr id="16" name="Rectangle 15"/>
+          <p:cNvSpPr/>
+          <p:nvPr/>
+        </p:nvSpPr>
+        <p:spPr>
+          <a:xfrm>
+            <a:off x="777240" y="5486400"/>
+            <a:ext cx="45720" cy="1051560"/>
+          </a:xfrm>
+          <a:prstGeom prst="rect">
+            <a:avLst/>
+          </a:prstGeom>
+          <a:solidFill>
+            <a:srgbClr val="8A5715"/>
+          </a:solidFill>
+          <a:ln>
+            <a:noFill/>
+          </a:ln>
+          <a:effectLst/>
+        </p:spPr>
+        <p:style>
+          <a:lnRef idx="1">
+            <a:schemeClr val="accent1"/>
+          </a:lnRef>
+          <a:fillRef idx="3">
+            <a:schemeClr val="accent1"/>
+          </a:fillRef>
+          <a:effectRef idx="2">
+            <a:schemeClr val="accent1"/>
+          </a:effectRef>
+          <a:fontRef idx="minor">
+            <a:schemeClr val="lt1"/>
+          </a:fontRef>
+        </p:style>
+        <p:txBody>
+          <a:bodyPr rtlCol="0" anchor="ctr"/>
+          <a:lstStyle/>
+          <a:p>
+            <a:pPr algn="ctr"/>
+          </a:p>
+        </p:txBody>
+      </p:sp>
+      <p:sp>
+        <p:nvSpPr>
+          <p:cNvPr id="17" name="TextBox 16"/>
+          <p:cNvSpPr txBox="1"/>
+          <p:nvPr/>
+        </p:nvSpPr>
+        <p:spPr>
+          <a:xfrm>
+            <a:off x="1033271" y="5632704"/>
+            <a:ext cx="10134295" cy="219456"/>
+          </a:xfrm>
+          <a:prstGeom prst="rect">
+            <a:avLst/>
+          </a:prstGeom>
+          <a:noFill/>
+        </p:spPr>
+        <p:txBody>
+          <a:bodyPr wrap="square" lIns="0" rIns="0" tIns="0" bIns="0">
+            <a:spAutoFit/>
+          </a:bodyPr>
+          <a:lstStyle/>
+          <a:p>
+            <a:pPr algn="l">
+              <a:lnSpc>
+                <a:spcPct val="100000"/>
+              </a:lnSpc>
+            </a:pPr>
+            <a:r>
+              <a:rPr sz="1050" b="1" i="0">
+                <a:solidFill>
+                  <a:srgbClr val="8A5715"/>
+                </a:solidFill>
+                <a:latin typeface="Segoe UI"/>
+              </a:rPr>
+              <a:t>OUR EXPLANATION — STATED AS A CONJECTURE</a:t>
+            </a:r>
+          </a:p>
+        </p:txBody>
+      </p:sp>
+      <p:sp>
+        <p:nvSpPr>
+          <p:cNvPr id="18" name="TextBox 17"/>
+          <p:cNvSpPr txBox="1"/>
+          <p:nvPr/>
+        </p:nvSpPr>
+        <p:spPr>
+          <a:xfrm>
+            <a:off x="1033271" y="5925312"/>
+            <a:ext cx="10134295" cy="484631"/>
+          </a:xfrm>
+          <a:prstGeom prst="rect">
+            <a:avLst/>
+          </a:prstGeom>
+          <a:noFill/>
+        </p:spPr>
+        <p:txBody>
+          <a:bodyPr wrap="square" lIns="0" rIns="0" tIns="0" bIns="0">
+            <a:spAutoFit/>
+          </a:bodyPr>
+          <a:lstStyle/>
+          <a:p>
+            <a:pPr algn="l">
+              <a:lnSpc>
+                <a:spcPct val="100000"/>
+              </a:lnSpc>
+            </a:pPr>
+            <a:r>
+              <a:rPr sz="1450" b="0" i="0">
+                <a:solidFill>
+                  <a:srgbClr val="141C1E"/>
+                </a:solidFill>
+                <a:latin typeface="Segoe UI"/>
+              </a:rPr>
+              <a:t>ShanghaiTech has 13 camera views; Avenue has one. A scene description has work to do only when there are several environments to tell apart. Testable: run the sweep inside a single ShanghaiTech view.</a:t>
+            </a:r>
+          </a:p>
+        </p:txBody>
+      </p:sp>
+    </p:spTree>
+  </p:cSld>
+  <p:clrMapOvr>
+    <a:masterClrMapping/>
+  </p:clrMapOvr>
+</p:sld>
+</file>
+
+<file path=ppt/slides/slide16.xml><?xml version="1.0" encoding="utf-8"?>
+<p:sld xmlns:a="http://schemas.openxmlformats.org/drawingml/2006/main" xmlns:p="http://schemas.openxmlformats.org/presentationml/2006/main" xmlns:r="http://schemas.openxmlformats.org/officeDocument/2006/relationships">
+  <p:cSld>
+    <p:spTree>
+      <p:nvGrpSpPr>
+        <p:cNvPr id="1" name=""/>
+        <p:cNvGrpSpPr/>
+        <p:nvPr/>
+      </p:nvGrpSpPr>
+      <p:grpSpPr/>
+      <p:sp>
+        <p:nvSpPr>
+          <p:cNvPr id="2" name="Rectangle 1"/>
+          <p:cNvSpPr/>
+          <p:nvPr/>
+        </p:nvSpPr>
+        <p:spPr>
+          <a:xfrm>
+            <a:off x="0" y="0"/>
+            <a:ext cx="12191695" cy="6858000"/>
+          </a:xfrm>
+          <a:prstGeom prst="rect">
+            <a:avLst/>
+          </a:prstGeom>
+          <a:solidFill>
+            <a:srgbClr val="FFFFFF"/>
+          </a:solidFill>
+          <a:ln>
+            <a:noFill/>
+          </a:ln>
+          <a:effectLst/>
+        </p:spPr>
+        <p:style>
+          <a:lnRef idx="1">
+            <a:schemeClr val="accent1"/>
+          </a:lnRef>
+          <a:fillRef idx="3">
+            <a:schemeClr val="accent1"/>
+          </a:fillRef>
+          <a:effectRef idx="2">
+            <a:schemeClr val="accent1"/>
+          </a:effectRef>
+          <a:fontRef idx="minor">
+            <a:schemeClr val="lt1"/>
+          </a:fontRef>
+        </p:style>
+        <p:txBody>
+          <a:bodyPr rtlCol="0" anchor="ctr"/>
+          <a:lstStyle/>
+          <a:p>
+            <a:pPr algn="ctr"/>
+          </a:p>
+        </p:txBody>
+      </p:sp>
+      <p:sp>
+        <p:nvSpPr>
+          <p:cNvPr id="3" name="TextBox 2"/>
+          <p:cNvSpPr txBox="1"/>
+          <p:nvPr/>
+        </p:nvSpPr>
+        <p:spPr>
+          <a:xfrm>
+            <a:off x="777240" y="475488"/>
+            <a:ext cx="10637215" cy="228600"/>
+          </a:xfrm>
+          <a:prstGeom prst="rect">
+            <a:avLst/>
+          </a:prstGeom>
+          <a:noFill/>
+        </p:spPr>
+        <p:txBody>
+          <a:bodyPr wrap="square" lIns="0" rIns="0" tIns="0" bIns="0">
+            <a:spAutoFit/>
+          </a:bodyPr>
+          <a:lstStyle/>
+          <a:p>
+            <a:pPr algn="l">
+              <a:lnSpc>
+                <a:spcPct val="100000"/>
+              </a:lnSpc>
+            </a:pPr>
+            <a:r>
+              <a:rPr sz="1100" b="1" i="0">
+                <a:solidFill>
+                  <a:srgbClr val="0D6B67"/>
+                </a:solidFill>
+                <a:latin typeface="Segoe UI"/>
+              </a:rPr>
+              <a:t>RESULTS  ·  NEGATIVE FINDINGS</a:t>
+            </a:r>
+          </a:p>
+        </p:txBody>
+      </p:sp>
+      <p:sp>
+        <p:nvSpPr>
+          <p:cNvPr id="4" name="TextBox 3"/>
+          <p:cNvSpPr txBox="1"/>
+          <p:nvPr/>
+        </p:nvSpPr>
+        <p:spPr>
+          <a:xfrm>
+            <a:off x="777240" y="749808"/>
+            <a:ext cx="10637215" cy="548640"/>
+          </a:xfrm>
+          <a:prstGeom prst="rect">
+            <a:avLst/>
+          </a:prstGeom>
+          <a:noFill/>
+        </p:spPr>
+        <p:txBody>
+          <a:bodyPr wrap="square" lIns="0" rIns="0" tIns="0" bIns="0">
+            <a:spAutoFit/>
+          </a:bodyPr>
+          <a:lstStyle/>
+          <a:p>
+            <a:pPr algn="l">
+              <a:lnSpc>
+                <a:spcPct val="100000"/>
+              </a:lnSpc>
+            </a:pPr>
+            <a:r>
+              <a:rPr sz="2700" b="1" i="0">
+                <a:solidFill>
+                  <a:srgbClr val="141C1E"/>
+                </a:solidFill>
+                <a:latin typeface="Segoe UI"/>
+              </a:rPr>
+              <a:t>Six things that did not work</a:t>
+            </a:r>
+          </a:p>
+        </p:txBody>
+      </p:sp>
+      <p:sp>
+        <p:nvSpPr>
+          <p:cNvPr id="5" name="Rectangle 4"/>
+          <p:cNvSpPr/>
+          <p:nvPr/>
+        </p:nvSpPr>
+        <p:spPr>
+          <a:xfrm>
+            <a:off x="777240" y="1408176"/>
+            <a:ext cx="1371600" cy="32004"/>
+          </a:xfrm>
+          <a:prstGeom prst="rect">
+            <a:avLst/>
+          </a:prstGeom>
+          <a:solidFill>
+            <a:srgbClr val="0D6B67"/>
+          </a:solidFill>
+          <a:ln>
+            <a:noFill/>
+          </a:ln>
+          <a:effectLst/>
+        </p:spPr>
+        <p:style>
+          <a:lnRef idx="1">
+            <a:schemeClr val="accent1"/>
+          </a:lnRef>
+          <a:fillRef idx="3">
+            <a:schemeClr val="accent1"/>
+          </a:fillRef>
+          <a:effectRef idx="2">
+            <a:schemeClr val="accent1"/>
+          </a:effectRef>
+          <a:fontRef idx="minor">
+            <a:schemeClr val="lt1"/>
+          </a:fontRef>
+        </p:style>
+        <p:txBody>
+          <a:bodyPr rtlCol="0" anchor="ctr"/>
+          <a:lstStyle/>
+          <a:p>
+            <a:pPr algn="ctr"/>
+          </a:p>
+        </p:txBody>
+      </p:sp>
+      <p:sp>
+        <p:nvSpPr>
+          <p:cNvPr id="6" name="TextBox 5"/>
+          <p:cNvSpPr txBox="1"/>
+          <p:nvPr/>
+        </p:nvSpPr>
+        <p:spPr>
+          <a:xfrm>
+            <a:off x="10865815" y="6382512"/>
+            <a:ext cx="548640" cy="228600"/>
+          </a:xfrm>
+          <a:prstGeom prst="rect">
+            <a:avLst/>
+          </a:prstGeom>
+          <a:noFill/>
+        </p:spPr>
+        <p:txBody>
+          <a:bodyPr wrap="square" lIns="0" rIns="0" tIns="0" bIns="0">
+            <a:spAutoFit/>
+          </a:bodyPr>
+          <a:lstStyle/>
+          <a:p>
+            <a:pPr algn="r">
+              <a:lnSpc>
+                <a:spcPct val="100000"/>
+              </a:lnSpc>
+            </a:pPr>
+            <a:r>
+              <a:rPr sz="1000" b="0" i="0">
+                <a:solidFill>
+                  <a:srgbClr val="617274"/>
+                </a:solidFill>
+                <a:latin typeface="Segoe UI"/>
+              </a:rPr>
+              <a:t>15</a:t>
+            </a:r>
+          </a:p>
+        </p:txBody>
+      </p:sp>
+      <p:graphicFrame>
+        <p:nvGraphicFramePr>
+          <p:cNvPr id="7" name="Table 6"/>
+          <p:cNvGraphicFramePr>
+            <a:graphicFrameLocks noGrp="1"/>
+          </p:cNvGraphicFramePr>
+          <p:nvPr/>
+        </p:nvGraphicFramePr>
+        <p:xfrm>
+          <a:off x="777240" y="1828800"/>
+          <a:ext cx="10634472" cy="3200400"/>
+        </p:xfrm>
+        <a:graphic>
+          <a:graphicData uri="http://schemas.openxmlformats.org/drawingml/2006/table">
+            <a:tbl>
+              <a:tblPr firstRow="1">
+                <a:tableStyleId>{5C22544A-7EE6-4342-B048-85BDC9FD1C3A}</a:tableStyleId>
+              </a:tblPr>
+              <a:tblGrid>
+                <a:gridCol w="6035040"/>
+                <a:gridCol w="4599432"/>
+              </a:tblGrid>
+              <a:tr h="457200">
+                <a:tc>
+                  <a:txBody>
+                    <a:bodyPr wrap="square"/>
+                    <a:lstStyle/>
+                    <a:p>
+                      <a:pPr algn="l"/>
+                      <a:r>
+                        <a:rPr sz="1350" b="1">
+                          <a:solidFill>
+                            <a:srgbClr val="FFFFFF"/>
+                          </a:solidFill>
+                          <a:latin typeface="Segoe UI"/>
+                        </a:rPr>
+                        <a:t>Modification</a:t>
+                      </a:r>
+                    </a:p>
+                  </a:txBody>
+                  <a:tcPr marL="128016" marR="128016" marT="45720" marB="45720" anchor="ctr">
+                    <a:solidFill>
+                      <a:srgbClr val="141C1E"/>
+                    </a:solidFill>
+                  </a:tcPr>
+                </a:tc>
+                <a:tc>
+                  <a:txBody>
+                    <a:bodyPr wrap="square"/>
+                    <a:lstStyle/>
+                    <a:p>
+                      <a:pPr algn="l"/>
+                      <a:r>
+                        <a:rPr sz="1350" b="1">
+                          <a:solidFill>
+                            <a:srgbClr val="FFFFFF"/>
+                          </a:solidFill>
+                          <a:latin typeface="Segoe UI"/>
+                        </a:rPr>
+                        <a:t>Outcome</a:t>
+                      </a:r>
+                    </a:p>
+                  </a:txBody>
+                  <a:tcPr marL="128016" marR="128016" marT="45720" marB="45720" anchor="ctr">
+                    <a:solidFill>
+                      <a:srgbClr val="141C1E"/>
+                    </a:solidFill>
+                  </a:tcPr>
+                </a:tc>
+              </a:tr>
+              <a:tr h="457200">
+                <a:tc>
+                  <a:txBody>
+                    <a:bodyPr wrap="square"/>
+                    <a:lstStyle/>
+                    <a:p>
+                      <a:pPr algn="l"/>
+                      <a:r>
+                        <a:rPr sz="1350" b="0">
+                          <a:solidFill>
+                            <a:srgbClr val="141C1E"/>
+                          </a:solidFill>
+                          <a:latin typeface="Segoe UI"/>
+                        </a:rPr>
+                        <a:t>Quadrant scoring, to catch small objects</a:t>
+                      </a:r>
+                    </a:p>
+                  </a:txBody>
+                  <a:tcPr marL="128016" marR="128016" marT="45720" marB="45720" anchor="ctr">
+                    <a:solidFill>
+                      <a:srgbClr val="FFFFFF"/>
+                    </a:solidFill>
+                  </a:tcPr>
+                </a:tc>
+                <a:tc>
+                  <a:txBody>
+                    <a:bodyPr wrap="square"/>
+                    <a:lstStyle/>
+                    <a:p>
+                      <a:pPr algn="l"/>
+                      <a:r>
+                        <a:rPr sz="1350" b="0">
+                          <a:solidFill>
+                            <a:srgbClr val="141C1E"/>
+                          </a:solidFill>
+                          <a:latin typeface="Segoe UI"/>
+                        </a:rPr>
+                        <a:t>No improvement in any configuration</a:t>
+                      </a:r>
+                    </a:p>
+                  </a:txBody>
+                  <a:tcPr marL="128016" marR="128016" marT="45720" marB="45720" anchor="ctr">
+                    <a:solidFill>
+                      <a:srgbClr val="FFFFFF"/>
+                    </a:solidFill>
+                  </a:tcPr>
+                </a:tc>
+              </a:tr>
+              <a:tr h="457200">
+                <a:tc>
+                  <a:txBody>
+                    <a:bodyPr wrap="square"/>
+                    <a:lstStyle/>
+                    <a:p>
+                      <a:pPr algn="l"/>
+                      <a:r>
+                        <a:rPr sz="1350" b="0">
+                          <a:solidFill>
+                            <a:srgbClr val="141C1E"/>
+                          </a:solidFill>
+                          <a:latin typeface="Segoe UI"/>
+                        </a:rPr>
+                        <a:t>Prompts naming bicycles and vehicles</a:t>
+                      </a:r>
+                    </a:p>
+                  </a:txBody>
+                  <a:tcPr marL="128016" marR="128016" marT="45720" marB="45720" anchor="ctr">
+                    <a:solidFill>
+                      <a:srgbClr val="F5F7F7"/>
+                    </a:solidFill>
+                  </a:tcPr>
+                </a:tc>
+                <a:tc>
+                  <a:txBody>
+                    <a:bodyPr wrap="square"/>
+                    <a:lstStyle/>
+                    <a:p>
+                      <a:pPr algn="l"/>
+                      <a:r>
+                        <a:rPr sz="1350" b="0">
+                          <a:solidFill>
+                            <a:srgbClr val="141C1E"/>
+                          </a:solidFill>
+                          <a:latin typeface="Segoe UI"/>
+                        </a:rPr>
+                        <a:t>Much worse alone — 0.486</a:t>
+                      </a:r>
+                    </a:p>
+                  </a:txBody>
+                  <a:tcPr marL="128016" marR="128016" marT="45720" marB="45720" anchor="ctr">
+                    <a:solidFill>
+                      <a:srgbClr val="F5F7F7"/>
+                    </a:solidFill>
+                  </a:tcPr>
+                </a:tc>
+              </a:tr>
+              <a:tr h="457200">
+                <a:tc>
+                  <a:txBody>
+                    <a:bodyPr wrap="square"/>
+                    <a:lstStyle/>
+                    <a:p>
+                      <a:pPr algn="l"/>
+                      <a:r>
+                        <a:rPr sz="1350" b="0">
+                          <a:solidFill>
+                            <a:srgbClr val="141C1E"/>
+                          </a:solidFill>
+                          <a:latin typeface="Segoe UI"/>
+                        </a:rPr>
+                        <a:t>Clip's own average as the normality reference</a:t>
+                      </a:r>
+                    </a:p>
+                  </a:txBody>
+                  <a:tcPr marL="128016" marR="128016" marT="45720" marB="45720" anchor="ctr">
+                    <a:solidFill>
+                      <a:srgbClr val="FFFFFF"/>
+                    </a:solidFill>
+                  </a:tcPr>
+                </a:tc>
+                <a:tc>
+                  <a:txBody>
+                    <a:bodyPr wrap="square"/>
+                    <a:lstStyle/>
+                    <a:p>
+                      <a:pPr algn="l"/>
+                      <a:r>
+                        <a:rPr sz="1350" b="0">
+                          <a:solidFill>
+                            <a:srgbClr val="141C1E"/>
+                          </a:solidFill>
+                          <a:latin typeface="Segoe UI"/>
+                        </a:rPr>
+                        <a:t>0.585, and it degrades the language signal</a:t>
+                      </a:r>
+                    </a:p>
+                  </a:txBody>
+                  <a:tcPr marL="128016" marR="128016" marT="45720" marB="45720" anchor="ctr">
+                    <a:solidFill>
+                      <a:srgbClr val="FFFFFF"/>
+                    </a:solidFill>
+                  </a:tcPr>
+                </a:tc>
+              </a:tr>
+              <a:tr h="457200">
+                <a:tc>
+                  <a:txBody>
+                    <a:bodyPr wrap="square"/>
+                    <a:lstStyle/>
+                    <a:p>
+                      <a:pPr algn="l"/>
+                      <a:r>
+                        <a:rPr sz="1350" b="0">
+                          <a:solidFill>
+                            <a:srgbClr val="141C1E"/>
+                          </a:solidFill>
+                          <a:latin typeface="Segoe UI"/>
+                        </a:rPr>
+                        <a:t>Adding a motion signal</a:t>
+                      </a:r>
+                    </a:p>
+                  </a:txBody>
+                  <a:tcPr marL="128016" marR="128016" marT="45720" marB="45720" anchor="ctr">
+                    <a:solidFill>
+                      <a:srgbClr val="F5F7F7"/>
+                    </a:solidFill>
+                  </a:tcPr>
+                </a:tc>
+                <a:tc>
+                  <a:txBody>
+                    <a:bodyPr wrap="square"/>
+                    <a:lstStyle/>
+                    <a:p>
+                      <a:pPr algn="l"/>
+                      <a:r>
+                        <a:rPr sz="1350" b="0">
+                          <a:solidFill>
+                            <a:srgbClr val="141C1E"/>
+                          </a:solidFill>
+                          <a:latin typeface="Segoe UI"/>
+                        </a:rPr>
+                        <a:t>Costs 0.001 — not complementary</a:t>
+                      </a:r>
+                    </a:p>
+                  </a:txBody>
+                  <a:tcPr marL="128016" marR="128016" marT="45720" marB="45720" anchor="ctr">
+                    <a:solidFill>
+                      <a:srgbClr val="F5F7F7"/>
+                    </a:solidFill>
+                  </a:tcPr>
+                </a:tc>
+              </a:tr>
+              <a:tr h="457200">
+                <a:tc>
+                  <a:txBody>
+                    <a:bodyPr wrap="square"/>
+                    <a:lstStyle/>
+                    <a:p>
+                      <a:pPr algn="l"/>
+                      <a:r>
+                        <a:rPr sz="1350" b="0">
+                          <a:solidFill>
+                            <a:srgbClr val="141C1E"/>
+                          </a:solidFill>
+                          <a:latin typeface="Segoe UI"/>
+                        </a:rPr>
+                        <a:t>Local temporal deviation before projection</a:t>
+                      </a:r>
+                    </a:p>
+                  </a:txBody>
+                  <a:tcPr marL="128016" marR="128016" marT="45720" marB="45720" anchor="ctr">
+                    <a:solidFill>
+                      <a:srgbClr val="FFFFFF"/>
+                    </a:solidFill>
+                  </a:tcPr>
+                </a:tc>
+                <a:tc>
+                  <a:txBody>
+                    <a:bodyPr wrap="square"/>
+                    <a:lstStyle/>
+                    <a:p>
+                      <a:pPr algn="l"/>
+                      <a:r>
+                        <a:rPr sz="1350" b="0">
+                          <a:solidFill>
+                            <a:srgbClr val="141C1E"/>
+                          </a:solidFill>
+                          <a:latin typeface="Segoe UI"/>
+                        </a:rPr>
+                        <a:t>Better scorer, but narrows the context gap</a:t>
+                      </a:r>
+                    </a:p>
+                  </a:txBody>
+                  <a:tcPr marL="128016" marR="128016" marT="45720" marB="45720" anchor="ctr">
+                    <a:solidFill>
+                      <a:srgbClr val="FFFFFF"/>
+                    </a:solidFill>
+                  </a:tcPr>
+                </a:tc>
+              </a:tr>
+              <a:tr h="457200">
+                <a:tc>
+                  <a:txBody>
+                    <a:bodyPr wrap="square"/>
+                    <a:lstStyle/>
+                    <a:p>
+                      <a:pPr algn="l"/>
+                      <a:r>
+                        <a:rPr sz="1350" b="0">
+                          <a:solidFill>
+                            <a:srgbClr val="141C1E"/>
+                          </a:solidFill>
+                          <a:latin typeface="Segoe UI"/>
+                        </a:rPr>
+                        <a:t>Per-prompt max pooling</a:t>
+                      </a:r>
+                    </a:p>
+                  </a:txBody>
+                  <a:tcPr marL="128016" marR="128016" marT="45720" marB="45720" anchor="ctr">
+                    <a:solidFill>
+                      <a:srgbClr val="F5F7F7"/>
+                    </a:solidFill>
+                  </a:tcPr>
+                </a:tc>
+                <a:tc>
+                  <a:txBody>
+                    <a:bodyPr wrap="square"/>
+                    <a:lstStyle/>
+                    <a:p>
+                      <a:pPr algn="l"/>
+                      <a:r>
+                        <a:rPr sz="1350" b="0">
+                          <a:solidFill>
+                            <a:srgbClr val="141C1E"/>
+                          </a:solidFill>
+                          <a:latin typeface="Segoe UI"/>
+                        </a:rPr>
+                        <a:t>0.678 against 0.707</a:t>
+                      </a:r>
+                    </a:p>
+                  </a:txBody>
+                  <a:tcPr marL="128016" marR="128016" marT="45720" marB="45720" anchor="ctr">
+                    <a:solidFill>
+                      <a:srgbClr val="F5F7F7"/>
+                    </a:solidFill>
+                  </a:tcPr>
+                </a:tc>
+              </a:tr>
+            </a:tbl>
+          </a:graphicData>
+        </a:graphic>
+      </p:graphicFrame>
+      <p:sp>
+        <p:nvSpPr>
+          <p:cNvPr id="8" name="Rectangle 7"/>
+          <p:cNvSpPr/>
+          <p:nvPr/>
+        </p:nvSpPr>
+        <p:spPr>
+          <a:xfrm>
+            <a:off x="777240" y="4846320"/>
+            <a:ext cx="10637215" cy="1417320"/>
+          </a:xfrm>
+          <a:prstGeom prst="rect">
+            <a:avLst/>
+          </a:prstGeom>
+          <a:solidFill>
+            <a:srgbClr val="DDEDEB"/>
+          </a:solidFill>
+          <a:ln>
+            <a:noFill/>
+          </a:ln>
+          <a:effectLst/>
+        </p:spPr>
+        <p:style>
+          <a:lnRef idx="1">
+            <a:schemeClr val="accent1"/>
+          </a:lnRef>
+          <a:fillRef idx="3">
+            <a:schemeClr val="accent1"/>
+          </a:fillRef>
+          <a:effectRef idx="2">
+            <a:schemeClr val="accent1"/>
+          </a:effectRef>
+          <a:fontRef idx="minor">
+            <a:schemeClr val="lt1"/>
+          </a:fontRef>
+        </p:style>
+        <p:txBody>
+          <a:bodyPr rtlCol="0" anchor="ctr"/>
+          <a:lstStyle/>
+          <a:p>
+            <a:pPr algn="ctr"/>
+          </a:p>
+        </p:txBody>
+      </p:sp>
+      <p:sp>
+        <p:nvSpPr>
+          <p:cNvPr id="9" name="Rectangle 8"/>
+          <p:cNvSpPr/>
+          <p:nvPr/>
+        </p:nvSpPr>
+        <p:spPr>
+          <a:xfrm>
+            <a:off x="777240" y="4846320"/>
+            <a:ext cx="45720" cy="1417320"/>
+          </a:xfrm>
+          <a:prstGeom prst="rect">
+            <a:avLst/>
+          </a:prstGeom>
+          <a:solidFill>
+            <a:srgbClr val="0D6B67"/>
+          </a:solidFill>
+          <a:ln>
+            <a:noFill/>
+          </a:ln>
+          <a:effectLst/>
+        </p:spPr>
+        <p:style>
+          <a:lnRef idx="1">
+            <a:schemeClr val="accent1"/>
+          </a:lnRef>
+          <a:fillRef idx="3">
+            <a:schemeClr val="accent1"/>
+          </a:fillRef>
+          <a:effectRef idx="2">
+            <a:schemeClr val="accent1"/>
+          </a:effectRef>
+          <a:fontRef idx="minor">
+            <a:schemeClr val="lt1"/>
+          </a:fontRef>
+        </p:style>
+        <p:txBody>
+          <a:bodyPr rtlCol="0" anchor="ctr"/>
+          <a:lstStyle/>
+          <a:p>
+            <a:pPr algn="ctr"/>
+          </a:p>
+        </p:txBody>
+      </p:sp>
+      <p:sp>
+        <p:nvSpPr>
+          <p:cNvPr id="10" name="TextBox 9"/>
+          <p:cNvSpPr txBox="1"/>
+          <p:nvPr/>
+        </p:nvSpPr>
+        <p:spPr>
+          <a:xfrm>
+            <a:off x="1033271" y="4992624"/>
+            <a:ext cx="10134295" cy="219456"/>
+          </a:xfrm>
+          <a:prstGeom prst="rect">
+            <a:avLst/>
+          </a:prstGeom>
+          <a:noFill/>
+        </p:spPr>
+        <p:txBody>
+          <a:bodyPr wrap="square" lIns="0" rIns="0" tIns="0" bIns="0">
+            <a:spAutoFit/>
+          </a:bodyPr>
+          <a:lstStyle/>
+          <a:p>
+            <a:pPr algn="l">
+              <a:lnSpc>
+                <a:spcPct val="100000"/>
+              </a:lnSpc>
+            </a:pPr>
+            <a:r>
+              <a:rPr sz="1050" b="1" i="0">
+                <a:solidFill>
+                  <a:srgbClr val="0D6B67"/>
+                </a:solidFill>
+                <a:latin typeface="Segoe UI"/>
+              </a:rPr>
+              <a:t>WHY THESE ARE IN THE DECK</a:t>
+            </a:r>
+          </a:p>
+        </p:txBody>
+      </p:sp>
+      <p:sp>
+        <p:nvSpPr>
+          <p:cNvPr id="11" name="TextBox 10"/>
+          <p:cNvSpPr txBox="1"/>
+          <p:nvPr/>
+        </p:nvSpPr>
+        <p:spPr>
+          <a:xfrm>
+            <a:off x="1033271" y="5285231"/>
+            <a:ext cx="10134295" cy="850392"/>
+          </a:xfrm>
+          <a:prstGeom prst="rect">
+            <a:avLst/>
+          </a:prstGeom>
+          <a:noFill/>
+        </p:spPr>
+        <p:txBody>
+          <a:bodyPr wrap="square" lIns="0" rIns="0" tIns="0" bIns="0">
+            <a:spAutoFit/>
+          </a:bodyPr>
+          <a:lstStyle/>
+          <a:p>
+            <a:pPr algn="l">
+              <a:lnSpc>
+                <a:spcPct val="100000"/>
+              </a:lnSpc>
+            </a:pPr>
+            <a:r>
+              <a:rPr sz="1550" b="0" i="0">
+                <a:solidFill>
+                  <a:srgbClr val="141C1E"/>
+                </a:solidFill>
+                <a:latin typeface="Segoe UI"/>
+              </a:rPr>
+              <a:t>The claim is that the minimal configuration is the right one. That is only credible alongside the alternatives that were tried. A clean table of successes is the artefact that is easy to fabricate; six diagnosed failures are not.</a:t>
+            </a:r>
+          </a:p>
+        </p:txBody>
+      </p:sp>
+    </p:spTree>
+  </p:cSld>
+  <p:clrMapOvr>
+    <a:masterClrMapping/>
+  </p:clrMapOvr>
+</p:sld>
+</file>
+
+<file path=ppt/slides/slide17.xml><?xml version="1.0" encoding="utf-8"?>
+<p:sld xmlns:a="http://schemas.openxmlformats.org/drawingml/2006/main" xmlns:p="http://schemas.openxmlformats.org/presentationml/2006/main" xmlns:r="http://schemas.openxmlformats.org/officeDocument/2006/relationships">
+  <p:cSld>
+    <p:spTree>
+      <p:nvGrpSpPr>
+        <p:cNvPr id="1" name=""/>
+        <p:cNvGrpSpPr/>
+        <p:nvPr/>
+      </p:nvGrpSpPr>
+      <p:grpSpPr/>
+      <p:sp>
+        <p:nvSpPr>
+          <p:cNvPr id="2" name="Rectangle 1"/>
+          <p:cNvSpPr/>
+          <p:nvPr/>
+        </p:nvSpPr>
+        <p:spPr>
+          <a:xfrm>
+            <a:off x="0" y="0"/>
+            <a:ext cx="12191695" cy="6858000"/>
+          </a:xfrm>
+          <a:prstGeom prst="rect">
+            <a:avLst/>
+          </a:prstGeom>
+          <a:solidFill>
+            <a:srgbClr val="FFFFFF"/>
+          </a:solidFill>
+          <a:ln>
+            <a:noFill/>
+          </a:ln>
+          <a:effectLst/>
+        </p:spPr>
+        <p:style>
+          <a:lnRef idx="1">
+            <a:schemeClr val="accent1"/>
+          </a:lnRef>
+          <a:fillRef idx="3">
+            <a:schemeClr val="accent1"/>
+          </a:fillRef>
+          <a:effectRef idx="2">
+            <a:schemeClr val="accent1"/>
+          </a:effectRef>
+          <a:fontRef idx="minor">
+            <a:schemeClr val="lt1"/>
+          </a:fontRef>
+        </p:style>
+        <p:txBody>
+          <a:bodyPr rtlCol="0" anchor="ctr"/>
+          <a:lstStyle/>
+          <a:p>
+            <a:pPr algn="ctr"/>
+          </a:p>
+        </p:txBody>
+      </p:sp>
+      <p:sp>
+        <p:nvSpPr>
+          <p:cNvPr id="3" name="TextBox 2"/>
+          <p:cNvSpPr txBox="1"/>
+          <p:nvPr/>
+        </p:nvSpPr>
+        <p:spPr>
+          <a:xfrm>
+            <a:off x="777240" y="475488"/>
+            <a:ext cx="10637215" cy="228600"/>
+          </a:xfrm>
+          <a:prstGeom prst="rect">
+            <a:avLst/>
+          </a:prstGeom>
+          <a:noFill/>
+        </p:spPr>
+        <p:txBody>
+          <a:bodyPr wrap="square" lIns="0" rIns="0" tIns="0" bIns="0">
+            <a:spAutoFit/>
+          </a:bodyPr>
+          <a:lstStyle/>
+          <a:p>
+            <a:pPr algn="l">
+              <a:lnSpc>
+                <a:spcPct val="100000"/>
+              </a:lnSpc>
+            </a:pPr>
+            <a:r>
+              <a:rPr sz="1100" b="1" i="0">
+                <a:solidFill>
+                  <a:srgbClr val="0D6B67"/>
+                </a:solidFill>
+                <a:latin typeface="Segoe UI"/>
+              </a:rPr>
+              <a:t>ASSESSMENT</a:t>
+            </a:r>
+          </a:p>
+        </p:txBody>
+      </p:sp>
+      <p:sp>
+        <p:nvSpPr>
+          <p:cNvPr id="4" name="TextBox 3"/>
+          <p:cNvSpPr txBox="1"/>
+          <p:nvPr/>
+        </p:nvSpPr>
+        <p:spPr>
+          <a:xfrm>
+            <a:off x="777240" y="749808"/>
+            <a:ext cx="10637215" cy="548640"/>
+          </a:xfrm>
+          <a:prstGeom prst="rect">
+            <a:avLst/>
+          </a:prstGeom>
+          <a:noFill/>
+        </p:spPr>
+        <p:txBody>
+          <a:bodyPr wrap="square" lIns="0" rIns="0" tIns="0" bIns="0">
+            <a:spAutoFit/>
+          </a:bodyPr>
+          <a:lstStyle/>
+          <a:p>
+            <a:pPr algn="l">
+              <a:lnSpc>
+                <a:spcPct val="100000"/>
+              </a:lnSpc>
+            </a:pPr>
+            <a:r>
+              <a:rPr sz="2700" b="1" i="0">
+                <a:solidFill>
+                  <a:srgbClr val="141C1E"/>
+                </a:solidFill>
+                <a:latin typeface="Segoe UI"/>
+              </a:rPr>
+              <a:t>Where this sits against the literature</a:t>
+            </a:r>
+          </a:p>
+        </p:txBody>
+      </p:sp>
+      <p:sp>
+        <p:nvSpPr>
+          <p:cNvPr id="5" name="Rectangle 4"/>
+          <p:cNvSpPr/>
+          <p:nvPr/>
+        </p:nvSpPr>
+        <p:spPr>
+          <a:xfrm>
+            <a:off x="777240" y="1408176"/>
+            <a:ext cx="1371600" cy="32004"/>
+          </a:xfrm>
+          <a:prstGeom prst="rect">
+            <a:avLst/>
+          </a:prstGeom>
+          <a:solidFill>
+            <a:srgbClr val="0D6B67"/>
+          </a:solidFill>
+          <a:ln>
+            <a:noFill/>
+          </a:ln>
+          <a:effectLst/>
+        </p:spPr>
+        <p:style>
+          <a:lnRef idx="1">
+            <a:schemeClr val="accent1"/>
+          </a:lnRef>
+          <a:fillRef idx="3">
+            <a:schemeClr val="accent1"/>
+          </a:fillRef>
+          <a:effectRef idx="2">
+            <a:schemeClr val="accent1"/>
+          </a:effectRef>
+          <a:fontRef idx="minor">
+            <a:schemeClr val="lt1"/>
+          </a:fontRef>
+        </p:style>
+        <p:txBody>
+          <a:bodyPr rtlCol="0" anchor="ctr"/>
+          <a:lstStyle/>
+          <a:p>
+            <a:pPr algn="ctr"/>
+          </a:p>
+        </p:txBody>
+      </p:sp>
+      <p:sp>
+        <p:nvSpPr>
+          <p:cNvPr id="6" name="TextBox 5"/>
+          <p:cNvSpPr txBox="1"/>
+          <p:nvPr/>
+        </p:nvSpPr>
+        <p:spPr>
+          <a:xfrm>
+            <a:off x="10865815" y="6382512"/>
+            <a:ext cx="548640" cy="228600"/>
+          </a:xfrm>
+          <a:prstGeom prst="rect">
+            <a:avLst/>
+          </a:prstGeom>
+          <a:noFill/>
+        </p:spPr>
+        <p:txBody>
+          <a:bodyPr wrap="square" lIns="0" rIns="0" tIns="0" bIns="0">
+            <a:spAutoFit/>
+          </a:bodyPr>
+          <a:lstStyle/>
+          <a:p>
+            <a:pPr algn="r">
+              <a:lnSpc>
+                <a:spcPct val="100000"/>
+              </a:lnSpc>
+            </a:pPr>
+            <a:r>
+              <a:rPr sz="1000" b="0" i="0">
+                <a:solidFill>
+                  <a:srgbClr val="617274"/>
+                </a:solidFill>
+                <a:latin typeface="Segoe UI"/>
+              </a:rPr>
+              <a:t>16</a:t>
+            </a:r>
+          </a:p>
+        </p:txBody>
+      </p:sp>
+      <p:graphicFrame>
+        <p:nvGraphicFramePr>
+          <p:cNvPr id="7" name="Table 6"/>
+          <p:cNvGraphicFramePr>
+            <a:graphicFrameLocks noGrp="1"/>
+          </p:cNvGraphicFramePr>
+          <p:nvPr/>
+        </p:nvGraphicFramePr>
+        <p:xfrm>
+          <a:off x="777240" y="1828800"/>
+          <a:ext cx="10634472" cy="2048256"/>
+        </p:xfrm>
+        <a:graphic>
+          <a:graphicData uri="http://schemas.openxmlformats.org/drawingml/2006/table">
+            <a:tbl>
+              <a:tblPr firstRow="1">
+                <a:tableStyleId>{5C22544A-7EE6-4342-B048-85BDC9FD1C3A}</a:tableStyleId>
+              </a:tblPr>
+              <a:tblGrid>
+                <a:gridCol w="5120640"/>
+                <a:gridCol w="2103120"/>
+                <a:gridCol w="3410712"/>
+              </a:tblGrid>
+              <a:tr h="512064">
                 <a:tc>
                   <a:txBody>
                     <a:bodyPr wrap="square"/>
@@ -9755,7 +11772,7 @@
                           </a:solidFill>
                           <a:latin typeface="Segoe UI"/>
                         </a:rPr>
-                        <a:t>Hypothesis</a:t>
+                        <a:t>Method</a:t>
                       </a:r>
                     </a:p>
                   </a:txBody>
@@ -9778,662 +11795,6 @@
                           </a:solidFill>
                           <a:latin typeface="Segoe UI"/>
                         </a:rPr>
-                        <a:t>Outcome</a:t>
-                      </a:r>
-                    </a:p>
-                  </a:txBody>
-                  <a:tcPr marL="128016" marR="128016" marT="45720" marB="45720" anchor="ctr">
-                    <a:solidFill>
-                      <a:srgbClr val="141C1E"/>
-                    </a:solidFill>
-                  </a:tcPr>
-                </a:tc>
-              </a:tr>
-              <a:tr h="530352">
-                <a:tc>
-                  <a:txBody>
-                    <a:bodyPr wrap="square"/>
-                    <a:lstStyle/>
-                    <a:p>
-                      <a:pPr algn="l"/>
-                      <a:r>
-                        <a:rPr sz="1450" b="0">
-                          <a:solidFill>
-                            <a:srgbClr val="141C1E"/>
-                          </a:solidFill>
-                          <a:latin typeface="Segoe UI"/>
-                        </a:rPr>
-                        <a:t>Quadrant scoring would recover small objects</a:t>
-                      </a:r>
-                    </a:p>
-                  </a:txBody>
-                  <a:tcPr marL="128016" marR="128016" marT="45720" marB="45720" anchor="ctr">
-                    <a:solidFill>
-                      <a:srgbClr val="FFFFFF"/>
-                    </a:solidFill>
-                  </a:tcPr>
-                </a:tc>
-                <a:tc>
-                  <a:txBody>
-                    <a:bodyPr wrap="square"/>
-                    <a:lstStyle/>
-                    <a:p>
-                      <a:pPr algn="l"/>
-                      <a:r>
-                        <a:rPr sz="1450" b="0">
-                          <a:solidFill>
-                            <a:srgbClr val="141C1E"/>
-                          </a:solidFill>
-                          <a:latin typeface="Segoe UI"/>
-                        </a:rPr>
-                        <a:t>No improvement in any configuration</a:t>
-                      </a:r>
-                    </a:p>
-                  </a:txBody>
-                  <a:tcPr marL="128016" marR="128016" marT="45720" marB="45720" anchor="ctr">
-                    <a:solidFill>
-                      <a:srgbClr val="FFFFFF"/>
-                    </a:solidFill>
-                  </a:tcPr>
-                </a:tc>
-              </a:tr>
-              <a:tr h="530352">
-                <a:tc>
-                  <a:txBody>
-                    <a:bodyPr wrap="square"/>
-                    <a:lstStyle/>
-                    <a:p>
-                      <a:pPr algn="l"/>
-                      <a:r>
-                        <a:rPr sz="1450" b="0">
-                          <a:solidFill>
-                            <a:srgbClr val="141C1E"/>
-                          </a:solidFill>
-                          <a:latin typeface="Segoe UI"/>
-                        </a:rPr>
-                        <a:t>Prompts naming bicycles and vehicles would help</a:t>
-                      </a:r>
-                    </a:p>
-                  </a:txBody>
-                  <a:tcPr marL="128016" marR="128016" marT="45720" marB="45720" anchor="ctr">
-                    <a:solidFill>
-                      <a:srgbClr val="F5F7F7"/>
-                    </a:solidFill>
-                  </a:tcPr>
-                </a:tc>
-                <a:tc>
-                  <a:txBody>
-                    <a:bodyPr wrap="square"/>
-                    <a:lstStyle/>
-                    <a:p>
-                      <a:pPr algn="l"/>
-                      <a:r>
-                        <a:rPr sz="1450" b="0">
-                          <a:solidFill>
-                            <a:srgbClr val="141C1E"/>
-                          </a:solidFill>
-                          <a:latin typeface="Segoe UI"/>
-                        </a:rPr>
-                        <a:t>Much worse alone — 0.486</a:t>
-                      </a:r>
-                    </a:p>
-                  </a:txBody>
-                  <a:tcPr marL="128016" marR="128016" marT="45720" marB="45720" anchor="ctr">
-                    <a:solidFill>
-                      <a:srgbClr val="F5F7F7"/>
-                    </a:solidFill>
-                  </a:tcPr>
-                </a:tc>
-              </a:tr>
-              <a:tr h="530352">
-                <a:tc>
-                  <a:txBody>
-                    <a:bodyPr wrap="square"/>
-                    <a:lstStyle/>
-                    <a:p>
-                      <a:pPr algn="l"/>
-                      <a:r>
-                        <a:rPr sz="1450" b="0">
-                          <a:solidFill>
-                            <a:srgbClr val="141C1E"/>
-                          </a:solidFill>
-                          <a:latin typeface="Segoe UI"/>
-                        </a:rPr>
-                        <a:t>A clip's own average appearance defines normality</a:t>
-                      </a:r>
-                    </a:p>
-                  </a:txBody>
-                  <a:tcPr marL="128016" marR="128016" marT="45720" marB="45720" anchor="ctr">
-                    <a:solidFill>
-                      <a:srgbClr val="FFFFFF"/>
-                    </a:solidFill>
-                  </a:tcPr>
-                </a:tc>
-                <a:tc>
-                  <a:txBody>
-                    <a:bodyPr wrap="square"/>
-                    <a:lstStyle/>
-                    <a:p>
-                      <a:pPr algn="l"/>
-                      <a:r>
-                        <a:rPr sz="1450" b="0">
-                          <a:solidFill>
-                            <a:srgbClr val="141C1E"/>
-                          </a:solidFill>
-                          <a:latin typeface="Segoe UI"/>
-                        </a:rPr>
-                        <a:t>0.585, and it degrades the language signal</a:t>
-                      </a:r>
-                    </a:p>
-                  </a:txBody>
-                  <a:tcPr marL="128016" marR="128016" marT="45720" marB="45720" anchor="ctr">
-                    <a:solidFill>
-                      <a:srgbClr val="FFFFFF"/>
-                    </a:solidFill>
-                  </a:tcPr>
-                </a:tc>
-              </a:tr>
-              <a:tr h="530352">
-                <a:tc>
-                  <a:txBody>
-                    <a:bodyPr wrap="square"/>
-                    <a:lstStyle/>
-                    <a:p>
-                      <a:pPr algn="l"/>
-                      <a:r>
-                        <a:rPr sz="1450" b="0">
-                          <a:solidFill>
-                            <a:srgbClr val="141C1E"/>
-                          </a:solidFill>
-                          <a:latin typeface="Segoe UI"/>
-                        </a:rPr>
-                        <a:t>Scoring prompts individually rather than pooled</a:t>
-                      </a:r>
-                    </a:p>
-                  </a:txBody>
-                  <a:tcPr marL="128016" marR="128016" marT="45720" marB="45720" anchor="ctr">
-                    <a:solidFill>
-                      <a:srgbClr val="F5F7F7"/>
-                    </a:solidFill>
-                  </a:tcPr>
-                </a:tc>
-                <a:tc>
-                  <a:txBody>
-                    <a:bodyPr wrap="square"/>
-                    <a:lstStyle/>
-                    <a:p>
-                      <a:pPr algn="l"/>
-                      <a:r>
-                        <a:rPr sz="1450" b="0">
-                          <a:solidFill>
-                            <a:srgbClr val="141C1E"/>
-                          </a:solidFill>
-                          <a:latin typeface="Segoe UI"/>
-                        </a:rPr>
-                        <a:t>No measurable difference</a:t>
-                      </a:r>
-                    </a:p>
-                  </a:txBody>
-                  <a:tcPr marL="128016" marR="128016" marT="45720" marB="45720" anchor="ctr">
-                    <a:solidFill>
-                      <a:srgbClr val="F5F7F7"/>
-                    </a:solidFill>
-                  </a:tcPr>
-                </a:tc>
-              </a:tr>
-            </a:tbl>
-          </a:graphicData>
-        </a:graphic>
-      </p:graphicFrame>
-      <p:sp>
-        <p:nvSpPr>
-          <p:cNvPr id="8" name="Rectangle 7"/>
-          <p:cNvSpPr/>
-          <p:nvPr/>
-        </p:nvSpPr>
-        <p:spPr>
-          <a:xfrm>
-            <a:off x="777240" y="4572000"/>
-            <a:ext cx="10637215" cy="1463040"/>
-          </a:xfrm>
-          <a:prstGeom prst="rect">
-            <a:avLst/>
-          </a:prstGeom>
-          <a:solidFill>
-            <a:srgbClr val="DDEDEB"/>
-          </a:solidFill>
-          <a:ln>
-            <a:noFill/>
-          </a:ln>
-          <a:effectLst/>
-        </p:spPr>
-        <p:style>
-          <a:lnRef idx="1">
-            <a:schemeClr val="accent1"/>
-          </a:lnRef>
-          <a:fillRef idx="3">
-            <a:schemeClr val="accent1"/>
-          </a:fillRef>
-          <a:effectRef idx="2">
-            <a:schemeClr val="accent1"/>
-          </a:effectRef>
-          <a:fontRef idx="minor">
-            <a:schemeClr val="lt1"/>
-          </a:fontRef>
-        </p:style>
-        <p:txBody>
-          <a:bodyPr rtlCol="0" anchor="ctr"/>
-          <a:lstStyle/>
-          <a:p>
-            <a:pPr algn="ctr"/>
-          </a:p>
-        </p:txBody>
-      </p:sp>
-      <p:sp>
-        <p:nvSpPr>
-          <p:cNvPr id="9" name="Rectangle 8"/>
-          <p:cNvSpPr/>
-          <p:nvPr/>
-        </p:nvSpPr>
-        <p:spPr>
-          <a:xfrm>
-            <a:off x="777240" y="4572000"/>
-            <a:ext cx="45720" cy="1463040"/>
-          </a:xfrm>
-          <a:prstGeom prst="rect">
-            <a:avLst/>
-          </a:prstGeom>
-          <a:solidFill>
-            <a:srgbClr val="0D6B67"/>
-          </a:solidFill>
-          <a:ln>
-            <a:noFill/>
-          </a:ln>
-          <a:effectLst/>
-        </p:spPr>
-        <p:style>
-          <a:lnRef idx="1">
-            <a:schemeClr val="accent1"/>
-          </a:lnRef>
-          <a:fillRef idx="3">
-            <a:schemeClr val="accent1"/>
-          </a:fillRef>
-          <a:effectRef idx="2">
-            <a:schemeClr val="accent1"/>
-          </a:effectRef>
-          <a:fontRef idx="minor">
-            <a:schemeClr val="lt1"/>
-          </a:fontRef>
-        </p:style>
-        <p:txBody>
-          <a:bodyPr rtlCol="0" anchor="ctr"/>
-          <a:lstStyle/>
-          <a:p>
-            <a:pPr algn="ctr"/>
-          </a:p>
-        </p:txBody>
-      </p:sp>
-      <p:sp>
-        <p:nvSpPr>
-          <p:cNvPr id="10" name="TextBox 9"/>
-          <p:cNvSpPr txBox="1"/>
-          <p:nvPr/>
-        </p:nvSpPr>
-        <p:spPr>
-          <a:xfrm>
-            <a:off x="1033271" y="4718304"/>
-            <a:ext cx="10134295" cy="219456"/>
-          </a:xfrm>
-          <a:prstGeom prst="rect">
-            <a:avLst/>
-          </a:prstGeom>
-          <a:noFill/>
-        </p:spPr>
-        <p:txBody>
-          <a:bodyPr wrap="square" lIns="0" rIns="0" tIns="0" bIns="0">
-            <a:spAutoFit/>
-          </a:bodyPr>
-          <a:lstStyle/>
-          <a:p>
-            <a:pPr algn="l">
-              <a:lnSpc>
-                <a:spcPct val="100000"/>
-              </a:lnSpc>
-            </a:pPr>
-            <a:r>
-              <a:rPr sz="1050" b="1" i="0">
-                <a:solidFill>
-                  <a:srgbClr val="0D6B67"/>
-                </a:solidFill>
-                <a:latin typeface="Segoe UI"/>
-              </a:rPr>
-              <a:t>WHY THESE ARE IN THE DECK</a:t>
-            </a:r>
-          </a:p>
-        </p:txBody>
-      </p:sp>
-      <p:sp>
-        <p:nvSpPr>
-          <p:cNvPr id="11" name="TextBox 10"/>
-          <p:cNvSpPr txBox="1"/>
-          <p:nvPr/>
-        </p:nvSpPr>
-        <p:spPr>
-          <a:xfrm>
-            <a:off x="1033271" y="5010912"/>
-            <a:ext cx="10134295" cy="896112"/>
-          </a:xfrm>
-          <a:prstGeom prst="rect">
-            <a:avLst/>
-          </a:prstGeom>
-          <a:noFill/>
-        </p:spPr>
-        <p:txBody>
-          <a:bodyPr wrap="square" lIns="0" rIns="0" tIns="0" bIns="0">
-            <a:spAutoFit/>
-          </a:bodyPr>
-          <a:lstStyle/>
-          <a:p>
-            <a:pPr algn="l">
-              <a:lnSpc>
-                <a:spcPct val="100000"/>
-              </a:lnSpc>
-            </a:pPr>
-            <a:r>
-              <a:rPr sz="1600" b="0" i="0">
-                <a:solidFill>
-                  <a:srgbClr val="141C1E"/>
-                </a:solidFill>
-                <a:latin typeface="Segoe UI"/>
-              </a:rPr>
-              <a:t>All four are written into the paper. A study that reports only its successful runs is a demonstration; reporting the refuted hypotheses with the reasons they failed is what makes the surviving claims credible.</a:t>
-            </a:r>
-          </a:p>
-        </p:txBody>
-      </p:sp>
-    </p:spTree>
-  </p:cSld>
-  <p:clrMapOvr>
-    <a:masterClrMapping/>
-  </p:clrMapOvr>
-</p:sld>
-</file>
-
-<file path=ppt/slides/slide16.xml><?xml version="1.0" encoding="utf-8"?>
-<p:sld xmlns:a="http://schemas.openxmlformats.org/drawingml/2006/main" xmlns:p="http://schemas.openxmlformats.org/presentationml/2006/main" xmlns:r="http://schemas.openxmlformats.org/officeDocument/2006/relationships">
-  <p:cSld>
-    <p:spTree>
-      <p:nvGrpSpPr>
-        <p:cNvPr id="1" name=""/>
-        <p:cNvGrpSpPr/>
-        <p:nvPr/>
-      </p:nvGrpSpPr>
-      <p:grpSpPr/>
-      <p:sp>
-        <p:nvSpPr>
-          <p:cNvPr id="2" name="Rectangle 1"/>
-          <p:cNvSpPr/>
-          <p:nvPr/>
-        </p:nvSpPr>
-        <p:spPr>
-          <a:xfrm>
-            <a:off x="0" y="0"/>
-            <a:ext cx="12191695" cy="6858000"/>
-          </a:xfrm>
-          <a:prstGeom prst="rect">
-            <a:avLst/>
-          </a:prstGeom>
-          <a:solidFill>
-            <a:srgbClr val="FFFFFF"/>
-          </a:solidFill>
-          <a:ln>
-            <a:noFill/>
-          </a:ln>
-          <a:effectLst/>
-        </p:spPr>
-        <p:style>
-          <a:lnRef idx="1">
-            <a:schemeClr val="accent1"/>
-          </a:lnRef>
-          <a:fillRef idx="3">
-            <a:schemeClr val="accent1"/>
-          </a:fillRef>
-          <a:effectRef idx="2">
-            <a:schemeClr val="accent1"/>
-          </a:effectRef>
-          <a:fontRef idx="minor">
-            <a:schemeClr val="lt1"/>
-          </a:fontRef>
-        </p:style>
-        <p:txBody>
-          <a:bodyPr rtlCol="0" anchor="ctr"/>
-          <a:lstStyle/>
-          <a:p>
-            <a:pPr algn="ctr"/>
-          </a:p>
-        </p:txBody>
-      </p:sp>
-      <p:sp>
-        <p:nvSpPr>
-          <p:cNvPr id="3" name="TextBox 2"/>
-          <p:cNvSpPr txBox="1"/>
-          <p:nvPr/>
-        </p:nvSpPr>
-        <p:spPr>
-          <a:xfrm>
-            <a:off x="777240" y="475488"/>
-            <a:ext cx="10637215" cy="228600"/>
-          </a:xfrm>
-          <a:prstGeom prst="rect">
-            <a:avLst/>
-          </a:prstGeom>
-          <a:noFill/>
-        </p:spPr>
-        <p:txBody>
-          <a:bodyPr wrap="square" lIns="0" rIns="0" tIns="0" bIns="0">
-            <a:spAutoFit/>
-          </a:bodyPr>
-          <a:lstStyle/>
-          <a:p>
-            <a:pPr algn="l">
-              <a:lnSpc>
-                <a:spcPct val="100000"/>
-              </a:lnSpc>
-            </a:pPr>
-            <a:r>
-              <a:rPr sz="1100" b="1" i="0">
-                <a:solidFill>
-                  <a:srgbClr val="0D6B67"/>
-                </a:solidFill>
-                <a:latin typeface="Segoe UI"/>
-              </a:rPr>
-              <a:t>ASSESSMENT</a:t>
-            </a:r>
-          </a:p>
-        </p:txBody>
-      </p:sp>
-      <p:sp>
-        <p:nvSpPr>
-          <p:cNvPr id="4" name="TextBox 3"/>
-          <p:cNvSpPr txBox="1"/>
-          <p:nvPr/>
-        </p:nvSpPr>
-        <p:spPr>
-          <a:xfrm>
-            <a:off x="777240" y="749808"/>
-            <a:ext cx="10637215" cy="548640"/>
-          </a:xfrm>
-          <a:prstGeom prst="rect">
-            <a:avLst/>
-          </a:prstGeom>
-          <a:noFill/>
-        </p:spPr>
-        <p:txBody>
-          <a:bodyPr wrap="square" lIns="0" rIns="0" tIns="0" bIns="0">
-            <a:spAutoFit/>
-          </a:bodyPr>
-          <a:lstStyle/>
-          <a:p>
-            <a:pPr algn="l">
-              <a:lnSpc>
-                <a:spcPct val="100000"/>
-              </a:lnSpc>
-            </a:pPr>
-            <a:r>
-              <a:rPr sz="2700" b="1" i="0">
-                <a:solidFill>
-                  <a:srgbClr val="141C1E"/>
-                </a:solidFill>
-                <a:latin typeface="Segoe UI"/>
-              </a:rPr>
-              <a:t>Where this sits against the literature</a:t>
-            </a:r>
-          </a:p>
-        </p:txBody>
-      </p:sp>
-      <p:sp>
-        <p:nvSpPr>
-          <p:cNvPr id="5" name="Rectangle 4"/>
-          <p:cNvSpPr/>
-          <p:nvPr/>
-        </p:nvSpPr>
-        <p:spPr>
-          <a:xfrm>
-            <a:off x="777240" y="1408176"/>
-            <a:ext cx="1371600" cy="32004"/>
-          </a:xfrm>
-          <a:prstGeom prst="rect">
-            <a:avLst/>
-          </a:prstGeom>
-          <a:solidFill>
-            <a:srgbClr val="0D6B67"/>
-          </a:solidFill>
-          <a:ln>
-            <a:noFill/>
-          </a:ln>
-          <a:effectLst/>
-        </p:spPr>
-        <p:style>
-          <a:lnRef idx="1">
-            <a:schemeClr val="accent1"/>
-          </a:lnRef>
-          <a:fillRef idx="3">
-            <a:schemeClr val="accent1"/>
-          </a:fillRef>
-          <a:effectRef idx="2">
-            <a:schemeClr val="accent1"/>
-          </a:effectRef>
-          <a:fontRef idx="minor">
-            <a:schemeClr val="lt1"/>
-          </a:fontRef>
-        </p:style>
-        <p:txBody>
-          <a:bodyPr rtlCol="0" anchor="ctr"/>
-          <a:lstStyle/>
-          <a:p>
-            <a:pPr algn="ctr"/>
-          </a:p>
-        </p:txBody>
-      </p:sp>
-      <p:sp>
-        <p:nvSpPr>
-          <p:cNvPr id="6" name="TextBox 5"/>
-          <p:cNvSpPr txBox="1"/>
-          <p:nvPr/>
-        </p:nvSpPr>
-        <p:spPr>
-          <a:xfrm>
-            <a:off x="10865815" y="6382512"/>
-            <a:ext cx="548640" cy="228600"/>
-          </a:xfrm>
-          <a:prstGeom prst="rect">
-            <a:avLst/>
-          </a:prstGeom>
-          <a:noFill/>
-        </p:spPr>
-        <p:txBody>
-          <a:bodyPr wrap="square" lIns="0" rIns="0" tIns="0" bIns="0">
-            <a:spAutoFit/>
-          </a:bodyPr>
-          <a:lstStyle/>
-          <a:p>
-            <a:pPr algn="r">
-              <a:lnSpc>
-                <a:spcPct val="100000"/>
-              </a:lnSpc>
-            </a:pPr>
-            <a:r>
-              <a:rPr sz="1000" b="0" i="0">
-                <a:solidFill>
-                  <a:srgbClr val="617274"/>
-                </a:solidFill>
-                <a:latin typeface="Segoe UI"/>
-              </a:rPr>
-              <a:t>15</a:t>
-            </a:r>
-          </a:p>
-        </p:txBody>
-      </p:sp>
-      <p:graphicFrame>
-        <p:nvGraphicFramePr>
-          <p:cNvPr id="7" name="Table 6"/>
-          <p:cNvGraphicFramePr>
-            <a:graphicFrameLocks noGrp="1"/>
-          </p:cNvGraphicFramePr>
-          <p:nvPr/>
-        </p:nvGraphicFramePr>
-        <p:xfrm>
-          <a:off x="777240" y="1828800"/>
-          <a:ext cx="10634472" cy="1536192"/>
-        </p:xfrm>
-        <a:graphic>
-          <a:graphicData uri="http://schemas.openxmlformats.org/drawingml/2006/table">
-            <a:tbl>
-              <a:tblPr firstRow="1">
-                <a:tableStyleId>{5C22544A-7EE6-4342-B048-85BDC9FD1C3A}</a:tableStyleId>
-              </a:tblPr>
-              <a:tblGrid>
-                <a:gridCol w="5120640"/>
-                <a:gridCol w="2103120"/>
-                <a:gridCol w="3410712"/>
-              </a:tblGrid>
-              <a:tr h="512064">
-                <a:tc>
-                  <a:txBody>
-                    <a:bodyPr wrap="square"/>
-                    <a:lstStyle/>
-                    <a:p>
-                      <a:pPr algn="l"/>
-                      <a:r>
-                        <a:rPr sz="1500" b="1">
-                          <a:solidFill>
-                            <a:srgbClr val="FFFFFF"/>
-                          </a:solidFill>
-                          <a:latin typeface="Segoe UI"/>
-                        </a:rPr>
-                        <a:t>Method</a:t>
-                      </a:r>
-                    </a:p>
-                  </a:txBody>
-                  <a:tcPr marL="128016" marR="128016" marT="45720" marB="45720" anchor="ctr">
-                    <a:solidFill>
-                      <a:srgbClr val="141C1E"/>
-                    </a:solidFill>
-                  </a:tcPr>
-                </a:tc>
-                <a:tc>
-                  <a:txBody>
-                    <a:bodyPr wrap="square"/>
-                    <a:lstStyle/>
-                    <a:p>
-                      <a:pPr algn="l"/>
-                      <a:r>
-                        <a:rPr sz="1500" b="1">
-                          <a:solidFill>
-                            <a:srgbClr val="FFFFFF"/>
-                          </a:solidFill>
-                          <a:latin typeface="Segoe UI"/>
-                        </a:rPr>
                         <a:t>AUROC</a:t>
                       </a:r>
                     </a:p>
@@ -10451,7 +11812,7 @@
                     <a:p>
                       <a:pPr algn="l"/>
                       <a:r>
-                        <a:rPr sz="1500" b="1">
+                        <a:rPr sz="1450" b="1">
                           <a:solidFill>
                             <a:srgbClr val="FFFFFF"/>
                           </a:solidFill>
@@ -10476,13 +11837,13 @@
                     <a:p>
                       <a:pPr algn="l"/>
                       <a:r>
-                        <a:rPr sz="1500" b="0">
+                        <a:rPr sz="1450" b="0">
                           <a:solidFill>
                             <a:srgbClr val="141C1E"/>
                           </a:solidFill>
                           <a:latin typeface="Segoe UI"/>
                         </a:rPr>
-                        <a:t>LAVAD (CVPR 2024), training-free</a:t>
+                        <a:t>Liu et al. 2018 — trained on the target scene</a:t>
                       </a:r>
                     </a:p>
                   </a:txBody>
@@ -10499,13 +11860,13 @@
                     <a:p>
                       <a:pPr algn="l"/>
                       <a:r>
-                        <a:rPr sz="1500" b="0">
+                        <a:rPr sz="1450" b="0">
                           <a:solidFill>
                             <a:srgbClr val="141C1E"/>
                           </a:solidFill>
                           <a:latin typeface="Segoe UI"/>
                         </a:rPr>
-                        <a:t>≈ 0.85</a:t>
+                        <a:t>≈ 0.728</a:t>
                       </a:r>
                     </a:p>
                   </a:txBody>
@@ -10522,13 +11883,13 @@
                     <a:p>
                       <a:pPr algn="l"/>
                       <a:r>
-                        <a:rPr sz="1500" b="0">
+                        <a:rPr sz="1450" b="0">
                           <a:solidFill>
                             <a:srgbClr val="141C1E"/>
                           </a:solidFill>
                           <a:latin typeface="Segoe UI"/>
                         </a:rPr>
-                        <a:t>Captioner + LLM + refiner</a:t>
+                        <a:t>1 trained model</a:t>
                       </a:r>
                     </a:p>
                   </a:txBody>
@@ -10547,7 +11908,78 @@
                     <a:p>
                       <a:pPr algn="l"/>
                       <a:r>
-                        <a:rPr sz="1500" b="1">
+                        <a:rPr sz="1450" b="0">
+                          <a:solidFill>
+                            <a:srgbClr val="141C1E"/>
+                          </a:solidFill>
+                          <a:latin typeface="Segoe UI"/>
+                        </a:rPr>
+                        <a:t>LAVAD (CVPR 2024), training-free</a:t>
+                      </a:r>
+                    </a:p>
+                  </a:txBody>
+                  <a:tcPr marL="128016" marR="128016" marT="45720" marB="45720" anchor="ctr">
+                    <a:solidFill>
+                      <a:srgbClr val="F5F7F7"/>
+                    </a:solidFill>
+                  </a:tcPr>
+                </a:tc>
+                <a:tc>
+                  <a:txBody>
+                    <a:bodyPr wrap="square"/>
+                    <a:lstStyle/>
+                    <a:p>
+                      <a:pPr algn="l"/>
+                      <a:r>
+                        <a:rPr sz="1450" b="0">
+                          <a:solidFill>
+                            <a:srgbClr val="141C1E"/>
+                          </a:solidFill>
+                          <a:latin typeface="Segoe UI"/>
+                        </a:rPr>
+                        <a:t>≈ 0.85</a:t>
+                      </a:r>
+                    </a:p>
+                  </a:txBody>
+                  <a:tcPr marL="128016" marR="128016" marT="45720" marB="45720" anchor="ctr">
+                    <a:solidFill>
+                      <a:srgbClr val="F5F7F7"/>
+                    </a:solidFill>
+                  </a:tcPr>
+                </a:tc>
+                <a:tc>
+                  <a:txBody>
+                    <a:bodyPr wrap="square"/>
+                    <a:lstStyle/>
+                    <a:p>
+                      <a:pPr algn="l"/>
+                      <a:r>
+                        <a:rPr sz="1450" b="0">
+                          <a:solidFill>
+                            <a:srgbClr val="141C1E"/>
+                          </a:solidFill>
+                          <a:latin typeface="Segoe UI"/>
+                        </a:rPr>
+                        <a:t>Captioner + LLM + refiner</a:t>
+                      </a:r>
+                    </a:p>
+                  </a:txBody>
+                  <a:tcPr marL="128016" marR="128016" marT="45720" marB="45720" anchor="ctr">
+                    <a:solidFill>
+                      <a:srgbClr val="F5F7F7"/>
+                    </a:solidFill>
+                  </a:tcPr>
+                </a:tc>
+              </a:tr>
+              <a:tr h="512064">
+                <a:tc>
+                  <a:txBody>
+                    <a:bodyPr wrap="square"/>
+                    <a:lstStyle/>
+                    <a:p>
+                      <a:pPr algn="l"/>
+                      <a:r>
+                        <a:rPr sz="1450" b="1">
                           <a:solidFill>
                             <a:srgbClr val="141C1E"/>
                           </a:solidFill>
@@ -10570,13 +12002,13 @@
                     <a:p>
                       <a:pPr algn="l"/>
                       <a:r>
-                        <a:rPr sz="1500" b="1">
+                        <a:rPr sz="1450" b="1">
                           <a:solidFill>
                             <a:srgbClr val="141C1E"/>
                           </a:solidFill>
                           <a:latin typeface="Segoe UI"/>
                         </a:rPr>
-                        <a:t>0.706</a:t>
+                        <a:t>0.734</a:t>
                       </a:r>
                     </a:p>
                   </a:txBody>
@@ -10593,7 +12025,7 @@
                     <a:p>
                       <a:pPr algn="l"/>
                       <a:r>
-                        <a:rPr sz="1500" b="1">
+                        <a:rPr sz="1450" b="1">
                           <a:solidFill>
                             <a:srgbClr val="141C1E"/>
                           </a:solidFill>
@@ -10622,7 +12054,7 @@
         </p:nvSpPr>
         <p:spPr>
           <a:xfrm>
-            <a:off x="777240" y="3429000"/>
+            <a:off x="777240" y="3931920"/>
             <a:ext cx="68580" cy="68580"/>
           </a:xfrm>
           <a:prstGeom prst="rect">
@@ -10666,7 +12098,7 @@
         </p:nvSpPr>
         <p:spPr>
           <a:xfrm>
-            <a:off x="1014983" y="3300984"/>
+            <a:off x="1014983" y="3803904"/>
             <a:ext cx="10399471" cy="365760"/>
           </a:xfrm>
           <a:prstGeom prst="rect">
@@ -10692,7 +12124,7 @@
                 </a:solidFill>
                 <a:latin typeface="Segoe UI"/>
               </a:rPr>
-              <a:t>Not a like-for-like comparison.  </a:t>
+              <a:t>The fair comparison is the trained baseline.  </a:t>
             </a:r>
             <a:r>
               <a:rPr sz="1600">
@@ -10701,7 +12133,7 @@
                 </a:solidFill>
                 <a:latin typeface="Segoe UI"/>
               </a:rPr>
-              <a:t>LAVAD runs three large models on every frame. Ours runs in roughly 7 GB and is not competing on accuracy.</a:t>
+              <a:t>We match the benchmark's own 2018 baseline while using none of its training data.</a:t>
             </a:r>
           </a:p>
         </p:txBody>
@@ -10714,7 +12146,7 @@
         </p:nvSpPr>
         <p:spPr>
           <a:xfrm>
-            <a:off x="777240" y="4343400"/>
+            <a:off x="777240" y="4846320"/>
             <a:ext cx="68580" cy="68580"/>
           </a:xfrm>
           <a:prstGeom prst="rect">
@@ -10758,7 +12190,7 @@
         </p:nvSpPr>
         <p:spPr>
           <a:xfrm>
-            <a:off x="1014983" y="4215384"/>
+            <a:off x="1014983" y="4718304"/>
             <a:ext cx="10399471" cy="365760"/>
           </a:xfrm>
           <a:prstGeom prst="rect">
@@ -10784,7 +12216,7 @@
                 </a:solidFill>
                 <a:latin typeface="Segoe UI"/>
               </a:rPr>
-              <a:t>The contribution is not the number.  </a:t>
+              <a:t>We do not match LAVAD, and say so.  </a:t>
             </a:r>
             <a:r>
               <a:rPr sz="1600">
@@ -10793,7 +12225,7 @@
                 </a:solidFill>
                 <a:latin typeface="Segoe UI"/>
               </a:rPr>
-              <a:t>It is a characterisation of the shift type, a mechanism, and a measurement protocol with a falsifying control.</a:t>
+              <a:t>It runs three large models per frame. We run in about 7 GB.</a:t>
             </a:r>
           </a:p>
         </p:txBody>
@@ -10806,8 +12238,8 @@
         </p:nvSpPr>
         <p:spPr>
           <a:xfrm>
-            <a:off x="777240" y="5120640"/>
-            <a:ext cx="10637215" cy="1143000"/>
+            <a:off x="777240" y="5486400"/>
+            <a:ext cx="10637215" cy="1051560"/>
           </a:xfrm>
           <a:prstGeom prst="rect">
             <a:avLst/>
@@ -10850,8 +12282,8 @@
         </p:nvSpPr>
         <p:spPr>
           <a:xfrm>
-            <a:off x="777240" y="5120640"/>
-            <a:ext cx="45720" cy="1143000"/>
+            <a:off x="777240" y="5486400"/>
+            <a:ext cx="45720" cy="1051560"/>
           </a:xfrm>
           <a:prstGeom prst="rect">
             <a:avLst/>
@@ -10894,7 +12326,7 @@
         </p:nvSpPr>
         <p:spPr>
           <a:xfrm>
-            <a:off x="1033271" y="5266944"/>
+            <a:off x="1033271" y="5632704"/>
             <a:ext cx="10134295" cy="219456"/>
           </a:xfrm>
           <a:prstGeom prst="rect">
@@ -10933,8 +12365,8 @@
         </p:nvSpPr>
         <p:spPr>
           <a:xfrm>
-            <a:off x="1033271" y="5559552"/>
-            <a:ext cx="10134295" cy="576072"/>
+            <a:off x="1033271" y="5925312"/>
+            <a:ext cx="10134295" cy="484631"/>
           </a:xfrm>
           <a:prstGeom prst="rect">
             <a:avLst/>
@@ -10960,689 +12392,6 @@
                 <a:latin typeface="Segoe UI"/>
               </a:rPr>
               <a:t>We do not expect to exceed trained state-of-the-art detectors on absolute AUROC, and the paper makes no such claim.</a:t>
-            </a:r>
-          </a:p>
-        </p:txBody>
-      </p:sp>
-    </p:spTree>
-  </p:cSld>
-  <p:clrMapOvr>
-    <a:masterClrMapping/>
-  </p:clrMapOvr>
-</p:sld>
-</file>
-
-<file path=ppt/slides/slide17.xml><?xml version="1.0" encoding="utf-8"?>
-<p:sld xmlns:a="http://schemas.openxmlformats.org/drawingml/2006/main" xmlns:p="http://schemas.openxmlformats.org/presentationml/2006/main" xmlns:r="http://schemas.openxmlformats.org/officeDocument/2006/relationships">
-  <p:cSld>
-    <p:spTree>
-      <p:nvGrpSpPr>
-        <p:cNvPr id="1" name=""/>
-        <p:cNvGrpSpPr/>
-        <p:nvPr/>
-      </p:nvGrpSpPr>
-      <p:grpSpPr/>
-      <p:sp>
-        <p:nvSpPr>
-          <p:cNvPr id="2" name="Rectangle 1"/>
-          <p:cNvSpPr/>
-          <p:nvPr/>
-        </p:nvSpPr>
-        <p:spPr>
-          <a:xfrm>
-            <a:off x="0" y="0"/>
-            <a:ext cx="12191695" cy="6858000"/>
-          </a:xfrm>
-          <a:prstGeom prst="rect">
-            <a:avLst/>
-          </a:prstGeom>
-          <a:solidFill>
-            <a:srgbClr val="FFFFFF"/>
-          </a:solidFill>
-          <a:ln>
-            <a:noFill/>
-          </a:ln>
-          <a:effectLst/>
-        </p:spPr>
-        <p:style>
-          <a:lnRef idx="1">
-            <a:schemeClr val="accent1"/>
-          </a:lnRef>
-          <a:fillRef idx="3">
-            <a:schemeClr val="accent1"/>
-          </a:fillRef>
-          <a:effectRef idx="2">
-            <a:schemeClr val="accent1"/>
-          </a:effectRef>
-          <a:fontRef idx="minor">
-            <a:schemeClr val="lt1"/>
-          </a:fontRef>
-        </p:style>
-        <p:txBody>
-          <a:bodyPr rtlCol="0" anchor="ctr"/>
-          <a:lstStyle/>
-          <a:p>
-            <a:pPr algn="ctr"/>
-          </a:p>
-        </p:txBody>
-      </p:sp>
-      <p:sp>
-        <p:nvSpPr>
-          <p:cNvPr id="3" name="TextBox 2"/>
-          <p:cNvSpPr txBox="1"/>
-          <p:nvPr/>
-        </p:nvSpPr>
-        <p:spPr>
-          <a:xfrm>
-            <a:off x="777240" y="475488"/>
-            <a:ext cx="10637215" cy="228600"/>
-          </a:xfrm>
-          <a:prstGeom prst="rect">
-            <a:avLst/>
-          </a:prstGeom>
-          <a:noFill/>
-        </p:spPr>
-        <p:txBody>
-          <a:bodyPr wrap="square" lIns="0" rIns="0" tIns="0" bIns="0">
-            <a:spAutoFit/>
-          </a:bodyPr>
-          <a:lstStyle/>
-          <a:p>
-            <a:pPr algn="l">
-              <a:lnSpc>
-                <a:spcPct val="100000"/>
-              </a:lnSpc>
-            </a:pPr>
-            <a:r>
-              <a:rPr sz="1100" b="1" i="0">
-                <a:solidFill>
-                  <a:srgbClr val="0D6B67"/>
-                </a:solidFill>
-                <a:latin typeface="Segoe UI"/>
-              </a:rPr>
-              <a:t>ASSESSMENT</a:t>
-            </a:r>
-          </a:p>
-        </p:txBody>
-      </p:sp>
-      <p:sp>
-        <p:nvSpPr>
-          <p:cNvPr id="4" name="TextBox 3"/>
-          <p:cNvSpPr txBox="1"/>
-          <p:nvPr/>
-        </p:nvSpPr>
-        <p:spPr>
-          <a:xfrm>
-            <a:off x="777240" y="749808"/>
-            <a:ext cx="10637215" cy="548640"/>
-          </a:xfrm>
-          <a:prstGeom prst="rect">
-            <a:avLst/>
-          </a:prstGeom>
-          <a:noFill/>
-        </p:spPr>
-        <p:txBody>
-          <a:bodyPr wrap="square" lIns="0" rIns="0" tIns="0" bIns="0">
-            <a:spAutoFit/>
-          </a:bodyPr>
-          <a:lstStyle/>
-          <a:p>
-            <a:pPr algn="l">
-              <a:lnSpc>
-                <a:spcPct val="100000"/>
-              </a:lnSpc>
-            </a:pPr>
-            <a:r>
-              <a:rPr sz="2700" b="1" i="0">
-                <a:solidFill>
-                  <a:srgbClr val="141C1E"/>
-                </a:solidFill>
-                <a:latin typeface="Segoe UI"/>
-              </a:rPr>
-              <a:t>Limitations we are stating ourselves</a:t>
-            </a:r>
-          </a:p>
-        </p:txBody>
-      </p:sp>
-      <p:sp>
-        <p:nvSpPr>
-          <p:cNvPr id="5" name="Rectangle 4"/>
-          <p:cNvSpPr/>
-          <p:nvPr/>
-        </p:nvSpPr>
-        <p:spPr>
-          <a:xfrm>
-            <a:off x="777240" y="1408176"/>
-            <a:ext cx="1371600" cy="32004"/>
-          </a:xfrm>
-          <a:prstGeom prst="rect">
-            <a:avLst/>
-          </a:prstGeom>
-          <a:solidFill>
-            <a:srgbClr val="0D6B67"/>
-          </a:solidFill>
-          <a:ln>
-            <a:noFill/>
-          </a:ln>
-          <a:effectLst/>
-        </p:spPr>
-        <p:style>
-          <a:lnRef idx="1">
-            <a:schemeClr val="accent1"/>
-          </a:lnRef>
-          <a:fillRef idx="3">
-            <a:schemeClr val="accent1"/>
-          </a:fillRef>
-          <a:effectRef idx="2">
-            <a:schemeClr val="accent1"/>
-          </a:effectRef>
-          <a:fontRef idx="minor">
-            <a:schemeClr val="lt1"/>
-          </a:fontRef>
-        </p:style>
-        <p:txBody>
-          <a:bodyPr rtlCol="0" anchor="ctr"/>
-          <a:lstStyle/>
-          <a:p>
-            <a:pPr algn="ctr"/>
-          </a:p>
-        </p:txBody>
-      </p:sp>
-      <p:sp>
-        <p:nvSpPr>
-          <p:cNvPr id="6" name="TextBox 5"/>
-          <p:cNvSpPr txBox="1"/>
-          <p:nvPr/>
-        </p:nvSpPr>
-        <p:spPr>
-          <a:xfrm>
-            <a:off x="10865815" y="6382512"/>
-            <a:ext cx="548640" cy="228600"/>
-          </a:xfrm>
-          <a:prstGeom prst="rect">
-            <a:avLst/>
-          </a:prstGeom>
-          <a:noFill/>
-        </p:spPr>
-        <p:txBody>
-          <a:bodyPr wrap="square" lIns="0" rIns="0" tIns="0" bIns="0">
-            <a:spAutoFit/>
-          </a:bodyPr>
-          <a:lstStyle/>
-          <a:p>
-            <a:pPr algn="r">
-              <a:lnSpc>
-                <a:spcPct val="100000"/>
-              </a:lnSpc>
-            </a:pPr>
-            <a:r>
-              <a:rPr sz="1000" b="0" i="0">
-                <a:solidFill>
-                  <a:srgbClr val="617274"/>
-                </a:solidFill>
-                <a:latin typeface="Segoe UI"/>
-              </a:rPr>
-              <a:t>16</a:t>
-            </a:r>
-          </a:p>
-        </p:txBody>
-      </p:sp>
-      <p:sp>
-        <p:nvSpPr>
-          <p:cNvPr id="7" name="Rectangle 6"/>
-          <p:cNvSpPr/>
-          <p:nvPr/>
-        </p:nvSpPr>
-        <p:spPr>
-          <a:xfrm>
-            <a:off x="777240" y="1874519"/>
-            <a:ext cx="68580" cy="68580"/>
-          </a:xfrm>
-          <a:prstGeom prst="rect">
-            <a:avLst/>
-          </a:prstGeom>
-          <a:solidFill>
-            <a:srgbClr val="0D6B67"/>
-          </a:solidFill>
-          <a:ln>
-            <a:noFill/>
-          </a:ln>
-          <a:effectLst/>
-        </p:spPr>
-        <p:style>
-          <a:lnRef idx="1">
-            <a:schemeClr val="accent1"/>
-          </a:lnRef>
-          <a:fillRef idx="3">
-            <a:schemeClr val="accent1"/>
-          </a:fillRef>
-          <a:effectRef idx="2">
-            <a:schemeClr val="accent1"/>
-          </a:effectRef>
-          <a:fontRef idx="minor">
-            <a:schemeClr val="lt1"/>
-          </a:fontRef>
-        </p:style>
-        <p:txBody>
-          <a:bodyPr rtlCol="0" anchor="ctr"/>
-          <a:lstStyle/>
-          <a:p>
-            <a:pPr algn="ctr"/>
-          </a:p>
-        </p:txBody>
-      </p:sp>
-      <p:sp>
-        <p:nvSpPr>
-          <p:cNvPr id="8" name="TextBox 7"/>
-          <p:cNvSpPr txBox="1"/>
-          <p:nvPr/>
-        </p:nvSpPr>
-        <p:spPr>
-          <a:xfrm>
-            <a:off x="1014983" y="1746504"/>
-            <a:ext cx="10399471" cy="365760"/>
-          </a:xfrm>
-          <a:prstGeom prst="rect">
-            <a:avLst/>
-          </a:prstGeom>
-          <a:noFill/>
-        </p:spPr>
-        <p:txBody>
-          <a:bodyPr wrap="square" lIns="0" rIns="0" tIns="0" bIns="0">
-            <a:spAutoFit/>
-          </a:bodyPr>
-          <a:lstStyle/>
-          <a:p>
-            <a:pPr>
-              <a:lnSpc>
-                <a:spcPct val="125000"/>
-              </a:lnSpc>
-            </a:pPr>
-            <a:r>
-              <a:rPr sz="1550" b="1">
-                <a:solidFill>
-                  <a:srgbClr val="141C1E"/>
-                </a:solidFill>
-                <a:latin typeface="Segoe UI"/>
-              </a:rPr>
-              <a:t>One domain only.  </a:t>
-            </a:r>
-            <a:r>
-              <a:rPr sz="1550">
-                <a:solidFill>
-                  <a:srgbClr val="3A4A4C"/>
-                </a:solidFill>
-                <a:latin typeface="Segoe UI"/>
-              </a:rPr>
-              <a:t>Every measurement comes from ShanghaiTech. The cross-domain transfer claim central to the framework is NOT yet tested.</a:t>
-            </a:r>
-          </a:p>
-        </p:txBody>
-      </p:sp>
-      <p:sp>
-        <p:nvSpPr>
-          <p:cNvPr id="9" name="Rectangle 8"/>
-          <p:cNvSpPr/>
-          <p:nvPr/>
-        </p:nvSpPr>
-        <p:spPr>
-          <a:xfrm>
-            <a:off x="777240" y="2807208"/>
-            <a:ext cx="68580" cy="68580"/>
-          </a:xfrm>
-          <a:prstGeom prst="rect">
-            <a:avLst/>
-          </a:prstGeom>
-          <a:solidFill>
-            <a:srgbClr val="0D6B67"/>
-          </a:solidFill>
-          <a:ln>
-            <a:noFill/>
-          </a:ln>
-          <a:effectLst/>
-        </p:spPr>
-        <p:style>
-          <a:lnRef idx="1">
-            <a:schemeClr val="accent1"/>
-          </a:lnRef>
-          <a:fillRef idx="3">
-            <a:schemeClr val="accent1"/>
-          </a:fillRef>
-          <a:effectRef idx="2">
-            <a:schemeClr val="accent1"/>
-          </a:effectRef>
-          <a:fontRef idx="minor">
-            <a:schemeClr val="lt1"/>
-          </a:fontRef>
-        </p:style>
-        <p:txBody>
-          <a:bodyPr rtlCol="0" anchor="ctr"/>
-          <a:lstStyle/>
-          <a:p>
-            <a:pPr algn="ctr"/>
-          </a:p>
-        </p:txBody>
-      </p:sp>
-      <p:sp>
-        <p:nvSpPr>
-          <p:cNvPr id="10" name="TextBox 9"/>
-          <p:cNvSpPr txBox="1"/>
-          <p:nvPr/>
-        </p:nvSpPr>
-        <p:spPr>
-          <a:xfrm>
-            <a:off x="1014983" y="2679191"/>
-            <a:ext cx="10399471" cy="365760"/>
-          </a:xfrm>
-          <a:prstGeom prst="rect">
-            <a:avLst/>
-          </a:prstGeom>
-          <a:noFill/>
-        </p:spPr>
-        <p:txBody>
-          <a:bodyPr wrap="square" lIns="0" rIns="0" tIns="0" bIns="0">
-            <a:spAutoFit/>
-          </a:bodyPr>
-          <a:lstStyle/>
-          <a:p>
-            <a:pPr>
-              <a:lnSpc>
-                <a:spcPct val="125000"/>
-              </a:lnSpc>
-            </a:pPr>
-            <a:r>
-              <a:rPr sz="1550" b="1">
-                <a:solidFill>
-                  <a:srgbClr val="141C1E"/>
-                </a:solidFill>
-                <a:latin typeface="Segoe UI"/>
-              </a:rPr>
-              <a:t>Resolution ceiling.  </a:t>
-            </a:r>
-            <a:r>
-              <a:rPr sz="1550">
-                <a:solidFill>
-                  <a:srgbClr val="3A4A4C"/>
-                </a:solidFill>
-                <a:latin typeface="Segoe UI"/>
-              </a:rPr>
-              <a:t>Whole-frame embeddings at 224×224 cannot resolve small objects. Quadrant scoring did not close the gap; patch-level scoring is untested.</a:t>
-            </a:r>
-          </a:p>
-        </p:txBody>
-      </p:sp>
-      <p:sp>
-        <p:nvSpPr>
-          <p:cNvPr id="11" name="Rectangle 10"/>
-          <p:cNvSpPr/>
-          <p:nvPr/>
-        </p:nvSpPr>
-        <p:spPr>
-          <a:xfrm>
-            <a:off x="777240" y="3739896"/>
-            <a:ext cx="68580" cy="68580"/>
-          </a:xfrm>
-          <a:prstGeom prst="rect">
-            <a:avLst/>
-          </a:prstGeom>
-          <a:solidFill>
-            <a:srgbClr val="0D6B67"/>
-          </a:solidFill>
-          <a:ln>
-            <a:noFill/>
-          </a:ln>
-          <a:effectLst/>
-        </p:spPr>
-        <p:style>
-          <a:lnRef idx="1">
-            <a:schemeClr val="accent1"/>
-          </a:lnRef>
-          <a:fillRef idx="3">
-            <a:schemeClr val="accent1"/>
-          </a:fillRef>
-          <a:effectRef idx="2">
-            <a:schemeClr val="accent1"/>
-          </a:effectRef>
-          <a:fontRef idx="minor">
-            <a:schemeClr val="lt1"/>
-          </a:fontRef>
-        </p:style>
-        <p:txBody>
-          <a:bodyPr rtlCol="0" anchor="ctr"/>
-          <a:lstStyle/>
-          <a:p>
-            <a:pPr algn="ctr"/>
-          </a:p>
-        </p:txBody>
-      </p:sp>
-      <p:sp>
-        <p:nvSpPr>
-          <p:cNvPr id="12" name="TextBox 11"/>
-          <p:cNvSpPr txBox="1"/>
-          <p:nvPr/>
-        </p:nvSpPr>
-        <p:spPr>
-          <a:xfrm>
-            <a:off x="1014983" y="3611879"/>
-            <a:ext cx="10399471" cy="365760"/>
-          </a:xfrm>
-          <a:prstGeom prst="rect">
-            <a:avLst/>
-          </a:prstGeom>
-          <a:noFill/>
-        </p:spPr>
-        <p:txBody>
-          <a:bodyPr wrap="square" lIns="0" rIns="0" tIns="0" bIns="0">
-            <a:spAutoFit/>
-          </a:bodyPr>
-          <a:lstStyle/>
-          <a:p>
-            <a:pPr>
-              <a:lnSpc>
-                <a:spcPct val="125000"/>
-              </a:lnSpc>
-            </a:pPr>
-            <a:r>
-              <a:rPr sz="1550" b="1">
-                <a:solidFill>
-                  <a:srgbClr val="141C1E"/>
-                </a:solidFill>
-                <a:latin typeface="Segoe UI"/>
-              </a:rPr>
-              <a:t>Motion is a proxy.  </a:t>
-            </a:r>
-            <a:r>
-              <a:rPr sz="1550">
-                <a:solidFill>
-                  <a:srgbClr val="3A4A4C"/>
-                </a:solidFill>
-                <a:latin typeface="Segoe UI"/>
-              </a:rPr>
-              <a:t>Frame-to-frame drift responds to movement, but also to lighting change and compression artefacts. Not yet isolated.</a:t>
-            </a:r>
-          </a:p>
-        </p:txBody>
-      </p:sp>
-      <p:sp>
-        <p:nvSpPr>
-          <p:cNvPr id="13" name="Rectangle 12"/>
-          <p:cNvSpPr/>
-          <p:nvPr/>
-        </p:nvSpPr>
-        <p:spPr>
-          <a:xfrm>
-            <a:off x="777240" y="4672583"/>
-            <a:ext cx="68580" cy="68580"/>
-          </a:xfrm>
-          <a:prstGeom prst="rect">
-            <a:avLst/>
-          </a:prstGeom>
-          <a:solidFill>
-            <a:srgbClr val="0D6B67"/>
-          </a:solidFill>
-          <a:ln>
-            <a:noFill/>
-          </a:ln>
-          <a:effectLst/>
-        </p:spPr>
-        <p:style>
-          <a:lnRef idx="1">
-            <a:schemeClr val="accent1"/>
-          </a:lnRef>
-          <a:fillRef idx="3">
-            <a:schemeClr val="accent1"/>
-          </a:fillRef>
-          <a:effectRef idx="2">
-            <a:schemeClr val="accent1"/>
-          </a:effectRef>
-          <a:fontRef idx="minor">
-            <a:schemeClr val="lt1"/>
-          </a:fontRef>
-        </p:style>
-        <p:txBody>
-          <a:bodyPr rtlCol="0" anchor="ctr"/>
-          <a:lstStyle/>
-          <a:p>
-            <a:pPr algn="ctr"/>
-          </a:p>
-        </p:txBody>
-      </p:sp>
-      <p:sp>
-        <p:nvSpPr>
-          <p:cNvPr id="14" name="TextBox 13"/>
-          <p:cNvSpPr txBox="1"/>
-          <p:nvPr/>
-        </p:nvSpPr>
-        <p:spPr>
-          <a:xfrm>
-            <a:off x="1014983" y="4544568"/>
-            <a:ext cx="10399471" cy="365760"/>
-          </a:xfrm>
-          <a:prstGeom prst="rect">
-            <a:avLst/>
-          </a:prstGeom>
-          <a:noFill/>
-        </p:spPr>
-        <p:txBody>
-          <a:bodyPr wrap="square" lIns="0" rIns="0" tIns="0" bIns="0">
-            <a:spAutoFit/>
-          </a:bodyPr>
-          <a:lstStyle/>
-          <a:p>
-            <a:pPr>
-              <a:lnSpc>
-                <a:spcPct val="125000"/>
-              </a:lnSpc>
-            </a:pPr>
-            <a:r>
-              <a:rPr sz="1550" b="1">
-                <a:solidFill>
-                  <a:srgbClr val="141C1E"/>
-                </a:solidFill>
-                <a:latin typeface="Segoe UI"/>
-              </a:rPr>
-              <a:t>Configuration selection.  </a:t>
-            </a:r>
-            <a:r>
-              <a:rPr sz="1550">
-                <a:solidFill>
-                  <a:srgbClr val="3A4A4C"/>
-                </a:solidFill>
-                <a:latin typeface="Segoe UI"/>
-              </a:rPr>
-              <a:t>No validation split exists for this benchmark, so we split clips and report the half never used for selection.</a:t>
-            </a:r>
-          </a:p>
-        </p:txBody>
-      </p:sp>
-      <p:sp>
-        <p:nvSpPr>
-          <p:cNvPr id="15" name="Rectangle 14"/>
-          <p:cNvSpPr/>
-          <p:nvPr/>
-        </p:nvSpPr>
-        <p:spPr>
-          <a:xfrm>
-            <a:off x="777240" y="5605271"/>
-            <a:ext cx="68580" cy="68580"/>
-          </a:xfrm>
-          <a:prstGeom prst="rect">
-            <a:avLst/>
-          </a:prstGeom>
-          <a:solidFill>
-            <a:srgbClr val="0D6B67"/>
-          </a:solidFill>
-          <a:ln>
-            <a:noFill/>
-          </a:ln>
-          <a:effectLst/>
-        </p:spPr>
-        <p:style>
-          <a:lnRef idx="1">
-            <a:schemeClr val="accent1"/>
-          </a:lnRef>
-          <a:fillRef idx="3">
-            <a:schemeClr val="accent1"/>
-          </a:fillRef>
-          <a:effectRef idx="2">
-            <a:schemeClr val="accent1"/>
-          </a:effectRef>
-          <a:fontRef idx="minor">
-            <a:schemeClr val="lt1"/>
-          </a:fontRef>
-        </p:style>
-        <p:txBody>
-          <a:bodyPr rtlCol="0" anchor="ctr"/>
-          <a:lstStyle/>
-          <a:p>
-            <a:pPr algn="ctr"/>
-          </a:p>
-        </p:txBody>
-      </p:sp>
-      <p:sp>
-        <p:nvSpPr>
-          <p:cNvPr id="16" name="TextBox 15"/>
-          <p:cNvSpPr txBox="1"/>
-          <p:nvPr/>
-        </p:nvSpPr>
-        <p:spPr>
-          <a:xfrm>
-            <a:off x="1014983" y="5477255"/>
-            <a:ext cx="10399471" cy="365760"/>
-          </a:xfrm>
-          <a:prstGeom prst="rect">
-            <a:avLst/>
-          </a:prstGeom>
-          <a:noFill/>
-        </p:spPr>
-        <p:txBody>
-          <a:bodyPr wrap="square" lIns="0" rIns="0" tIns="0" bIns="0">
-            <a:spAutoFit/>
-          </a:bodyPr>
-          <a:lstStyle/>
-          <a:p>
-            <a:pPr>
-              <a:lnSpc>
-                <a:spcPct val="125000"/>
-              </a:lnSpc>
-            </a:pPr>
-            <a:r>
-              <a:rPr sz="1550" b="1">
-                <a:solidFill>
-                  <a:srgbClr val="141C1E"/>
-                </a:solidFill>
-                <a:latin typeface="Segoe UI"/>
-              </a:rPr>
-              <a:t>M4 not yet run.  </a:t>
-            </a:r>
-            <a:r>
-              <a:rPr sz="1550">
-                <a:solidFill>
-                  <a:srgbClr val="3A4A4C"/>
-                </a:solidFill>
-                <a:latin typeface="Segoe UI"/>
-              </a:rPr>
-              <a:t>The explanation module has produced no video results.</a:t>
             </a:r>
           </a:p>
         </p:txBody>
@@ -11743,7 +12492,7 @@
                 </a:solidFill>
                 <a:latin typeface="Segoe UI"/>
               </a:rPr>
-              <a:t>NEXT</a:t>
+              <a:t>ASSESSMENT</a:t>
             </a:r>
           </a:p>
         </p:txBody>
@@ -11782,7 +12531,7 @@
                 </a:solidFill>
                 <a:latin typeface="Segoe UI"/>
               </a:rPr>
-              <a:t>Phase 3 plan</a:t>
+              <a:t>Limitations we are stating ourselves</a:t>
             </a:r>
           </a:p>
         </p:txBody>
@@ -11870,6 +12619,781 @@
           </a:p>
         </p:txBody>
       </p:sp>
+      <p:sp>
+        <p:nvSpPr>
+          <p:cNvPr id="7" name="Rectangle 6"/>
+          <p:cNvSpPr/>
+          <p:nvPr/>
+        </p:nvSpPr>
+        <p:spPr>
+          <a:xfrm>
+            <a:off x="777240" y="1874519"/>
+            <a:ext cx="68580" cy="68580"/>
+          </a:xfrm>
+          <a:prstGeom prst="rect">
+            <a:avLst/>
+          </a:prstGeom>
+          <a:solidFill>
+            <a:srgbClr val="0D6B67"/>
+          </a:solidFill>
+          <a:ln>
+            <a:noFill/>
+          </a:ln>
+          <a:effectLst/>
+        </p:spPr>
+        <p:style>
+          <a:lnRef idx="1">
+            <a:schemeClr val="accent1"/>
+          </a:lnRef>
+          <a:fillRef idx="3">
+            <a:schemeClr val="accent1"/>
+          </a:fillRef>
+          <a:effectRef idx="2">
+            <a:schemeClr val="accent1"/>
+          </a:effectRef>
+          <a:fontRef idx="minor">
+            <a:schemeClr val="lt1"/>
+          </a:fontRef>
+        </p:style>
+        <p:txBody>
+          <a:bodyPr rtlCol="0" anchor="ctr"/>
+          <a:lstStyle/>
+          <a:p>
+            <a:pPr algn="ctr"/>
+          </a:p>
+        </p:txBody>
+      </p:sp>
+      <p:sp>
+        <p:nvSpPr>
+          <p:cNvPr id="8" name="TextBox 7"/>
+          <p:cNvSpPr txBox="1"/>
+          <p:nvPr/>
+        </p:nvSpPr>
+        <p:spPr>
+          <a:xfrm>
+            <a:off x="1014983" y="1746504"/>
+            <a:ext cx="10399471" cy="365760"/>
+          </a:xfrm>
+          <a:prstGeom prst="rect">
+            <a:avLst/>
+          </a:prstGeom>
+          <a:noFill/>
+        </p:spPr>
+        <p:txBody>
+          <a:bodyPr wrap="square" lIns="0" rIns="0" tIns="0" bIns="0">
+            <a:spAutoFit/>
+          </a:bodyPr>
+          <a:lstStyle/>
+          <a:p>
+            <a:pPr>
+              <a:lnSpc>
+                <a:spcPct val="125000"/>
+              </a:lnSpc>
+            </a:pPr>
+            <a:r>
+              <a:rPr sz="1450" b="1">
+                <a:solidFill>
+                  <a:srgbClr val="141C1E"/>
+                </a:solidFill>
+                <a:latin typeface="Segoe UI"/>
+              </a:rPr>
+              <a:t>The mechanism is bounded.  </a:t>
+            </a:r>
+            <a:r>
+              <a:rPr sz="1450">
+                <a:solidFill>
+                  <a:srgbClr val="3A4A4C"/>
+                </a:solidFill>
+                <a:latin typeface="Segoe UI"/>
+              </a:rPr>
+              <a:t>It works on ShanghaiTech and nearly vanishes on Avenue. The scene-diversity explanation rests on two datasets and is not established.</a:t>
+            </a:r>
+          </a:p>
+        </p:txBody>
+      </p:sp>
+      <p:sp>
+        <p:nvSpPr>
+          <p:cNvPr id="9" name="Rectangle 8"/>
+          <p:cNvSpPr/>
+          <p:nvPr/>
+        </p:nvSpPr>
+        <p:spPr>
+          <a:xfrm>
+            <a:off x="777240" y="2660904"/>
+            <a:ext cx="68580" cy="68580"/>
+          </a:xfrm>
+          <a:prstGeom prst="rect">
+            <a:avLst/>
+          </a:prstGeom>
+          <a:solidFill>
+            <a:srgbClr val="0D6B67"/>
+          </a:solidFill>
+          <a:ln>
+            <a:noFill/>
+          </a:ln>
+          <a:effectLst/>
+        </p:spPr>
+        <p:style>
+          <a:lnRef idx="1">
+            <a:schemeClr val="accent1"/>
+          </a:lnRef>
+          <a:fillRef idx="3">
+            <a:schemeClr val="accent1"/>
+          </a:fillRef>
+          <a:effectRef idx="2">
+            <a:schemeClr val="accent1"/>
+          </a:effectRef>
+          <a:fontRef idx="minor">
+            <a:schemeClr val="lt1"/>
+          </a:fontRef>
+        </p:style>
+        <p:txBody>
+          <a:bodyPr rtlCol="0" anchor="ctr"/>
+          <a:lstStyle/>
+          <a:p>
+            <a:pPr algn="ctr"/>
+          </a:p>
+        </p:txBody>
+      </p:sp>
+      <p:sp>
+        <p:nvSpPr>
+          <p:cNvPr id="10" name="TextBox 9"/>
+          <p:cNvSpPr txBox="1"/>
+          <p:nvPr/>
+        </p:nvSpPr>
+        <p:spPr>
+          <a:xfrm>
+            <a:off x="1014983" y="2532888"/>
+            <a:ext cx="10399471" cy="365760"/>
+          </a:xfrm>
+          <a:prstGeom prst="rect">
+            <a:avLst/>
+          </a:prstGeom>
+          <a:noFill/>
+        </p:spPr>
+        <p:txBody>
+          <a:bodyPr wrap="square" lIns="0" rIns="0" tIns="0" bIns="0">
+            <a:spAutoFit/>
+          </a:bodyPr>
+          <a:lstStyle/>
+          <a:p>
+            <a:pPr>
+              <a:lnSpc>
+                <a:spcPct val="125000"/>
+              </a:lnSpc>
+            </a:pPr>
+            <a:r>
+              <a:rPr sz="1450" b="1">
+                <a:solidFill>
+                  <a:srgbClr val="141C1E"/>
+                </a:solidFill>
+                <a:latin typeface="Segoe UI"/>
+              </a:rPr>
+              <a:t>Resolution ceiling.  </a:t>
+            </a:r>
+            <a:r>
+              <a:rPr sz="1450">
+                <a:solidFill>
+                  <a:srgbClr val="3A4A4C"/>
+                </a:solidFill>
+                <a:latin typeface="Segoe UI"/>
+              </a:rPr>
+              <a:t>Whole-frame embeddings at 224×224 cannot resolve small objects. Quadrant scoring did not close it; patch-level scoring is untested.</a:t>
+            </a:r>
+          </a:p>
+        </p:txBody>
+      </p:sp>
+      <p:sp>
+        <p:nvSpPr>
+          <p:cNvPr id="11" name="Rectangle 10"/>
+          <p:cNvSpPr/>
+          <p:nvPr/>
+        </p:nvSpPr>
+        <p:spPr>
+          <a:xfrm>
+            <a:off x="777240" y="3447288"/>
+            <a:ext cx="68580" cy="68580"/>
+          </a:xfrm>
+          <a:prstGeom prst="rect">
+            <a:avLst/>
+          </a:prstGeom>
+          <a:solidFill>
+            <a:srgbClr val="0D6B67"/>
+          </a:solidFill>
+          <a:ln>
+            <a:noFill/>
+          </a:ln>
+          <a:effectLst/>
+        </p:spPr>
+        <p:style>
+          <a:lnRef idx="1">
+            <a:schemeClr val="accent1"/>
+          </a:lnRef>
+          <a:fillRef idx="3">
+            <a:schemeClr val="accent1"/>
+          </a:fillRef>
+          <a:effectRef idx="2">
+            <a:schemeClr val="accent1"/>
+          </a:effectRef>
+          <a:fontRef idx="minor">
+            <a:schemeClr val="lt1"/>
+          </a:fontRef>
+        </p:style>
+        <p:txBody>
+          <a:bodyPr rtlCol="0" anchor="ctr"/>
+          <a:lstStyle/>
+          <a:p>
+            <a:pPr algn="ctr"/>
+          </a:p>
+        </p:txBody>
+      </p:sp>
+      <p:sp>
+        <p:nvSpPr>
+          <p:cNvPr id="12" name="TextBox 11"/>
+          <p:cNvSpPr txBox="1"/>
+          <p:nvPr/>
+        </p:nvSpPr>
+        <p:spPr>
+          <a:xfrm>
+            <a:off x="1014983" y="3319272"/>
+            <a:ext cx="10399471" cy="365760"/>
+          </a:xfrm>
+          <a:prstGeom prst="rect">
+            <a:avLst/>
+          </a:prstGeom>
+          <a:noFill/>
+        </p:spPr>
+        <p:txBody>
+          <a:bodyPr wrap="square" lIns="0" rIns="0" tIns="0" bIns="0">
+            <a:spAutoFit/>
+          </a:bodyPr>
+          <a:lstStyle/>
+          <a:p>
+            <a:pPr>
+              <a:lnSpc>
+                <a:spcPct val="125000"/>
+              </a:lnSpc>
+            </a:pPr>
+            <a:r>
+              <a:rPr sz="1450" b="1">
+                <a:solidFill>
+                  <a:srgbClr val="141C1E"/>
+                </a:solidFill>
+                <a:latin typeface="Segoe UI"/>
+              </a:rPr>
+              <a:t>The metric is scale-sensitive.  </a:t>
+            </a:r>
+            <a:r>
+              <a:rPr sz="1450">
+                <a:solidFill>
+                  <a:srgbClr val="3A4A4C"/>
+                </a:solidFill>
+                <a:latin typeface="Segoe UI"/>
+              </a:rPr>
+              <a:t>Per-clip normalisation is affine, so a monotone rescaling of the score changes the pooled figure even though the ranking is identical. We found this the hard way.</a:t>
+            </a:r>
+          </a:p>
+        </p:txBody>
+      </p:sp>
+      <p:sp>
+        <p:nvSpPr>
+          <p:cNvPr id="13" name="Rectangle 12"/>
+          <p:cNvSpPr/>
+          <p:nvPr/>
+        </p:nvSpPr>
+        <p:spPr>
+          <a:xfrm>
+            <a:off x="777240" y="4233672"/>
+            <a:ext cx="68580" cy="68580"/>
+          </a:xfrm>
+          <a:prstGeom prst="rect">
+            <a:avLst/>
+          </a:prstGeom>
+          <a:solidFill>
+            <a:srgbClr val="0D6B67"/>
+          </a:solidFill>
+          <a:ln>
+            <a:noFill/>
+          </a:ln>
+          <a:effectLst/>
+        </p:spPr>
+        <p:style>
+          <a:lnRef idx="1">
+            <a:schemeClr val="accent1"/>
+          </a:lnRef>
+          <a:fillRef idx="3">
+            <a:schemeClr val="accent1"/>
+          </a:fillRef>
+          <a:effectRef idx="2">
+            <a:schemeClr val="accent1"/>
+          </a:effectRef>
+          <a:fontRef idx="minor">
+            <a:schemeClr val="lt1"/>
+          </a:fontRef>
+        </p:style>
+        <p:txBody>
+          <a:bodyPr rtlCol="0" anchor="ctr"/>
+          <a:lstStyle/>
+          <a:p>
+            <a:pPr algn="ctr"/>
+          </a:p>
+        </p:txBody>
+      </p:sp>
+      <p:sp>
+        <p:nvSpPr>
+          <p:cNvPr id="14" name="TextBox 13"/>
+          <p:cNvSpPr txBox="1"/>
+          <p:nvPr/>
+        </p:nvSpPr>
+        <p:spPr>
+          <a:xfrm>
+            <a:off x="1014983" y="4105656"/>
+            <a:ext cx="10399471" cy="365760"/>
+          </a:xfrm>
+          <a:prstGeom prst="rect">
+            <a:avLst/>
+          </a:prstGeom>
+          <a:noFill/>
+        </p:spPr>
+        <p:txBody>
+          <a:bodyPr wrap="square" lIns="0" rIns="0" tIns="0" bIns="0">
+            <a:spAutoFit/>
+          </a:bodyPr>
+          <a:lstStyle/>
+          <a:p>
+            <a:pPr>
+              <a:lnSpc>
+                <a:spcPct val="125000"/>
+              </a:lnSpc>
+            </a:pPr>
+            <a:r>
+              <a:rPr sz="1450" b="1">
+                <a:solidFill>
+                  <a:srgbClr val="141C1E"/>
+                </a:solidFill>
+                <a:latin typeface="Segoe UI"/>
+              </a:rPr>
+              <a:t>Configuration selection.  </a:t>
+            </a:r>
+            <a:r>
+              <a:rPr sz="1450">
+                <a:solidFill>
+                  <a:srgbClr val="3A4A4C"/>
+                </a:solidFill>
+                <a:latin typeface="Segoe UI"/>
+              </a:rPr>
+              <a:t>No validation split exists for these benchmarks, so we split clips and report the half never used to select.</a:t>
+            </a:r>
+          </a:p>
+        </p:txBody>
+      </p:sp>
+      <p:sp>
+        <p:nvSpPr>
+          <p:cNvPr id="15" name="Rectangle 14"/>
+          <p:cNvSpPr/>
+          <p:nvPr/>
+        </p:nvSpPr>
+        <p:spPr>
+          <a:xfrm>
+            <a:off x="777240" y="5020056"/>
+            <a:ext cx="68580" cy="68580"/>
+          </a:xfrm>
+          <a:prstGeom prst="rect">
+            <a:avLst/>
+          </a:prstGeom>
+          <a:solidFill>
+            <a:srgbClr val="0D6B67"/>
+          </a:solidFill>
+          <a:ln>
+            <a:noFill/>
+          </a:ln>
+          <a:effectLst/>
+        </p:spPr>
+        <p:style>
+          <a:lnRef idx="1">
+            <a:schemeClr val="accent1"/>
+          </a:lnRef>
+          <a:fillRef idx="3">
+            <a:schemeClr val="accent1"/>
+          </a:fillRef>
+          <a:effectRef idx="2">
+            <a:schemeClr val="accent1"/>
+          </a:effectRef>
+          <a:fontRef idx="minor">
+            <a:schemeClr val="lt1"/>
+          </a:fontRef>
+        </p:style>
+        <p:txBody>
+          <a:bodyPr rtlCol="0" anchor="ctr"/>
+          <a:lstStyle/>
+          <a:p>
+            <a:pPr algn="ctr"/>
+          </a:p>
+        </p:txBody>
+      </p:sp>
+      <p:sp>
+        <p:nvSpPr>
+          <p:cNvPr id="16" name="TextBox 15"/>
+          <p:cNvSpPr txBox="1"/>
+          <p:nvPr/>
+        </p:nvSpPr>
+        <p:spPr>
+          <a:xfrm>
+            <a:off x="1014983" y="4892040"/>
+            <a:ext cx="10399471" cy="365760"/>
+          </a:xfrm>
+          <a:prstGeom prst="rect">
+            <a:avLst/>
+          </a:prstGeom>
+          <a:noFill/>
+        </p:spPr>
+        <p:txBody>
+          <a:bodyPr wrap="square" lIns="0" rIns="0" tIns="0" bIns="0">
+            <a:spAutoFit/>
+          </a:bodyPr>
+          <a:lstStyle/>
+          <a:p>
+            <a:pPr>
+              <a:lnSpc>
+                <a:spcPct val="125000"/>
+              </a:lnSpc>
+            </a:pPr>
+            <a:r>
+              <a:rPr sz="1450" b="1">
+                <a:solidFill>
+                  <a:srgbClr val="141C1E"/>
+                </a:solidFill>
+                <a:latin typeface="Segoe UI"/>
+              </a:rPr>
+              <a:t>Both video domains are outdoor pedestrian surveillance.  </a:t>
+            </a:r>
+            <a:r>
+              <a:rPr sz="1450">
+                <a:solidFill>
+                  <a:srgbClr val="3A4A4C"/>
+                </a:solidFill>
+                <a:latin typeface="Segoe UI"/>
+              </a:rPr>
+              <a:t>The industrial contrast is evaluated for detection but not for the sweep.</a:t>
+            </a:r>
+          </a:p>
+        </p:txBody>
+      </p:sp>
+      <p:sp>
+        <p:nvSpPr>
+          <p:cNvPr id="17" name="Rectangle 16"/>
+          <p:cNvSpPr/>
+          <p:nvPr/>
+        </p:nvSpPr>
+        <p:spPr>
+          <a:xfrm>
+            <a:off x="777240" y="5806440"/>
+            <a:ext cx="68580" cy="68580"/>
+          </a:xfrm>
+          <a:prstGeom prst="rect">
+            <a:avLst/>
+          </a:prstGeom>
+          <a:solidFill>
+            <a:srgbClr val="0D6B67"/>
+          </a:solidFill>
+          <a:ln>
+            <a:noFill/>
+          </a:ln>
+          <a:effectLst/>
+        </p:spPr>
+        <p:style>
+          <a:lnRef idx="1">
+            <a:schemeClr val="accent1"/>
+          </a:lnRef>
+          <a:fillRef idx="3">
+            <a:schemeClr val="accent1"/>
+          </a:fillRef>
+          <a:effectRef idx="2">
+            <a:schemeClr val="accent1"/>
+          </a:effectRef>
+          <a:fontRef idx="minor">
+            <a:schemeClr val="lt1"/>
+          </a:fontRef>
+        </p:style>
+        <p:txBody>
+          <a:bodyPr rtlCol="0" anchor="ctr"/>
+          <a:lstStyle/>
+          <a:p>
+            <a:pPr algn="ctr"/>
+          </a:p>
+        </p:txBody>
+      </p:sp>
+      <p:sp>
+        <p:nvSpPr>
+          <p:cNvPr id="18" name="TextBox 17"/>
+          <p:cNvSpPr txBox="1"/>
+          <p:nvPr/>
+        </p:nvSpPr>
+        <p:spPr>
+          <a:xfrm>
+            <a:off x="1014983" y="5678424"/>
+            <a:ext cx="10399471" cy="365760"/>
+          </a:xfrm>
+          <a:prstGeom prst="rect">
+            <a:avLst/>
+          </a:prstGeom>
+          <a:noFill/>
+        </p:spPr>
+        <p:txBody>
+          <a:bodyPr wrap="square" lIns="0" rIns="0" tIns="0" bIns="0">
+            <a:spAutoFit/>
+          </a:bodyPr>
+          <a:lstStyle/>
+          <a:p>
+            <a:pPr>
+              <a:lnSpc>
+                <a:spcPct val="125000"/>
+              </a:lnSpc>
+            </a:pPr>
+            <a:r>
+              <a:rPr sz="1450" b="1">
+                <a:solidFill>
+                  <a:srgbClr val="141C1E"/>
+                </a:solidFill>
+                <a:latin typeface="Segoe UI"/>
+              </a:rPr>
+              <a:t>M4 not yet run.  </a:t>
+            </a:r>
+            <a:r>
+              <a:rPr sz="1450">
+                <a:solidFill>
+                  <a:srgbClr val="3A4A4C"/>
+                </a:solidFill>
+                <a:latin typeface="Segoe UI"/>
+              </a:rPr>
+              <a:t>The explanation module has produced no video results.</a:t>
+            </a:r>
+          </a:p>
+        </p:txBody>
+      </p:sp>
+    </p:spTree>
+  </p:cSld>
+  <p:clrMapOvr>
+    <a:masterClrMapping/>
+  </p:clrMapOvr>
+</p:sld>
+</file>
+
+<file path=ppt/slides/slide19.xml><?xml version="1.0" encoding="utf-8"?>
+<p:sld xmlns:a="http://schemas.openxmlformats.org/drawingml/2006/main" xmlns:p="http://schemas.openxmlformats.org/presentationml/2006/main" xmlns:r="http://schemas.openxmlformats.org/officeDocument/2006/relationships">
+  <p:cSld>
+    <p:spTree>
+      <p:nvGrpSpPr>
+        <p:cNvPr id="1" name=""/>
+        <p:cNvGrpSpPr/>
+        <p:nvPr/>
+      </p:nvGrpSpPr>
+      <p:grpSpPr/>
+      <p:sp>
+        <p:nvSpPr>
+          <p:cNvPr id="2" name="Rectangle 1"/>
+          <p:cNvSpPr/>
+          <p:nvPr/>
+        </p:nvSpPr>
+        <p:spPr>
+          <a:xfrm>
+            <a:off x="0" y="0"/>
+            <a:ext cx="12191695" cy="6858000"/>
+          </a:xfrm>
+          <a:prstGeom prst="rect">
+            <a:avLst/>
+          </a:prstGeom>
+          <a:solidFill>
+            <a:srgbClr val="FFFFFF"/>
+          </a:solidFill>
+          <a:ln>
+            <a:noFill/>
+          </a:ln>
+          <a:effectLst/>
+        </p:spPr>
+        <p:style>
+          <a:lnRef idx="1">
+            <a:schemeClr val="accent1"/>
+          </a:lnRef>
+          <a:fillRef idx="3">
+            <a:schemeClr val="accent1"/>
+          </a:fillRef>
+          <a:effectRef idx="2">
+            <a:schemeClr val="accent1"/>
+          </a:effectRef>
+          <a:fontRef idx="minor">
+            <a:schemeClr val="lt1"/>
+          </a:fontRef>
+        </p:style>
+        <p:txBody>
+          <a:bodyPr rtlCol="0" anchor="ctr"/>
+          <a:lstStyle/>
+          <a:p>
+            <a:pPr algn="ctr"/>
+          </a:p>
+        </p:txBody>
+      </p:sp>
+      <p:sp>
+        <p:nvSpPr>
+          <p:cNvPr id="3" name="TextBox 2"/>
+          <p:cNvSpPr txBox="1"/>
+          <p:nvPr/>
+        </p:nvSpPr>
+        <p:spPr>
+          <a:xfrm>
+            <a:off x="777240" y="475488"/>
+            <a:ext cx="10637215" cy="228600"/>
+          </a:xfrm>
+          <a:prstGeom prst="rect">
+            <a:avLst/>
+          </a:prstGeom>
+          <a:noFill/>
+        </p:spPr>
+        <p:txBody>
+          <a:bodyPr wrap="square" lIns="0" rIns="0" tIns="0" bIns="0">
+            <a:spAutoFit/>
+          </a:bodyPr>
+          <a:lstStyle/>
+          <a:p>
+            <a:pPr algn="l">
+              <a:lnSpc>
+                <a:spcPct val="100000"/>
+              </a:lnSpc>
+            </a:pPr>
+            <a:r>
+              <a:rPr sz="1100" b="1" i="0">
+                <a:solidFill>
+                  <a:srgbClr val="0D6B67"/>
+                </a:solidFill>
+                <a:latin typeface="Segoe UI"/>
+              </a:rPr>
+              <a:t>NEXT</a:t>
+            </a:r>
+          </a:p>
+        </p:txBody>
+      </p:sp>
+      <p:sp>
+        <p:nvSpPr>
+          <p:cNvPr id="4" name="TextBox 3"/>
+          <p:cNvSpPr txBox="1"/>
+          <p:nvPr/>
+        </p:nvSpPr>
+        <p:spPr>
+          <a:xfrm>
+            <a:off x="777240" y="749808"/>
+            <a:ext cx="10637215" cy="548640"/>
+          </a:xfrm>
+          <a:prstGeom prst="rect">
+            <a:avLst/>
+          </a:prstGeom>
+          <a:noFill/>
+        </p:spPr>
+        <p:txBody>
+          <a:bodyPr wrap="square" lIns="0" rIns="0" tIns="0" bIns="0">
+            <a:spAutoFit/>
+          </a:bodyPr>
+          <a:lstStyle/>
+          <a:p>
+            <a:pPr algn="l">
+              <a:lnSpc>
+                <a:spcPct val="100000"/>
+              </a:lnSpc>
+            </a:pPr>
+            <a:r>
+              <a:rPr sz="2700" b="1" i="0">
+                <a:solidFill>
+                  <a:srgbClr val="141C1E"/>
+                </a:solidFill>
+                <a:latin typeface="Segoe UI"/>
+              </a:rPr>
+              <a:t>Phase 3 plan</a:t>
+            </a:r>
+          </a:p>
+        </p:txBody>
+      </p:sp>
+      <p:sp>
+        <p:nvSpPr>
+          <p:cNvPr id="5" name="Rectangle 4"/>
+          <p:cNvSpPr/>
+          <p:nvPr/>
+        </p:nvSpPr>
+        <p:spPr>
+          <a:xfrm>
+            <a:off x="777240" y="1408176"/>
+            <a:ext cx="1371600" cy="32004"/>
+          </a:xfrm>
+          <a:prstGeom prst="rect">
+            <a:avLst/>
+          </a:prstGeom>
+          <a:solidFill>
+            <a:srgbClr val="0D6B67"/>
+          </a:solidFill>
+          <a:ln>
+            <a:noFill/>
+          </a:ln>
+          <a:effectLst/>
+        </p:spPr>
+        <p:style>
+          <a:lnRef idx="1">
+            <a:schemeClr val="accent1"/>
+          </a:lnRef>
+          <a:fillRef idx="3">
+            <a:schemeClr val="accent1"/>
+          </a:fillRef>
+          <a:effectRef idx="2">
+            <a:schemeClr val="accent1"/>
+          </a:effectRef>
+          <a:fontRef idx="minor">
+            <a:schemeClr val="lt1"/>
+          </a:fontRef>
+        </p:style>
+        <p:txBody>
+          <a:bodyPr rtlCol="0" anchor="ctr"/>
+          <a:lstStyle/>
+          <a:p>
+            <a:pPr algn="ctr"/>
+          </a:p>
+        </p:txBody>
+      </p:sp>
+      <p:sp>
+        <p:nvSpPr>
+          <p:cNvPr id="6" name="TextBox 5"/>
+          <p:cNvSpPr txBox="1"/>
+          <p:nvPr/>
+        </p:nvSpPr>
+        <p:spPr>
+          <a:xfrm>
+            <a:off x="10865815" y="6382512"/>
+            <a:ext cx="548640" cy="228600"/>
+          </a:xfrm>
+          <a:prstGeom prst="rect">
+            <a:avLst/>
+          </a:prstGeom>
+          <a:noFill/>
+        </p:spPr>
+        <p:txBody>
+          <a:bodyPr wrap="square" lIns="0" rIns="0" tIns="0" bIns="0">
+            <a:spAutoFit/>
+          </a:bodyPr>
+          <a:lstStyle/>
+          <a:p>
+            <a:pPr algn="r">
+              <a:lnSpc>
+                <a:spcPct val="100000"/>
+              </a:lnSpc>
+            </a:pPr>
+            <a:r>
+              <a:rPr sz="1000" b="0" i="0">
+                <a:solidFill>
+                  <a:srgbClr val="617274"/>
+                </a:solidFill>
+                <a:latin typeface="Segoe UI"/>
+              </a:rPr>
+              <a:t>18</a:t>
+            </a:r>
+          </a:p>
+        </p:txBody>
+      </p:sp>
       <p:graphicFrame>
         <p:nvGraphicFramePr>
           <p:cNvPr id="7" name="Table 6"/>
@@ -11880,7 +13404,7 @@
         </p:nvGraphicFramePr>
         <p:xfrm>
           <a:off x="777240" y="1828800"/>
-          <a:ext cx="10634472" cy="2743200"/>
+          <a:ext cx="10634472" cy="2834640"/>
         </p:xfrm>
         <a:graphic>
           <a:graphicData uri="http://schemas.openxmlformats.org/drawingml/2006/table">
@@ -11893,7 +13417,7 @@
                 <a:gridCol w="5029200"/>
                 <a:gridCol w="4507992"/>
               </a:tblGrid>
-              <a:tr h="548640">
+              <a:tr h="566928">
                 <a:tc>
                   <a:txBody>
                     <a:bodyPr wrap="square"/>
@@ -11901,7 +13425,7 @@
                     <a:p>
                       <a:pPr algn="r"/>
                       <a:r>
-                        <a:rPr sz="1400" b="1">
+                        <a:rPr sz="1350" b="1">
                           <a:solidFill>
                             <a:srgbClr val="FFFFFF"/>
                           </a:solidFill>
@@ -11924,7 +13448,7 @@
                     <a:p>
                       <a:pPr algn="l"/>
                       <a:r>
-                        <a:rPr sz="1400" b="1">
+                        <a:rPr sz="1350" b="1">
                           <a:solidFill>
                             <a:srgbClr val="FFFFFF"/>
                           </a:solidFill>
@@ -11947,7 +13471,7 @@
                     <a:p>
                       <a:pPr algn="l"/>
                       <a:r>
-                        <a:rPr sz="1400" b="1">
+                        <a:rPr sz="1350" b="1">
                           <a:solidFill>
                             <a:srgbClr val="FFFFFF"/>
                           </a:solidFill>
@@ -11964,7 +13488,7 @@
                   </a:tcPr>
                 </a:tc>
               </a:tr>
-              <a:tr h="548640">
+              <a:tr h="566928">
                 <a:tc>
                   <a:txBody>
                     <a:bodyPr wrap="square"/>
@@ -11972,7 +13496,7 @@
                     <a:p>
                       <a:pPr algn="r"/>
                       <a:r>
-                        <a:rPr sz="1400" b="0">
+                        <a:rPr sz="1350" b="0">
                           <a:solidFill>
                             <a:srgbClr val="141C1E"/>
                           </a:solidFill>
@@ -11995,13 +13519,13 @@
                     <a:p>
                       <a:pPr algn="l"/>
                       <a:r>
-                        <a:rPr sz="1400" b="0">
+                        <a:rPr sz="1350" b="0">
                           <a:solidFill>
                             <a:srgbClr val="141C1E"/>
                           </a:solidFill>
                           <a:latin typeface="Segoe UI"/>
                         </a:rPr>
-                        <a:t>Second dataset — CUHK Avenue</a:t>
+                        <a:t>Sweep within a single ShanghaiTech camera view</a:t>
                       </a:r>
                     </a:p>
                   </a:txBody>
@@ -12018,13 +13542,13 @@
                     <a:p>
                       <a:pPr algn="l"/>
                       <a:r>
-                        <a:rPr sz="1400" b="0">
+                        <a:rPr sz="1350" b="0">
                           <a:solidFill>
                             <a:srgbClr val="141C1E"/>
                           </a:solidFill>
                           <a:latin typeface="Segoe UI"/>
                         </a:rPr>
-                        <a:t>Tests the transfer claim directly. Currently untested.</a:t>
+                        <a:t>Settles whether scene diversity is the operative variable</a:t>
                       </a:r>
                     </a:p>
                   </a:txBody>
@@ -12035,7 +13559,7 @@
                   </a:tcPr>
                 </a:tc>
               </a:tr>
-              <a:tr h="548640">
+              <a:tr h="566928">
                 <a:tc>
                   <a:txBody>
                     <a:bodyPr wrap="square"/>
@@ -12043,7 +13567,7 @@
                     <a:p>
                       <a:pPr algn="r"/>
                       <a:r>
-                        <a:rPr sz="1400" b="0">
+                        <a:rPr sz="1350" b="0">
                           <a:solidFill>
                             <a:srgbClr val="141C1E"/>
                           </a:solidFill>
@@ -12066,13 +13590,13 @@
                     <a:p>
                       <a:pPr algn="l"/>
                       <a:r>
-                        <a:rPr sz="1400" b="0">
+                        <a:rPr sz="1350" b="0">
                           <a:solidFill>
                             <a:srgbClr val="141C1E"/>
                           </a:solidFill>
                           <a:latin typeface="Segoe UI"/>
                         </a:rPr>
-                        <a:t>Patch-level scoring against spatial tokens</a:t>
+                        <a:t>Context sweep on MVTec AD</a:t>
                       </a:r>
                     </a:p>
                   </a:txBody>
@@ -12089,13 +13613,13 @@
                     <a:p>
                       <a:pPr algn="l"/>
                       <a:r>
-                        <a:rPr sz="1400" b="0">
+                        <a:rPr sz="1350" b="0">
                           <a:solidFill>
                             <a:srgbClr val="141C1E"/>
                           </a:solidFill>
                           <a:latin typeface="Segoe UI"/>
                         </a:rPr>
-                        <a:t>Most likely route to a materially higher figure.</a:t>
+                        <a:t>Gives the industrial–surveillance contrast for adaptation, not just detection</a:t>
                       </a:r>
                     </a:p>
                   </a:txBody>
@@ -12106,7 +13630,7 @@
                   </a:tcPr>
                 </a:tc>
               </a:tr>
-              <a:tr h="548640">
+              <a:tr h="566928">
                 <a:tc>
                   <a:txBody>
                     <a:bodyPr wrap="square"/>
@@ -12114,7 +13638,7 @@
                     <a:p>
                       <a:pPr algn="r"/>
                       <a:r>
-                        <a:rPr sz="1400" b="0">
+                        <a:rPr sz="1350" b="0">
                           <a:solidFill>
                             <a:srgbClr val="141C1E"/>
                           </a:solidFill>
@@ -12137,13 +13661,13 @@
                     <a:p>
                       <a:pPr algn="l"/>
                       <a:r>
-                        <a:rPr sz="1400" b="0">
+                        <a:rPr sz="1350" b="0">
                           <a:solidFill>
                             <a:srgbClr val="141C1E"/>
                           </a:solidFill>
                           <a:latin typeface="Segoe UI"/>
                         </a:rPr>
-                        <a:t>Run M4 — explanation under matched vs mismatched context</a:t>
+                        <a:t>Patch-level scoring against spatial tokens</a:t>
                       </a:r>
                     </a:p>
                   </a:txBody>
@@ -12160,13 +13684,13 @@
                     <a:p>
                       <a:pPr algn="l"/>
                       <a:r>
-                        <a:rPr sz="1400" b="0">
+                        <a:rPr sz="1350" b="0">
                           <a:solidFill>
                             <a:srgbClr val="141C1E"/>
                           </a:solidFill>
                           <a:latin typeface="Segoe UI"/>
                         </a:rPr>
-                        <a:t>Completes the framework; supplies the qualitative result.</a:t>
+                        <a:t>Most likely route to a materially higher figure</a:t>
                       </a:r>
                     </a:p>
                   </a:txBody>
@@ -12177,7 +13701,7 @@
                   </a:tcPr>
                 </a:tc>
               </a:tr>
-              <a:tr h="548640">
+              <a:tr h="566928">
                 <a:tc>
                   <a:txBody>
                     <a:bodyPr wrap="square"/>
@@ -12185,7 +13709,7 @@
                     <a:p>
                       <a:pPr algn="r"/>
                       <a:r>
-                        <a:rPr sz="1400" b="0">
+                        <a:rPr sz="1350" b="0">
                           <a:solidFill>
                             <a:srgbClr val="141C1E"/>
                           </a:solidFill>
@@ -12208,13 +13732,13 @@
                     <a:p>
                       <a:pPr algn="l"/>
                       <a:r>
-                        <a:rPr sz="1400" b="0">
+                        <a:rPr sz="1350" b="0">
                           <a:solidFill>
                             <a:srgbClr val="141C1E"/>
                           </a:solidFill>
                           <a:latin typeface="Segoe UI"/>
                         </a:rPr>
-                        <a:t>Sharper motion signal</a:t>
+                        <a:t>Run M4 — explanations under matched vs mismatched context</a:t>
                       </a:r>
                     </a:p>
                   </a:txBody>
@@ -12231,13 +13755,13 @@
                     <a:p>
                       <a:pPr algn="l"/>
                       <a:r>
-                        <a:rPr sz="1400" b="0">
+                        <a:rPr sz="1350" b="0">
                           <a:solidFill>
                             <a:srgbClr val="141C1E"/>
                           </a:solidFill>
                           <a:latin typeface="Segoe UI"/>
                         </a:rPr>
-                        <a:t>Isolate movement from lighting and compression effects.</a:t>
+                        <a:t>Completes the framework; supplies the qualitative result</a:t>
                       </a:r>
                     </a:p>
                   </a:txBody>
@@ -12260,7 +13784,7 @@
         </p:nvSpPr>
         <p:spPr>
           <a:xfrm>
-            <a:off x="777240" y="4617720"/>
+            <a:off x="777240" y="4754880"/>
             <a:ext cx="10637215" cy="1371600"/>
           </a:xfrm>
           <a:prstGeom prst="rect">
@@ -12304,7 +13828,7 @@
         </p:nvSpPr>
         <p:spPr>
           <a:xfrm>
-            <a:off x="777240" y="4617720"/>
+            <a:off x="777240" y="4754880"/>
             <a:ext cx="45720" cy="1371600"/>
           </a:xfrm>
           <a:prstGeom prst="rect">
@@ -12348,7 +13872,7 @@
         </p:nvSpPr>
         <p:spPr>
           <a:xfrm>
-            <a:off x="1033271" y="4764024"/>
+            <a:off x="1033271" y="4901184"/>
             <a:ext cx="10134295" cy="219456"/>
           </a:xfrm>
           <a:prstGeom prst="rect">
@@ -12387,7 +13911,7 @@
         </p:nvSpPr>
         <p:spPr>
           <a:xfrm>
-            <a:off x="1033271" y="5056631"/>
+            <a:off x="1033271" y="5193792"/>
             <a:ext cx="10134295" cy="804672"/>
           </a:xfrm>
           <a:prstGeom prst="rect">
@@ -12413,1074 +13937,7 @@
                 </a:solidFill>
                 <a:latin typeface="Segoe UI"/>
               </a:rPr>
-              <a:t>Server, dataset, driver and caching are in place. Encoding the benchmark once takes 21 minutes, after which a new scoring hypothesis is evaluated in seconds rather than 50 minutes.</a:t>
-            </a:r>
-          </a:p>
-        </p:txBody>
-      </p:sp>
-    </p:spTree>
-  </p:cSld>
-  <p:clrMapOvr>
-    <a:masterClrMapping/>
-  </p:clrMapOvr>
-</p:sld>
-</file>
-
-<file path=ppt/slides/slide19.xml><?xml version="1.0" encoding="utf-8"?>
-<p:sld xmlns:a="http://schemas.openxmlformats.org/drawingml/2006/main" xmlns:p="http://schemas.openxmlformats.org/presentationml/2006/main" xmlns:r="http://schemas.openxmlformats.org/officeDocument/2006/relationships">
-  <p:cSld>
-    <p:spTree>
-      <p:nvGrpSpPr>
-        <p:cNvPr id="1" name=""/>
-        <p:cNvGrpSpPr/>
-        <p:nvPr/>
-      </p:nvGrpSpPr>
-      <p:grpSpPr/>
-      <p:sp>
-        <p:nvSpPr>
-          <p:cNvPr id="2" name="Rectangle 1"/>
-          <p:cNvSpPr/>
-          <p:nvPr/>
-        </p:nvSpPr>
-        <p:spPr>
-          <a:xfrm>
-            <a:off x="0" y="0"/>
-            <a:ext cx="12191695" cy="6858000"/>
-          </a:xfrm>
-          <a:prstGeom prst="rect">
-            <a:avLst/>
-          </a:prstGeom>
-          <a:solidFill>
-            <a:srgbClr val="FFFFFF"/>
-          </a:solidFill>
-          <a:ln>
-            <a:noFill/>
-          </a:ln>
-          <a:effectLst/>
-        </p:spPr>
-        <p:style>
-          <a:lnRef idx="1">
-            <a:schemeClr val="accent1"/>
-          </a:lnRef>
-          <a:fillRef idx="3">
-            <a:schemeClr val="accent1"/>
-          </a:fillRef>
-          <a:effectRef idx="2">
-            <a:schemeClr val="accent1"/>
-          </a:effectRef>
-          <a:fontRef idx="minor">
-            <a:schemeClr val="lt1"/>
-          </a:fontRef>
-        </p:style>
-        <p:txBody>
-          <a:bodyPr rtlCol="0" anchor="ctr"/>
-          <a:lstStyle/>
-          <a:p>
-            <a:pPr algn="ctr"/>
-          </a:p>
-        </p:txBody>
-      </p:sp>
-      <p:sp>
-        <p:nvSpPr>
-          <p:cNvPr id="3" name="TextBox 2"/>
-          <p:cNvSpPr txBox="1"/>
-          <p:nvPr/>
-        </p:nvSpPr>
-        <p:spPr>
-          <a:xfrm>
-            <a:off x="777240" y="475488"/>
-            <a:ext cx="10637215" cy="228600"/>
-          </a:xfrm>
-          <a:prstGeom prst="rect">
-            <a:avLst/>
-          </a:prstGeom>
-          <a:noFill/>
-        </p:spPr>
-        <p:txBody>
-          <a:bodyPr wrap="square" lIns="0" rIns="0" tIns="0" bIns="0">
-            <a:spAutoFit/>
-          </a:bodyPr>
-          <a:lstStyle/>
-          <a:p>
-            <a:pPr algn="l">
-              <a:lnSpc>
-                <a:spcPct val="100000"/>
-              </a:lnSpc>
-            </a:pPr>
-            <a:r>
-              <a:rPr sz="1100" b="1" i="0">
-                <a:solidFill>
-                  <a:srgbClr val="0D6B67"/>
-                </a:solidFill>
-                <a:latin typeface="Segoe UI"/>
-              </a:rPr>
-              <a:t>PHASE 2</a:t>
-            </a:r>
-          </a:p>
-        </p:txBody>
-      </p:sp>
-      <p:sp>
-        <p:nvSpPr>
-          <p:cNvPr id="4" name="TextBox 3"/>
-          <p:cNvSpPr txBox="1"/>
-          <p:nvPr/>
-        </p:nvSpPr>
-        <p:spPr>
-          <a:xfrm>
-            <a:off x="777240" y="749808"/>
-            <a:ext cx="10637215" cy="548640"/>
-          </a:xfrm>
-          <a:prstGeom prst="rect">
-            <a:avLst/>
-          </a:prstGeom>
-          <a:noFill/>
-        </p:spPr>
-        <p:txBody>
-          <a:bodyPr wrap="square" lIns="0" rIns="0" tIns="0" bIns="0">
-            <a:spAutoFit/>
-          </a:bodyPr>
-          <a:lstStyle/>
-          <a:p>
-            <a:pPr algn="l">
-              <a:lnSpc>
-                <a:spcPct val="100000"/>
-              </a:lnSpc>
-            </a:pPr>
-            <a:r>
-              <a:rPr sz="2700" b="1" i="0">
-                <a:solidFill>
-                  <a:srgbClr val="141C1E"/>
-                </a:solidFill>
-                <a:latin typeface="Segoe UI"/>
-              </a:rPr>
-              <a:t>Summary</a:t>
-            </a:r>
-          </a:p>
-        </p:txBody>
-      </p:sp>
-      <p:sp>
-        <p:nvSpPr>
-          <p:cNvPr id="5" name="Rectangle 4"/>
-          <p:cNvSpPr/>
-          <p:nvPr/>
-        </p:nvSpPr>
-        <p:spPr>
-          <a:xfrm>
-            <a:off x="777240" y="1408176"/>
-            <a:ext cx="1371600" cy="32004"/>
-          </a:xfrm>
-          <a:prstGeom prst="rect">
-            <a:avLst/>
-          </a:prstGeom>
-          <a:solidFill>
-            <a:srgbClr val="0D6B67"/>
-          </a:solidFill>
-          <a:ln>
-            <a:noFill/>
-          </a:ln>
-          <a:effectLst/>
-        </p:spPr>
-        <p:style>
-          <a:lnRef idx="1">
-            <a:schemeClr val="accent1"/>
-          </a:lnRef>
-          <a:fillRef idx="3">
-            <a:schemeClr val="accent1"/>
-          </a:fillRef>
-          <a:effectRef idx="2">
-            <a:schemeClr val="accent1"/>
-          </a:effectRef>
-          <a:fontRef idx="minor">
-            <a:schemeClr val="lt1"/>
-          </a:fontRef>
-        </p:style>
-        <p:txBody>
-          <a:bodyPr rtlCol="0" anchor="ctr"/>
-          <a:lstStyle/>
-          <a:p>
-            <a:pPr algn="ctr"/>
-          </a:p>
-        </p:txBody>
-      </p:sp>
-      <p:sp>
-        <p:nvSpPr>
-          <p:cNvPr id="6" name="TextBox 5"/>
-          <p:cNvSpPr txBox="1"/>
-          <p:nvPr/>
-        </p:nvSpPr>
-        <p:spPr>
-          <a:xfrm>
-            <a:off x="10865815" y="6382512"/>
-            <a:ext cx="548640" cy="228600"/>
-          </a:xfrm>
-          <a:prstGeom prst="rect">
-            <a:avLst/>
-          </a:prstGeom>
-          <a:noFill/>
-        </p:spPr>
-        <p:txBody>
-          <a:bodyPr wrap="square" lIns="0" rIns="0" tIns="0" bIns="0">
-            <a:spAutoFit/>
-          </a:bodyPr>
-          <a:lstStyle/>
-          <a:p>
-            <a:pPr algn="r">
-              <a:lnSpc>
-                <a:spcPct val="100000"/>
-              </a:lnSpc>
-            </a:pPr>
-            <a:r>
-              <a:rPr sz="1000" b="0" i="0">
-                <a:solidFill>
-                  <a:srgbClr val="617274"/>
-                </a:solidFill>
-                <a:latin typeface="Segoe UI"/>
-              </a:rPr>
-              <a:t>18</a:t>
-            </a:r>
-          </a:p>
-        </p:txBody>
-      </p:sp>
-      <p:sp>
-        <p:nvSpPr>
-          <p:cNvPr id="7" name="Rectangle 6"/>
-          <p:cNvSpPr/>
-          <p:nvPr/>
-        </p:nvSpPr>
-        <p:spPr>
-          <a:xfrm>
-            <a:off x="777240" y="1783080"/>
-            <a:ext cx="10637215" cy="786384"/>
-          </a:xfrm>
-          <a:prstGeom prst="rect">
-            <a:avLst/>
-          </a:prstGeom>
-          <a:solidFill>
-            <a:srgbClr val="F5F7F7"/>
-          </a:solidFill>
-          <a:ln>
-            <a:noFill/>
-          </a:ln>
-          <a:effectLst/>
-        </p:spPr>
-        <p:style>
-          <a:lnRef idx="1">
-            <a:schemeClr val="accent1"/>
-          </a:lnRef>
-          <a:fillRef idx="3">
-            <a:schemeClr val="accent1"/>
-          </a:fillRef>
-          <a:effectRef idx="2">
-            <a:schemeClr val="accent1"/>
-          </a:effectRef>
-          <a:fontRef idx="minor">
-            <a:schemeClr val="lt1"/>
-          </a:fontRef>
-        </p:style>
-        <p:txBody>
-          <a:bodyPr rtlCol="0" anchor="ctr"/>
-          <a:lstStyle/>
-          <a:p>
-            <a:pPr algn="ctr"/>
-          </a:p>
-        </p:txBody>
-      </p:sp>
-      <p:sp>
-        <p:nvSpPr>
-          <p:cNvPr id="8" name="TextBox 7"/>
-          <p:cNvSpPr txBox="1"/>
-          <p:nvPr/>
-        </p:nvSpPr>
-        <p:spPr>
-          <a:xfrm>
-            <a:off x="1051560" y="2002536"/>
-            <a:ext cx="457200" cy="365760"/>
-          </a:xfrm>
-          <a:prstGeom prst="rect">
-            <a:avLst/>
-          </a:prstGeom>
-          <a:noFill/>
-        </p:spPr>
-        <p:txBody>
-          <a:bodyPr wrap="square" lIns="0" rIns="0" tIns="0" bIns="0">
-            <a:spAutoFit/>
-          </a:bodyPr>
-          <a:lstStyle/>
-          <a:p>
-            <a:pPr algn="l">
-              <a:lnSpc>
-                <a:spcPct val="100000"/>
-              </a:lnSpc>
-            </a:pPr>
-            <a:r>
-              <a:rPr sz="2200" b="1" i="0">
-                <a:solidFill>
-                  <a:srgbClr val="0D6B67"/>
-                </a:solidFill>
-                <a:latin typeface="Segoe UI"/>
-              </a:rPr>
-              <a:t>1</a:t>
-            </a:r>
-          </a:p>
-        </p:txBody>
-      </p:sp>
-      <p:sp>
-        <p:nvSpPr>
-          <p:cNvPr id="9" name="TextBox 8"/>
-          <p:cNvSpPr txBox="1"/>
-          <p:nvPr/>
-        </p:nvSpPr>
-        <p:spPr>
-          <a:xfrm>
-            <a:off x="1645919" y="1892807"/>
-            <a:ext cx="2286000" cy="274320"/>
-          </a:xfrm>
-          <a:prstGeom prst="rect">
-            <a:avLst/>
-          </a:prstGeom>
-          <a:noFill/>
-        </p:spPr>
-        <p:txBody>
-          <a:bodyPr wrap="square" lIns="0" rIns="0" tIns="0" bIns="0">
-            <a:spAutoFit/>
-          </a:bodyPr>
-          <a:lstStyle/>
-          <a:p>
-            <a:pPr algn="l">
-              <a:lnSpc>
-                <a:spcPct val="100000"/>
-              </a:lnSpc>
-            </a:pPr>
-            <a:r>
-              <a:rPr sz="1400" b="1" i="0">
-                <a:solidFill>
-                  <a:srgbClr val="141C1E"/>
-                </a:solidFill>
-                <a:latin typeface="Segoe UI"/>
-              </a:rPr>
-              <a:t>The gap</a:t>
-            </a:r>
-          </a:p>
-        </p:txBody>
-      </p:sp>
-      <p:sp>
-        <p:nvSpPr>
-          <p:cNvPr id="10" name="TextBox 9"/>
-          <p:cNvSpPr txBox="1"/>
-          <p:nvPr/>
-        </p:nvSpPr>
-        <p:spPr>
-          <a:xfrm>
-            <a:off x="1645919" y="2167128"/>
-            <a:ext cx="9509760" cy="365760"/>
-          </a:xfrm>
-          <a:prstGeom prst="rect">
-            <a:avLst/>
-          </a:prstGeom>
-          <a:noFill/>
-        </p:spPr>
-        <p:txBody>
-          <a:bodyPr wrap="square" lIns="0" rIns="0" tIns="0" bIns="0">
-            <a:spAutoFit/>
-          </a:bodyPr>
-          <a:lstStyle/>
-          <a:p>
-            <a:pPr algn="l">
-              <a:lnSpc>
-                <a:spcPct val="120000"/>
-              </a:lnSpc>
-            </a:pPr>
-            <a:r>
-              <a:rPr sz="1350" b="0" i="0">
-                <a:solidFill>
-                  <a:srgbClr val="3A4A4C"/>
-                </a:solidFill>
-                <a:latin typeface="Segoe UI"/>
-              </a:rPr>
-              <a:t>Domain adaptation research targets covariate shift by explicit scoping. Anomaly detection is dominated by concept shift.</a:t>
-            </a:r>
-          </a:p>
-        </p:txBody>
-      </p:sp>
-      <p:sp>
-        <p:nvSpPr>
-          <p:cNvPr id="11" name="Rectangle 10"/>
-          <p:cNvSpPr/>
-          <p:nvPr/>
-        </p:nvSpPr>
-        <p:spPr>
-          <a:xfrm>
-            <a:off x="777240" y="2606040"/>
-            <a:ext cx="10637215" cy="786384"/>
-          </a:xfrm>
-          <a:prstGeom prst="rect">
-            <a:avLst/>
-          </a:prstGeom>
-          <a:solidFill>
-            <a:srgbClr val="FFFFFF"/>
-          </a:solidFill>
-          <a:ln>
-            <a:noFill/>
-          </a:ln>
-          <a:effectLst/>
-        </p:spPr>
-        <p:style>
-          <a:lnRef idx="1">
-            <a:schemeClr val="accent1"/>
-          </a:lnRef>
-          <a:fillRef idx="3">
-            <a:schemeClr val="accent1"/>
-          </a:fillRef>
-          <a:effectRef idx="2">
-            <a:schemeClr val="accent1"/>
-          </a:effectRef>
-          <a:fontRef idx="minor">
-            <a:schemeClr val="lt1"/>
-          </a:fontRef>
-        </p:style>
-        <p:txBody>
-          <a:bodyPr rtlCol="0" anchor="ctr"/>
-          <a:lstStyle/>
-          <a:p>
-            <a:pPr algn="ctr"/>
-          </a:p>
-        </p:txBody>
-      </p:sp>
-      <p:sp>
-        <p:nvSpPr>
-          <p:cNvPr id="12" name="TextBox 11"/>
-          <p:cNvSpPr txBox="1"/>
-          <p:nvPr/>
-        </p:nvSpPr>
-        <p:spPr>
-          <a:xfrm>
-            <a:off x="1051560" y="2825496"/>
-            <a:ext cx="457200" cy="365760"/>
-          </a:xfrm>
-          <a:prstGeom prst="rect">
-            <a:avLst/>
-          </a:prstGeom>
-          <a:noFill/>
-        </p:spPr>
-        <p:txBody>
-          <a:bodyPr wrap="square" lIns="0" rIns="0" tIns="0" bIns="0">
-            <a:spAutoFit/>
-          </a:bodyPr>
-          <a:lstStyle/>
-          <a:p>
-            <a:pPr algn="l">
-              <a:lnSpc>
-                <a:spcPct val="100000"/>
-              </a:lnSpc>
-            </a:pPr>
-            <a:r>
-              <a:rPr sz="2200" b="1" i="0">
-                <a:solidFill>
-                  <a:srgbClr val="0D6B67"/>
-                </a:solidFill>
-                <a:latin typeface="Segoe UI"/>
-              </a:rPr>
-              <a:t>2</a:t>
-            </a:r>
-          </a:p>
-        </p:txBody>
-      </p:sp>
-      <p:sp>
-        <p:nvSpPr>
-          <p:cNvPr id="13" name="TextBox 12"/>
-          <p:cNvSpPr txBox="1"/>
-          <p:nvPr/>
-        </p:nvSpPr>
-        <p:spPr>
-          <a:xfrm>
-            <a:off x="1645919" y="2715768"/>
-            <a:ext cx="2286000" cy="274320"/>
-          </a:xfrm>
-          <a:prstGeom prst="rect">
-            <a:avLst/>
-          </a:prstGeom>
-          <a:noFill/>
-        </p:spPr>
-        <p:txBody>
-          <a:bodyPr wrap="square" lIns="0" rIns="0" tIns="0" bIns="0">
-            <a:spAutoFit/>
-          </a:bodyPr>
-          <a:lstStyle/>
-          <a:p>
-            <a:pPr algn="l">
-              <a:lnSpc>
-                <a:spcPct val="100000"/>
-              </a:lnSpc>
-            </a:pPr>
-            <a:r>
-              <a:rPr sz="1400" b="1" i="0">
-                <a:solidFill>
-                  <a:srgbClr val="141C1E"/>
-                </a:solidFill>
-                <a:latin typeface="Segoe UI"/>
-              </a:rPr>
-              <a:t>The method</a:t>
-            </a:r>
-          </a:p>
-        </p:txBody>
-      </p:sp>
-      <p:sp>
-        <p:nvSpPr>
-          <p:cNvPr id="14" name="TextBox 13"/>
-          <p:cNvSpPr txBox="1"/>
-          <p:nvPr/>
-        </p:nvSpPr>
-        <p:spPr>
-          <a:xfrm>
-            <a:off x="1645919" y="2990088"/>
-            <a:ext cx="9509760" cy="365760"/>
-          </a:xfrm>
-          <a:prstGeom prst="rect">
-            <a:avLst/>
-          </a:prstGeom>
-          <a:noFill/>
-        </p:spPr>
-        <p:txBody>
-          <a:bodyPr wrap="square" lIns="0" rIns="0" tIns="0" bIns="0">
-            <a:spAutoFit/>
-          </a:bodyPr>
-          <a:lstStyle/>
-          <a:p>
-            <a:pPr algn="l">
-              <a:lnSpc>
-                <a:spcPct val="120000"/>
-              </a:lnSpc>
-            </a:pPr>
-            <a:r>
-              <a:rPr sz="1350" b="0" i="0">
-                <a:solidFill>
-                  <a:srgbClr val="3A4A4C"/>
-                </a:solidFill>
-                <a:latin typeface="Segoe UI"/>
-              </a:rPr>
-              <a:t>Every model frozen; adaptation carried entirely by a sentence — which makes the claim identifiable.</a:t>
-            </a:r>
-          </a:p>
-        </p:txBody>
-      </p:sp>
-      <p:sp>
-        <p:nvSpPr>
-          <p:cNvPr id="15" name="Rectangle 14"/>
-          <p:cNvSpPr/>
-          <p:nvPr/>
-        </p:nvSpPr>
-        <p:spPr>
-          <a:xfrm>
-            <a:off x="777240" y="3429000"/>
-            <a:ext cx="10637215" cy="786384"/>
-          </a:xfrm>
-          <a:prstGeom prst="rect">
-            <a:avLst/>
-          </a:prstGeom>
-          <a:solidFill>
-            <a:srgbClr val="F5F7F7"/>
-          </a:solidFill>
-          <a:ln>
-            <a:noFill/>
-          </a:ln>
-          <a:effectLst/>
-        </p:spPr>
-        <p:style>
-          <a:lnRef idx="1">
-            <a:schemeClr val="accent1"/>
-          </a:lnRef>
-          <a:fillRef idx="3">
-            <a:schemeClr val="accent1"/>
-          </a:fillRef>
-          <a:effectRef idx="2">
-            <a:schemeClr val="accent1"/>
-          </a:effectRef>
-          <a:fontRef idx="minor">
-            <a:schemeClr val="lt1"/>
-          </a:fontRef>
-        </p:style>
-        <p:txBody>
-          <a:bodyPr rtlCol="0" anchor="ctr"/>
-          <a:lstStyle/>
-          <a:p>
-            <a:pPr algn="ctr"/>
-          </a:p>
-        </p:txBody>
-      </p:sp>
-      <p:sp>
-        <p:nvSpPr>
-          <p:cNvPr id="16" name="TextBox 15"/>
-          <p:cNvSpPr txBox="1"/>
-          <p:nvPr/>
-        </p:nvSpPr>
-        <p:spPr>
-          <a:xfrm>
-            <a:off x="1051560" y="3648456"/>
-            <a:ext cx="457200" cy="365760"/>
-          </a:xfrm>
-          <a:prstGeom prst="rect">
-            <a:avLst/>
-          </a:prstGeom>
-          <a:noFill/>
-        </p:spPr>
-        <p:txBody>
-          <a:bodyPr wrap="square" lIns="0" rIns="0" tIns="0" bIns="0">
-            <a:spAutoFit/>
-          </a:bodyPr>
-          <a:lstStyle/>
-          <a:p>
-            <a:pPr algn="l">
-              <a:lnSpc>
-                <a:spcPct val="100000"/>
-              </a:lnSpc>
-            </a:pPr>
-            <a:r>
-              <a:rPr sz="2200" b="1" i="0">
-                <a:solidFill>
-                  <a:srgbClr val="0D6B67"/>
-                </a:solidFill>
-                <a:latin typeface="Segoe UI"/>
-              </a:rPr>
-              <a:t>3</a:t>
-            </a:r>
-          </a:p>
-        </p:txBody>
-      </p:sp>
-      <p:sp>
-        <p:nvSpPr>
-          <p:cNvPr id="17" name="TextBox 16"/>
-          <p:cNvSpPr txBox="1"/>
-          <p:nvPr/>
-        </p:nvSpPr>
-        <p:spPr>
-          <a:xfrm>
-            <a:off x="1645919" y="3538728"/>
-            <a:ext cx="2286000" cy="274320"/>
-          </a:xfrm>
-          <a:prstGeom prst="rect">
-            <a:avLst/>
-          </a:prstGeom>
-          <a:noFill/>
-        </p:spPr>
-        <p:txBody>
-          <a:bodyPr wrap="square" lIns="0" rIns="0" tIns="0" bIns="0">
-            <a:spAutoFit/>
-          </a:bodyPr>
-          <a:lstStyle/>
-          <a:p>
-            <a:pPr algn="l">
-              <a:lnSpc>
-                <a:spcPct val="100000"/>
-              </a:lnSpc>
-            </a:pPr>
-            <a:r>
-              <a:rPr sz="1400" b="1" i="0">
-                <a:solidFill>
-                  <a:srgbClr val="141C1E"/>
-                </a:solidFill>
-                <a:latin typeface="Segoe UI"/>
-              </a:rPr>
-              <a:t>The result</a:t>
-            </a:r>
-          </a:p>
-        </p:txBody>
-      </p:sp>
-      <p:sp>
-        <p:nvSpPr>
-          <p:cNvPr id="18" name="TextBox 17"/>
-          <p:cNvSpPr txBox="1"/>
-          <p:nvPr/>
-        </p:nvSpPr>
-        <p:spPr>
-          <a:xfrm>
-            <a:off x="1645919" y="3813048"/>
-            <a:ext cx="9509760" cy="365760"/>
-          </a:xfrm>
-          <a:prstGeom prst="rect">
-            <a:avLst/>
-          </a:prstGeom>
-          <a:noFill/>
-        </p:spPr>
-        <p:txBody>
-          <a:bodyPr wrap="square" lIns="0" rIns="0" tIns="0" bIns="0">
-            <a:spAutoFit/>
-          </a:bodyPr>
-          <a:lstStyle/>
-          <a:p>
-            <a:pPr algn="l">
-              <a:lnSpc>
-                <a:spcPct val="120000"/>
-              </a:lnSpc>
-            </a:pPr>
-            <a:r>
-              <a:rPr sz="1350" b="0" i="0">
-                <a:solidFill>
-                  <a:srgbClr val="3A4A4C"/>
-                </a:solidFill>
-                <a:latin typeface="Segoe UI"/>
-              </a:rPr>
-              <a:t>0.706 AUROC on ShanghaiTech with no training, and a wrong description costs 0.100 — evidence the text is load-bearing.</a:t>
-            </a:r>
-          </a:p>
-        </p:txBody>
-      </p:sp>
-      <p:sp>
-        <p:nvSpPr>
-          <p:cNvPr id="19" name="Rectangle 18"/>
-          <p:cNvSpPr/>
-          <p:nvPr/>
-        </p:nvSpPr>
-        <p:spPr>
-          <a:xfrm>
-            <a:off x="777240" y="4251960"/>
-            <a:ext cx="10637215" cy="786384"/>
-          </a:xfrm>
-          <a:prstGeom prst="rect">
-            <a:avLst/>
-          </a:prstGeom>
-          <a:solidFill>
-            <a:srgbClr val="FFFFFF"/>
-          </a:solidFill>
-          <a:ln>
-            <a:noFill/>
-          </a:ln>
-          <a:effectLst/>
-        </p:spPr>
-        <p:style>
-          <a:lnRef idx="1">
-            <a:schemeClr val="accent1"/>
-          </a:lnRef>
-          <a:fillRef idx="3">
-            <a:schemeClr val="accent1"/>
-          </a:fillRef>
-          <a:effectRef idx="2">
-            <a:schemeClr val="accent1"/>
-          </a:effectRef>
-          <a:fontRef idx="minor">
-            <a:schemeClr val="lt1"/>
-          </a:fontRef>
-        </p:style>
-        <p:txBody>
-          <a:bodyPr rtlCol="0" anchor="ctr"/>
-          <a:lstStyle/>
-          <a:p>
-            <a:pPr algn="ctr"/>
-          </a:p>
-        </p:txBody>
-      </p:sp>
-      <p:sp>
-        <p:nvSpPr>
-          <p:cNvPr id="20" name="TextBox 19"/>
-          <p:cNvSpPr txBox="1"/>
-          <p:nvPr/>
-        </p:nvSpPr>
-        <p:spPr>
-          <a:xfrm>
-            <a:off x="1051560" y="4471416"/>
-            <a:ext cx="457200" cy="365760"/>
-          </a:xfrm>
-          <a:prstGeom prst="rect">
-            <a:avLst/>
-          </a:prstGeom>
-          <a:noFill/>
-        </p:spPr>
-        <p:txBody>
-          <a:bodyPr wrap="square" lIns="0" rIns="0" tIns="0" bIns="0">
-            <a:spAutoFit/>
-          </a:bodyPr>
-          <a:lstStyle/>
-          <a:p>
-            <a:pPr algn="l">
-              <a:lnSpc>
-                <a:spcPct val="100000"/>
-              </a:lnSpc>
-            </a:pPr>
-            <a:r>
-              <a:rPr sz="2200" b="1" i="0">
-                <a:solidFill>
-                  <a:srgbClr val="0D6B67"/>
-                </a:solidFill>
-                <a:latin typeface="Segoe UI"/>
-              </a:rPr>
-              <a:t>4</a:t>
-            </a:r>
-          </a:p>
-        </p:txBody>
-      </p:sp>
-      <p:sp>
-        <p:nvSpPr>
-          <p:cNvPr id="21" name="TextBox 20"/>
-          <p:cNvSpPr txBox="1"/>
-          <p:nvPr/>
-        </p:nvSpPr>
-        <p:spPr>
-          <a:xfrm>
-            <a:off x="1645919" y="4361688"/>
-            <a:ext cx="2286000" cy="274320"/>
-          </a:xfrm>
-          <a:prstGeom prst="rect">
-            <a:avLst/>
-          </a:prstGeom>
-          <a:noFill/>
-        </p:spPr>
-        <p:txBody>
-          <a:bodyPr wrap="square" lIns="0" rIns="0" tIns="0" bIns="0">
-            <a:spAutoFit/>
-          </a:bodyPr>
-          <a:lstStyle/>
-          <a:p>
-            <a:pPr algn="l">
-              <a:lnSpc>
-                <a:spcPct val="100000"/>
-              </a:lnSpc>
-            </a:pPr>
-            <a:r>
-              <a:rPr sz="1400" b="1" i="0">
-                <a:solidFill>
-                  <a:srgbClr val="141C1E"/>
-                </a:solidFill>
-                <a:latin typeface="Segoe UI"/>
-              </a:rPr>
-              <a:t>The finding</a:t>
-            </a:r>
-          </a:p>
-        </p:txBody>
-      </p:sp>
-      <p:sp>
-        <p:nvSpPr>
-          <p:cNvPr id="22" name="TextBox 21"/>
-          <p:cNvSpPr txBox="1"/>
-          <p:nvPr/>
-        </p:nvSpPr>
-        <p:spPr>
-          <a:xfrm>
-            <a:off x="1645919" y="4636008"/>
-            <a:ext cx="9509760" cy="365760"/>
-          </a:xfrm>
-          <a:prstGeom prst="rect">
-            <a:avLst/>
-          </a:prstGeom>
-          <a:noFill/>
-        </p:spPr>
-        <p:txBody>
-          <a:bodyPr wrap="square" lIns="0" rIns="0" tIns="0" bIns="0">
-            <a:spAutoFit/>
-          </a:bodyPr>
-          <a:lstStyle/>
-          <a:p>
-            <a:pPr algn="l">
-              <a:lnSpc>
-                <a:spcPct val="120000"/>
-              </a:lnSpc>
-            </a:pPr>
-            <a:r>
-              <a:rPr sz="1350" b="0" i="0">
-                <a:solidFill>
-                  <a:srgbClr val="3A4A4C"/>
-                </a:solidFill>
-                <a:latin typeface="Segoe UI"/>
-              </a:rPr>
-              <a:t>Where the description is injected dominates what it says, to the point of reversing the effect. Not reported in the literature.</a:t>
-            </a:r>
-          </a:p>
-        </p:txBody>
-      </p:sp>
-      <p:sp>
-        <p:nvSpPr>
-          <p:cNvPr id="23" name="Rectangle 22"/>
-          <p:cNvSpPr/>
-          <p:nvPr/>
-        </p:nvSpPr>
-        <p:spPr>
-          <a:xfrm>
-            <a:off x="777240" y="5074920"/>
-            <a:ext cx="10637215" cy="786384"/>
-          </a:xfrm>
-          <a:prstGeom prst="rect">
-            <a:avLst/>
-          </a:prstGeom>
-          <a:solidFill>
-            <a:srgbClr val="F5F7F7"/>
-          </a:solidFill>
-          <a:ln>
-            <a:noFill/>
-          </a:ln>
-          <a:effectLst/>
-        </p:spPr>
-        <p:style>
-          <a:lnRef idx="1">
-            <a:schemeClr val="accent1"/>
-          </a:lnRef>
-          <a:fillRef idx="3">
-            <a:schemeClr val="accent1"/>
-          </a:fillRef>
-          <a:effectRef idx="2">
-            <a:schemeClr val="accent1"/>
-          </a:effectRef>
-          <a:fontRef idx="minor">
-            <a:schemeClr val="lt1"/>
-          </a:fontRef>
-        </p:style>
-        <p:txBody>
-          <a:bodyPr rtlCol="0" anchor="ctr"/>
-          <a:lstStyle/>
-          <a:p>
-            <a:pPr algn="ctr"/>
-          </a:p>
-        </p:txBody>
-      </p:sp>
-      <p:sp>
-        <p:nvSpPr>
-          <p:cNvPr id="24" name="TextBox 23"/>
-          <p:cNvSpPr txBox="1"/>
-          <p:nvPr/>
-        </p:nvSpPr>
-        <p:spPr>
-          <a:xfrm>
-            <a:off x="1051560" y="5294376"/>
-            <a:ext cx="457200" cy="365760"/>
-          </a:xfrm>
-          <a:prstGeom prst="rect">
-            <a:avLst/>
-          </a:prstGeom>
-          <a:noFill/>
-        </p:spPr>
-        <p:txBody>
-          <a:bodyPr wrap="square" lIns="0" rIns="0" tIns="0" bIns="0">
-            <a:spAutoFit/>
-          </a:bodyPr>
-          <a:lstStyle/>
-          <a:p>
-            <a:pPr algn="l">
-              <a:lnSpc>
-                <a:spcPct val="100000"/>
-              </a:lnSpc>
-            </a:pPr>
-            <a:r>
-              <a:rPr sz="2200" b="1" i="0">
-                <a:solidFill>
-                  <a:srgbClr val="0D6B67"/>
-                </a:solidFill>
-                <a:latin typeface="Segoe UI"/>
-              </a:rPr>
-              <a:t>5</a:t>
-            </a:r>
-          </a:p>
-        </p:txBody>
-      </p:sp>
-      <p:sp>
-        <p:nvSpPr>
-          <p:cNvPr id="25" name="TextBox 24"/>
-          <p:cNvSpPr txBox="1"/>
-          <p:nvPr/>
-        </p:nvSpPr>
-        <p:spPr>
-          <a:xfrm>
-            <a:off x="1645919" y="5184648"/>
-            <a:ext cx="2286000" cy="274320"/>
-          </a:xfrm>
-          <a:prstGeom prst="rect">
-            <a:avLst/>
-          </a:prstGeom>
-          <a:noFill/>
-        </p:spPr>
-        <p:txBody>
-          <a:bodyPr wrap="square" lIns="0" rIns="0" tIns="0" bIns="0">
-            <a:spAutoFit/>
-          </a:bodyPr>
-          <a:lstStyle/>
-          <a:p>
-            <a:pPr algn="l">
-              <a:lnSpc>
-                <a:spcPct val="100000"/>
-              </a:lnSpc>
-            </a:pPr>
-            <a:r>
-              <a:rPr sz="1400" b="1" i="0">
-                <a:solidFill>
-                  <a:srgbClr val="141C1E"/>
-                </a:solidFill>
-                <a:latin typeface="Segoe UI"/>
-              </a:rPr>
-              <a:t>What is missing</a:t>
-            </a:r>
-          </a:p>
-        </p:txBody>
-      </p:sp>
-      <p:sp>
-        <p:nvSpPr>
-          <p:cNvPr id="26" name="TextBox 25"/>
-          <p:cNvSpPr txBox="1"/>
-          <p:nvPr/>
-        </p:nvSpPr>
-        <p:spPr>
-          <a:xfrm>
-            <a:off x="1645919" y="5458968"/>
-            <a:ext cx="9509760" cy="365760"/>
-          </a:xfrm>
-          <a:prstGeom prst="rect">
-            <a:avLst/>
-          </a:prstGeom>
-          <a:noFill/>
-        </p:spPr>
-        <p:txBody>
-          <a:bodyPr wrap="square" lIns="0" rIns="0" tIns="0" bIns="0">
-            <a:spAutoFit/>
-          </a:bodyPr>
-          <a:lstStyle/>
-          <a:p>
-            <a:pPr algn="l">
-              <a:lnSpc>
-                <a:spcPct val="120000"/>
-              </a:lnSpc>
-            </a:pPr>
-            <a:r>
-              <a:rPr sz="1350" b="0" i="0">
-                <a:solidFill>
-                  <a:srgbClr val="3A4A4C"/>
-                </a:solidFill>
-                <a:latin typeface="Segoe UI"/>
-              </a:rPr>
-              <a:t>Cross-domain transfer, on a second dataset. This is Phase 3's first task.</a:t>
-            </a:r>
-          </a:p>
-        </p:txBody>
-      </p:sp>
-      <p:sp>
-        <p:nvSpPr>
-          <p:cNvPr id="27" name="TextBox 26"/>
-          <p:cNvSpPr txBox="1"/>
-          <p:nvPr/>
-        </p:nvSpPr>
-        <p:spPr>
-          <a:xfrm>
-            <a:off x="777240" y="6172200"/>
-            <a:ext cx="10637215" cy="320040"/>
-          </a:xfrm>
-          <a:prstGeom prst="rect">
-            <a:avLst/>
-          </a:prstGeom>
-          <a:noFill/>
-        </p:spPr>
-        <p:txBody>
-          <a:bodyPr wrap="square" lIns="0" rIns="0" tIns="0" bIns="0">
-            <a:spAutoFit/>
-          </a:bodyPr>
-          <a:lstStyle/>
-          <a:p>
-            <a:pPr algn="ctr">
-              <a:lnSpc>
-                <a:spcPct val="100000"/>
-              </a:lnSpc>
-            </a:pPr>
-            <a:r>
-              <a:rPr sz="1300" b="0" i="1">
-                <a:solidFill>
-                  <a:srgbClr val="617274"/>
-                </a:solidFill>
-                <a:latin typeface="Segoe UI"/>
-              </a:rPr>
-              <a:t>All results reproducible from committed code and run manifests.</a:t>
+              <a:t>Server, datasets, driver and embedding cache are in place. Encoding a benchmark once takes 21 minutes, after which a new scoring hypothesis is evaluated in seconds rather than 50 minutes.</a:t>
             </a:r>
           </a:p>
         </p:txBody>
@@ -13887,7 +14344,7 @@
                 </a:solidFill>
                 <a:latin typeface="Segoe UI"/>
               </a:rPr>
-              <a:t>Move it anywhere else and it fails — new site means new footage collection and a full retraining cycle.</a:t>
+              <a:t>Move it anywhere else and it fails — a new site means new footage collection and a full retraining cycle.</a:t>
             </a:r>
           </a:p>
         </p:txBody>
@@ -14173,6 +14630,1073 @@
                 <a:latin typeface="Segoe UI"/>
               </a:rPr>
               <a:t>Same footage. Opposite answers. The picture did not change — the rule did.</a:t>
+            </a:r>
+          </a:p>
+        </p:txBody>
+      </p:sp>
+    </p:spTree>
+  </p:cSld>
+  <p:clrMapOvr>
+    <a:masterClrMapping/>
+  </p:clrMapOvr>
+</p:sld>
+</file>
+
+<file path=ppt/slides/slide20.xml><?xml version="1.0" encoding="utf-8"?>
+<p:sld xmlns:a="http://schemas.openxmlformats.org/drawingml/2006/main" xmlns:p="http://schemas.openxmlformats.org/presentationml/2006/main" xmlns:r="http://schemas.openxmlformats.org/officeDocument/2006/relationships">
+  <p:cSld>
+    <p:spTree>
+      <p:nvGrpSpPr>
+        <p:cNvPr id="1" name=""/>
+        <p:cNvGrpSpPr/>
+        <p:nvPr/>
+      </p:nvGrpSpPr>
+      <p:grpSpPr/>
+      <p:sp>
+        <p:nvSpPr>
+          <p:cNvPr id="2" name="Rectangle 1"/>
+          <p:cNvSpPr/>
+          <p:nvPr/>
+        </p:nvSpPr>
+        <p:spPr>
+          <a:xfrm>
+            <a:off x="0" y="0"/>
+            <a:ext cx="12191695" cy="6858000"/>
+          </a:xfrm>
+          <a:prstGeom prst="rect">
+            <a:avLst/>
+          </a:prstGeom>
+          <a:solidFill>
+            <a:srgbClr val="FFFFFF"/>
+          </a:solidFill>
+          <a:ln>
+            <a:noFill/>
+          </a:ln>
+          <a:effectLst/>
+        </p:spPr>
+        <p:style>
+          <a:lnRef idx="1">
+            <a:schemeClr val="accent1"/>
+          </a:lnRef>
+          <a:fillRef idx="3">
+            <a:schemeClr val="accent1"/>
+          </a:fillRef>
+          <a:effectRef idx="2">
+            <a:schemeClr val="accent1"/>
+          </a:effectRef>
+          <a:fontRef idx="minor">
+            <a:schemeClr val="lt1"/>
+          </a:fontRef>
+        </p:style>
+        <p:txBody>
+          <a:bodyPr rtlCol="0" anchor="ctr"/>
+          <a:lstStyle/>
+          <a:p>
+            <a:pPr algn="ctr"/>
+          </a:p>
+        </p:txBody>
+      </p:sp>
+      <p:sp>
+        <p:nvSpPr>
+          <p:cNvPr id="3" name="TextBox 2"/>
+          <p:cNvSpPr txBox="1"/>
+          <p:nvPr/>
+        </p:nvSpPr>
+        <p:spPr>
+          <a:xfrm>
+            <a:off x="777240" y="475488"/>
+            <a:ext cx="10637215" cy="228600"/>
+          </a:xfrm>
+          <a:prstGeom prst="rect">
+            <a:avLst/>
+          </a:prstGeom>
+          <a:noFill/>
+        </p:spPr>
+        <p:txBody>
+          <a:bodyPr wrap="square" lIns="0" rIns="0" tIns="0" bIns="0">
+            <a:spAutoFit/>
+          </a:bodyPr>
+          <a:lstStyle/>
+          <a:p>
+            <a:pPr algn="l">
+              <a:lnSpc>
+                <a:spcPct val="100000"/>
+              </a:lnSpc>
+            </a:pPr>
+            <a:r>
+              <a:rPr sz="1100" b="1" i="0">
+                <a:solidFill>
+                  <a:srgbClr val="0D6B67"/>
+                </a:solidFill>
+                <a:latin typeface="Segoe UI"/>
+              </a:rPr>
+              <a:t>PHASE 2</a:t>
+            </a:r>
+          </a:p>
+        </p:txBody>
+      </p:sp>
+      <p:sp>
+        <p:nvSpPr>
+          <p:cNvPr id="4" name="TextBox 3"/>
+          <p:cNvSpPr txBox="1"/>
+          <p:nvPr/>
+        </p:nvSpPr>
+        <p:spPr>
+          <a:xfrm>
+            <a:off x="777240" y="749808"/>
+            <a:ext cx="10637215" cy="548640"/>
+          </a:xfrm>
+          <a:prstGeom prst="rect">
+            <a:avLst/>
+          </a:prstGeom>
+          <a:noFill/>
+        </p:spPr>
+        <p:txBody>
+          <a:bodyPr wrap="square" lIns="0" rIns="0" tIns="0" bIns="0">
+            <a:spAutoFit/>
+          </a:bodyPr>
+          <a:lstStyle/>
+          <a:p>
+            <a:pPr algn="l">
+              <a:lnSpc>
+                <a:spcPct val="100000"/>
+              </a:lnSpc>
+            </a:pPr>
+            <a:r>
+              <a:rPr sz="2700" b="1" i="0">
+                <a:solidFill>
+                  <a:srgbClr val="141C1E"/>
+                </a:solidFill>
+                <a:latin typeface="Segoe UI"/>
+              </a:rPr>
+              <a:t>Summary</a:t>
+            </a:r>
+          </a:p>
+        </p:txBody>
+      </p:sp>
+      <p:sp>
+        <p:nvSpPr>
+          <p:cNvPr id="5" name="Rectangle 4"/>
+          <p:cNvSpPr/>
+          <p:nvPr/>
+        </p:nvSpPr>
+        <p:spPr>
+          <a:xfrm>
+            <a:off x="777240" y="1408176"/>
+            <a:ext cx="1371600" cy="32004"/>
+          </a:xfrm>
+          <a:prstGeom prst="rect">
+            <a:avLst/>
+          </a:prstGeom>
+          <a:solidFill>
+            <a:srgbClr val="0D6B67"/>
+          </a:solidFill>
+          <a:ln>
+            <a:noFill/>
+          </a:ln>
+          <a:effectLst/>
+        </p:spPr>
+        <p:style>
+          <a:lnRef idx="1">
+            <a:schemeClr val="accent1"/>
+          </a:lnRef>
+          <a:fillRef idx="3">
+            <a:schemeClr val="accent1"/>
+          </a:fillRef>
+          <a:effectRef idx="2">
+            <a:schemeClr val="accent1"/>
+          </a:effectRef>
+          <a:fontRef idx="minor">
+            <a:schemeClr val="lt1"/>
+          </a:fontRef>
+        </p:style>
+        <p:txBody>
+          <a:bodyPr rtlCol="0" anchor="ctr"/>
+          <a:lstStyle/>
+          <a:p>
+            <a:pPr algn="ctr"/>
+          </a:p>
+        </p:txBody>
+      </p:sp>
+      <p:sp>
+        <p:nvSpPr>
+          <p:cNvPr id="6" name="TextBox 5"/>
+          <p:cNvSpPr txBox="1"/>
+          <p:nvPr/>
+        </p:nvSpPr>
+        <p:spPr>
+          <a:xfrm>
+            <a:off x="10865815" y="6382512"/>
+            <a:ext cx="548640" cy="228600"/>
+          </a:xfrm>
+          <a:prstGeom prst="rect">
+            <a:avLst/>
+          </a:prstGeom>
+          <a:noFill/>
+        </p:spPr>
+        <p:txBody>
+          <a:bodyPr wrap="square" lIns="0" rIns="0" tIns="0" bIns="0">
+            <a:spAutoFit/>
+          </a:bodyPr>
+          <a:lstStyle/>
+          <a:p>
+            <a:pPr algn="r">
+              <a:lnSpc>
+                <a:spcPct val="100000"/>
+              </a:lnSpc>
+            </a:pPr>
+            <a:r>
+              <a:rPr sz="1000" b="0" i="0">
+                <a:solidFill>
+                  <a:srgbClr val="617274"/>
+                </a:solidFill>
+                <a:latin typeface="Segoe UI"/>
+              </a:rPr>
+              <a:t>19</a:t>
+            </a:r>
+          </a:p>
+        </p:txBody>
+      </p:sp>
+      <p:sp>
+        <p:nvSpPr>
+          <p:cNvPr id="7" name="Rectangle 6"/>
+          <p:cNvSpPr/>
+          <p:nvPr/>
+        </p:nvSpPr>
+        <p:spPr>
+          <a:xfrm>
+            <a:off x="777240" y="1783080"/>
+            <a:ext cx="10637215" cy="786384"/>
+          </a:xfrm>
+          <a:prstGeom prst="rect">
+            <a:avLst/>
+          </a:prstGeom>
+          <a:solidFill>
+            <a:srgbClr val="F5F7F7"/>
+          </a:solidFill>
+          <a:ln>
+            <a:noFill/>
+          </a:ln>
+          <a:effectLst/>
+        </p:spPr>
+        <p:style>
+          <a:lnRef idx="1">
+            <a:schemeClr val="accent1"/>
+          </a:lnRef>
+          <a:fillRef idx="3">
+            <a:schemeClr val="accent1"/>
+          </a:fillRef>
+          <a:effectRef idx="2">
+            <a:schemeClr val="accent1"/>
+          </a:effectRef>
+          <a:fontRef idx="minor">
+            <a:schemeClr val="lt1"/>
+          </a:fontRef>
+        </p:style>
+        <p:txBody>
+          <a:bodyPr rtlCol="0" anchor="ctr"/>
+          <a:lstStyle/>
+          <a:p>
+            <a:pPr algn="ctr"/>
+          </a:p>
+        </p:txBody>
+      </p:sp>
+      <p:sp>
+        <p:nvSpPr>
+          <p:cNvPr id="8" name="TextBox 7"/>
+          <p:cNvSpPr txBox="1"/>
+          <p:nvPr/>
+        </p:nvSpPr>
+        <p:spPr>
+          <a:xfrm>
+            <a:off x="1051560" y="2002536"/>
+            <a:ext cx="457200" cy="365760"/>
+          </a:xfrm>
+          <a:prstGeom prst="rect">
+            <a:avLst/>
+          </a:prstGeom>
+          <a:noFill/>
+        </p:spPr>
+        <p:txBody>
+          <a:bodyPr wrap="square" lIns="0" rIns="0" tIns="0" bIns="0">
+            <a:spAutoFit/>
+          </a:bodyPr>
+          <a:lstStyle/>
+          <a:p>
+            <a:pPr algn="l">
+              <a:lnSpc>
+                <a:spcPct val="100000"/>
+              </a:lnSpc>
+            </a:pPr>
+            <a:r>
+              <a:rPr sz="2200" b="1" i="0">
+                <a:solidFill>
+                  <a:srgbClr val="0D6B67"/>
+                </a:solidFill>
+                <a:latin typeface="Segoe UI"/>
+              </a:rPr>
+              <a:t>1</a:t>
+            </a:r>
+          </a:p>
+        </p:txBody>
+      </p:sp>
+      <p:sp>
+        <p:nvSpPr>
+          <p:cNvPr id="9" name="TextBox 8"/>
+          <p:cNvSpPr txBox="1"/>
+          <p:nvPr/>
+        </p:nvSpPr>
+        <p:spPr>
+          <a:xfrm>
+            <a:off x="1645919" y="1892807"/>
+            <a:ext cx="2286000" cy="274320"/>
+          </a:xfrm>
+          <a:prstGeom prst="rect">
+            <a:avLst/>
+          </a:prstGeom>
+          <a:noFill/>
+        </p:spPr>
+        <p:txBody>
+          <a:bodyPr wrap="square" lIns="0" rIns="0" tIns="0" bIns="0">
+            <a:spAutoFit/>
+          </a:bodyPr>
+          <a:lstStyle/>
+          <a:p>
+            <a:pPr algn="l">
+              <a:lnSpc>
+                <a:spcPct val="100000"/>
+              </a:lnSpc>
+            </a:pPr>
+            <a:r>
+              <a:rPr sz="1400" b="1" i="0">
+                <a:solidFill>
+                  <a:srgbClr val="141C1E"/>
+                </a:solidFill>
+                <a:latin typeface="Segoe UI"/>
+              </a:rPr>
+              <a:t>The gap</a:t>
+            </a:r>
+          </a:p>
+        </p:txBody>
+      </p:sp>
+      <p:sp>
+        <p:nvSpPr>
+          <p:cNvPr id="10" name="TextBox 9"/>
+          <p:cNvSpPr txBox="1"/>
+          <p:nvPr/>
+        </p:nvSpPr>
+        <p:spPr>
+          <a:xfrm>
+            <a:off x="1645919" y="2167128"/>
+            <a:ext cx="9509760" cy="365760"/>
+          </a:xfrm>
+          <a:prstGeom prst="rect">
+            <a:avLst/>
+          </a:prstGeom>
+          <a:noFill/>
+        </p:spPr>
+        <p:txBody>
+          <a:bodyPr wrap="square" lIns="0" rIns="0" tIns="0" bIns="0">
+            <a:spAutoFit/>
+          </a:bodyPr>
+          <a:lstStyle/>
+          <a:p>
+            <a:pPr algn="l">
+              <a:lnSpc>
+                <a:spcPct val="120000"/>
+              </a:lnSpc>
+            </a:pPr>
+            <a:r>
+              <a:rPr sz="1350" b="0" i="0">
+                <a:solidFill>
+                  <a:srgbClr val="3A4A4C"/>
+                </a:solidFill>
+                <a:latin typeface="Segoe UI"/>
+              </a:rPr>
+              <a:t>Domain adaptation research targets covariate shift by explicit scoping. Anomaly detection is dominated by concept shift.</a:t>
+            </a:r>
+          </a:p>
+        </p:txBody>
+      </p:sp>
+      <p:sp>
+        <p:nvSpPr>
+          <p:cNvPr id="11" name="Rectangle 10"/>
+          <p:cNvSpPr/>
+          <p:nvPr/>
+        </p:nvSpPr>
+        <p:spPr>
+          <a:xfrm>
+            <a:off x="777240" y="2606040"/>
+            <a:ext cx="10637215" cy="786384"/>
+          </a:xfrm>
+          <a:prstGeom prst="rect">
+            <a:avLst/>
+          </a:prstGeom>
+          <a:solidFill>
+            <a:srgbClr val="FFFFFF"/>
+          </a:solidFill>
+          <a:ln>
+            <a:noFill/>
+          </a:ln>
+          <a:effectLst/>
+        </p:spPr>
+        <p:style>
+          <a:lnRef idx="1">
+            <a:schemeClr val="accent1"/>
+          </a:lnRef>
+          <a:fillRef idx="3">
+            <a:schemeClr val="accent1"/>
+          </a:fillRef>
+          <a:effectRef idx="2">
+            <a:schemeClr val="accent1"/>
+          </a:effectRef>
+          <a:fontRef idx="minor">
+            <a:schemeClr val="lt1"/>
+          </a:fontRef>
+        </p:style>
+        <p:txBody>
+          <a:bodyPr rtlCol="0" anchor="ctr"/>
+          <a:lstStyle/>
+          <a:p>
+            <a:pPr algn="ctr"/>
+          </a:p>
+        </p:txBody>
+      </p:sp>
+      <p:sp>
+        <p:nvSpPr>
+          <p:cNvPr id="12" name="TextBox 11"/>
+          <p:cNvSpPr txBox="1"/>
+          <p:nvPr/>
+        </p:nvSpPr>
+        <p:spPr>
+          <a:xfrm>
+            <a:off x="1051560" y="2825496"/>
+            <a:ext cx="457200" cy="365760"/>
+          </a:xfrm>
+          <a:prstGeom prst="rect">
+            <a:avLst/>
+          </a:prstGeom>
+          <a:noFill/>
+        </p:spPr>
+        <p:txBody>
+          <a:bodyPr wrap="square" lIns="0" rIns="0" tIns="0" bIns="0">
+            <a:spAutoFit/>
+          </a:bodyPr>
+          <a:lstStyle/>
+          <a:p>
+            <a:pPr algn="l">
+              <a:lnSpc>
+                <a:spcPct val="100000"/>
+              </a:lnSpc>
+            </a:pPr>
+            <a:r>
+              <a:rPr sz="2200" b="1" i="0">
+                <a:solidFill>
+                  <a:srgbClr val="0D6B67"/>
+                </a:solidFill>
+                <a:latin typeface="Segoe UI"/>
+              </a:rPr>
+              <a:t>2</a:t>
+            </a:r>
+          </a:p>
+        </p:txBody>
+      </p:sp>
+      <p:sp>
+        <p:nvSpPr>
+          <p:cNvPr id="13" name="TextBox 12"/>
+          <p:cNvSpPr txBox="1"/>
+          <p:nvPr/>
+        </p:nvSpPr>
+        <p:spPr>
+          <a:xfrm>
+            <a:off x="1645919" y="2715768"/>
+            <a:ext cx="2286000" cy="274320"/>
+          </a:xfrm>
+          <a:prstGeom prst="rect">
+            <a:avLst/>
+          </a:prstGeom>
+          <a:noFill/>
+        </p:spPr>
+        <p:txBody>
+          <a:bodyPr wrap="square" lIns="0" rIns="0" tIns="0" bIns="0">
+            <a:spAutoFit/>
+          </a:bodyPr>
+          <a:lstStyle/>
+          <a:p>
+            <a:pPr algn="l">
+              <a:lnSpc>
+                <a:spcPct val="100000"/>
+              </a:lnSpc>
+            </a:pPr>
+            <a:r>
+              <a:rPr sz="1400" b="1" i="0">
+                <a:solidFill>
+                  <a:srgbClr val="141C1E"/>
+                </a:solidFill>
+                <a:latin typeface="Segoe UI"/>
+              </a:rPr>
+              <a:t>The method</a:t>
+            </a:r>
+          </a:p>
+        </p:txBody>
+      </p:sp>
+      <p:sp>
+        <p:nvSpPr>
+          <p:cNvPr id="14" name="TextBox 13"/>
+          <p:cNvSpPr txBox="1"/>
+          <p:nvPr/>
+        </p:nvSpPr>
+        <p:spPr>
+          <a:xfrm>
+            <a:off x="1645919" y="2990088"/>
+            <a:ext cx="9509760" cy="365760"/>
+          </a:xfrm>
+          <a:prstGeom prst="rect">
+            <a:avLst/>
+          </a:prstGeom>
+          <a:noFill/>
+        </p:spPr>
+        <p:txBody>
+          <a:bodyPr wrap="square" lIns="0" rIns="0" tIns="0" bIns="0">
+            <a:spAutoFit/>
+          </a:bodyPr>
+          <a:lstStyle/>
+          <a:p>
+            <a:pPr algn="l">
+              <a:lnSpc>
+                <a:spcPct val="120000"/>
+              </a:lnSpc>
+            </a:pPr>
+            <a:r>
+              <a:rPr sz="1350" b="0" i="0">
+                <a:solidFill>
+                  <a:srgbClr val="3A4A4C"/>
+                </a:solidFill>
+                <a:latin typeface="Segoe UI"/>
+              </a:rPr>
+              <a:t>Every model frozen; adaptation carried entirely by a sentence — which is what makes the claim identifiable.</a:t>
+            </a:r>
+          </a:p>
+        </p:txBody>
+      </p:sp>
+      <p:sp>
+        <p:nvSpPr>
+          <p:cNvPr id="15" name="Rectangle 14"/>
+          <p:cNvSpPr/>
+          <p:nvPr/>
+        </p:nvSpPr>
+        <p:spPr>
+          <a:xfrm>
+            <a:off x="777240" y="3429000"/>
+            <a:ext cx="10637215" cy="786384"/>
+          </a:xfrm>
+          <a:prstGeom prst="rect">
+            <a:avLst/>
+          </a:prstGeom>
+          <a:solidFill>
+            <a:srgbClr val="F5F7F7"/>
+          </a:solidFill>
+          <a:ln>
+            <a:noFill/>
+          </a:ln>
+          <a:effectLst/>
+        </p:spPr>
+        <p:style>
+          <a:lnRef idx="1">
+            <a:schemeClr val="accent1"/>
+          </a:lnRef>
+          <a:fillRef idx="3">
+            <a:schemeClr val="accent1"/>
+          </a:fillRef>
+          <a:effectRef idx="2">
+            <a:schemeClr val="accent1"/>
+          </a:effectRef>
+          <a:fontRef idx="minor">
+            <a:schemeClr val="lt1"/>
+          </a:fontRef>
+        </p:style>
+        <p:txBody>
+          <a:bodyPr rtlCol="0" anchor="ctr"/>
+          <a:lstStyle/>
+          <a:p>
+            <a:pPr algn="ctr"/>
+          </a:p>
+        </p:txBody>
+      </p:sp>
+      <p:sp>
+        <p:nvSpPr>
+          <p:cNvPr id="16" name="TextBox 15"/>
+          <p:cNvSpPr txBox="1"/>
+          <p:nvPr/>
+        </p:nvSpPr>
+        <p:spPr>
+          <a:xfrm>
+            <a:off x="1051560" y="3648456"/>
+            <a:ext cx="457200" cy="365760"/>
+          </a:xfrm>
+          <a:prstGeom prst="rect">
+            <a:avLst/>
+          </a:prstGeom>
+          <a:noFill/>
+        </p:spPr>
+        <p:txBody>
+          <a:bodyPr wrap="square" lIns="0" rIns="0" tIns="0" bIns="0">
+            <a:spAutoFit/>
+          </a:bodyPr>
+          <a:lstStyle/>
+          <a:p>
+            <a:pPr algn="l">
+              <a:lnSpc>
+                <a:spcPct val="100000"/>
+              </a:lnSpc>
+            </a:pPr>
+            <a:r>
+              <a:rPr sz="2200" b="1" i="0">
+                <a:solidFill>
+                  <a:srgbClr val="0D6B67"/>
+                </a:solidFill>
+                <a:latin typeface="Segoe UI"/>
+              </a:rPr>
+              <a:t>3</a:t>
+            </a:r>
+          </a:p>
+        </p:txBody>
+      </p:sp>
+      <p:sp>
+        <p:nvSpPr>
+          <p:cNvPr id="17" name="TextBox 16"/>
+          <p:cNvSpPr txBox="1"/>
+          <p:nvPr/>
+        </p:nvSpPr>
+        <p:spPr>
+          <a:xfrm>
+            <a:off x="1645919" y="3538728"/>
+            <a:ext cx="2286000" cy="274320"/>
+          </a:xfrm>
+          <a:prstGeom prst="rect">
+            <a:avLst/>
+          </a:prstGeom>
+          <a:noFill/>
+        </p:spPr>
+        <p:txBody>
+          <a:bodyPr wrap="square" lIns="0" rIns="0" tIns="0" bIns="0">
+            <a:spAutoFit/>
+          </a:bodyPr>
+          <a:lstStyle/>
+          <a:p>
+            <a:pPr algn="l">
+              <a:lnSpc>
+                <a:spcPct val="100000"/>
+              </a:lnSpc>
+            </a:pPr>
+            <a:r>
+              <a:rPr sz="1400" b="1" i="0">
+                <a:solidFill>
+                  <a:srgbClr val="141C1E"/>
+                </a:solidFill>
+                <a:latin typeface="Segoe UI"/>
+              </a:rPr>
+              <a:t>The result</a:t>
+            </a:r>
+          </a:p>
+        </p:txBody>
+      </p:sp>
+      <p:sp>
+        <p:nvSpPr>
+          <p:cNvPr id="18" name="TextBox 17"/>
+          <p:cNvSpPr txBox="1"/>
+          <p:nvPr/>
+        </p:nvSpPr>
+        <p:spPr>
+          <a:xfrm>
+            <a:off x="1645919" y="3813048"/>
+            <a:ext cx="9509760" cy="365760"/>
+          </a:xfrm>
+          <a:prstGeom prst="rect">
+            <a:avLst/>
+          </a:prstGeom>
+          <a:noFill/>
+        </p:spPr>
+        <p:txBody>
+          <a:bodyPr wrap="square" lIns="0" rIns="0" tIns="0" bIns="0">
+            <a:spAutoFit/>
+          </a:bodyPr>
+          <a:lstStyle/>
+          <a:p>
+            <a:pPr algn="l">
+              <a:lnSpc>
+                <a:spcPct val="120000"/>
+              </a:lnSpc>
+            </a:pPr>
+            <a:r>
+              <a:rPr sz="1350" b="0" i="0">
+                <a:solidFill>
+                  <a:srgbClr val="3A4A4C"/>
+                </a:solidFill>
+                <a:latin typeface="Segoe UI"/>
+              </a:rPr>
+              <a:t>0.734 AUROC on ShanghaiTech with no training, and a wrong description costs 0.105 — evidence the text is load-bearing.</a:t>
+            </a:r>
+          </a:p>
+        </p:txBody>
+      </p:sp>
+      <p:sp>
+        <p:nvSpPr>
+          <p:cNvPr id="19" name="Rectangle 18"/>
+          <p:cNvSpPr/>
+          <p:nvPr/>
+        </p:nvSpPr>
+        <p:spPr>
+          <a:xfrm>
+            <a:off x="777240" y="4251960"/>
+            <a:ext cx="10637215" cy="786384"/>
+          </a:xfrm>
+          <a:prstGeom prst="rect">
+            <a:avLst/>
+          </a:prstGeom>
+          <a:solidFill>
+            <a:srgbClr val="FFFFFF"/>
+          </a:solidFill>
+          <a:ln>
+            <a:noFill/>
+          </a:ln>
+          <a:effectLst/>
+        </p:spPr>
+        <p:style>
+          <a:lnRef idx="1">
+            <a:schemeClr val="accent1"/>
+          </a:lnRef>
+          <a:fillRef idx="3">
+            <a:schemeClr val="accent1"/>
+          </a:fillRef>
+          <a:effectRef idx="2">
+            <a:schemeClr val="accent1"/>
+          </a:effectRef>
+          <a:fontRef idx="minor">
+            <a:schemeClr val="lt1"/>
+          </a:fontRef>
+        </p:style>
+        <p:txBody>
+          <a:bodyPr rtlCol="0" anchor="ctr"/>
+          <a:lstStyle/>
+          <a:p>
+            <a:pPr algn="ctr"/>
+          </a:p>
+        </p:txBody>
+      </p:sp>
+      <p:sp>
+        <p:nvSpPr>
+          <p:cNvPr id="20" name="TextBox 19"/>
+          <p:cNvSpPr txBox="1"/>
+          <p:nvPr/>
+        </p:nvSpPr>
+        <p:spPr>
+          <a:xfrm>
+            <a:off x="1051560" y="4471416"/>
+            <a:ext cx="457200" cy="365760"/>
+          </a:xfrm>
+          <a:prstGeom prst="rect">
+            <a:avLst/>
+          </a:prstGeom>
+          <a:noFill/>
+        </p:spPr>
+        <p:txBody>
+          <a:bodyPr wrap="square" lIns="0" rIns="0" tIns="0" bIns="0">
+            <a:spAutoFit/>
+          </a:bodyPr>
+          <a:lstStyle/>
+          <a:p>
+            <a:pPr algn="l">
+              <a:lnSpc>
+                <a:spcPct val="100000"/>
+              </a:lnSpc>
+            </a:pPr>
+            <a:r>
+              <a:rPr sz="2200" b="1" i="0">
+                <a:solidFill>
+                  <a:srgbClr val="0D6B67"/>
+                </a:solidFill>
+                <a:latin typeface="Segoe UI"/>
+              </a:rPr>
+              <a:t>4</a:t>
+            </a:r>
+          </a:p>
+        </p:txBody>
+      </p:sp>
+      <p:sp>
+        <p:nvSpPr>
+          <p:cNvPr id="21" name="TextBox 20"/>
+          <p:cNvSpPr txBox="1"/>
+          <p:nvPr/>
+        </p:nvSpPr>
+        <p:spPr>
+          <a:xfrm>
+            <a:off x="1645919" y="4361688"/>
+            <a:ext cx="2286000" cy="274320"/>
+          </a:xfrm>
+          <a:prstGeom prst="rect">
+            <a:avLst/>
+          </a:prstGeom>
+          <a:noFill/>
+        </p:spPr>
+        <p:txBody>
+          <a:bodyPr wrap="square" lIns="0" rIns="0" tIns="0" bIns="0">
+            <a:spAutoFit/>
+          </a:bodyPr>
+          <a:lstStyle/>
+          <a:p>
+            <a:pPr algn="l">
+              <a:lnSpc>
+                <a:spcPct val="100000"/>
+              </a:lnSpc>
+            </a:pPr>
+            <a:r>
+              <a:rPr sz="1400" b="1" i="0">
+                <a:solidFill>
+                  <a:srgbClr val="141C1E"/>
+                </a:solidFill>
+                <a:latin typeface="Segoe UI"/>
+              </a:rPr>
+              <a:t>The finding</a:t>
+            </a:r>
+          </a:p>
+        </p:txBody>
+      </p:sp>
+      <p:sp>
+        <p:nvSpPr>
+          <p:cNvPr id="22" name="TextBox 21"/>
+          <p:cNvSpPr txBox="1"/>
+          <p:nvPr/>
+        </p:nvSpPr>
+        <p:spPr>
+          <a:xfrm>
+            <a:off x="1645919" y="4636008"/>
+            <a:ext cx="9509760" cy="365760"/>
+          </a:xfrm>
+          <a:prstGeom prst="rect">
+            <a:avLst/>
+          </a:prstGeom>
+          <a:noFill/>
+        </p:spPr>
+        <p:txBody>
+          <a:bodyPr wrap="square" lIns="0" rIns="0" tIns="0" bIns="0">
+            <a:spAutoFit/>
+          </a:bodyPr>
+          <a:lstStyle/>
+          <a:p>
+            <a:pPr algn="l">
+              <a:lnSpc>
+                <a:spcPct val="120000"/>
+              </a:lnSpc>
+            </a:pPr>
+            <a:r>
+              <a:rPr sz="1350" b="0" i="0">
+                <a:solidFill>
+                  <a:srgbClr val="3A4A4C"/>
+                </a:solidFill>
+                <a:latin typeface="Segoe UI"/>
+              </a:rPr>
+              <a:t>Where the description is injected dominates what it says, to the point of reversing the effect. Not in the literature.</a:t>
+            </a:r>
+          </a:p>
+        </p:txBody>
+      </p:sp>
+      <p:sp>
+        <p:nvSpPr>
+          <p:cNvPr id="23" name="Rectangle 22"/>
+          <p:cNvSpPr/>
+          <p:nvPr/>
+        </p:nvSpPr>
+        <p:spPr>
+          <a:xfrm>
+            <a:off x="777240" y="5074920"/>
+            <a:ext cx="10637215" cy="786384"/>
+          </a:xfrm>
+          <a:prstGeom prst="rect">
+            <a:avLst/>
+          </a:prstGeom>
+          <a:solidFill>
+            <a:srgbClr val="F5F7F7"/>
+          </a:solidFill>
+          <a:ln>
+            <a:noFill/>
+          </a:ln>
+          <a:effectLst/>
+        </p:spPr>
+        <p:style>
+          <a:lnRef idx="1">
+            <a:schemeClr val="accent1"/>
+          </a:lnRef>
+          <a:fillRef idx="3">
+            <a:schemeClr val="accent1"/>
+          </a:fillRef>
+          <a:effectRef idx="2">
+            <a:schemeClr val="accent1"/>
+          </a:effectRef>
+          <a:fontRef idx="minor">
+            <a:schemeClr val="lt1"/>
+          </a:fontRef>
+        </p:style>
+        <p:txBody>
+          <a:bodyPr rtlCol="0" anchor="ctr"/>
+          <a:lstStyle/>
+          <a:p>
+            <a:pPr algn="ctr"/>
+          </a:p>
+        </p:txBody>
+      </p:sp>
+      <p:sp>
+        <p:nvSpPr>
+          <p:cNvPr id="24" name="TextBox 23"/>
+          <p:cNvSpPr txBox="1"/>
+          <p:nvPr/>
+        </p:nvSpPr>
+        <p:spPr>
+          <a:xfrm>
+            <a:off x="1051560" y="5294376"/>
+            <a:ext cx="457200" cy="365760"/>
+          </a:xfrm>
+          <a:prstGeom prst="rect">
+            <a:avLst/>
+          </a:prstGeom>
+          <a:noFill/>
+        </p:spPr>
+        <p:txBody>
+          <a:bodyPr wrap="square" lIns="0" rIns="0" tIns="0" bIns="0">
+            <a:spAutoFit/>
+          </a:bodyPr>
+          <a:lstStyle/>
+          <a:p>
+            <a:pPr algn="l">
+              <a:lnSpc>
+                <a:spcPct val="100000"/>
+              </a:lnSpc>
+            </a:pPr>
+            <a:r>
+              <a:rPr sz="2200" b="1" i="0">
+                <a:solidFill>
+                  <a:srgbClr val="0D6B67"/>
+                </a:solidFill>
+                <a:latin typeface="Segoe UI"/>
+              </a:rPr>
+              <a:t>5</a:t>
+            </a:r>
+          </a:p>
+        </p:txBody>
+      </p:sp>
+      <p:sp>
+        <p:nvSpPr>
+          <p:cNvPr id="25" name="TextBox 24"/>
+          <p:cNvSpPr txBox="1"/>
+          <p:nvPr/>
+        </p:nvSpPr>
+        <p:spPr>
+          <a:xfrm>
+            <a:off x="1645919" y="5184648"/>
+            <a:ext cx="2286000" cy="274320"/>
+          </a:xfrm>
+          <a:prstGeom prst="rect">
+            <a:avLst/>
+          </a:prstGeom>
+          <a:noFill/>
+        </p:spPr>
+        <p:txBody>
+          <a:bodyPr wrap="square" lIns="0" rIns="0" tIns="0" bIns="0">
+            <a:spAutoFit/>
+          </a:bodyPr>
+          <a:lstStyle/>
+          <a:p>
+            <a:pPr algn="l">
+              <a:lnSpc>
+                <a:spcPct val="100000"/>
+              </a:lnSpc>
+            </a:pPr>
+            <a:r>
+              <a:rPr sz="1400" b="1" i="0">
+                <a:solidFill>
+                  <a:srgbClr val="141C1E"/>
+                </a:solidFill>
+                <a:latin typeface="Segoe UI"/>
+              </a:rPr>
+              <a:t>The boundary</a:t>
+            </a:r>
+          </a:p>
+        </p:txBody>
+      </p:sp>
+      <p:sp>
+        <p:nvSpPr>
+          <p:cNvPr id="26" name="TextBox 25"/>
+          <p:cNvSpPr txBox="1"/>
+          <p:nvPr/>
+        </p:nvSpPr>
+        <p:spPr>
+          <a:xfrm>
+            <a:off x="1645919" y="5458968"/>
+            <a:ext cx="9509760" cy="365760"/>
+          </a:xfrm>
+          <a:prstGeom prst="rect">
+            <a:avLst/>
+          </a:prstGeom>
+          <a:noFill/>
+        </p:spPr>
+        <p:txBody>
+          <a:bodyPr wrap="square" lIns="0" rIns="0" tIns="0" bIns="0">
+            <a:spAutoFit/>
+          </a:bodyPr>
+          <a:lstStyle/>
+          <a:p>
+            <a:pPr algn="l">
+              <a:lnSpc>
+                <a:spcPct val="120000"/>
+              </a:lnSpc>
+            </a:pPr>
+            <a:r>
+              <a:rPr sz="1350" b="0" i="0">
+                <a:solidFill>
+                  <a:srgbClr val="3A4A4C"/>
+                </a:solidFill>
+                <a:latin typeface="Segoe UI"/>
+              </a:rPr>
+              <a:t>It does not replicate on a single-scene benchmark. The claim is scoped, not abandoned — and we named the test that settles it.</a:t>
+            </a:r>
+          </a:p>
+        </p:txBody>
+      </p:sp>
+      <p:sp>
+        <p:nvSpPr>
+          <p:cNvPr id="27" name="TextBox 26"/>
+          <p:cNvSpPr txBox="1"/>
+          <p:nvPr/>
+        </p:nvSpPr>
+        <p:spPr>
+          <a:xfrm>
+            <a:off x="777240" y="6172200"/>
+            <a:ext cx="10637215" cy="320040"/>
+          </a:xfrm>
+          <a:prstGeom prst="rect">
+            <a:avLst/>
+          </a:prstGeom>
+          <a:noFill/>
+        </p:spPr>
+        <p:txBody>
+          <a:bodyPr wrap="square" lIns="0" rIns="0" tIns="0" bIns="0">
+            <a:spAutoFit/>
+          </a:bodyPr>
+          <a:lstStyle/>
+          <a:p>
+            <a:pPr algn="ctr">
+              <a:lnSpc>
+                <a:spcPct val="100000"/>
+              </a:lnSpc>
+            </a:pPr>
+            <a:r>
+              <a:rPr sz="1300" b="0" i="1">
+                <a:solidFill>
+                  <a:srgbClr val="617274"/>
+                </a:solidFill>
+                <a:latin typeface="Segoe UI"/>
+              </a:rPr>
+              <a:t>All results reproducible from committed code and run manifests.</a:t>
             </a:r>
           </a:p>
         </p:txBody>
@@ -15612,13 +17136,13 @@
               </a:lnSpc>
             </a:pPr>
             <a:r>
-              <a:rPr sz="1500" b="0" i="0">
+              <a:rPr sz="1450" b="0" i="0">
                 <a:solidFill>
                   <a:srgbClr val="141C1E"/>
                 </a:solidFill>
                 <a:latin typeface="Segoe UI"/>
               </a:rPr>
-              <a:t>Methods that align appearance cannot help here — the appearance is already identical. Two domains can share p(x) exactly while the labelling function differs. No existing work characterises video anomaly detection in these terms.</a:t>
+              <a:t>Methods that align appearance cannot help here — the appearance is already identical. Two domains can share p(x) exactly while the labelling function differs. A 2026 position paper argues the same premise independently; what is missing is a test of whether supplied context does any work.</a:t>
             </a:r>
           </a:p>
         </p:txBody>
@@ -17103,7 +18627,7 @@
                 </a:solidFill>
                 <a:latin typeface="Segoe UI"/>
               </a:rPr>
-              <a:t>This is what makes the adaptation claim testable rather than asserted. Methods that update weights cannot isolate the contribution of a contextual input, because weights and context move together.</a:t>
+              <a:t>This is what makes the adaptation claim testable rather than asserted. You cannot run our central experiment on the competing systems — their text is learned on source data, or entangled in an LLM prior, or accompanied by a trained adapter.</a:t>
             </a:r>
           </a:p>
         </p:txBody>
@@ -18216,7 +19740,7 @@
                           </a:solidFill>
                           <a:latin typeface="Segoe UI"/>
                         </a:rPr>
-                        <a:t>Benchmark</a:t>
+                        <a:t>Benchmarks</a:t>
                       </a:r>
                     </a:p>
                   </a:txBody>
@@ -18239,7 +19763,7 @@
                           </a:solidFill>
                           <a:latin typeface="Segoe UI"/>
                         </a:rPr>
-                        <a:t>ShanghaiTech — campus CCTV, 13 camera views</a:t>
+                        <a:t>ShanghaiTech (13 views) and CUHK Avenue (1 view)</a:t>
                       </a:r>
                     </a:p>
                   </a:txBody>
@@ -18287,7 +19811,7 @@
                           </a:solidFill>
                           <a:latin typeface="Segoe UI"/>
                         </a:rPr>
-                        <a:t>107 test clips · 40,791 frames · frame-level ground truth</a:t>
+                        <a:t>128 test clips · 28,118 frames · frame-level ground truth</a:t>
                       </a:r>
                     </a:p>
                   </a:txBody>
@@ -18431,7 +19955,7 @@
                           </a:solidFill>
                           <a:latin typeface="Segoe UI"/>
                         </a:rPr>
-                        <a:t>3 full experiment runs + cached-embedding analysis</a:t>
+                        <a:t>5 full experiment runs + cached-embedding analysis</a:t>
                       </a:r>
                     </a:p>
                   </a:txBody>
@@ -19233,7 +20757,7 @@
                           </a:solidFill>
                           <a:latin typeface="Segoe UI"/>
                         </a:rPr>
-                        <a:t>WORST — 0.637</a:t>
+                        <a:t>WORST — 0.666</a:t>
                       </a:r>
                     </a:p>
                   </a:txBody>
@@ -19304,7 +20828,7 @@
                           </a:solidFill>
                           <a:latin typeface="Segoe UI"/>
                         </a:rPr>
-                        <a:t>Among the best — 0.678</a:t>
+                        <a:t>Among the best — 0.695</a:t>
                       </a:r>
                     </a:p>
                   </a:txBody>

--- a/docs/06_presentations/DA-ZVAD_Phase2_Review.pptx
+++ b/docs/06_presentations/DA-ZVAD_Phase2_Review.pptx
@@ -25,6 +25,7 @@
     <p:sldId id="273" r:id="rId24"/>
     <p:sldId id="274" r:id="rId25"/>
     <p:sldId id="275" r:id="rId26"/>
+    <p:sldId id="276" r:id="rId27"/>
   </p:sldIdLst>
   <p:sldSz cx="12191695" cy="6858000" type="screen4x3"/>
   <p:notesSz cx="6858000" cy="9144000"/>
@@ -1011,7 +1012,7 @@
           <a:lstStyle/>
           <a:p>
             <a:r>
-              <a:t>Say why you are showing failures: the claim is that the minimal configuration is right, and that is only credible next to what was tried. If the panel suspects generated work, this slide is your best answer.</a:t>
+              <a:t>This is the slide that shows a full cycle: we saw something odd, formed an explanation, designed a test that could have killed it, ran it, and it held. Say out loud that a gap near +0.105 here would have refuted us. Then give the caveat yourself - three of nine views are negative, so within one scene the effect is not reliable.</a:t>
             </a:r>
           </a:p>
         </p:txBody>
@@ -1081,7 +1082,7 @@
           <a:lstStyle/>
           <a:p>
             <a:r>
-              <a:t>Anchor on the trained baseline, not on LAVAD. You match the benchmark's own 2018 baseline using none of its training data. Then concede LAVAD openly.</a:t>
+              <a:t>Say why you are showing failures: the claim is that the minimal configuration is right, and that is only credible next to what was tried. If the panel suspects generated work, this slide is your best answer.</a:t>
             </a:r>
           </a:p>
         </p:txBody>
@@ -1151,7 +1152,7 @@
           <a:lstStyle/>
           <a:p>
             <a:r>
-              <a:t>Deliver these confidently rather than apologetically. The metric limitation is worth dwelling on - it is a real methodological point about a protocol the whole field uses, and we found it by chasing our own bug.</a:t>
+              <a:t>Anchor on the trained baseline, not on LAVAD. You match the benchmark's own 2018 baseline using none of its training data. Then concede LAVAD openly.</a:t>
             </a:r>
           </a:p>
         </p:txBody>
@@ -1221,7 +1222,7 @@
           <a:lstStyle/>
           <a:p>
             <a:r>
-              <a:t>Priority one is the within-view control because it turns our explanation from a conjecture into a result. Note the infrastructure cost is now paid.</a:t>
+              <a:t>Deliver these confidently rather than apologetically. The metric limitation is worth dwelling on - it is a real methodological point about a protocol the whole field uses, and we found it by chasing our own bug.</a:t>
             </a:r>
           </a:p>
         </p:txBody>
@@ -1317,6 +1318,76 @@
 </file>
 
 <file path=ppt/notesSlides/notesSlide20.xml><?xml version="1.0" encoding="utf-8"?>
+<p:notes xmlns:a="http://schemas.openxmlformats.org/drawingml/2006/main" xmlns:p="http://schemas.openxmlformats.org/presentationml/2006/main" xmlns:r="http://schemas.openxmlformats.org/officeDocument/2006/relationships">
+  <p:cSld>
+    <p:spTree>
+      <p:nvGrpSpPr>
+        <p:cNvPr id="1" name=""/>
+        <p:cNvGrpSpPr/>
+        <p:nvPr/>
+      </p:nvGrpSpPr>
+      <p:grpSpPr>
+        <a:xfrm>
+          <a:off x="0" y="0"/>
+          <a:ext cx="0" cy="0"/>
+          <a:chOff x="0" y="0"/>
+          <a:chExt cx="0" cy="0"/>
+        </a:xfrm>
+      </p:grpSpPr>
+      <p:sp>
+        <p:nvSpPr>
+          <p:cNvPr id="2" name="Slide Image Placeholder 1"/>
+          <p:cNvSpPr>
+            <a:spLocks noGrp="1"/>
+          </p:cNvSpPr>
+          <p:nvPr>
+            <p:ph type="sldImg" idx="2"/>
+          </p:nvPr>
+        </p:nvSpPr>
+        <p:spPr/>
+      </p:sp>
+      <p:sp>
+        <p:nvSpPr>
+          <p:cNvPr id="3" name="Notes Placeholder 2"/>
+          <p:cNvSpPr>
+            <a:spLocks noGrp="1"/>
+          </p:cNvSpPr>
+          <p:nvPr>
+            <p:ph type="body" idx="3" sz="quarter"/>
+          </p:nvPr>
+        </p:nvSpPr>
+        <p:spPr/>
+        <p:txBody>
+          <a:bodyPr/>
+          <a:lstStyle/>
+          <a:p>
+            <a:r>
+              <a:t>Priority one is the within-view control because it turns our explanation from a conjecture into a result. Note the infrastructure cost is now paid.</a:t>
+            </a:r>
+          </a:p>
+        </p:txBody>
+      </p:sp>
+      <p:sp>
+        <p:nvSpPr>
+          <p:cNvPr id="4" name="Slide Number Placeholder 3"/>
+          <p:cNvSpPr>
+            <a:spLocks noGrp="1"/>
+          </p:cNvSpPr>
+          <p:nvPr>
+            <p:ph type="sldNum" idx="5" sz="quarter"/>
+          </p:nvPr>
+        </p:nvSpPr>
+        <p:spPr/>
+      </p:sp>
+    </p:spTree>
+  </p:cSld>
+  <p:clrMapOvr>
+    <a:masterClrMapping/>
+  </p:clrMapOvr>
+</p:notes>
+</file>
+
+<file path=ppt/notesSlides/notesSlide21.xml><?xml version="1.0" encoding="utf-8"?>
 <p:notes xmlns:a="http://schemas.openxmlformats.org/drawingml/2006/main" xmlns:p="http://schemas.openxmlformats.org/presentationml/2006/main" xmlns:r="http://schemas.openxmlformats.org/officeDocument/2006/relationships">
   <p:cSld>
     <p:spTree>
@@ -10857,7 +10928,7 @@
                 </a:solidFill>
                 <a:latin typeface="Segoe UI"/>
               </a:rPr>
-              <a:t>RESULTS  ·  NEGATIVE FINDINGS</a:t>
+              <a:t>RESULTS  ·  THE CONTROL</a:t>
             </a:r>
           </a:p>
         </p:txBody>
@@ -10896,7 +10967,7 @@
                 </a:solidFill>
                 <a:latin typeface="Segoe UI"/>
               </a:rPr>
-              <a:t>Six things that did not work</a:t>
+              <a:t>We tested that explanation, and it held</a:t>
             </a:r>
           </a:p>
         </p:txBody>
@@ -10980,6 +11051,877 @@
                 <a:latin typeface="Segoe UI"/>
               </a:rPr>
               <a:t>15</a:t>
+            </a:r>
+          </a:p>
+        </p:txBody>
+      </p:sp>
+      <p:sp>
+        <p:nvSpPr>
+          <p:cNvPr id="7" name="TextBox 6"/>
+          <p:cNvSpPr txBox="1"/>
+          <p:nvPr/>
+        </p:nvSpPr>
+        <p:spPr>
+          <a:xfrm>
+            <a:off x="777240" y="1737360"/>
+            <a:ext cx="10637215" cy="640080"/>
+          </a:xfrm>
+          <a:prstGeom prst="rect">
+            <a:avLst/>
+          </a:prstGeom>
+          <a:noFill/>
+        </p:spPr>
+        <p:txBody>
+          <a:bodyPr wrap="square" lIns="0" rIns="0" tIns="0" bIns="0">
+            <a:spAutoFit/>
+          </a:bodyPr>
+          <a:lstStyle/>
+          <a:p>
+            <a:pPr algn="l">
+              <a:lnSpc>
+                <a:spcPct val="130000"/>
+              </a:lnSpc>
+            </a:pPr>
+            <a:r>
+              <a:rPr sz="1550" b="0" i="0">
+                <a:solidFill>
+                  <a:srgbClr val="3A4A4C"/>
+                </a:solidFill>
+                <a:latin typeface="Segoe UI"/>
+              </a:rPr>
+              <a:t>ShanghaiTech is thirteen single-view datasets stacked together. If the descriptor works by telling the model WHICH scene it is in, then confining the sweep to one camera view should reproduce Avenue's flat result.</a:t>
+            </a:r>
+          </a:p>
+        </p:txBody>
+      </p:sp>
+      <p:graphicFrame>
+        <p:nvGraphicFramePr>
+          <p:cNvPr id="8" name="Table 7"/>
+          <p:cNvGraphicFramePr>
+            <a:graphicFrameLocks noGrp="1"/>
+          </p:cNvGraphicFramePr>
+          <p:nvPr/>
+        </p:nvGraphicFramePr>
+        <p:xfrm>
+          <a:off x="777240" y="2606040"/>
+          <a:ext cx="10634472" cy="2048256"/>
+        </p:xfrm>
+        <a:graphic>
+          <a:graphicData uri="http://schemas.openxmlformats.org/drawingml/2006/table">
+            <a:tbl>
+              <a:tblPr firstRow="1">
+                <a:tableStyleId>{5C22544A-7EE6-4342-B048-85BDC9FD1C3A}</a:tableStyleId>
+              </a:tblPr>
+              <a:tblGrid>
+                <a:gridCol w="5120640"/>
+                <a:gridCol w="1737360"/>
+                <a:gridCol w="2103120"/>
+                <a:gridCol w="1673352"/>
+              </a:tblGrid>
+              <a:tr h="512064">
+                <a:tc>
+                  <a:txBody>
+                    <a:bodyPr wrap="square"/>
+                    <a:lstStyle/>
+                    <a:p>
+                      <a:pPr algn="l"/>
+                      <a:r>
+                        <a:rPr sz="1500" b="1">
+                          <a:solidFill>
+                            <a:srgbClr val="FFFFFF"/>
+                          </a:solidFill>
+                          <a:latin typeface="Segoe UI"/>
+                        </a:rPr>
+                        <a:t>Evaluation</a:t>
+                      </a:r>
+                    </a:p>
+                  </a:txBody>
+                  <a:tcPr marL="128016" marR="128016" marT="45720" marB="45720" anchor="ctr">
+                    <a:solidFill>
+                      <a:srgbClr val="141C1E"/>
+                    </a:solidFill>
+                  </a:tcPr>
+                </a:tc>
+                <a:tc>
+                  <a:txBody>
+                    <a:bodyPr wrap="square"/>
+                    <a:lstStyle/>
+                    <a:p>
+                      <a:pPr algn="l"/>
+                      <a:r>
+                        <a:rPr sz="1500" b="1">
+                          <a:solidFill>
+                            <a:srgbClr val="FFFFFF"/>
+                          </a:solidFill>
+                          <a:latin typeface="Segoe UI"/>
+                        </a:rPr>
+                        <a:t>Views</a:t>
+                      </a:r>
+                    </a:p>
+                  </a:txBody>
+                  <a:tcPr marL="128016" marR="128016" marT="45720" marB="45720" anchor="ctr">
+                    <a:solidFill>
+                      <a:srgbClr val="141C1E"/>
+                    </a:solidFill>
+                  </a:tcPr>
+                </a:tc>
+                <a:tc>
+                  <a:txBody>
+                    <a:bodyPr wrap="square"/>
+                    <a:lstStyle/>
+                    <a:p>
+                      <a:pPr algn="l"/>
+                      <a:r>
+                        <a:rPr sz="1500" b="1">
+                          <a:solidFill>
+                            <a:srgbClr val="FFFFFF"/>
+                          </a:solidFill>
+                          <a:latin typeface="Segoe UI"/>
+                        </a:rPr>
+                        <a:t>Clips</a:t>
+                      </a:r>
+                    </a:p>
+                  </a:txBody>
+                  <a:tcPr marL="128016" marR="128016" marT="45720" marB="45720" anchor="ctr">
+                    <a:solidFill>
+                      <a:srgbClr val="141C1E"/>
+                    </a:solidFill>
+                  </a:tcPr>
+                </a:tc>
+                <a:tc>
+                  <a:txBody>
+                    <a:bodyPr wrap="square"/>
+                    <a:lstStyle/>
+                    <a:p>
+                      <a:pPr algn="r"/>
+                      <a:r>
+                        <a:rPr sz="1500" b="1">
+                          <a:solidFill>
+                            <a:srgbClr val="FFFFFF"/>
+                          </a:solidFill>
+                          <a:latin typeface="Segoe UI"/>
+                        </a:rPr>
+                        <a:t>Gap</a:t>
+                      </a:r>
+                    </a:p>
+                  </a:txBody>
+                  <a:tcPr marL="128016" marR="128016" marT="45720" marB="45720" anchor="ctr">
+                    <a:solidFill>
+                      <a:srgbClr val="141C1E"/>
+                    </a:solidFill>
+                  </a:tcPr>
+                </a:tc>
+              </a:tr>
+              <a:tr h="512064">
+                <a:tc>
+                  <a:txBody>
+                    <a:bodyPr wrap="square"/>
+                    <a:lstStyle/>
+                    <a:p>
+                      <a:pPr algn="l"/>
+                      <a:r>
+                        <a:rPr sz="1500" b="0">
+                          <a:solidFill>
+                            <a:srgbClr val="141C1E"/>
+                          </a:solidFill>
+                          <a:latin typeface="Segoe UI"/>
+                        </a:rPr>
+                        <a:t>Pooled across views</a:t>
+                      </a:r>
+                    </a:p>
+                  </a:txBody>
+                  <a:tcPr marL="128016" marR="128016" marT="45720" marB="45720" anchor="ctr">
+                    <a:solidFill>
+                      <a:srgbClr val="FFFFFF"/>
+                    </a:solidFill>
+                  </a:tcPr>
+                </a:tc>
+                <a:tc>
+                  <a:txBody>
+                    <a:bodyPr wrap="square"/>
+                    <a:lstStyle/>
+                    <a:p>
+                      <a:pPr algn="l"/>
+                      <a:r>
+                        <a:rPr sz="1500" b="0">
+                          <a:solidFill>
+                            <a:srgbClr val="141C1E"/>
+                          </a:solidFill>
+                          <a:latin typeface="Segoe UI"/>
+                        </a:rPr>
+                        <a:t>13</a:t>
+                      </a:r>
+                    </a:p>
+                  </a:txBody>
+                  <a:tcPr marL="128016" marR="128016" marT="45720" marB="45720" anchor="ctr">
+                    <a:solidFill>
+                      <a:srgbClr val="FFFFFF"/>
+                    </a:solidFill>
+                  </a:tcPr>
+                </a:tc>
+                <a:tc>
+                  <a:txBody>
+                    <a:bodyPr wrap="square"/>
+                    <a:lstStyle/>
+                    <a:p>
+                      <a:pPr algn="l"/>
+                      <a:r>
+                        <a:rPr sz="1500" b="0">
+                          <a:solidFill>
+                            <a:srgbClr val="141C1E"/>
+                          </a:solidFill>
+                          <a:latin typeface="Segoe UI"/>
+                        </a:rPr>
+                        <a:t>107</a:t>
+                      </a:r>
+                    </a:p>
+                  </a:txBody>
+                  <a:tcPr marL="128016" marR="128016" marT="45720" marB="45720" anchor="ctr">
+                    <a:solidFill>
+                      <a:srgbClr val="FFFFFF"/>
+                    </a:solidFill>
+                  </a:tcPr>
+                </a:tc>
+                <a:tc>
+                  <a:txBody>
+                    <a:bodyPr wrap="square"/>
+                    <a:lstStyle/>
+                    <a:p>
+                      <a:pPr algn="r"/>
+                      <a:r>
+                        <a:rPr sz="1500" b="0">
+                          <a:solidFill>
+                            <a:srgbClr val="141C1E"/>
+                          </a:solidFill>
+                          <a:latin typeface="Consolas"/>
+                        </a:rPr>
+                        <a:t>+0.105</a:t>
+                      </a:r>
+                    </a:p>
+                  </a:txBody>
+                  <a:tcPr marL="128016" marR="128016" marT="45720" marB="45720" anchor="ctr">
+                    <a:solidFill>
+                      <a:srgbClr val="FFFFFF"/>
+                    </a:solidFill>
+                  </a:tcPr>
+                </a:tc>
+              </a:tr>
+              <a:tr h="512064">
+                <a:tc>
+                  <a:txBody>
+                    <a:bodyPr wrap="square"/>
+                    <a:lstStyle/>
+                    <a:p>
+                      <a:pPr algn="l"/>
+                      <a:r>
+                        <a:rPr sz="1500" b="1">
+                          <a:solidFill>
+                            <a:srgbClr val="141C1E"/>
+                          </a:solidFill>
+                          <a:latin typeface="Segoe UI"/>
+                        </a:rPr>
+                        <a:t>Within a single view (mean)</a:t>
+                      </a:r>
+                    </a:p>
+                  </a:txBody>
+                  <a:tcPr marL="128016" marR="128016" marT="45720" marB="45720" anchor="ctr">
+                    <a:solidFill>
+                      <a:srgbClr val="DDEDEB"/>
+                    </a:solidFill>
+                  </a:tcPr>
+                </a:tc>
+                <a:tc>
+                  <a:txBody>
+                    <a:bodyPr wrap="square"/>
+                    <a:lstStyle/>
+                    <a:p>
+                      <a:pPr algn="l"/>
+                      <a:r>
+                        <a:rPr sz="1500" b="1">
+                          <a:solidFill>
+                            <a:srgbClr val="141C1E"/>
+                          </a:solidFill>
+                          <a:latin typeface="Segoe UI"/>
+                        </a:rPr>
+                        <a:t>9</a:t>
+                      </a:r>
+                    </a:p>
+                  </a:txBody>
+                  <a:tcPr marL="128016" marR="128016" marT="45720" marB="45720" anchor="ctr">
+                    <a:solidFill>
+                      <a:srgbClr val="DDEDEB"/>
+                    </a:solidFill>
+                  </a:tcPr>
+                </a:tc>
+                <a:tc>
+                  <a:txBody>
+                    <a:bodyPr wrap="square"/>
+                    <a:lstStyle/>
+                    <a:p>
+                      <a:pPr algn="l"/>
+                      <a:r>
+                        <a:rPr sz="1500" b="1">
+                          <a:solidFill>
+                            <a:srgbClr val="141C1E"/>
+                          </a:solidFill>
+                          <a:latin typeface="Segoe UI"/>
+                        </a:rPr>
+                        <a:t>5–34 each</a:t>
+                      </a:r>
+                    </a:p>
+                  </a:txBody>
+                  <a:tcPr marL="128016" marR="128016" marT="45720" marB="45720" anchor="ctr">
+                    <a:solidFill>
+                      <a:srgbClr val="DDEDEB"/>
+                    </a:solidFill>
+                  </a:tcPr>
+                </a:tc>
+                <a:tc>
+                  <a:txBody>
+                    <a:bodyPr wrap="square"/>
+                    <a:lstStyle/>
+                    <a:p>
+                      <a:pPr algn="r"/>
+                      <a:r>
+                        <a:rPr sz="1500" b="1">
+                          <a:solidFill>
+                            <a:srgbClr val="141C1E"/>
+                          </a:solidFill>
+                          <a:latin typeface="Consolas"/>
+                        </a:rPr>
+                        <a:t>+0.034</a:t>
+                      </a:r>
+                    </a:p>
+                  </a:txBody>
+                  <a:tcPr marL="128016" marR="128016" marT="45720" marB="45720" anchor="ctr">
+                    <a:solidFill>
+                      <a:srgbClr val="DDEDEB"/>
+                    </a:solidFill>
+                  </a:tcPr>
+                </a:tc>
+              </a:tr>
+              <a:tr h="512064">
+                <a:tc>
+                  <a:txBody>
+                    <a:bodyPr wrap="square"/>
+                    <a:lstStyle/>
+                    <a:p>
+                      <a:pPr algn="l"/>
+                      <a:r>
+                        <a:rPr sz="1500" b="0">
+                          <a:solidFill>
+                            <a:srgbClr val="141C1E"/>
+                          </a:solidFill>
+                          <a:latin typeface="Segoe UI"/>
+                        </a:rPr>
+                        <a:t>CUHK Avenue (single view)</a:t>
+                      </a:r>
+                    </a:p>
+                  </a:txBody>
+                  <a:tcPr marL="128016" marR="128016" marT="45720" marB="45720" anchor="ctr">
+                    <a:solidFill>
+                      <a:srgbClr val="FFFFFF"/>
+                    </a:solidFill>
+                  </a:tcPr>
+                </a:tc>
+                <a:tc>
+                  <a:txBody>
+                    <a:bodyPr wrap="square"/>
+                    <a:lstStyle/>
+                    <a:p>
+                      <a:pPr algn="l"/>
+                      <a:r>
+                        <a:rPr sz="1500" b="0">
+                          <a:solidFill>
+                            <a:srgbClr val="141C1E"/>
+                          </a:solidFill>
+                          <a:latin typeface="Segoe UI"/>
+                        </a:rPr>
+                        <a:t>1</a:t>
+                      </a:r>
+                    </a:p>
+                  </a:txBody>
+                  <a:tcPr marL="128016" marR="128016" marT="45720" marB="45720" anchor="ctr">
+                    <a:solidFill>
+                      <a:srgbClr val="FFFFFF"/>
+                    </a:solidFill>
+                  </a:tcPr>
+                </a:tc>
+                <a:tc>
+                  <a:txBody>
+                    <a:bodyPr wrap="square"/>
+                    <a:lstStyle/>
+                    <a:p>
+                      <a:pPr algn="l"/>
+                      <a:r>
+                        <a:rPr sz="1500" b="0">
+                          <a:solidFill>
+                            <a:srgbClr val="141C1E"/>
+                          </a:solidFill>
+                          <a:latin typeface="Segoe UI"/>
+                        </a:rPr>
+                        <a:t>21</a:t>
+                      </a:r>
+                    </a:p>
+                  </a:txBody>
+                  <a:tcPr marL="128016" marR="128016" marT="45720" marB="45720" anchor="ctr">
+                    <a:solidFill>
+                      <a:srgbClr val="FFFFFF"/>
+                    </a:solidFill>
+                  </a:tcPr>
+                </a:tc>
+                <a:tc>
+                  <a:txBody>
+                    <a:bodyPr wrap="square"/>
+                    <a:lstStyle/>
+                    <a:p>
+                      <a:pPr algn="r"/>
+                      <a:r>
+                        <a:rPr sz="1500" b="0">
+                          <a:solidFill>
+                            <a:srgbClr val="141C1E"/>
+                          </a:solidFill>
+                          <a:latin typeface="Consolas"/>
+                        </a:rPr>
+                        <a:t>+0.020</a:t>
+                      </a:r>
+                    </a:p>
+                  </a:txBody>
+                  <a:tcPr marL="128016" marR="128016" marT="45720" marB="45720" anchor="ctr">
+                    <a:solidFill>
+                      <a:srgbClr val="FFFFFF"/>
+                    </a:solidFill>
+                  </a:tcPr>
+                </a:tc>
+              </a:tr>
+            </a:tbl>
+          </a:graphicData>
+        </a:graphic>
+      </p:graphicFrame>
+      <p:sp>
+        <p:nvSpPr>
+          <p:cNvPr id="9" name="Rectangle 8"/>
+          <p:cNvSpPr/>
+          <p:nvPr/>
+        </p:nvSpPr>
+        <p:spPr>
+          <a:xfrm>
+            <a:off x="777240" y="4480560"/>
+            <a:ext cx="10637215" cy="1051560"/>
+          </a:xfrm>
+          <a:prstGeom prst="rect">
+            <a:avLst/>
+          </a:prstGeom>
+          <a:solidFill>
+            <a:srgbClr val="DDEDEB"/>
+          </a:solidFill>
+          <a:ln>
+            <a:noFill/>
+          </a:ln>
+          <a:effectLst/>
+        </p:spPr>
+        <p:style>
+          <a:lnRef idx="1">
+            <a:schemeClr val="accent1"/>
+          </a:lnRef>
+          <a:fillRef idx="3">
+            <a:schemeClr val="accent1"/>
+          </a:fillRef>
+          <a:effectRef idx="2">
+            <a:schemeClr val="accent1"/>
+          </a:effectRef>
+          <a:fontRef idx="minor">
+            <a:schemeClr val="lt1"/>
+          </a:fontRef>
+        </p:style>
+        <p:txBody>
+          <a:bodyPr rtlCol="0" anchor="ctr"/>
+          <a:lstStyle/>
+          <a:p>
+            <a:pPr algn="ctr"/>
+          </a:p>
+        </p:txBody>
+      </p:sp>
+      <p:sp>
+        <p:nvSpPr>
+          <p:cNvPr id="10" name="Rectangle 9"/>
+          <p:cNvSpPr/>
+          <p:nvPr/>
+        </p:nvSpPr>
+        <p:spPr>
+          <a:xfrm>
+            <a:off x="777240" y="4480560"/>
+            <a:ext cx="45720" cy="1051560"/>
+          </a:xfrm>
+          <a:prstGeom prst="rect">
+            <a:avLst/>
+          </a:prstGeom>
+          <a:solidFill>
+            <a:srgbClr val="0D6B67"/>
+          </a:solidFill>
+          <a:ln>
+            <a:noFill/>
+          </a:ln>
+          <a:effectLst/>
+        </p:spPr>
+        <p:style>
+          <a:lnRef idx="1">
+            <a:schemeClr val="accent1"/>
+          </a:lnRef>
+          <a:fillRef idx="3">
+            <a:schemeClr val="accent1"/>
+          </a:fillRef>
+          <a:effectRef idx="2">
+            <a:schemeClr val="accent1"/>
+          </a:effectRef>
+          <a:fontRef idx="minor">
+            <a:schemeClr val="lt1"/>
+          </a:fontRef>
+        </p:style>
+        <p:txBody>
+          <a:bodyPr rtlCol="0" anchor="ctr"/>
+          <a:lstStyle/>
+          <a:p>
+            <a:pPr algn="ctr"/>
+          </a:p>
+        </p:txBody>
+      </p:sp>
+      <p:sp>
+        <p:nvSpPr>
+          <p:cNvPr id="11" name="TextBox 10"/>
+          <p:cNvSpPr txBox="1"/>
+          <p:nvPr/>
+        </p:nvSpPr>
+        <p:spPr>
+          <a:xfrm>
+            <a:off x="1033271" y="4626864"/>
+            <a:ext cx="10134295" cy="219456"/>
+          </a:xfrm>
+          <a:prstGeom prst="rect">
+            <a:avLst/>
+          </a:prstGeom>
+          <a:noFill/>
+        </p:spPr>
+        <p:txBody>
+          <a:bodyPr wrap="square" lIns="0" rIns="0" tIns="0" bIns="0">
+            <a:spAutoFit/>
+          </a:bodyPr>
+          <a:lstStyle/>
+          <a:p>
+            <a:pPr algn="l">
+              <a:lnSpc>
+                <a:spcPct val="100000"/>
+              </a:lnSpc>
+            </a:pPr>
+            <a:r>
+              <a:rPr sz="1050" b="1" i="0">
+                <a:solidFill>
+                  <a:srgbClr val="0D6B67"/>
+                </a:solidFill>
+                <a:latin typeface="Segoe UI"/>
+              </a:rPr>
+              <a:t>THE PREDICTION COULD HAVE FAILED</a:t>
+            </a:r>
+          </a:p>
+        </p:txBody>
+      </p:sp>
+      <p:sp>
+        <p:nvSpPr>
+          <p:cNvPr id="12" name="TextBox 11"/>
+          <p:cNvSpPr txBox="1"/>
+          <p:nvPr/>
+        </p:nvSpPr>
+        <p:spPr>
+          <a:xfrm>
+            <a:off x="1033271" y="4919472"/>
+            <a:ext cx="10134295" cy="484631"/>
+          </a:xfrm>
+          <a:prstGeom prst="rect">
+            <a:avLst/>
+          </a:prstGeom>
+          <a:noFill/>
+        </p:spPr>
+        <p:txBody>
+          <a:bodyPr wrap="square" lIns="0" rIns="0" tIns="0" bIns="0">
+            <a:spAutoFit/>
+          </a:bodyPr>
+          <a:lstStyle/>
+          <a:p>
+            <a:pPr algn="l">
+              <a:lnSpc>
+                <a:spcPct val="100000"/>
+              </a:lnSpc>
+            </a:pPr>
+            <a:r>
+              <a:rPr sz="1550" b="0" i="0">
+                <a:solidFill>
+                  <a:srgbClr val="141C1E"/>
+                </a:solidFill>
+                <a:latin typeface="Segoe UI"/>
+              </a:rPr>
+              <a:t>A within-view gap near +0.105 would have refuted the explanation outright. It came back at a third of that, next to Avenue's figure.</a:t>
+            </a:r>
+          </a:p>
+        </p:txBody>
+      </p:sp>
+      <p:sp>
+        <p:nvSpPr>
+          <p:cNvPr id="13" name="TextBox 12"/>
+          <p:cNvSpPr txBox="1"/>
+          <p:nvPr/>
+        </p:nvSpPr>
+        <p:spPr>
+          <a:xfrm>
+            <a:off x="777240" y="5715000"/>
+            <a:ext cx="10637215" cy="640080"/>
+          </a:xfrm>
+          <a:prstGeom prst="rect">
+            <a:avLst/>
+          </a:prstGeom>
+          <a:noFill/>
+        </p:spPr>
+        <p:txBody>
+          <a:bodyPr wrap="square" lIns="0" rIns="0" tIns="0" bIns="0">
+            <a:spAutoFit/>
+          </a:bodyPr>
+          <a:lstStyle/>
+          <a:p>
+            <a:pPr algn="l">
+              <a:lnSpc>
+                <a:spcPct val="130000"/>
+              </a:lnSpc>
+            </a:pPr>
+            <a:r>
+              <a:rPr sz="1550" b="1" i="0">
+                <a:solidFill>
+                  <a:srgbClr val="141C1E"/>
+                </a:solidFill>
+                <a:latin typeface="Segoe UI"/>
+              </a:rPr>
+              <a:t>What the sentence mainly supplies is WHICH scene you are in — not what counts as normal within it. Three of nine views show a negative gap, so inside one scene the effect is not reliable.</a:t>
+            </a:r>
+          </a:p>
+        </p:txBody>
+      </p:sp>
+    </p:spTree>
+  </p:cSld>
+  <p:clrMapOvr>
+    <a:masterClrMapping/>
+  </p:clrMapOvr>
+</p:sld>
+</file>
+
+<file path=ppt/slides/slide17.xml><?xml version="1.0" encoding="utf-8"?>
+<p:sld xmlns:a="http://schemas.openxmlformats.org/drawingml/2006/main" xmlns:p="http://schemas.openxmlformats.org/presentationml/2006/main" xmlns:r="http://schemas.openxmlformats.org/officeDocument/2006/relationships">
+  <p:cSld>
+    <p:spTree>
+      <p:nvGrpSpPr>
+        <p:cNvPr id="1" name=""/>
+        <p:cNvGrpSpPr/>
+        <p:nvPr/>
+      </p:nvGrpSpPr>
+      <p:grpSpPr/>
+      <p:sp>
+        <p:nvSpPr>
+          <p:cNvPr id="2" name="Rectangle 1"/>
+          <p:cNvSpPr/>
+          <p:nvPr/>
+        </p:nvSpPr>
+        <p:spPr>
+          <a:xfrm>
+            <a:off x="0" y="0"/>
+            <a:ext cx="12191695" cy="6858000"/>
+          </a:xfrm>
+          <a:prstGeom prst="rect">
+            <a:avLst/>
+          </a:prstGeom>
+          <a:solidFill>
+            <a:srgbClr val="FFFFFF"/>
+          </a:solidFill>
+          <a:ln>
+            <a:noFill/>
+          </a:ln>
+          <a:effectLst/>
+        </p:spPr>
+        <p:style>
+          <a:lnRef idx="1">
+            <a:schemeClr val="accent1"/>
+          </a:lnRef>
+          <a:fillRef idx="3">
+            <a:schemeClr val="accent1"/>
+          </a:fillRef>
+          <a:effectRef idx="2">
+            <a:schemeClr val="accent1"/>
+          </a:effectRef>
+          <a:fontRef idx="minor">
+            <a:schemeClr val="lt1"/>
+          </a:fontRef>
+        </p:style>
+        <p:txBody>
+          <a:bodyPr rtlCol="0" anchor="ctr"/>
+          <a:lstStyle/>
+          <a:p>
+            <a:pPr algn="ctr"/>
+          </a:p>
+        </p:txBody>
+      </p:sp>
+      <p:sp>
+        <p:nvSpPr>
+          <p:cNvPr id="3" name="TextBox 2"/>
+          <p:cNvSpPr txBox="1"/>
+          <p:nvPr/>
+        </p:nvSpPr>
+        <p:spPr>
+          <a:xfrm>
+            <a:off x="777240" y="475488"/>
+            <a:ext cx="10637215" cy="228600"/>
+          </a:xfrm>
+          <a:prstGeom prst="rect">
+            <a:avLst/>
+          </a:prstGeom>
+          <a:noFill/>
+        </p:spPr>
+        <p:txBody>
+          <a:bodyPr wrap="square" lIns="0" rIns="0" tIns="0" bIns="0">
+            <a:spAutoFit/>
+          </a:bodyPr>
+          <a:lstStyle/>
+          <a:p>
+            <a:pPr algn="l">
+              <a:lnSpc>
+                <a:spcPct val="100000"/>
+              </a:lnSpc>
+            </a:pPr>
+            <a:r>
+              <a:rPr sz="1100" b="1" i="0">
+                <a:solidFill>
+                  <a:srgbClr val="0D6B67"/>
+                </a:solidFill>
+                <a:latin typeface="Segoe UI"/>
+              </a:rPr>
+              <a:t>RESULTS  ·  NEGATIVE FINDINGS</a:t>
+            </a:r>
+          </a:p>
+        </p:txBody>
+      </p:sp>
+      <p:sp>
+        <p:nvSpPr>
+          <p:cNvPr id="4" name="TextBox 3"/>
+          <p:cNvSpPr txBox="1"/>
+          <p:nvPr/>
+        </p:nvSpPr>
+        <p:spPr>
+          <a:xfrm>
+            <a:off x="777240" y="749808"/>
+            <a:ext cx="10637215" cy="548640"/>
+          </a:xfrm>
+          <a:prstGeom prst="rect">
+            <a:avLst/>
+          </a:prstGeom>
+          <a:noFill/>
+        </p:spPr>
+        <p:txBody>
+          <a:bodyPr wrap="square" lIns="0" rIns="0" tIns="0" bIns="0">
+            <a:spAutoFit/>
+          </a:bodyPr>
+          <a:lstStyle/>
+          <a:p>
+            <a:pPr algn="l">
+              <a:lnSpc>
+                <a:spcPct val="100000"/>
+              </a:lnSpc>
+            </a:pPr>
+            <a:r>
+              <a:rPr sz="2700" b="1" i="0">
+                <a:solidFill>
+                  <a:srgbClr val="141C1E"/>
+                </a:solidFill>
+                <a:latin typeface="Segoe UI"/>
+              </a:rPr>
+              <a:t>Six things that did not work</a:t>
+            </a:r>
+          </a:p>
+        </p:txBody>
+      </p:sp>
+      <p:sp>
+        <p:nvSpPr>
+          <p:cNvPr id="5" name="Rectangle 4"/>
+          <p:cNvSpPr/>
+          <p:nvPr/>
+        </p:nvSpPr>
+        <p:spPr>
+          <a:xfrm>
+            <a:off x="777240" y="1408176"/>
+            <a:ext cx="1371600" cy="32004"/>
+          </a:xfrm>
+          <a:prstGeom prst="rect">
+            <a:avLst/>
+          </a:prstGeom>
+          <a:solidFill>
+            <a:srgbClr val="0D6B67"/>
+          </a:solidFill>
+          <a:ln>
+            <a:noFill/>
+          </a:ln>
+          <a:effectLst/>
+        </p:spPr>
+        <p:style>
+          <a:lnRef idx="1">
+            <a:schemeClr val="accent1"/>
+          </a:lnRef>
+          <a:fillRef idx="3">
+            <a:schemeClr val="accent1"/>
+          </a:fillRef>
+          <a:effectRef idx="2">
+            <a:schemeClr val="accent1"/>
+          </a:effectRef>
+          <a:fontRef idx="minor">
+            <a:schemeClr val="lt1"/>
+          </a:fontRef>
+        </p:style>
+        <p:txBody>
+          <a:bodyPr rtlCol="0" anchor="ctr"/>
+          <a:lstStyle/>
+          <a:p>
+            <a:pPr algn="ctr"/>
+          </a:p>
+        </p:txBody>
+      </p:sp>
+      <p:sp>
+        <p:nvSpPr>
+          <p:cNvPr id="6" name="TextBox 5"/>
+          <p:cNvSpPr txBox="1"/>
+          <p:nvPr/>
+        </p:nvSpPr>
+        <p:spPr>
+          <a:xfrm>
+            <a:off x="10865815" y="6382512"/>
+            <a:ext cx="548640" cy="228600"/>
+          </a:xfrm>
+          <a:prstGeom prst="rect">
+            <a:avLst/>
+          </a:prstGeom>
+          <a:noFill/>
+        </p:spPr>
+        <p:txBody>
+          <a:bodyPr wrap="square" lIns="0" rIns="0" tIns="0" bIns="0">
+            <a:spAutoFit/>
+          </a:bodyPr>
+          <a:lstStyle/>
+          <a:p>
+            <a:pPr algn="r">
+              <a:lnSpc>
+                <a:spcPct val="100000"/>
+              </a:lnSpc>
+            </a:pPr>
+            <a:r>
+              <a:rPr sz="1000" b="0" i="0">
+                <a:solidFill>
+                  <a:srgbClr val="617274"/>
+                </a:solidFill>
+                <a:latin typeface="Segoe UI"/>
+              </a:rPr>
+              <a:t>16</a:t>
             </a:r>
           </a:p>
         </p:txBody>
@@ -11520,7 +12462,7 @@
 </p:sld>
 </file>
 
-<file path=ppt/slides/slide17.xml><?xml version="1.0" encoding="utf-8"?>
+<file path=ppt/slides/slide18.xml><?xml version="1.0" encoding="utf-8"?>
 <p:sld xmlns:a="http://schemas.openxmlformats.org/drawingml/2006/main" xmlns:p="http://schemas.openxmlformats.org/presentationml/2006/main" xmlns:r="http://schemas.openxmlformats.org/officeDocument/2006/relationships">
   <p:cSld>
     <p:spTree>
@@ -11730,7 +12672,7 @@
                 </a:solidFill>
                 <a:latin typeface="Segoe UI"/>
               </a:rPr>
-              <a:t>16</a:t>
+              <a:t>17</a:t>
             </a:r>
           </a:p>
         </p:txBody>
@@ -12404,781 +13346,6 @@
 </p:sld>
 </file>
 
-<file path=ppt/slides/slide18.xml><?xml version="1.0" encoding="utf-8"?>
-<p:sld xmlns:a="http://schemas.openxmlformats.org/drawingml/2006/main" xmlns:p="http://schemas.openxmlformats.org/presentationml/2006/main" xmlns:r="http://schemas.openxmlformats.org/officeDocument/2006/relationships">
-  <p:cSld>
-    <p:spTree>
-      <p:nvGrpSpPr>
-        <p:cNvPr id="1" name=""/>
-        <p:cNvGrpSpPr/>
-        <p:nvPr/>
-      </p:nvGrpSpPr>
-      <p:grpSpPr/>
-      <p:sp>
-        <p:nvSpPr>
-          <p:cNvPr id="2" name="Rectangle 1"/>
-          <p:cNvSpPr/>
-          <p:nvPr/>
-        </p:nvSpPr>
-        <p:spPr>
-          <a:xfrm>
-            <a:off x="0" y="0"/>
-            <a:ext cx="12191695" cy="6858000"/>
-          </a:xfrm>
-          <a:prstGeom prst="rect">
-            <a:avLst/>
-          </a:prstGeom>
-          <a:solidFill>
-            <a:srgbClr val="FFFFFF"/>
-          </a:solidFill>
-          <a:ln>
-            <a:noFill/>
-          </a:ln>
-          <a:effectLst/>
-        </p:spPr>
-        <p:style>
-          <a:lnRef idx="1">
-            <a:schemeClr val="accent1"/>
-          </a:lnRef>
-          <a:fillRef idx="3">
-            <a:schemeClr val="accent1"/>
-          </a:fillRef>
-          <a:effectRef idx="2">
-            <a:schemeClr val="accent1"/>
-          </a:effectRef>
-          <a:fontRef idx="minor">
-            <a:schemeClr val="lt1"/>
-          </a:fontRef>
-        </p:style>
-        <p:txBody>
-          <a:bodyPr rtlCol="0" anchor="ctr"/>
-          <a:lstStyle/>
-          <a:p>
-            <a:pPr algn="ctr"/>
-          </a:p>
-        </p:txBody>
-      </p:sp>
-      <p:sp>
-        <p:nvSpPr>
-          <p:cNvPr id="3" name="TextBox 2"/>
-          <p:cNvSpPr txBox="1"/>
-          <p:nvPr/>
-        </p:nvSpPr>
-        <p:spPr>
-          <a:xfrm>
-            <a:off x="777240" y="475488"/>
-            <a:ext cx="10637215" cy="228600"/>
-          </a:xfrm>
-          <a:prstGeom prst="rect">
-            <a:avLst/>
-          </a:prstGeom>
-          <a:noFill/>
-        </p:spPr>
-        <p:txBody>
-          <a:bodyPr wrap="square" lIns="0" rIns="0" tIns="0" bIns="0">
-            <a:spAutoFit/>
-          </a:bodyPr>
-          <a:lstStyle/>
-          <a:p>
-            <a:pPr algn="l">
-              <a:lnSpc>
-                <a:spcPct val="100000"/>
-              </a:lnSpc>
-            </a:pPr>
-            <a:r>
-              <a:rPr sz="1100" b="1" i="0">
-                <a:solidFill>
-                  <a:srgbClr val="0D6B67"/>
-                </a:solidFill>
-                <a:latin typeface="Segoe UI"/>
-              </a:rPr>
-              <a:t>ASSESSMENT</a:t>
-            </a:r>
-          </a:p>
-        </p:txBody>
-      </p:sp>
-      <p:sp>
-        <p:nvSpPr>
-          <p:cNvPr id="4" name="TextBox 3"/>
-          <p:cNvSpPr txBox="1"/>
-          <p:nvPr/>
-        </p:nvSpPr>
-        <p:spPr>
-          <a:xfrm>
-            <a:off x="777240" y="749808"/>
-            <a:ext cx="10637215" cy="548640"/>
-          </a:xfrm>
-          <a:prstGeom prst="rect">
-            <a:avLst/>
-          </a:prstGeom>
-          <a:noFill/>
-        </p:spPr>
-        <p:txBody>
-          <a:bodyPr wrap="square" lIns="0" rIns="0" tIns="0" bIns="0">
-            <a:spAutoFit/>
-          </a:bodyPr>
-          <a:lstStyle/>
-          <a:p>
-            <a:pPr algn="l">
-              <a:lnSpc>
-                <a:spcPct val="100000"/>
-              </a:lnSpc>
-            </a:pPr>
-            <a:r>
-              <a:rPr sz="2700" b="1" i="0">
-                <a:solidFill>
-                  <a:srgbClr val="141C1E"/>
-                </a:solidFill>
-                <a:latin typeface="Segoe UI"/>
-              </a:rPr>
-              <a:t>Limitations we are stating ourselves</a:t>
-            </a:r>
-          </a:p>
-        </p:txBody>
-      </p:sp>
-      <p:sp>
-        <p:nvSpPr>
-          <p:cNvPr id="5" name="Rectangle 4"/>
-          <p:cNvSpPr/>
-          <p:nvPr/>
-        </p:nvSpPr>
-        <p:spPr>
-          <a:xfrm>
-            <a:off x="777240" y="1408176"/>
-            <a:ext cx="1371600" cy="32004"/>
-          </a:xfrm>
-          <a:prstGeom prst="rect">
-            <a:avLst/>
-          </a:prstGeom>
-          <a:solidFill>
-            <a:srgbClr val="0D6B67"/>
-          </a:solidFill>
-          <a:ln>
-            <a:noFill/>
-          </a:ln>
-          <a:effectLst/>
-        </p:spPr>
-        <p:style>
-          <a:lnRef idx="1">
-            <a:schemeClr val="accent1"/>
-          </a:lnRef>
-          <a:fillRef idx="3">
-            <a:schemeClr val="accent1"/>
-          </a:fillRef>
-          <a:effectRef idx="2">
-            <a:schemeClr val="accent1"/>
-          </a:effectRef>
-          <a:fontRef idx="minor">
-            <a:schemeClr val="lt1"/>
-          </a:fontRef>
-        </p:style>
-        <p:txBody>
-          <a:bodyPr rtlCol="0" anchor="ctr"/>
-          <a:lstStyle/>
-          <a:p>
-            <a:pPr algn="ctr"/>
-          </a:p>
-        </p:txBody>
-      </p:sp>
-      <p:sp>
-        <p:nvSpPr>
-          <p:cNvPr id="6" name="TextBox 5"/>
-          <p:cNvSpPr txBox="1"/>
-          <p:nvPr/>
-        </p:nvSpPr>
-        <p:spPr>
-          <a:xfrm>
-            <a:off x="10865815" y="6382512"/>
-            <a:ext cx="548640" cy="228600"/>
-          </a:xfrm>
-          <a:prstGeom prst="rect">
-            <a:avLst/>
-          </a:prstGeom>
-          <a:noFill/>
-        </p:spPr>
-        <p:txBody>
-          <a:bodyPr wrap="square" lIns="0" rIns="0" tIns="0" bIns="0">
-            <a:spAutoFit/>
-          </a:bodyPr>
-          <a:lstStyle/>
-          <a:p>
-            <a:pPr algn="r">
-              <a:lnSpc>
-                <a:spcPct val="100000"/>
-              </a:lnSpc>
-            </a:pPr>
-            <a:r>
-              <a:rPr sz="1000" b="0" i="0">
-                <a:solidFill>
-                  <a:srgbClr val="617274"/>
-                </a:solidFill>
-                <a:latin typeface="Segoe UI"/>
-              </a:rPr>
-              <a:t>17</a:t>
-            </a:r>
-          </a:p>
-        </p:txBody>
-      </p:sp>
-      <p:sp>
-        <p:nvSpPr>
-          <p:cNvPr id="7" name="Rectangle 6"/>
-          <p:cNvSpPr/>
-          <p:nvPr/>
-        </p:nvSpPr>
-        <p:spPr>
-          <a:xfrm>
-            <a:off x="777240" y="1874519"/>
-            <a:ext cx="68580" cy="68580"/>
-          </a:xfrm>
-          <a:prstGeom prst="rect">
-            <a:avLst/>
-          </a:prstGeom>
-          <a:solidFill>
-            <a:srgbClr val="0D6B67"/>
-          </a:solidFill>
-          <a:ln>
-            <a:noFill/>
-          </a:ln>
-          <a:effectLst/>
-        </p:spPr>
-        <p:style>
-          <a:lnRef idx="1">
-            <a:schemeClr val="accent1"/>
-          </a:lnRef>
-          <a:fillRef idx="3">
-            <a:schemeClr val="accent1"/>
-          </a:fillRef>
-          <a:effectRef idx="2">
-            <a:schemeClr val="accent1"/>
-          </a:effectRef>
-          <a:fontRef idx="minor">
-            <a:schemeClr val="lt1"/>
-          </a:fontRef>
-        </p:style>
-        <p:txBody>
-          <a:bodyPr rtlCol="0" anchor="ctr"/>
-          <a:lstStyle/>
-          <a:p>
-            <a:pPr algn="ctr"/>
-          </a:p>
-        </p:txBody>
-      </p:sp>
-      <p:sp>
-        <p:nvSpPr>
-          <p:cNvPr id="8" name="TextBox 7"/>
-          <p:cNvSpPr txBox="1"/>
-          <p:nvPr/>
-        </p:nvSpPr>
-        <p:spPr>
-          <a:xfrm>
-            <a:off x="1014983" y="1746504"/>
-            <a:ext cx="10399471" cy="365760"/>
-          </a:xfrm>
-          <a:prstGeom prst="rect">
-            <a:avLst/>
-          </a:prstGeom>
-          <a:noFill/>
-        </p:spPr>
-        <p:txBody>
-          <a:bodyPr wrap="square" lIns="0" rIns="0" tIns="0" bIns="0">
-            <a:spAutoFit/>
-          </a:bodyPr>
-          <a:lstStyle/>
-          <a:p>
-            <a:pPr>
-              <a:lnSpc>
-                <a:spcPct val="125000"/>
-              </a:lnSpc>
-            </a:pPr>
-            <a:r>
-              <a:rPr sz="1450" b="1">
-                <a:solidFill>
-                  <a:srgbClr val="141C1E"/>
-                </a:solidFill>
-                <a:latin typeface="Segoe UI"/>
-              </a:rPr>
-              <a:t>The mechanism is bounded.  </a:t>
-            </a:r>
-            <a:r>
-              <a:rPr sz="1450">
-                <a:solidFill>
-                  <a:srgbClr val="3A4A4C"/>
-                </a:solidFill>
-                <a:latin typeface="Segoe UI"/>
-              </a:rPr>
-              <a:t>It works on ShanghaiTech and nearly vanishes on Avenue. The scene-diversity explanation rests on two datasets and is not established.</a:t>
-            </a:r>
-          </a:p>
-        </p:txBody>
-      </p:sp>
-      <p:sp>
-        <p:nvSpPr>
-          <p:cNvPr id="9" name="Rectangle 8"/>
-          <p:cNvSpPr/>
-          <p:nvPr/>
-        </p:nvSpPr>
-        <p:spPr>
-          <a:xfrm>
-            <a:off x="777240" y="2660904"/>
-            <a:ext cx="68580" cy="68580"/>
-          </a:xfrm>
-          <a:prstGeom prst="rect">
-            <a:avLst/>
-          </a:prstGeom>
-          <a:solidFill>
-            <a:srgbClr val="0D6B67"/>
-          </a:solidFill>
-          <a:ln>
-            <a:noFill/>
-          </a:ln>
-          <a:effectLst/>
-        </p:spPr>
-        <p:style>
-          <a:lnRef idx="1">
-            <a:schemeClr val="accent1"/>
-          </a:lnRef>
-          <a:fillRef idx="3">
-            <a:schemeClr val="accent1"/>
-          </a:fillRef>
-          <a:effectRef idx="2">
-            <a:schemeClr val="accent1"/>
-          </a:effectRef>
-          <a:fontRef idx="minor">
-            <a:schemeClr val="lt1"/>
-          </a:fontRef>
-        </p:style>
-        <p:txBody>
-          <a:bodyPr rtlCol="0" anchor="ctr"/>
-          <a:lstStyle/>
-          <a:p>
-            <a:pPr algn="ctr"/>
-          </a:p>
-        </p:txBody>
-      </p:sp>
-      <p:sp>
-        <p:nvSpPr>
-          <p:cNvPr id="10" name="TextBox 9"/>
-          <p:cNvSpPr txBox="1"/>
-          <p:nvPr/>
-        </p:nvSpPr>
-        <p:spPr>
-          <a:xfrm>
-            <a:off x="1014983" y="2532888"/>
-            <a:ext cx="10399471" cy="365760"/>
-          </a:xfrm>
-          <a:prstGeom prst="rect">
-            <a:avLst/>
-          </a:prstGeom>
-          <a:noFill/>
-        </p:spPr>
-        <p:txBody>
-          <a:bodyPr wrap="square" lIns="0" rIns="0" tIns="0" bIns="0">
-            <a:spAutoFit/>
-          </a:bodyPr>
-          <a:lstStyle/>
-          <a:p>
-            <a:pPr>
-              <a:lnSpc>
-                <a:spcPct val="125000"/>
-              </a:lnSpc>
-            </a:pPr>
-            <a:r>
-              <a:rPr sz="1450" b="1">
-                <a:solidFill>
-                  <a:srgbClr val="141C1E"/>
-                </a:solidFill>
-                <a:latin typeface="Segoe UI"/>
-              </a:rPr>
-              <a:t>Resolution ceiling.  </a:t>
-            </a:r>
-            <a:r>
-              <a:rPr sz="1450">
-                <a:solidFill>
-                  <a:srgbClr val="3A4A4C"/>
-                </a:solidFill>
-                <a:latin typeface="Segoe UI"/>
-              </a:rPr>
-              <a:t>Whole-frame embeddings at 224×224 cannot resolve small objects. Quadrant scoring did not close it; patch-level scoring is untested.</a:t>
-            </a:r>
-          </a:p>
-        </p:txBody>
-      </p:sp>
-      <p:sp>
-        <p:nvSpPr>
-          <p:cNvPr id="11" name="Rectangle 10"/>
-          <p:cNvSpPr/>
-          <p:nvPr/>
-        </p:nvSpPr>
-        <p:spPr>
-          <a:xfrm>
-            <a:off x="777240" y="3447288"/>
-            <a:ext cx="68580" cy="68580"/>
-          </a:xfrm>
-          <a:prstGeom prst="rect">
-            <a:avLst/>
-          </a:prstGeom>
-          <a:solidFill>
-            <a:srgbClr val="0D6B67"/>
-          </a:solidFill>
-          <a:ln>
-            <a:noFill/>
-          </a:ln>
-          <a:effectLst/>
-        </p:spPr>
-        <p:style>
-          <a:lnRef idx="1">
-            <a:schemeClr val="accent1"/>
-          </a:lnRef>
-          <a:fillRef idx="3">
-            <a:schemeClr val="accent1"/>
-          </a:fillRef>
-          <a:effectRef idx="2">
-            <a:schemeClr val="accent1"/>
-          </a:effectRef>
-          <a:fontRef idx="minor">
-            <a:schemeClr val="lt1"/>
-          </a:fontRef>
-        </p:style>
-        <p:txBody>
-          <a:bodyPr rtlCol="0" anchor="ctr"/>
-          <a:lstStyle/>
-          <a:p>
-            <a:pPr algn="ctr"/>
-          </a:p>
-        </p:txBody>
-      </p:sp>
-      <p:sp>
-        <p:nvSpPr>
-          <p:cNvPr id="12" name="TextBox 11"/>
-          <p:cNvSpPr txBox="1"/>
-          <p:nvPr/>
-        </p:nvSpPr>
-        <p:spPr>
-          <a:xfrm>
-            <a:off x="1014983" y="3319272"/>
-            <a:ext cx="10399471" cy="365760"/>
-          </a:xfrm>
-          <a:prstGeom prst="rect">
-            <a:avLst/>
-          </a:prstGeom>
-          <a:noFill/>
-        </p:spPr>
-        <p:txBody>
-          <a:bodyPr wrap="square" lIns="0" rIns="0" tIns="0" bIns="0">
-            <a:spAutoFit/>
-          </a:bodyPr>
-          <a:lstStyle/>
-          <a:p>
-            <a:pPr>
-              <a:lnSpc>
-                <a:spcPct val="125000"/>
-              </a:lnSpc>
-            </a:pPr>
-            <a:r>
-              <a:rPr sz="1450" b="1">
-                <a:solidFill>
-                  <a:srgbClr val="141C1E"/>
-                </a:solidFill>
-                <a:latin typeface="Segoe UI"/>
-              </a:rPr>
-              <a:t>The metric is scale-sensitive.  </a:t>
-            </a:r>
-            <a:r>
-              <a:rPr sz="1450">
-                <a:solidFill>
-                  <a:srgbClr val="3A4A4C"/>
-                </a:solidFill>
-                <a:latin typeface="Segoe UI"/>
-              </a:rPr>
-              <a:t>Per-clip normalisation is affine, so a monotone rescaling of the score changes the pooled figure even though the ranking is identical. We found this the hard way.</a:t>
-            </a:r>
-          </a:p>
-        </p:txBody>
-      </p:sp>
-      <p:sp>
-        <p:nvSpPr>
-          <p:cNvPr id="13" name="Rectangle 12"/>
-          <p:cNvSpPr/>
-          <p:nvPr/>
-        </p:nvSpPr>
-        <p:spPr>
-          <a:xfrm>
-            <a:off x="777240" y="4233672"/>
-            <a:ext cx="68580" cy="68580"/>
-          </a:xfrm>
-          <a:prstGeom prst="rect">
-            <a:avLst/>
-          </a:prstGeom>
-          <a:solidFill>
-            <a:srgbClr val="0D6B67"/>
-          </a:solidFill>
-          <a:ln>
-            <a:noFill/>
-          </a:ln>
-          <a:effectLst/>
-        </p:spPr>
-        <p:style>
-          <a:lnRef idx="1">
-            <a:schemeClr val="accent1"/>
-          </a:lnRef>
-          <a:fillRef idx="3">
-            <a:schemeClr val="accent1"/>
-          </a:fillRef>
-          <a:effectRef idx="2">
-            <a:schemeClr val="accent1"/>
-          </a:effectRef>
-          <a:fontRef idx="minor">
-            <a:schemeClr val="lt1"/>
-          </a:fontRef>
-        </p:style>
-        <p:txBody>
-          <a:bodyPr rtlCol="0" anchor="ctr"/>
-          <a:lstStyle/>
-          <a:p>
-            <a:pPr algn="ctr"/>
-          </a:p>
-        </p:txBody>
-      </p:sp>
-      <p:sp>
-        <p:nvSpPr>
-          <p:cNvPr id="14" name="TextBox 13"/>
-          <p:cNvSpPr txBox="1"/>
-          <p:nvPr/>
-        </p:nvSpPr>
-        <p:spPr>
-          <a:xfrm>
-            <a:off x="1014983" y="4105656"/>
-            <a:ext cx="10399471" cy="365760"/>
-          </a:xfrm>
-          <a:prstGeom prst="rect">
-            <a:avLst/>
-          </a:prstGeom>
-          <a:noFill/>
-        </p:spPr>
-        <p:txBody>
-          <a:bodyPr wrap="square" lIns="0" rIns="0" tIns="0" bIns="0">
-            <a:spAutoFit/>
-          </a:bodyPr>
-          <a:lstStyle/>
-          <a:p>
-            <a:pPr>
-              <a:lnSpc>
-                <a:spcPct val="125000"/>
-              </a:lnSpc>
-            </a:pPr>
-            <a:r>
-              <a:rPr sz="1450" b="1">
-                <a:solidFill>
-                  <a:srgbClr val="141C1E"/>
-                </a:solidFill>
-                <a:latin typeface="Segoe UI"/>
-              </a:rPr>
-              <a:t>Configuration selection.  </a:t>
-            </a:r>
-            <a:r>
-              <a:rPr sz="1450">
-                <a:solidFill>
-                  <a:srgbClr val="3A4A4C"/>
-                </a:solidFill>
-                <a:latin typeface="Segoe UI"/>
-              </a:rPr>
-              <a:t>No validation split exists for these benchmarks, so we split clips and report the half never used to select.</a:t>
-            </a:r>
-          </a:p>
-        </p:txBody>
-      </p:sp>
-      <p:sp>
-        <p:nvSpPr>
-          <p:cNvPr id="15" name="Rectangle 14"/>
-          <p:cNvSpPr/>
-          <p:nvPr/>
-        </p:nvSpPr>
-        <p:spPr>
-          <a:xfrm>
-            <a:off x="777240" y="5020056"/>
-            <a:ext cx="68580" cy="68580"/>
-          </a:xfrm>
-          <a:prstGeom prst="rect">
-            <a:avLst/>
-          </a:prstGeom>
-          <a:solidFill>
-            <a:srgbClr val="0D6B67"/>
-          </a:solidFill>
-          <a:ln>
-            <a:noFill/>
-          </a:ln>
-          <a:effectLst/>
-        </p:spPr>
-        <p:style>
-          <a:lnRef idx="1">
-            <a:schemeClr val="accent1"/>
-          </a:lnRef>
-          <a:fillRef idx="3">
-            <a:schemeClr val="accent1"/>
-          </a:fillRef>
-          <a:effectRef idx="2">
-            <a:schemeClr val="accent1"/>
-          </a:effectRef>
-          <a:fontRef idx="minor">
-            <a:schemeClr val="lt1"/>
-          </a:fontRef>
-        </p:style>
-        <p:txBody>
-          <a:bodyPr rtlCol="0" anchor="ctr"/>
-          <a:lstStyle/>
-          <a:p>
-            <a:pPr algn="ctr"/>
-          </a:p>
-        </p:txBody>
-      </p:sp>
-      <p:sp>
-        <p:nvSpPr>
-          <p:cNvPr id="16" name="TextBox 15"/>
-          <p:cNvSpPr txBox="1"/>
-          <p:nvPr/>
-        </p:nvSpPr>
-        <p:spPr>
-          <a:xfrm>
-            <a:off x="1014983" y="4892040"/>
-            <a:ext cx="10399471" cy="365760"/>
-          </a:xfrm>
-          <a:prstGeom prst="rect">
-            <a:avLst/>
-          </a:prstGeom>
-          <a:noFill/>
-        </p:spPr>
-        <p:txBody>
-          <a:bodyPr wrap="square" lIns="0" rIns="0" tIns="0" bIns="0">
-            <a:spAutoFit/>
-          </a:bodyPr>
-          <a:lstStyle/>
-          <a:p>
-            <a:pPr>
-              <a:lnSpc>
-                <a:spcPct val="125000"/>
-              </a:lnSpc>
-            </a:pPr>
-            <a:r>
-              <a:rPr sz="1450" b="1">
-                <a:solidFill>
-                  <a:srgbClr val="141C1E"/>
-                </a:solidFill>
-                <a:latin typeface="Segoe UI"/>
-              </a:rPr>
-              <a:t>Both video domains are outdoor pedestrian surveillance.  </a:t>
-            </a:r>
-            <a:r>
-              <a:rPr sz="1450">
-                <a:solidFill>
-                  <a:srgbClr val="3A4A4C"/>
-                </a:solidFill>
-                <a:latin typeface="Segoe UI"/>
-              </a:rPr>
-              <a:t>The industrial contrast is evaluated for detection but not for the sweep.</a:t>
-            </a:r>
-          </a:p>
-        </p:txBody>
-      </p:sp>
-      <p:sp>
-        <p:nvSpPr>
-          <p:cNvPr id="17" name="Rectangle 16"/>
-          <p:cNvSpPr/>
-          <p:nvPr/>
-        </p:nvSpPr>
-        <p:spPr>
-          <a:xfrm>
-            <a:off x="777240" y="5806440"/>
-            <a:ext cx="68580" cy="68580"/>
-          </a:xfrm>
-          <a:prstGeom prst="rect">
-            <a:avLst/>
-          </a:prstGeom>
-          <a:solidFill>
-            <a:srgbClr val="0D6B67"/>
-          </a:solidFill>
-          <a:ln>
-            <a:noFill/>
-          </a:ln>
-          <a:effectLst/>
-        </p:spPr>
-        <p:style>
-          <a:lnRef idx="1">
-            <a:schemeClr val="accent1"/>
-          </a:lnRef>
-          <a:fillRef idx="3">
-            <a:schemeClr val="accent1"/>
-          </a:fillRef>
-          <a:effectRef idx="2">
-            <a:schemeClr val="accent1"/>
-          </a:effectRef>
-          <a:fontRef idx="minor">
-            <a:schemeClr val="lt1"/>
-          </a:fontRef>
-        </p:style>
-        <p:txBody>
-          <a:bodyPr rtlCol="0" anchor="ctr"/>
-          <a:lstStyle/>
-          <a:p>
-            <a:pPr algn="ctr"/>
-          </a:p>
-        </p:txBody>
-      </p:sp>
-      <p:sp>
-        <p:nvSpPr>
-          <p:cNvPr id="18" name="TextBox 17"/>
-          <p:cNvSpPr txBox="1"/>
-          <p:nvPr/>
-        </p:nvSpPr>
-        <p:spPr>
-          <a:xfrm>
-            <a:off x="1014983" y="5678424"/>
-            <a:ext cx="10399471" cy="365760"/>
-          </a:xfrm>
-          <a:prstGeom prst="rect">
-            <a:avLst/>
-          </a:prstGeom>
-          <a:noFill/>
-        </p:spPr>
-        <p:txBody>
-          <a:bodyPr wrap="square" lIns="0" rIns="0" tIns="0" bIns="0">
-            <a:spAutoFit/>
-          </a:bodyPr>
-          <a:lstStyle/>
-          <a:p>
-            <a:pPr>
-              <a:lnSpc>
-                <a:spcPct val="125000"/>
-              </a:lnSpc>
-            </a:pPr>
-            <a:r>
-              <a:rPr sz="1450" b="1">
-                <a:solidFill>
-                  <a:srgbClr val="141C1E"/>
-                </a:solidFill>
-                <a:latin typeface="Segoe UI"/>
-              </a:rPr>
-              <a:t>M4 not yet run.  </a:t>
-            </a:r>
-            <a:r>
-              <a:rPr sz="1450">
-                <a:solidFill>
-                  <a:srgbClr val="3A4A4C"/>
-                </a:solidFill>
-                <a:latin typeface="Segoe UI"/>
-              </a:rPr>
-              <a:t>The explanation module has produced no video results.</a:t>
-            </a:r>
-          </a:p>
-        </p:txBody>
-      </p:sp>
-    </p:spTree>
-  </p:cSld>
-  <p:clrMapOvr>
-    <a:masterClrMapping/>
-  </p:clrMapOvr>
-</p:sld>
-</file>
-
 <file path=ppt/slides/slide19.xml><?xml version="1.0" encoding="utf-8"?>
 <p:sld xmlns:a="http://schemas.openxmlformats.org/drawingml/2006/main" xmlns:p="http://schemas.openxmlformats.org/presentationml/2006/main" xmlns:r="http://schemas.openxmlformats.org/officeDocument/2006/relationships">
   <p:cSld>
@@ -13267,7 +13434,7 @@
                 </a:solidFill>
                 <a:latin typeface="Segoe UI"/>
               </a:rPr>
-              <a:t>NEXT</a:t>
+              <a:t>ASSESSMENT</a:t>
             </a:r>
           </a:p>
         </p:txBody>
@@ -13306,7 +13473,7 @@
                 </a:solidFill>
                 <a:latin typeface="Segoe UI"/>
               </a:rPr>
-              <a:t>Phase 3 plan</a:t>
+              <a:t>Limitations we are stating ourselves</a:t>
             </a:r>
           </a:p>
         </p:txBody>
@@ -13390,6 +13557,1473 @@
                 <a:latin typeface="Segoe UI"/>
               </a:rPr>
               <a:t>18</a:t>
+            </a:r>
+          </a:p>
+        </p:txBody>
+      </p:sp>
+      <p:sp>
+        <p:nvSpPr>
+          <p:cNvPr id="7" name="Rectangle 6"/>
+          <p:cNvSpPr/>
+          <p:nvPr/>
+        </p:nvSpPr>
+        <p:spPr>
+          <a:xfrm>
+            <a:off x="777240" y="1874519"/>
+            <a:ext cx="68580" cy="68580"/>
+          </a:xfrm>
+          <a:prstGeom prst="rect">
+            <a:avLst/>
+          </a:prstGeom>
+          <a:solidFill>
+            <a:srgbClr val="0D6B67"/>
+          </a:solidFill>
+          <a:ln>
+            <a:noFill/>
+          </a:ln>
+          <a:effectLst/>
+        </p:spPr>
+        <p:style>
+          <a:lnRef idx="1">
+            <a:schemeClr val="accent1"/>
+          </a:lnRef>
+          <a:fillRef idx="3">
+            <a:schemeClr val="accent1"/>
+          </a:fillRef>
+          <a:effectRef idx="2">
+            <a:schemeClr val="accent1"/>
+          </a:effectRef>
+          <a:fontRef idx="minor">
+            <a:schemeClr val="lt1"/>
+          </a:fontRef>
+        </p:style>
+        <p:txBody>
+          <a:bodyPr rtlCol="0" anchor="ctr"/>
+          <a:lstStyle/>
+          <a:p>
+            <a:pPr algn="ctr"/>
+          </a:p>
+        </p:txBody>
+      </p:sp>
+      <p:sp>
+        <p:nvSpPr>
+          <p:cNvPr id="8" name="TextBox 7"/>
+          <p:cNvSpPr txBox="1"/>
+          <p:nvPr/>
+        </p:nvSpPr>
+        <p:spPr>
+          <a:xfrm>
+            <a:off x="1014983" y="1746504"/>
+            <a:ext cx="10399471" cy="365760"/>
+          </a:xfrm>
+          <a:prstGeom prst="rect">
+            <a:avLst/>
+          </a:prstGeom>
+          <a:noFill/>
+        </p:spPr>
+        <p:txBody>
+          <a:bodyPr wrap="square" lIns="0" rIns="0" tIns="0" bIns="0">
+            <a:spAutoFit/>
+          </a:bodyPr>
+          <a:lstStyle/>
+          <a:p>
+            <a:pPr>
+              <a:lnSpc>
+                <a:spcPct val="125000"/>
+              </a:lnSpc>
+            </a:pPr>
+            <a:r>
+              <a:rPr sz="1450" b="1">
+                <a:solidFill>
+                  <a:srgbClr val="141C1E"/>
+                </a:solidFill>
+                <a:latin typeface="Segoe UI"/>
+              </a:rPr>
+              <a:t>The mechanism is bounded.  </a:t>
+            </a:r>
+            <a:r>
+              <a:rPr sz="1450">
+                <a:solidFill>
+                  <a:srgbClr val="3A4A4C"/>
+                </a:solidFill>
+                <a:latin typeface="Segoe UI"/>
+              </a:rPr>
+              <a:t>It works on ShanghaiTech and nearly vanishes on Avenue. The scene-diversity explanation rests on two datasets and is not established.</a:t>
+            </a:r>
+          </a:p>
+        </p:txBody>
+      </p:sp>
+      <p:sp>
+        <p:nvSpPr>
+          <p:cNvPr id="9" name="Rectangle 8"/>
+          <p:cNvSpPr/>
+          <p:nvPr/>
+        </p:nvSpPr>
+        <p:spPr>
+          <a:xfrm>
+            <a:off x="777240" y="2660904"/>
+            <a:ext cx="68580" cy="68580"/>
+          </a:xfrm>
+          <a:prstGeom prst="rect">
+            <a:avLst/>
+          </a:prstGeom>
+          <a:solidFill>
+            <a:srgbClr val="0D6B67"/>
+          </a:solidFill>
+          <a:ln>
+            <a:noFill/>
+          </a:ln>
+          <a:effectLst/>
+        </p:spPr>
+        <p:style>
+          <a:lnRef idx="1">
+            <a:schemeClr val="accent1"/>
+          </a:lnRef>
+          <a:fillRef idx="3">
+            <a:schemeClr val="accent1"/>
+          </a:fillRef>
+          <a:effectRef idx="2">
+            <a:schemeClr val="accent1"/>
+          </a:effectRef>
+          <a:fontRef idx="minor">
+            <a:schemeClr val="lt1"/>
+          </a:fontRef>
+        </p:style>
+        <p:txBody>
+          <a:bodyPr rtlCol="0" anchor="ctr"/>
+          <a:lstStyle/>
+          <a:p>
+            <a:pPr algn="ctr"/>
+          </a:p>
+        </p:txBody>
+      </p:sp>
+      <p:sp>
+        <p:nvSpPr>
+          <p:cNvPr id="10" name="TextBox 9"/>
+          <p:cNvSpPr txBox="1"/>
+          <p:nvPr/>
+        </p:nvSpPr>
+        <p:spPr>
+          <a:xfrm>
+            <a:off x="1014983" y="2532888"/>
+            <a:ext cx="10399471" cy="365760"/>
+          </a:xfrm>
+          <a:prstGeom prst="rect">
+            <a:avLst/>
+          </a:prstGeom>
+          <a:noFill/>
+        </p:spPr>
+        <p:txBody>
+          <a:bodyPr wrap="square" lIns="0" rIns="0" tIns="0" bIns="0">
+            <a:spAutoFit/>
+          </a:bodyPr>
+          <a:lstStyle/>
+          <a:p>
+            <a:pPr>
+              <a:lnSpc>
+                <a:spcPct val="125000"/>
+              </a:lnSpc>
+            </a:pPr>
+            <a:r>
+              <a:rPr sz="1450" b="1">
+                <a:solidFill>
+                  <a:srgbClr val="141C1E"/>
+                </a:solidFill>
+                <a:latin typeface="Segoe UI"/>
+              </a:rPr>
+              <a:t>Resolution ceiling.  </a:t>
+            </a:r>
+            <a:r>
+              <a:rPr sz="1450">
+                <a:solidFill>
+                  <a:srgbClr val="3A4A4C"/>
+                </a:solidFill>
+                <a:latin typeface="Segoe UI"/>
+              </a:rPr>
+              <a:t>Whole-frame embeddings at 224×224 cannot resolve small objects. Quadrant scoring did not close it; patch-level scoring is untested.</a:t>
+            </a:r>
+          </a:p>
+        </p:txBody>
+      </p:sp>
+      <p:sp>
+        <p:nvSpPr>
+          <p:cNvPr id="11" name="Rectangle 10"/>
+          <p:cNvSpPr/>
+          <p:nvPr/>
+        </p:nvSpPr>
+        <p:spPr>
+          <a:xfrm>
+            <a:off x="777240" y="3447288"/>
+            <a:ext cx="68580" cy="68580"/>
+          </a:xfrm>
+          <a:prstGeom prst="rect">
+            <a:avLst/>
+          </a:prstGeom>
+          <a:solidFill>
+            <a:srgbClr val="0D6B67"/>
+          </a:solidFill>
+          <a:ln>
+            <a:noFill/>
+          </a:ln>
+          <a:effectLst/>
+        </p:spPr>
+        <p:style>
+          <a:lnRef idx="1">
+            <a:schemeClr val="accent1"/>
+          </a:lnRef>
+          <a:fillRef idx="3">
+            <a:schemeClr val="accent1"/>
+          </a:fillRef>
+          <a:effectRef idx="2">
+            <a:schemeClr val="accent1"/>
+          </a:effectRef>
+          <a:fontRef idx="minor">
+            <a:schemeClr val="lt1"/>
+          </a:fontRef>
+        </p:style>
+        <p:txBody>
+          <a:bodyPr rtlCol="0" anchor="ctr"/>
+          <a:lstStyle/>
+          <a:p>
+            <a:pPr algn="ctr"/>
+          </a:p>
+        </p:txBody>
+      </p:sp>
+      <p:sp>
+        <p:nvSpPr>
+          <p:cNvPr id="12" name="TextBox 11"/>
+          <p:cNvSpPr txBox="1"/>
+          <p:nvPr/>
+        </p:nvSpPr>
+        <p:spPr>
+          <a:xfrm>
+            <a:off x="1014983" y="3319272"/>
+            <a:ext cx="10399471" cy="365760"/>
+          </a:xfrm>
+          <a:prstGeom prst="rect">
+            <a:avLst/>
+          </a:prstGeom>
+          <a:noFill/>
+        </p:spPr>
+        <p:txBody>
+          <a:bodyPr wrap="square" lIns="0" rIns="0" tIns="0" bIns="0">
+            <a:spAutoFit/>
+          </a:bodyPr>
+          <a:lstStyle/>
+          <a:p>
+            <a:pPr>
+              <a:lnSpc>
+                <a:spcPct val="125000"/>
+              </a:lnSpc>
+            </a:pPr>
+            <a:r>
+              <a:rPr sz="1450" b="1">
+                <a:solidFill>
+                  <a:srgbClr val="141C1E"/>
+                </a:solidFill>
+                <a:latin typeface="Segoe UI"/>
+              </a:rPr>
+              <a:t>The metric is scale-sensitive.  </a:t>
+            </a:r>
+            <a:r>
+              <a:rPr sz="1450">
+                <a:solidFill>
+                  <a:srgbClr val="3A4A4C"/>
+                </a:solidFill>
+                <a:latin typeface="Segoe UI"/>
+              </a:rPr>
+              <a:t>Per-clip normalisation is affine, so a monotone rescaling of the score changes the pooled figure even though the ranking is identical. We found this the hard way.</a:t>
+            </a:r>
+          </a:p>
+        </p:txBody>
+      </p:sp>
+      <p:sp>
+        <p:nvSpPr>
+          <p:cNvPr id="13" name="Rectangle 12"/>
+          <p:cNvSpPr/>
+          <p:nvPr/>
+        </p:nvSpPr>
+        <p:spPr>
+          <a:xfrm>
+            <a:off x="777240" y="4233672"/>
+            <a:ext cx="68580" cy="68580"/>
+          </a:xfrm>
+          <a:prstGeom prst="rect">
+            <a:avLst/>
+          </a:prstGeom>
+          <a:solidFill>
+            <a:srgbClr val="0D6B67"/>
+          </a:solidFill>
+          <a:ln>
+            <a:noFill/>
+          </a:ln>
+          <a:effectLst/>
+        </p:spPr>
+        <p:style>
+          <a:lnRef idx="1">
+            <a:schemeClr val="accent1"/>
+          </a:lnRef>
+          <a:fillRef idx="3">
+            <a:schemeClr val="accent1"/>
+          </a:fillRef>
+          <a:effectRef idx="2">
+            <a:schemeClr val="accent1"/>
+          </a:effectRef>
+          <a:fontRef idx="minor">
+            <a:schemeClr val="lt1"/>
+          </a:fontRef>
+        </p:style>
+        <p:txBody>
+          <a:bodyPr rtlCol="0" anchor="ctr"/>
+          <a:lstStyle/>
+          <a:p>
+            <a:pPr algn="ctr"/>
+          </a:p>
+        </p:txBody>
+      </p:sp>
+      <p:sp>
+        <p:nvSpPr>
+          <p:cNvPr id="14" name="TextBox 13"/>
+          <p:cNvSpPr txBox="1"/>
+          <p:nvPr/>
+        </p:nvSpPr>
+        <p:spPr>
+          <a:xfrm>
+            <a:off x="1014983" y="4105656"/>
+            <a:ext cx="10399471" cy="365760"/>
+          </a:xfrm>
+          <a:prstGeom prst="rect">
+            <a:avLst/>
+          </a:prstGeom>
+          <a:noFill/>
+        </p:spPr>
+        <p:txBody>
+          <a:bodyPr wrap="square" lIns="0" rIns="0" tIns="0" bIns="0">
+            <a:spAutoFit/>
+          </a:bodyPr>
+          <a:lstStyle/>
+          <a:p>
+            <a:pPr>
+              <a:lnSpc>
+                <a:spcPct val="125000"/>
+              </a:lnSpc>
+            </a:pPr>
+            <a:r>
+              <a:rPr sz="1450" b="1">
+                <a:solidFill>
+                  <a:srgbClr val="141C1E"/>
+                </a:solidFill>
+                <a:latin typeface="Segoe UI"/>
+              </a:rPr>
+              <a:t>Configuration selection.  </a:t>
+            </a:r>
+            <a:r>
+              <a:rPr sz="1450">
+                <a:solidFill>
+                  <a:srgbClr val="3A4A4C"/>
+                </a:solidFill>
+                <a:latin typeface="Segoe UI"/>
+              </a:rPr>
+              <a:t>No validation split exists for these benchmarks, so we split clips and report the half never used to select.</a:t>
+            </a:r>
+          </a:p>
+        </p:txBody>
+      </p:sp>
+      <p:sp>
+        <p:nvSpPr>
+          <p:cNvPr id="15" name="Rectangle 14"/>
+          <p:cNvSpPr/>
+          <p:nvPr/>
+        </p:nvSpPr>
+        <p:spPr>
+          <a:xfrm>
+            <a:off x="777240" y="5020056"/>
+            <a:ext cx="68580" cy="68580"/>
+          </a:xfrm>
+          <a:prstGeom prst="rect">
+            <a:avLst/>
+          </a:prstGeom>
+          <a:solidFill>
+            <a:srgbClr val="0D6B67"/>
+          </a:solidFill>
+          <a:ln>
+            <a:noFill/>
+          </a:ln>
+          <a:effectLst/>
+        </p:spPr>
+        <p:style>
+          <a:lnRef idx="1">
+            <a:schemeClr val="accent1"/>
+          </a:lnRef>
+          <a:fillRef idx="3">
+            <a:schemeClr val="accent1"/>
+          </a:fillRef>
+          <a:effectRef idx="2">
+            <a:schemeClr val="accent1"/>
+          </a:effectRef>
+          <a:fontRef idx="minor">
+            <a:schemeClr val="lt1"/>
+          </a:fontRef>
+        </p:style>
+        <p:txBody>
+          <a:bodyPr rtlCol="0" anchor="ctr"/>
+          <a:lstStyle/>
+          <a:p>
+            <a:pPr algn="ctr"/>
+          </a:p>
+        </p:txBody>
+      </p:sp>
+      <p:sp>
+        <p:nvSpPr>
+          <p:cNvPr id="16" name="TextBox 15"/>
+          <p:cNvSpPr txBox="1"/>
+          <p:nvPr/>
+        </p:nvSpPr>
+        <p:spPr>
+          <a:xfrm>
+            <a:off x="1014983" y="4892040"/>
+            <a:ext cx="10399471" cy="365760"/>
+          </a:xfrm>
+          <a:prstGeom prst="rect">
+            <a:avLst/>
+          </a:prstGeom>
+          <a:noFill/>
+        </p:spPr>
+        <p:txBody>
+          <a:bodyPr wrap="square" lIns="0" rIns="0" tIns="0" bIns="0">
+            <a:spAutoFit/>
+          </a:bodyPr>
+          <a:lstStyle/>
+          <a:p>
+            <a:pPr>
+              <a:lnSpc>
+                <a:spcPct val="125000"/>
+              </a:lnSpc>
+            </a:pPr>
+            <a:r>
+              <a:rPr sz="1450" b="1">
+                <a:solidFill>
+                  <a:srgbClr val="141C1E"/>
+                </a:solidFill>
+                <a:latin typeface="Segoe UI"/>
+              </a:rPr>
+              <a:t>Both video domains are outdoor pedestrian surveillance.  </a:t>
+            </a:r>
+            <a:r>
+              <a:rPr sz="1450">
+                <a:solidFill>
+                  <a:srgbClr val="3A4A4C"/>
+                </a:solidFill>
+                <a:latin typeface="Segoe UI"/>
+              </a:rPr>
+              <a:t>The industrial contrast is evaluated for detection but not for the sweep.</a:t>
+            </a:r>
+          </a:p>
+        </p:txBody>
+      </p:sp>
+      <p:sp>
+        <p:nvSpPr>
+          <p:cNvPr id="17" name="Rectangle 16"/>
+          <p:cNvSpPr/>
+          <p:nvPr/>
+        </p:nvSpPr>
+        <p:spPr>
+          <a:xfrm>
+            <a:off x="777240" y="5806440"/>
+            <a:ext cx="68580" cy="68580"/>
+          </a:xfrm>
+          <a:prstGeom prst="rect">
+            <a:avLst/>
+          </a:prstGeom>
+          <a:solidFill>
+            <a:srgbClr val="0D6B67"/>
+          </a:solidFill>
+          <a:ln>
+            <a:noFill/>
+          </a:ln>
+          <a:effectLst/>
+        </p:spPr>
+        <p:style>
+          <a:lnRef idx="1">
+            <a:schemeClr val="accent1"/>
+          </a:lnRef>
+          <a:fillRef idx="3">
+            <a:schemeClr val="accent1"/>
+          </a:fillRef>
+          <a:effectRef idx="2">
+            <a:schemeClr val="accent1"/>
+          </a:effectRef>
+          <a:fontRef idx="minor">
+            <a:schemeClr val="lt1"/>
+          </a:fontRef>
+        </p:style>
+        <p:txBody>
+          <a:bodyPr rtlCol="0" anchor="ctr"/>
+          <a:lstStyle/>
+          <a:p>
+            <a:pPr algn="ctr"/>
+          </a:p>
+        </p:txBody>
+      </p:sp>
+      <p:sp>
+        <p:nvSpPr>
+          <p:cNvPr id="18" name="TextBox 17"/>
+          <p:cNvSpPr txBox="1"/>
+          <p:nvPr/>
+        </p:nvSpPr>
+        <p:spPr>
+          <a:xfrm>
+            <a:off x="1014983" y="5678424"/>
+            <a:ext cx="10399471" cy="365760"/>
+          </a:xfrm>
+          <a:prstGeom prst="rect">
+            <a:avLst/>
+          </a:prstGeom>
+          <a:noFill/>
+        </p:spPr>
+        <p:txBody>
+          <a:bodyPr wrap="square" lIns="0" rIns="0" tIns="0" bIns="0">
+            <a:spAutoFit/>
+          </a:bodyPr>
+          <a:lstStyle/>
+          <a:p>
+            <a:pPr>
+              <a:lnSpc>
+                <a:spcPct val="125000"/>
+              </a:lnSpc>
+            </a:pPr>
+            <a:r>
+              <a:rPr sz="1450" b="1">
+                <a:solidFill>
+                  <a:srgbClr val="141C1E"/>
+                </a:solidFill>
+                <a:latin typeface="Segoe UI"/>
+              </a:rPr>
+              <a:t>M4 not yet run.  </a:t>
+            </a:r>
+            <a:r>
+              <a:rPr sz="1450">
+                <a:solidFill>
+                  <a:srgbClr val="3A4A4C"/>
+                </a:solidFill>
+                <a:latin typeface="Segoe UI"/>
+              </a:rPr>
+              <a:t>The explanation module has produced no video results.</a:t>
+            </a:r>
+          </a:p>
+        </p:txBody>
+      </p:sp>
+    </p:spTree>
+  </p:cSld>
+  <p:clrMapOvr>
+    <a:masterClrMapping/>
+  </p:clrMapOvr>
+</p:sld>
+</file>
+
+<file path=ppt/slides/slide2.xml><?xml version="1.0" encoding="utf-8"?>
+<p:sld xmlns:a="http://schemas.openxmlformats.org/drawingml/2006/main" xmlns:p="http://schemas.openxmlformats.org/presentationml/2006/main" xmlns:r="http://schemas.openxmlformats.org/officeDocument/2006/relationships">
+  <p:cSld>
+    <p:spTree>
+      <p:nvGrpSpPr>
+        <p:cNvPr id="1" name=""/>
+        <p:cNvGrpSpPr/>
+        <p:nvPr/>
+      </p:nvGrpSpPr>
+      <p:grpSpPr/>
+      <p:sp>
+        <p:nvSpPr>
+          <p:cNvPr id="2" name="Rectangle 1"/>
+          <p:cNvSpPr/>
+          <p:nvPr/>
+        </p:nvSpPr>
+        <p:spPr>
+          <a:xfrm>
+            <a:off x="0" y="0"/>
+            <a:ext cx="12191695" cy="6858000"/>
+          </a:xfrm>
+          <a:prstGeom prst="rect">
+            <a:avLst/>
+          </a:prstGeom>
+          <a:solidFill>
+            <a:srgbClr val="FFFFFF"/>
+          </a:solidFill>
+          <a:ln>
+            <a:noFill/>
+          </a:ln>
+          <a:effectLst/>
+        </p:spPr>
+        <p:style>
+          <a:lnRef idx="1">
+            <a:schemeClr val="accent1"/>
+          </a:lnRef>
+          <a:fillRef idx="3">
+            <a:schemeClr val="accent1"/>
+          </a:fillRef>
+          <a:effectRef idx="2">
+            <a:schemeClr val="accent1"/>
+          </a:effectRef>
+          <a:fontRef idx="minor">
+            <a:schemeClr val="lt1"/>
+          </a:fontRef>
+        </p:style>
+        <p:txBody>
+          <a:bodyPr rtlCol="0" anchor="ctr"/>
+          <a:lstStyle/>
+          <a:p>
+            <a:pPr algn="ctr"/>
+          </a:p>
+        </p:txBody>
+      </p:sp>
+      <p:sp>
+        <p:nvSpPr>
+          <p:cNvPr id="3" name="TextBox 2"/>
+          <p:cNvSpPr txBox="1"/>
+          <p:nvPr/>
+        </p:nvSpPr>
+        <p:spPr>
+          <a:xfrm>
+            <a:off x="777240" y="475488"/>
+            <a:ext cx="10637215" cy="228600"/>
+          </a:xfrm>
+          <a:prstGeom prst="rect">
+            <a:avLst/>
+          </a:prstGeom>
+          <a:noFill/>
+        </p:spPr>
+        <p:txBody>
+          <a:bodyPr wrap="square" lIns="0" rIns="0" tIns="0" bIns="0">
+            <a:spAutoFit/>
+          </a:bodyPr>
+          <a:lstStyle/>
+          <a:p>
+            <a:pPr algn="l">
+              <a:lnSpc>
+                <a:spcPct val="100000"/>
+              </a:lnSpc>
+            </a:pPr>
+            <a:r>
+              <a:rPr sz="1100" b="1" i="0">
+                <a:solidFill>
+                  <a:srgbClr val="0D6B67"/>
+                </a:solidFill>
+                <a:latin typeface="Segoe UI"/>
+              </a:rPr>
+              <a:t>THE PROBLEM</a:t>
+            </a:r>
+          </a:p>
+        </p:txBody>
+      </p:sp>
+      <p:sp>
+        <p:nvSpPr>
+          <p:cNvPr id="4" name="TextBox 3"/>
+          <p:cNvSpPr txBox="1"/>
+          <p:nvPr/>
+        </p:nvSpPr>
+        <p:spPr>
+          <a:xfrm>
+            <a:off x="777240" y="749808"/>
+            <a:ext cx="10637215" cy="548640"/>
+          </a:xfrm>
+          <a:prstGeom prst="rect">
+            <a:avLst/>
+          </a:prstGeom>
+          <a:noFill/>
+        </p:spPr>
+        <p:txBody>
+          <a:bodyPr wrap="square" lIns="0" rIns="0" tIns="0" bIns="0">
+            <a:spAutoFit/>
+          </a:bodyPr>
+          <a:lstStyle/>
+          <a:p>
+            <a:pPr algn="l">
+              <a:lnSpc>
+                <a:spcPct val="100000"/>
+              </a:lnSpc>
+            </a:pPr>
+            <a:r>
+              <a:rPr sz="2700" b="1" i="0">
+                <a:solidFill>
+                  <a:srgbClr val="141C1E"/>
+                </a:solidFill>
+                <a:latin typeface="Segoe UI"/>
+              </a:rPr>
+              <a:t>A detector is tied to the place it learned</a:t>
+            </a:r>
+          </a:p>
+        </p:txBody>
+      </p:sp>
+      <p:sp>
+        <p:nvSpPr>
+          <p:cNvPr id="5" name="Rectangle 4"/>
+          <p:cNvSpPr/>
+          <p:nvPr/>
+        </p:nvSpPr>
+        <p:spPr>
+          <a:xfrm>
+            <a:off x="777240" y="1408176"/>
+            <a:ext cx="1371600" cy="32004"/>
+          </a:xfrm>
+          <a:prstGeom prst="rect">
+            <a:avLst/>
+          </a:prstGeom>
+          <a:solidFill>
+            <a:srgbClr val="0D6B67"/>
+          </a:solidFill>
+          <a:ln>
+            <a:noFill/>
+          </a:ln>
+          <a:effectLst/>
+        </p:spPr>
+        <p:style>
+          <a:lnRef idx="1">
+            <a:schemeClr val="accent1"/>
+          </a:lnRef>
+          <a:fillRef idx="3">
+            <a:schemeClr val="accent1"/>
+          </a:fillRef>
+          <a:effectRef idx="2">
+            <a:schemeClr val="accent1"/>
+          </a:effectRef>
+          <a:fontRef idx="minor">
+            <a:schemeClr val="lt1"/>
+          </a:fontRef>
+        </p:style>
+        <p:txBody>
+          <a:bodyPr rtlCol="0" anchor="ctr"/>
+          <a:lstStyle/>
+          <a:p>
+            <a:pPr algn="ctr"/>
+          </a:p>
+        </p:txBody>
+      </p:sp>
+      <p:sp>
+        <p:nvSpPr>
+          <p:cNvPr id="6" name="TextBox 5"/>
+          <p:cNvSpPr txBox="1"/>
+          <p:nvPr/>
+        </p:nvSpPr>
+        <p:spPr>
+          <a:xfrm>
+            <a:off x="10865815" y="6382512"/>
+            <a:ext cx="548640" cy="228600"/>
+          </a:xfrm>
+          <a:prstGeom prst="rect">
+            <a:avLst/>
+          </a:prstGeom>
+          <a:noFill/>
+        </p:spPr>
+        <p:txBody>
+          <a:bodyPr wrap="square" lIns="0" rIns="0" tIns="0" bIns="0">
+            <a:spAutoFit/>
+          </a:bodyPr>
+          <a:lstStyle/>
+          <a:p>
+            <a:pPr algn="r">
+              <a:lnSpc>
+                <a:spcPct val="100000"/>
+              </a:lnSpc>
+            </a:pPr>
+            <a:r>
+              <a:rPr sz="1000" b="0" i="0">
+                <a:solidFill>
+                  <a:srgbClr val="617274"/>
+                </a:solidFill>
+                <a:latin typeface="Segoe UI"/>
+              </a:rPr>
+              <a:t>1</a:t>
+            </a:r>
+          </a:p>
+        </p:txBody>
+      </p:sp>
+      <p:sp>
+        <p:nvSpPr>
+          <p:cNvPr id="7" name="Rectangle 6"/>
+          <p:cNvSpPr/>
+          <p:nvPr/>
+        </p:nvSpPr>
+        <p:spPr>
+          <a:xfrm>
+            <a:off x="777240" y="1874519"/>
+            <a:ext cx="68580" cy="68580"/>
+          </a:xfrm>
+          <a:prstGeom prst="rect">
+            <a:avLst/>
+          </a:prstGeom>
+          <a:solidFill>
+            <a:srgbClr val="0D6B67"/>
+          </a:solidFill>
+          <a:ln>
+            <a:noFill/>
+          </a:ln>
+          <a:effectLst/>
+        </p:spPr>
+        <p:style>
+          <a:lnRef idx="1">
+            <a:schemeClr val="accent1"/>
+          </a:lnRef>
+          <a:fillRef idx="3">
+            <a:schemeClr val="accent1"/>
+          </a:fillRef>
+          <a:effectRef idx="2">
+            <a:schemeClr val="accent1"/>
+          </a:effectRef>
+          <a:fontRef idx="minor">
+            <a:schemeClr val="lt1"/>
+          </a:fontRef>
+        </p:style>
+        <p:txBody>
+          <a:bodyPr rtlCol="0" anchor="ctr"/>
+          <a:lstStyle/>
+          <a:p>
+            <a:pPr algn="ctr"/>
+          </a:p>
+        </p:txBody>
+      </p:sp>
+      <p:sp>
+        <p:nvSpPr>
+          <p:cNvPr id="8" name="TextBox 7"/>
+          <p:cNvSpPr txBox="1"/>
+          <p:nvPr/>
+        </p:nvSpPr>
+        <p:spPr>
+          <a:xfrm>
+            <a:off x="1014983" y="1746504"/>
+            <a:ext cx="10399471" cy="365760"/>
+          </a:xfrm>
+          <a:prstGeom prst="rect">
+            <a:avLst/>
+          </a:prstGeom>
+          <a:noFill/>
+        </p:spPr>
+        <p:txBody>
+          <a:bodyPr wrap="square" lIns="0" rIns="0" tIns="0" bIns="0">
+            <a:spAutoFit/>
+          </a:bodyPr>
+          <a:lstStyle/>
+          <a:p>
+            <a:pPr>
+              <a:lnSpc>
+                <a:spcPct val="125000"/>
+              </a:lnSpc>
+            </a:pPr>
+            <a:r>
+              <a:rPr sz="1650" b="1">
+                <a:solidFill>
+                  <a:srgbClr val="141C1E"/>
+                </a:solidFill>
+                <a:latin typeface="Segoe UI"/>
+              </a:rPr>
+              <a:t>Standard approach.  </a:t>
+            </a:r>
+            <a:r>
+              <a:rPr sz="1650">
+                <a:solidFill>
+                  <a:srgbClr val="3A4A4C"/>
+                </a:solidFill>
+                <a:latin typeface="Segoe UI"/>
+              </a:rPr>
+              <a:t>Show the system weeks of ordinary footage from one camera until it learns what normal looks like there.</a:t>
+            </a:r>
+          </a:p>
+        </p:txBody>
+      </p:sp>
+      <p:sp>
+        <p:nvSpPr>
+          <p:cNvPr id="9" name="Rectangle 8"/>
+          <p:cNvSpPr/>
+          <p:nvPr/>
+        </p:nvSpPr>
+        <p:spPr>
+          <a:xfrm>
+            <a:off x="777240" y="2295144"/>
+            <a:ext cx="68580" cy="68580"/>
+          </a:xfrm>
+          <a:prstGeom prst="rect">
+            <a:avLst/>
+          </a:prstGeom>
+          <a:solidFill>
+            <a:srgbClr val="0D6B67"/>
+          </a:solidFill>
+          <a:ln>
+            <a:noFill/>
+          </a:ln>
+          <a:effectLst/>
+        </p:spPr>
+        <p:style>
+          <a:lnRef idx="1">
+            <a:schemeClr val="accent1"/>
+          </a:lnRef>
+          <a:fillRef idx="3">
+            <a:schemeClr val="accent1"/>
+          </a:fillRef>
+          <a:effectRef idx="2">
+            <a:schemeClr val="accent1"/>
+          </a:effectRef>
+          <a:fontRef idx="minor">
+            <a:schemeClr val="lt1"/>
+          </a:fontRef>
+        </p:style>
+        <p:txBody>
+          <a:bodyPr rtlCol="0" anchor="ctr"/>
+          <a:lstStyle/>
+          <a:p>
+            <a:pPr algn="ctr"/>
+          </a:p>
+        </p:txBody>
+      </p:sp>
+      <p:sp>
+        <p:nvSpPr>
+          <p:cNvPr id="10" name="TextBox 9"/>
+          <p:cNvSpPr txBox="1"/>
+          <p:nvPr/>
+        </p:nvSpPr>
+        <p:spPr>
+          <a:xfrm>
+            <a:off x="1014983" y="2167128"/>
+            <a:ext cx="10399471" cy="365760"/>
+          </a:xfrm>
+          <a:prstGeom prst="rect">
+            <a:avLst/>
+          </a:prstGeom>
+          <a:noFill/>
+        </p:spPr>
+        <p:txBody>
+          <a:bodyPr wrap="square" lIns="0" rIns="0" tIns="0" bIns="0">
+            <a:spAutoFit/>
+          </a:bodyPr>
+          <a:lstStyle/>
+          <a:p>
+            <a:pPr>
+              <a:lnSpc>
+                <a:spcPct val="125000"/>
+              </a:lnSpc>
+            </a:pPr>
+            <a:r>
+              <a:rPr sz="1650" b="1">
+                <a:solidFill>
+                  <a:srgbClr val="141C1E"/>
+                </a:solidFill>
+                <a:latin typeface="Segoe UI"/>
+              </a:rPr>
+              <a:t>The cost.  </a:t>
+            </a:r>
+            <a:r>
+              <a:rPr sz="1650">
+                <a:solidFill>
+                  <a:srgbClr val="3A4A4C"/>
+                </a:solidFill>
+                <a:latin typeface="Segoe UI"/>
+              </a:rPr>
+              <a:t>Move it anywhere else and it fails — a new site means new footage collection and a full retraining cycle.</a:t>
+            </a:r>
+          </a:p>
+        </p:txBody>
+      </p:sp>
+      <p:sp>
+        <p:nvSpPr>
+          <p:cNvPr id="11" name="Rectangle 10"/>
+          <p:cNvSpPr/>
+          <p:nvPr/>
+        </p:nvSpPr>
+        <p:spPr>
+          <a:xfrm>
+            <a:off x="777240" y="2880360"/>
+            <a:ext cx="5074920" cy="2286000"/>
+          </a:xfrm>
+          <a:prstGeom prst="rect">
+            <a:avLst/>
+          </a:prstGeom>
+          <a:solidFill>
+            <a:srgbClr val="F5F7F7"/>
+          </a:solidFill>
+          <a:ln>
+            <a:noFill/>
+          </a:ln>
+          <a:effectLst/>
+        </p:spPr>
+        <p:style>
+          <a:lnRef idx="1">
+            <a:schemeClr val="accent1"/>
+          </a:lnRef>
+          <a:fillRef idx="3">
+            <a:schemeClr val="accent1"/>
+          </a:fillRef>
+          <a:effectRef idx="2">
+            <a:schemeClr val="accent1"/>
+          </a:effectRef>
+          <a:fontRef idx="minor">
+            <a:schemeClr val="lt1"/>
+          </a:fontRef>
+        </p:style>
+        <p:txBody>
+          <a:bodyPr rtlCol="0" anchor="ctr"/>
+          <a:lstStyle/>
+          <a:p>
+            <a:pPr algn="ctr"/>
+          </a:p>
+        </p:txBody>
+      </p:sp>
+      <p:sp>
+        <p:nvSpPr>
+          <p:cNvPr id="12" name="TextBox 11"/>
+          <p:cNvSpPr txBox="1"/>
+          <p:nvPr/>
+        </p:nvSpPr>
+        <p:spPr>
+          <a:xfrm>
+            <a:off x="1097280" y="3127248"/>
+            <a:ext cx="4480560" cy="274320"/>
+          </a:xfrm>
+          <a:prstGeom prst="rect">
+            <a:avLst/>
+          </a:prstGeom>
+          <a:noFill/>
+        </p:spPr>
+        <p:txBody>
+          <a:bodyPr wrap="square" lIns="0" rIns="0" tIns="0" bIns="0">
+            <a:spAutoFit/>
+          </a:bodyPr>
+          <a:lstStyle/>
+          <a:p>
+            <a:pPr algn="l">
+              <a:lnSpc>
+                <a:spcPct val="100000"/>
+              </a:lnSpc>
+            </a:pPr>
+            <a:r>
+              <a:rPr sz="1200" b="1" i="0">
+                <a:solidFill>
+                  <a:srgbClr val="0D6B67"/>
+                </a:solidFill>
+                <a:latin typeface="Segoe UI"/>
+              </a:rPr>
+              <a:t>SHOPPING MALL</a:t>
+            </a:r>
+          </a:p>
+        </p:txBody>
+      </p:sp>
+      <p:sp>
+        <p:nvSpPr>
+          <p:cNvPr id="13" name="TextBox 12"/>
+          <p:cNvSpPr txBox="1"/>
+          <p:nvPr/>
+        </p:nvSpPr>
+        <p:spPr>
+          <a:xfrm>
+            <a:off x="1097280" y="3520440"/>
+            <a:ext cx="4480560" cy="1371600"/>
+          </a:xfrm>
+          <a:prstGeom prst="rect">
+            <a:avLst/>
+          </a:prstGeom>
+          <a:noFill/>
+        </p:spPr>
+        <p:txBody>
+          <a:bodyPr wrap="square" lIns="0" rIns="0" tIns="0" bIns="0">
+            <a:spAutoFit/>
+          </a:bodyPr>
+          <a:lstStyle/>
+          <a:p>
+            <a:pPr algn="l">
+              <a:lnSpc>
+                <a:spcPct val="135000"/>
+              </a:lnSpc>
+            </a:pPr>
+            <a:r>
+              <a:rPr sz="1700" b="0" i="0">
+                <a:solidFill>
+                  <a:srgbClr val="141C1E"/>
+                </a:solidFill>
+                <a:latin typeface="Segoe UI"/>
+              </a:rPr>
+              <a:t>A forklift moving through the aisles is
+an immediate alarm.</a:t>
+            </a:r>
+          </a:p>
+        </p:txBody>
+      </p:sp>
+      <p:sp>
+        <p:nvSpPr>
+          <p:cNvPr id="14" name="Rectangle 13"/>
+          <p:cNvSpPr/>
+          <p:nvPr/>
+        </p:nvSpPr>
+        <p:spPr>
+          <a:xfrm>
+            <a:off x="6217920" y="2880360"/>
+            <a:ext cx="5074920" cy="2286000"/>
+          </a:xfrm>
+          <a:prstGeom prst="rect">
+            <a:avLst/>
+          </a:prstGeom>
+          <a:solidFill>
+            <a:srgbClr val="F5F7F7"/>
+          </a:solidFill>
+          <a:ln>
+            <a:noFill/>
+          </a:ln>
+          <a:effectLst/>
+        </p:spPr>
+        <p:style>
+          <a:lnRef idx="1">
+            <a:schemeClr val="accent1"/>
+          </a:lnRef>
+          <a:fillRef idx="3">
+            <a:schemeClr val="accent1"/>
+          </a:fillRef>
+          <a:effectRef idx="2">
+            <a:schemeClr val="accent1"/>
+          </a:effectRef>
+          <a:fontRef idx="minor">
+            <a:schemeClr val="lt1"/>
+          </a:fontRef>
+        </p:style>
+        <p:txBody>
+          <a:bodyPr rtlCol="0" anchor="ctr"/>
+          <a:lstStyle/>
+          <a:p>
+            <a:pPr algn="ctr"/>
+          </a:p>
+        </p:txBody>
+      </p:sp>
+      <p:sp>
+        <p:nvSpPr>
+          <p:cNvPr id="15" name="TextBox 14"/>
+          <p:cNvSpPr txBox="1"/>
+          <p:nvPr/>
+        </p:nvSpPr>
+        <p:spPr>
+          <a:xfrm>
+            <a:off x="6537959" y="3127248"/>
+            <a:ext cx="4480560" cy="274320"/>
+          </a:xfrm>
+          <a:prstGeom prst="rect">
+            <a:avLst/>
+          </a:prstGeom>
+          <a:noFill/>
+        </p:spPr>
+        <p:txBody>
+          <a:bodyPr wrap="square" lIns="0" rIns="0" tIns="0" bIns="0">
+            <a:spAutoFit/>
+          </a:bodyPr>
+          <a:lstStyle/>
+          <a:p>
+            <a:pPr algn="l">
+              <a:lnSpc>
+                <a:spcPct val="100000"/>
+              </a:lnSpc>
+            </a:pPr>
+            <a:r>
+              <a:rPr sz="1200" b="1" i="0">
+                <a:solidFill>
+                  <a:srgbClr val="8A5715"/>
+                </a:solidFill>
+                <a:latin typeface="Segoe UI"/>
+              </a:rPr>
+              <a:t>FACTORY FLOOR</a:t>
+            </a:r>
+          </a:p>
+        </p:txBody>
+      </p:sp>
+      <p:sp>
+        <p:nvSpPr>
+          <p:cNvPr id="16" name="TextBox 15"/>
+          <p:cNvSpPr txBox="1"/>
+          <p:nvPr/>
+        </p:nvSpPr>
+        <p:spPr>
+          <a:xfrm>
+            <a:off x="6537959" y="3520440"/>
+            <a:ext cx="4480560" cy="1371600"/>
+          </a:xfrm>
+          <a:prstGeom prst="rect">
+            <a:avLst/>
+          </a:prstGeom>
+          <a:noFill/>
+        </p:spPr>
+        <p:txBody>
+          <a:bodyPr wrap="square" lIns="0" rIns="0" tIns="0" bIns="0">
+            <a:spAutoFit/>
+          </a:bodyPr>
+          <a:lstStyle/>
+          <a:p>
+            <a:pPr algn="l">
+              <a:lnSpc>
+                <a:spcPct val="135000"/>
+              </a:lnSpc>
+            </a:pPr>
+            <a:r>
+              <a:rPr sz="1700" b="0" i="0">
+                <a:solidFill>
+                  <a:srgbClr val="141C1E"/>
+                </a:solidFill>
+                <a:latin typeface="Segoe UI"/>
+              </a:rPr>
+              <a:t>The identical forklift is completely
+routine.</a:t>
+            </a:r>
+          </a:p>
+        </p:txBody>
+      </p:sp>
+      <p:sp>
+        <p:nvSpPr>
+          <p:cNvPr id="17" name="TextBox 16"/>
+          <p:cNvSpPr txBox="1"/>
+          <p:nvPr/>
+        </p:nvSpPr>
+        <p:spPr>
+          <a:xfrm>
+            <a:off x="777240" y="5440680"/>
+            <a:ext cx="10637215" cy="457200"/>
+          </a:xfrm>
+          <a:prstGeom prst="rect">
+            <a:avLst/>
+          </a:prstGeom>
+          <a:noFill/>
+        </p:spPr>
+        <p:txBody>
+          <a:bodyPr wrap="square" lIns="0" rIns="0" tIns="0" bIns="0">
+            <a:spAutoFit/>
+          </a:bodyPr>
+          <a:lstStyle/>
+          <a:p>
+            <a:pPr algn="ctr">
+              <a:lnSpc>
+                <a:spcPct val="100000"/>
+              </a:lnSpc>
+            </a:pPr>
+            <a:r>
+              <a:rPr sz="1700" b="1" i="0">
+                <a:solidFill>
+                  <a:srgbClr val="141C1E"/>
+                </a:solidFill>
+                <a:latin typeface="Segoe UI"/>
+              </a:rPr>
+              <a:t>Same footage. Opposite answers. The picture did not change — the rule did.</a:t>
+            </a:r>
+          </a:p>
+        </p:txBody>
+      </p:sp>
+    </p:spTree>
+  </p:cSld>
+  <p:clrMapOvr>
+    <a:masterClrMapping/>
+  </p:clrMapOvr>
+</p:sld>
+</file>
+
+<file path=ppt/slides/slide20.xml><?xml version="1.0" encoding="utf-8"?>
+<p:sld xmlns:a="http://schemas.openxmlformats.org/drawingml/2006/main" xmlns:p="http://schemas.openxmlformats.org/presentationml/2006/main" xmlns:r="http://schemas.openxmlformats.org/officeDocument/2006/relationships">
+  <p:cSld>
+    <p:spTree>
+      <p:nvGrpSpPr>
+        <p:cNvPr id="1" name=""/>
+        <p:cNvGrpSpPr/>
+        <p:nvPr/>
+      </p:nvGrpSpPr>
+      <p:grpSpPr/>
+      <p:sp>
+        <p:nvSpPr>
+          <p:cNvPr id="2" name="Rectangle 1"/>
+          <p:cNvSpPr/>
+          <p:nvPr/>
+        </p:nvSpPr>
+        <p:spPr>
+          <a:xfrm>
+            <a:off x="0" y="0"/>
+            <a:ext cx="12191695" cy="6858000"/>
+          </a:xfrm>
+          <a:prstGeom prst="rect">
+            <a:avLst/>
+          </a:prstGeom>
+          <a:solidFill>
+            <a:srgbClr val="FFFFFF"/>
+          </a:solidFill>
+          <a:ln>
+            <a:noFill/>
+          </a:ln>
+          <a:effectLst/>
+        </p:spPr>
+        <p:style>
+          <a:lnRef idx="1">
+            <a:schemeClr val="accent1"/>
+          </a:lnRef>
+          <a:fillRef idx="3">
+            <a:schemeClr val="accent1"/>
+          </a:fillRef>
+          <a:effectRef idx="2">
+            <a:schemeClr val="accent1"/>
+          </a:effectRef>
+          <a:fontRef idx="minor">
+            <a:schemeClr val="lt1"/>
+          </a:fontRef>
+        </p:style>
+        <p:txBody>
+          <a:bodyPr rtlCol="0" anchor="ctr"/>
+          <a:lstStyle/>
+          <a:p>
+            <a:pPr algn="ctr"/>
+          </a:p>
+        </p:txBody>
+      </p:sp>
+      <p:sp>
+        <p:nvSpPr>
+          <p:cNvPr id="3" name="TextBox 2"/>
+          <p:cNvSpPr txBox="1"/>
+          <p:nvPr/>
+        </p:nvSpPr>
+        <p:spPr>
+          <a:xfrm>
+            <a:off x="777240" y="475488"/>
+            <a:ext cx="10637215" cy="228600"/>
+          </a:xfrm>
+          <a:prstGeom prst="rect">
+            <a:avLst/>
+          </a:prstGeom>
+          <a:noFill/>
+        </p:spPr>
+        <p:txBody>
+          <a:bodyPr wrap="square" lIns="0" rIns="0" tIns="0" bIns="0">
+            <a:spAutoFit/>
+          </a:bodyPr>
+          <a:lstStyle/>
+          <a:p>
+            <a:pPr algn="l">
+              <a:lnSpc>
+                <a:spcPct val="100000"/>
+              </a:lnSpc>
+            </a:pPr>
+            <a:r>
+              <a:rPr sz="1100" b="1" i="0">
+                <a:solidFill>
+                  <a:srgbClr val="0D6B67"/>
+                </a:solidFill>
+                <a:latin typeface="Segoe UI"/>
+              </a:rPr>
+              <a:t>NEXT</a:t>
+            </a:r>
+          </a:p>
+        </p:txBody>
+      </p:sp>
+      <p:sp>
+        <p:nvSpPr>
+          <p:cNvPr id="4" name="TextBox 3"/>
+          <p:cNvSpPr txBox="1"/>
+          <p:nvPr/>
+        </p:nvSpPr>
+        <p:spPr>
+          <a:xfrm>
+            <a:off x="777240" y="749808"/>
+            <a:ext cx="10637215" cy="548640"/>
+          </a:xfrm>
+          <a:prstGeom prst="rect">
+            <a:avLst/>
+          </a:prstGeom>
+          <a:noFill/>
+        </p:spPr>
+        <p:txBody>
+          <a:bodyPr wrap="square" lIns="0" rIns="0" tIns="0" bIns="0">
+            <a:spAutoFit/>
+          </a:bodyPr>
+          <a:lstStyle/>
+          <a:p>
+            <a:pPr algn="l">
+              <a:lnSpc>
+                <a:spcPct val="100000"/>
+              </a:lnSpc>
+            </a:pPr>
+            <a:r>
+              <a:rPr sz="2700" b="1" i="0">
+                <a:solidFill>
+                  <a:srgbClr val="141C1E"/>
+                </a:solidFill>
+                <a:latin typeface="Segoe UI"/>
+              </a:rPr>
+              <a:t>Phase 3 plan</a:t>
+            </a:r>
+          </a:p>
+        </p:txBody>
+      </p:sp>
+      <p:sp>
+        <p:nvSpPr>
+          <p:cNvPr id="5" name="Rectangle 4"/>
+          <p:cNvSpPr/>
+          <p:nvPr/>
+        </p:nvSpPr>
+        <p:spPr>
+          <a:xfrm>
+            <a:off x="777240" y="1408176"/>
+            <a:ext cx="1371600" cy="32004"/>
+          </a:xfrm>
+          <a:prstGeom prst="rect">
+            <a:avLst/>
+          </a:prstGeom>
+          <a:solidFill>
+            <a:srgbClr val="0D6B67"/>
+          </a:solidFill>
+          <a:ln>
+            <a:noFill/>
+          </a:ln>
+          <a:effectLst/>
+        </p:spPr>
+        <p:style>
+          <a:lnRef idx="1">
+            <a:schemeClr val="accent1"/>
+          </a:lnRef>
+          <a:fillRef idx="3">
+            <a:schemeClr val="accent1"/>
+          </a:fillRef>
+          <a:effectRef idx="2">
+            <a:schemeClr val="accent1"/>
+          </a:effectRef>
+          <a:fontRef idx="minor">
+            <a:schemeClr val="lt1"/>
+          </a:fontRef>
+        </p:style>
+        <p:txBody>
+          <a:bodyPr rtlCol="0" anchor="ctr"/>
+          <a:lstStyle/>
+          <a:p>
+            <a:pPr algn="ctr"/>
+          </a:p>
+        </p:txBody>
+      </p:sp>
+      <p:sp>
+        <p:nvSpPr>
+          <p:cNvPr id="6" name="TextBox 5"/>
+          <p:cNvSpPr txBox="1"/>
+          <p:nvPr/>
+        </p:nvSpPr>
+        <p:spPr>
+          <a:xfrm>
+            <a:off x="10865815" y="6382512"/>
+            <a:ext cx="548640" cy="228600"/>
+          </a:xfrm>
+          <a:prstGeom prst="rect">
+            <a:avLst/>
+          </a:prstGeom>
+          <a:noFill/>
+        </p:spPr>
+        <p:txBody>
+          <a:bodyPr wrap="square" lIns="0" rIns="0" tIns="0" bIns="0">
+            <a:spAutoFit/>
+          </a:bodyPr>
+          <a:lstStyle/>
+          <a:p>
+            <a:pPr algn="r">
+              <a:lnSpc>
+                <a:spcPct val="100000"/>
+              </a:lnSpc>
+            </a:pPr>
+            <a:r>
+              <a:rPr sz="1000" b="0" i="0">
+                <a:solidFill>
+                  <a:srgbClr val="617274"/>
+                </a:solidFill>
+                <a:latin typeface="Segoe UI"/>
+              </a:rPr>
+              <a:t>19</a:t>
             </a:r>
           </a:p>
         </p:txBody>
@@ -13950,7 +15584,7 @@
 </p:sld>
 </file>
 
-<file path=ppt/slides/slide2.xml><?xml version="1.0" encoding="utf-8"?>
+<file path=ppt/slides/slide21.xml><?xml version="1.0" encoding="utf-8"?>
 <p:sld xmlns:a="http://schemas.openxmlformats.org/drawingml/2006/main" xmlns:p="http://schemas.openxmlformats.org/presentationml/2006/main" xmlns:r="http://schemas.openxmlformats.org/officeDocument/2006/relationships">
   <p:cSld>
     <p:spTree>
@@ -14038,7 +15672,7 @@
                 </a:solidFill>
                 <a:latin typeface="Segoe UI"/>
               </a:rPr>
-              <a:t>THE PROBLEM</a:t>
+              <a:t>PHASE 2</a:t>
             </a:r>
           </a:p>
         </p:txBody>
@@ -14077,7 +15711,7 @@
                 </a:solidFill>
                 <a:latin typeface="Segoe UI"/>
               </a:rPr>
-              <a:t>A detector is tied to the place it learned</a:t>
+              <a:t>Summary</a:t>
             </a:r>
           </a:p>
         </p:txBody>
@@ -14160,7 +15794,7 @@
                 </a:solidFill>
                 <a:latin typeface="Segoe UI"/>
               </a:rPr>
-              <a:t>1</a:t>
+              <a:t>20</a:t>
             </a:r>
           </a:p>
         </p:txBody>
@@ -14173,192 +15807,8 @@
         </p:nvSpPr>
         <p:spPr>
           <a:xfrm>
-            <a:off x="777240" y="1874519"/>
-            <a:ext cx="68580" cy="68580"/>
-          </a:xfrm>
-          <a:prstGeom prst="rect">
-            <a:avLst/>
-          </a:prstGeom>
-          <a:solidFill>
-            <a:srgbClr val="0D6B67"/>
-          </a:solidFill>
-          <a:ln>
-            <a:noFill/>
-          </a:ln>
-          <a:effectLst/>
-        </p:spPr>
-        <p:style>
-          <a:lnRef idx="1">
-            <a:schemeClr val="accent1"/>
-          </a:lnRef>
-          <a:fillRef idx="3">
-            <a:schemeClr val="accent1"/>
-          </a:fillRef>
-          <a:effectRef idx="2">
-            <a:schemeClr val="accent1"/>
-          </a:effectRef>
-          <a:fontRef idx="minor">
-            <a:schemeClr val="lt1"/>
-          </a:fontRef>
-        </p:style>
-        <p:txBody>
-          <a:bodyPr rtlCol="0" anchor="ctr"/>
-          <a:lstStyle/>
-          <a:p>
-            <a:pPr algn="ctr"/>
-          </a:p>
-        </p:txBody>
-      </p:sp>
-      <p:sp>
-        <p:nvSpPr>
-          <p:cNvPr id="8" name="TextBox 7"/>
-          <p:cNvSpPr txBox="1"/>
-          <p:nvPr/>
-        </p:nvSpPr>
-        <p:spPr>
-          <a:xfrm>
-            <a:off x="1014983" y="1746504"/>
-            <a:ext cx="10399471" cy="365760"/>
-          </a:xfrm>
-          <a:prstGeom prst="rect">
-            <a:avLst/>
-          </a:prstGeom>
-          <a:noFill/>
-        </p:spPr>
-        <p:txBody>
-          <a:bodyPr wrap="square" lIns="0" rIns="0" tIns="0" bIns="0">
-            <a:spAutoFit/>
-          </a:bodyPr>
-          <a:lstStyle/>
-          <a:p>
-            <a:pPr>
-              <a:lnSpc>
-                <a:spcPct val="125000"/>
-              </a:lnSpc>
-            </a:pPr>
-            <a:r>
-              <a:rPr sz="1650" b="1">
-                <a:solidFill>
-                  <a:srgbClr val="141C1E"/>
-                </a:solidFill>
-                <a:latin typeface="Segoe UI"/>
-              </a:rPr>
-              <a:t>Standard approach.  </a:t>
-            </a:r>
-            <a:r>
-              <a:rPr sz="1650">
-                <a:solidFill>
-                  <a:srgbClr val="3A4A4C"/>
-                </a:solidFill>
-                <a:latin typeface="Segoe UI"/>
-              </a:rPr>
-              <a:t>Show the system weeks of ordinary footage from one camera until it learns what normal looks like there.</a:t>
-            </a:r>
-          </a:p>
-        </p:txBody>
-      </p:sp>
-      <p:sp>
-        <p:nvSpPr>
-          <p:cNvPr id="9" name="Rectangle 8"/>
-          <p:cNvSpPr/>
-          <p:nvPr/>
-        </p:nvSpPr>
-        <p:spPr>
-          <a:xfrm>
-            <a:off x="777240" y="2295144"/>
-            <a:ext cx="68580" cy="68580"/>
-          </a:xfrm>
-          <a:prstGeom prst="rect">
-            <a:avLst/>
-          </a:prstGeom>
-          <a:solidFill>
-            <a:srgbClr val="0D6B67"/>
-          </a:solidFill>
-          <a:ln>
-            <a:noFill/>
-          </a:ln>
-          <a:effectLst/>
-        </p:spPr>
-        <p:style>
-          <a:lnRef idx="1">
-            <a:schemeClr val="accent1"/>
-          </a:lnRef>
-          <a:fillRef idx="3">
-            <a:schemeClr val="accent1"/>
-          </a:fillRef>
-          <a:effectRef idx="2">
-            <a:schemeClr val="accent1"/>
-          </a:effectRef>
-          <a:fontRef idx="minor">
-            <a:schemeClr val="lt1"/>
-          </a:fontRef>
-        </p:style>
-        <p:txBody>
-          <a:bodyPr rtlCol="0" anchor="ctr"/>
-          <a:lstStyle/>
-          <a:p>
-            <a:pPr algn="ctr"/>
-          </a:p>
-        </p:txBody>
-      </p:sp>
-      <p:sp>
-        <p:nvSpPr>
-          <p:cNvPr id="10" name="TextBox 9"/>
-          <p:cNvSpPr txBox="1"/>
-          <p:nvPr/>
-        </p:nvSpPr>
-        <p:spPr>
-          <a:xfrm>
-            <a:off x="1014983" y="2167128"/>
-            <a:ext cx="10399471" cy="365760"/>
-          </a:xfrm>
-          <a:prstGeom prst="rect">
-            <a:avLst/>
-          </a:prstGeom>
-          <a:noFill/>
-        </p:spPr>
-        <p:txBody>
-          <a:bodyPr wrap="square" lIns="0" rIns="0" tIns="0" bIns="0">
-            <a:spAutoFit/>
-          </a:bodyPr>
-          <a:lstStyle/>
-          <a:p>
-            <a:pPr>
-              <a:lnSpc>
-                <a:spcPct val="125000"/>
-              </a:lnSpc>
-            </a:pPr>
-            <a:r>
-              <a:rPr sz="1650" b="1">
-                <a:solidFill>
-                  <a:srgbClr val="141C1E"/>
-                </a:solidFill>
-                <a:latin typeface="Segoe UI"/>
-              </a:rPr>
-              <a:t>The cost.  </a:t>
-            </a:r>
-            <a:r>
-              <a:rPr sz="1650">
-                <a:solidFill>
-                  <a:srgbClr val="3A4A4C"/>
-                </a:solidFill>
-                <a:latin typeface="Segoe UI"/>
-              </a:rPr>
-              <a:t>Move it anywhere else and it fails — a new site means new footage collection and a full retraining cycle.</a:t>
-            </a:r>
-          </a:p>
-        </p:txBody>
-      </p:sp>
-      <p:sp>
-        <p:nvSpPr>
-          <p:cNvPr id="11" name="Rectangle 10"/>
-          <p:cNvSpPr/>
-          <p:nvPr/>
-        </p:nvSpPr>
-        <p:spPr>
-          <a:xfrm>
-            <a:off x="777240" y="2880360"/>
-            <a:ext cx="5074920" cy="2286000"/>
+            <a:off x="777240" y="1783080"/>
+            <a:ext cx="10637215" cy="786384"/>
           </a:xfrm>
           <a:prstGeom prst="rect">
             <a:avLst/>
@@ -14395,14 +15845,14 @@
       </p:sp>
       <p:sp>
         <p:nvSpPr>
-          <p:cNvPr id="12" name="TextBox 11"/>
+          <p:cNvPr id="8" name="TextBox 7"/>
           <p:cNvSpPr txBox="1"/>
           <p:nvPr/>
         </p:nvSpPr>
         <p:spPr>
           <a:xfrm>
-            <a:off x="1097280" y="3127248"/>
-            <a:ext cx="4480560" cy="274320"/>
+            <a:off x="1051560" y="2002536"/>
+            <a:ext cx="457200" cy="365760"/>
           </a:xfrm>
           <a:prstGeom prst="rect">
             <a:avLst/>
@@ -14421,27 +15871,27 @@
               </a:lnSpc>
             </a:pPr>
             <a:r>
-              <a:rPr sz="1200" b="1" i="0">
+              <a:rPr sz="2200" b="1" i="0">
                 <a:solidFill>
                   <a:srgbClr val="0D6B67"/>
                 </a:solidFill>
                 <a:latin typeface="Segoe UI"/>
               </a:rPr>
-              <a:t>SHOPPING MALL</a:t>
-            </a:r>
-          </a:p>
-        </p:txBody>
-      </p:sp>
-      <p:sp>
-        <p:nvSpPr>
-          <p:cNvPr id="13" name="TextBox 12"/>
+              <a:t>1</a:t>
+            </a:r>
+          </a:p>
+        </p:txBody>
+      </p:sp>
+      <p:sp>
+        <p:nvSpPr>
+          <p:cNvPr id="9" name="TextBox 8"/>
           <p:cNvSpPr txBox="1"/>
           <p:nvPr/>
         </p:nvSpPr>
         <p:spPr>
           <a:xfrm>
-            <a:off x="1097280" y="3520440"/>
-            <a:ext cx="4480560" cy="1371600"/>
+            <a:off x="1645919" y="1892807"/>
+            <a:ext cx="2286000" cy="274320"/>
           </a:xfrm>
           <a:prstGeom prst="rect">
             <a:avLst/>
@@ -14456,32 +15906,231 @@
           <a:p>
             <a:pPr algn="l">
               <a:lnSpc>
-                <a:spcPct val="135000"/>
+                <a:spcPct val="100000"/>
               </a:lnSpc>
             </a:pPr>
             <a:r>
-              <a:rPr sz="1700" b="0" i="0">
+              <a:rPr sz="1400" b="1" i="0">
                 <a:solidFill>
                   <a:srgbClr val="141C1E"/>
                 </a:solidFill>
                 <a:latin typeface="Segoe UI"/>
               </a:rPr>
-              <a:t>A forklift moving through the aisles is
-an immediate alarm.</a:t>
-            </a:r>
-          </a:p>
-        </p:txBody>
-      </p:sp>
-      <p:sp>
-        <p:nvSpPr>
-          <p:cNvPr id="14" name="Rectangle 13"/>
+              <a:t>The gap</a:t>
+            </a:r>
+          </a:p>
+        </p:txBody>
+      </p:sp>
+      <p:sp>
+        <p:nvSpPr>
+          <p:cNvPr id="10" name="TextBox 9"/>
+          <p:cNvSpPr txBox="1"/>
+          <p:nvPr/>
+        </p:nvSpPr>
+        <p:spPr>
+          <a:xfrm>
+            <a:off x="1645919" y="2167128"/>
+            <a:ext cx="9509760" cy="365760"/>
+          </a:xfrm>
+          <a:prstGeom prst="rect">
+            <a:avLst/>
+          </a:prstGeom>
+          <a:noFill/>
+        </p:spPr>
+        <p:txBody>
+          <a:bodyPr wrap="square" lIns="0" rIns="0" tIns="0" bIns="0">
+            <a:spAutoFit/>
+          </a:bodyPr>
+          <a:lstStyle/>
+          <a:p>
+            <a:pPr algn="l">
+              <a:lnSpc>
+                <a:spcPct val="120000"/>
+              </a:lnSpc>
+            </a:pPr>
+            <a:r>
+              <a:rPr sz="1350" b="0" i="0">
+                <a:solidFill>
+                  <a:srgbClr val="3A4A4C"/>
+                </a:solidFill>
+                <a:latin typeface="Segoe UI"/>
+              </a:rPr>
+              <a:t>Domain adaptation research targets covariate shift by explicit scoping. Anomaly detection is dominated by concept shift.</a:t>
+            </a:r>
+          </a:p>
+        </p:txBody>
+      </p:sp>
+      <p:sp>
+        <p:nvSpPr>
+          <p:cNvPr id="11" name="Rectangle 10"/>
           <p:cNvSpPr/>
           <p:nvPr/>
         </p:nvSpPr>
         <p:spPr>
           <a:xfrm>
-            <a:off x="6217920" y="2880360"/>
-            <a:ext cx="5074920" cy="2286000"/>
+            <a:off x="777240" y="2606040"/>
+            <a:ext cx="10637215" cy="786384"/>
+          </a:xfrm>
+          <a:prstGeom prst="rect">
+            <a:avLst/>
+          </a:prstGeom>
+          <a:solidFill>
+            <a:srgbClr val="FFFFFF"/>
+          </a:solidFill>
+          <a:ln>
+            <a:noFill/>
+          </a:ln>
+          <a:effectLst/>
+        </p:spPr>
+        <p:style>
+          <a:lnRef idx="1">
+            <a:schemeClr val="accent1"/>
+          </a:lnRef>
+          <a:fillRef idx="3">
+            <a:schemeClr val="accent1"/>
+          </a:fillRef>
+          <a:effectRef idx="2">
+            <a:schemeClr val="accent1"/>
+          </a:effectRef>
+          <a:fontRef idx="minor">
+            <a:schemeClr val="lt1"/>
+          </a:fontRef>
+        </p:style>
+        <p:txBody>
+          <a:bodyPr rtlCol="0" anchor="ctr"/>
+          <a:lstStyle/>
+          <a:p>
+            <a:pPr algn="ctr"/>
+          </a:p>
+        </p:txBody>
+      </p:sp>
+      <p:sp>
+        <p:nvSpPr>
+          <p:cNvPr id="12" name="TextBox 11"/>
+          <p:cNvSpPr txBox="1"/>
+          <p:nvPr/>
+        </p:nvSpPr>
+        <p:spPr>
+          <a:xfrm>
+            <a:off x="1051560" y="2825496"/>
+            <a:ext cx="457200" cy="365760"/>
+          </a:xfrm>
+          <a:prstGeom prst="rect">
+            <a:avLst/>
+          </a:prstGeom>
+          <a:noFill/>
+        </p:spPr>
+        <p:txBody>
+          <a:bodyPr wrap="square" lIns="0" rIns="0" tIns="0" bIns="0">
+            <a:spAutoFit/>
+          </a:bodyPr>
+          <a:lstStyle/>
+          <a:p>
+            <a:pPr algn="l">
+              <a:lnSpc>
+                <a:spcPct val="100000"/>
+              </a:lnSpc>
+            </a:pPr>
+            <a:r>
+              <a:rPr sz="2200" b="1" i="0">
+                <a:solidFill>
+                  <a:srgbClr val="0D6B67"/>
+                </a:solidFill>
+                <a:latin typeface="Segoe UI"/>
+              </a:rPr>
+              <a:t>2</a:t>
+            </a:r>
+          </a:p>
+        </p:txBody>
+      </p:sp>
+      <p:sp>
+        <p:nvSpPr>
+          <p:cNvPr id="13" name="TextBox 12"/>
+          <p:cNvSpPr txBox="1"/>
+          <p:nvPr/>
+        </p:nvSpPr>
+        <p:spPr>
+          <a:xfrm>
+            <a:off x="1645919" y="2715768"/>
+            <a:ext cx="2286000" cy="274320"/>
+          </a:xfrm>
+          <a:prstGeom prst="rect">
+            <a:avLst/>
+          </a:prstGeom>
+          <a:noFill/>
+        </p:spPr>
+        <p:txBody>
+          <a:bodyPr wrap="square" lIns="0" rIns="0" tIns="0" bIns="0">
+            <a:spAutoFit/>
+          </a:bodyPr>
+          <a:lstStyle/>
+          <a:p>
+            <a:pPr algn="l">
+              <a:lnSpc>
+                <a:spcPct val="100000"/>
+              </a:lnSpc>
+            </a:pPr>
+            <a:r>
+              <a:rPr sz="1400" b="1" i="0">
+                <a:solidFill>
+                  <a:srgbClr val="141C1E"/>
+                </a:solidFill>
+                <a:latin typeface="Segoe UI"/>
+              </a:rPr>
+              <a:t>The method</a:t>
+            </a:r>
+          </a:p>
+        </p:txBody>
+      </p:sp>
+      <p:sp>
+        <p:nvSpPr>
+          <p:cNvPr id="14" name="TextBox 13"/>
+          <p:cNvSpPr txBox="1"/>
+          <p:nvPr/>
+        </p:nvSpPr>
+        <p:spPr>
+          <a:xfrm>
+            <a:off x="1645919" y="2990088"/>
+            <a:ext cx="9509760" cy="365760"/>
+          </a:xfrm>
+          <a:prstGeom prst="rect">
+            <a:avLst/>
+          </a:prstGeom>
+          <a:noFill/>
+        </p:spPr>
+        <p:txBody>
+          <a:bodyPr wrap="square" lIns="0" rIns="0" tIns="0" bIns="0">
+            <a:spAutoFit/>
+          </a:bodyPr>
+          <a:lstStyle/>
+          <a:p>
+            <a:pPr algn="l">
+              <a:lnSpc>
+                <a:spcPct val="120000"/>
+              </a:lnSpc>
+            </a:pPr>
+            <a:r>
+              <a:rPr sz="1350" b="0" i="0">
+                <a:solidFill>
+                  <a:srgbClr val="3A4A4C"/>
+                </a:solidFill>
+                <a:latin typeface="Segoe UI"/>
+              </a:rPr>
+              <a:t>Every model frozen; adaptation carried entirely by a sentence — which is what makes the claim identifiable.</a:t>
+            </a:r>
+          </a:p>
+        </p:txBody>
+      </p:sp>
+      <p:sp>
+        <p:nvSpPr>
+          <p:cNvPr id="15" name="Rectangle 14"/>
+          <p:cNvSpPr/>
+          <p:nvPr/>
+        </p:nvSpPr>
+        <p:spPr>
+          <a:xfrm>
+            <a:off x="777240" y="3429000"/>
+            <a:ext cx="10637215" cy="786384"/>
           </a:xfrm>
           <a:prstGeom prst="rect">
             <a:avLst/>
@@ -14518,14 +16167,14 @@
       </p:sp>
       <p:sp>
         <p:nvSpPr>
-          <p:cNvPr id="15" name="TextBox 14"/>
+          <p:cNvPr id="16" name="TextBox 15"/>
           <p:cNvSpPr txBox="1"/>
           <p:nvPr/>
         </p:nvSpPr>
         <p:spPr>
           <a:xfrm>
-            <a:off x="6537959" y="3127248"/>
-            <a:ext cx="4480560" cy="274320"/>
+            <a:off x="1051560" y="3648456"/>
+            <a:ext cx="457200" cy="365760"/>
           </a:xfrm>
           <a:prstGeom prst="rect">
             <a:avLst/>
@@ -14544,27 +16193,27 @@
               </a:lnSpc>
             </a:pPr>
             <a:r>
-              <a:rPr sz="1200" b="1" i="0">
-                <a:solidFill>
-                  <a:srgbClr val="8A5715"/>
+              <a:rPr sz="2200" b="1" i="0">
+                <a:solidFill>
+                  <a:srgbClr val="0D6B67"/>
                 </a:solidFill>
                 <a:latin typeface="Segoe UI"/>
               </a:rPr>
-              <a:t>FACTORY FLOOR</a:t>
-            </a:r>
-          </a:p>
-        </p:txBody>
-      </p:sp>
-      <p:sp>
-        <p:nvSpPr>
-          <p:cNvPr id="16" name="TextBox 15"/>
+              <a:t>3</a:t>
+            </a:r>
+          </a:p>
+        </p:txBody>
+      </p:sp>
+      <p:sp>
+        <p:nvSpPr>
+          <p:cNvPr id="17" name="TextBox 16"/>
           <p:cNvSpPr txBox="1"/>
           <p:nvPr/>
         </p:nvSpPr>
         <p:spPr>
           <a:xfrm>
-            <a:off x="6537959" y="3520440"/>
-            <a:ext cx="4480560" cy="1371600"/>
+            <a:off x="1645919" y="3538728"/>
+            <a:ext cx="2286000" cy="274320"/>
           </a:xfrm>
           <a:prstGeom prst="rect">
             <a:avLst/>
@@ -14578,90 +16227,71 @@
           <a:lstStyle/>
           <a:p>
             <a:pPr algn="l">
-              <a:lnSpc>
-                <a:spcPct val="135000"/>
-              </a:lnSpc>
-            </a:pPr>
-            <a:r>
-              <a:rPr sz="1700" b="0" i="0">
-                <a:solidFill>
-                  <a:srgbClr val="141C1E"/>
-                </a:solidFill>
-                <a:latin typeface="Segoe UI"/>
-              </a:rPr>
-              <a:t>The identical forklift is completely
-routine.</a:t>
-            </a:r>
-          </a:p>
-        </p:txBody>
-      </p:sp>
-      <p:sp>
-        <p:nvSpPr>
-          <p:cNvPr id="17" name="TextBox 16"/>
-          <p:cNvSpPr txBox="1"/>
-          <p:nvPr/>
-        </p:nvSpPr>
-        <p:spPr>
-          <a:xfrm>
-            <a:off x="777240" y="5440680"/>
-            <a:ext cx="10637215" cy="457200"/>
-          </a:xfrm>
-          <a:prstGeom prst="rect">
-            <a:avLst/>
-          </a:prstGeom>
-          <a:noFill/>
-        </p:spPr>
-        <p:txBody>
-          <a:bodyPr wrap="square" lIns="0" rIns="0" tIns="0" bIns="0">
-            <a:spAutoFit/>
-          </a:bodyPr>
-          <a:lstStyle/>
-          <a:p>
-            <a:pPr algn="ctr">
               <a:lnSpc>
                 <a:spcPct val="100000"/>
               </a:lnSpc>
             </a:pPr>
             <a:r>
-              <a:rPr sz="1700" b="1" i="0">
+              <a:rPr sz="1400" b="1" i="0">
                 <a:solidFill>
                   <a:srgbClr val="141C1E"/>
                 </a:solidFill>
                 <a:latin typeface="Segoe UI"/>
               </a:rPr>
-              <a:t>Same footage. Opposite answers. The picture did not change — the rule did.</a:t>
-            </a:r>
-          </a:p>
-        </p:txBody>
-      </p:sp>
-    </p:spTree>
-  </p:cSld>
-  <p:clrMapOvr>
-    <a:masterClrMapping/>
-  </p:clrMapOvr>
-</p:sld>
-</file>
-
-<file path=ppt/slides/slide20.xml><?xml version="1.0" encoding="utf-8"?>
-<p:sld xmlns:a="http://schemas.openxmlformats.org/drawingml/2006/main" xmlns:p="http://schemas.openxmlformats.org/presentationml/2006/main" xmlns:r="http://schemas.openxmlformats.org/officeDocument/2006/relationships">
-  <p:cSld>
-    <p:spTree>
-      <p:nvGrpSpPr>
-        <p:cNvPr id="1" name=""/>
-        <p:cNvGrpSpPr/>
-        <p:nvPr/>
-      </p:nvGrpSpPr>
-      <p:grpSpPr/>
-      <p:sp>
-        <p:nvSpPr>
-          <p:cNvPr id="2" name="Rectangle 1"/>
+              <a:t>The result</a:t>
+            </a:r>
+          </a:p>
+        </p:txBody>
+      </p:sp>
+      <p:sp>
+        <p:nvSpPr>
+          <p:cNvPr id="18" name="TextBox 17"/>
+          <p:cNvSpPr txBox="1"/>
+          <p:nvPr/>
+        </p:nvSpPr>
+        <p:spPr>
+          <a:xfrm>
+            <a:off x="1645919" y="3813048"/>
+            <a:ext cx="9509760" cy="365760"/>
+          </a:xfrm>
+          <a:prstGeom prst="rect">
+            <a:avLst/>
+          </a:prstGeom>
+          <a:noFill/>
+        </p:spPr>
+        <p:txBody>
+          <a:bodyPr wrap="square" lIns="0" rIns="0" tIns="0" bIns="0">
+            <a:spAutoFit/>
+          </a:bodyPr>
+          <a:lstStyle/>
+          <a:p>
+            <a:pPr algn="l">
+              <a:lnSpc>
+                <a:spcPct val="120000"/>
+              </a:lnSpc>
+            </a:pPr>
+            <a:r>
+              <a:rPr sz="1350" b="0" i="0">
+                <a:solidFill>
+                  <a:srgbClr val="3A4A4C"/>
+                </a:solidFill>
+                <a:latin typeface="Segoe UI"/>
+              </a:rPr>
+              <a:t>0.734 AUROC on ShanghaiTech with no training, and a wrong description costs 0.105 — evidence the text is load-bearing.</a:t>
+            </a:r>
+          </a:p>
+        </p:txBody>
+      </p:sp>
+      <p:sp>
+        <p:nvSpPr>
+          <p:cNvPr id="19" name="Rectangle 18"/>
           <p:cNvSpPr/>
           <p:nvPr/>
         </p:nvSpPr>
         <p:spPr>
           <a:xfrm>
-            <a:off x="0" y="0"/>
-            <a:ext cx="12191695" cy="6858000"/>
+            <a:off x="777240" y="4251960"/>
+            <a:ext cx="10637215" cy="786384"/>
           </a:xfrm>
           <a:prstGeom prst="rect">
             <a:avLst/>
@@ -14698,14 +16328,14 @@
       </p:sp>
       <p:sp>
         <p:nvSpPr>
-          <p:cNvPr id="3" name="TextBox 2"/>
+          <p:cNvPr id="20" name="TextBox 19"/>
           <p:cNvSpPr txBox="1"/>
           <p:nvPr/>
         </p:nvSpPr>
         <p:spPr>
           <a:xfrm>
-            <a:off x="777240" y="475488"/>
-            <a:ext cx="10637215" cy="228600"/>
+            <a:off x="1051560" y="4471416"/>
+            <a:ext cx="457200" cy="365760"/>
           </a:xfrm>
           <a:prstGeom prst="rect">
             <a:avLst/>
@@ -14724,27 +16354,27 @@
               </a:lnSpc>
             </a:pPr>
             <a:r>
-              <a:rPr sz="1100" b="1" i="0">
+              <a:rPr sz="2200" b="1" i="0">
                 <a:solidFill>
                   <a:srgbClr val="0D6B67"/>
                 </a:solidFill>
                 <a:latin typeface="Segoe UI"/>
               </a:rPr>
-              <a:t>PHASE 2</a:t>
-            </a:r>
-          </a:p>
-        </p:txBody>
-      </p:sp>
-      <p:sp>
-        <p:nvSpPr>
-          <p:cNvPr id="4" name="TextBox 3"/>
+              <a:t>4</a:t>
+            </a:r>
+          </a:p>
+        </p:txBody>
+      </p:sp>
+      <p:sp>
+        <p:nvSpPr>
+          <p:cNvPr id="21" name="TextBox 20"/>
           <p:cNvSpPr txBox="1"/>
           <p:nvPr/>
         </p:nvSpPr>
         <p:spPr>
           <a:xfrm>
-            <a:off x="777240" y="749808"/>
-            <a:ext cx="10637215" cy="548640"/>
+            <a:off x="1645919" y="4361688"/>
+            <a:ext cx="2286000" cy="274320"/>
           </a:xfrm>
           <a:prstGeom prst="rect">
             <a:avLst/>
@@ -14763,71 +16393,27 @@
               </a:lnSpc>
             </a:pPr>
             <a:r>
-              <a:rPr sz="2700" b="1" i="0">
+              <a:rPr sz="1400" b="1" i="0">
                 <a:solidFill>
                   <a:srgbClr val="141C1E"/>
                 </a:solidFill>
                 <a:latin typeface="Segoe UI"/>
               </a:rPr>
-              <a:t>Summary</a:t>
-            </a:r>
-          </a:p>
-        </p:txBody>
-      </p:sp>
-      <p:sp>
-        <p:nvSpPr>
-          <p:cNvPr id="5" name="Rectangle 4"/>
-          <p:cNvSpPr/>
-          <p:nvPr/>
-        </p:nvSpPr>
-        <p:spPr>
-          <a:xfrm>
-            <a:off x="777240" y="1408176"/>
-            <a:ext cx="1371600" cy="32004"/>
-          </a:xfrm>
-          <a:prstGeom prst="rect">
-            <a:avLst/>
-          </a:prstGeom>
-          <a:solidFill>
-            <a:srgbClr val="0D6B67"/>
-          </a:solidFill>
-          <a:ln>
-            <a:noFill/>
-          </a:ln>
-          <a:effectLst/>
-        </p:spPr>
-        <p:style>
-          <a:lnRef idx="1">
-            <a:schemeClr val="accent1"/>
-          </a:lnRef>
-          <a:fillRef idx="3">
-            <a:schemeClr val="accent1"/>
-          </a:fillRef>
-          <a:effectRef idx="2">
-            <a:schemeClr val="accent1"/>
-          </a:effectRef>
-          <a:fontRef idx="minor">
-            <a:schemeClr val="lt1"/>
-          </a:fontRef>
-        </p:style>
-        <p:txBody>
-          <a:bodyPr rtlCol="0" anchor="ctr"/>
-          <a:lstStyle/>
-          <a:p>
-            <a:pPr algn="ctr"/>
-          </a:p>
-        </p:txBody>
-      </p:sp>
-      <p:sp>
-        <p:nvSpPr>
-          <p:cNvPr id="6" name="TextBox 5"/>
+              <a:t>The finding</a:t>
+            </a:r>
+          </a:p>
+        </p:txBody>
+      </p:sp>
+      <p:sp>
+        <p:nvSpPr>
+          <p:cNvPr id="22" name="TextBox 21"/>
           <p:cNvSpPr txBox="1"/>
           <p:nvPr/>
         </p:nvSpPr>
         <p:spPr>
           <a:xfrm>
-            <a:off x="10865815" y="6382512"/>
-            <a:ext cx="548640" cy="228600"/>
+            <a:off x="1645919" y="4636008"/>
+            <a:ext cx="9509760" cy="365760"/>
           </a:xfrm>
           <a:prstGeom prst="rect">
             <a:avLst/>
@@ -14840,32 +16426,32 @@
           </a:bodyPr>
           <a:lstStyle/>
           <a:p>
-            <a:pPr algn="r">
+            <a:pPr algn="l">
               <a:lnSpc>
-                <a:spcPct val="100000"/>
+                <a:spcPct val="120000"/>
               </a:lnSpc>
             </a:pPr>
             <a:r>
-              <a:rPr sz="1000" b="0" i="0">
-                <a:solidFill>
-                  <a:srgbClr val="617274"/>
+              <a:rPr sz="1350" b="0" i="0">
+                <a:solidFill>
+                  <a:srgbClr val="3A4A4C"/>
                 </a:solidFill>
                 <a:latin typeface="Segoe UI"/>
               </a:rPr>
-              <a:t>19</a:t>
-            </a:r>
-          </a:p>
-        </p:txBody>
-      </p:sp>
-      <p:sp>
-        <p:nvSpPr>
-          <p:cNvPr id="7" name="Rectangle 6"/>
+              <a:t>Where the description is injected dominates what it says, to the point of reversing the effect. Not in the literature.</a:t>
+            </a:r>
+          </a:p>
+        </p:txBody>
+      </p:sp>
+      <p:sp>
+        <p:nvSpPr>
+          <p:cNvPr id="23" name="Rectangle 22"/>
           <p:cNvSpPr/>
           <p:nvPr/>
         </p:nvSpPr>
         <p:spPr>
           <a:xfrm>
-            <a:off x="777240" y="1783080"/>
+            <a:off x="777240" y="5074920"/>
             <a:ext cx="10637215" cy="786384"/>
           </a:xfrm>
           <a:prstGeom prst="rect">
@@ -14903,13 +16489,13 @@
       </p:sp>
       <p:sp>
         <p:nvSpPr>
-          <p:cNvPr id="8" name="TextBox 7"/>
+          <p:cNvPr id="24" name="TextBox 23"/>
           <p:cNvSpPr txBox="1"/>
           <p:nvPr/>
         </p:nvSpPr>
         <p:spPr>
           <a:xfrm>
-            <a:off x="1051560" y="2002536"/>
+            <a:off x="1051560" y="5294376"/>
             <a:ext cx="457200" cy="365760"/>
           </a:xfrm>
           <a:prstGeom prst="rect">
@@ -14935,20 +16521,20 @@
                 </a:solidFill>
                 <a:latin typeface="Segoe UI"/>
               </a:rPr>
-              <a:t>1</a:t>
-            </a:r>
-          </a:p>
-        </p:txBody>
-      </p:sp>
-      <p:sp>
-        <p:nvSpPr>
-          <p:cNvPr id="9" name="TextBox 8"/>
+              <a:t>5</a:t>
+            </a:r>
+          </a:p>
+        </p:txBody>
+      </p:sp>
+      <p:sp>
+        <p:nvSpPr>
+          <p:cNvPr id="25" name="TextBox 24"/>
           <p:cNvSpPr txBox="1"/>
           <p:nvPr/>
         </p:nvSpPr>
         <p:spPr>
           <a:xfrm>
-            <a:off x="1645919" y="1892807"/>
+            <a:off x="1645919" y="5184648"/>
             <a:ext cx="2286000" cy="274320"/>
           </a:xfrm>
           <a:prstGeom prst="rect">
@@ -14974,20 +16560,20 @@
                 </a:solidFill>
                 <a:latin typeface="Segoe UI"/>
               </a:rPr>
-              <a:t>The gap</a:t>
-            </a:r>
-          </a:p>
-        </p:txBody>
-      </p:sp>
-      <p:sp>
-        <p:nvSpPr>
-          <p:cNvPr id="10" name="TextBox 9"/>
+              <a:t>The boundary</a:t>
+            </a:r>
+          </a:p>
+        </p:txBody>
+      </p:sp>
+      <p:sp>
+        <p:nvSpPr>
+          <p:cNvPr id="26" name="TextBox 25"/>
           <p:cNvSpPr txBox="1"/>
           <p:nvPr/>
         </p:nvSpPr>
         <p:spPr>
           <a:xfrm>
-            <a:off x="1645919" y="2167128"/>
+            <a:off x="1645919" y="5458968"/>
             <a:ext cx="9509760" cy="365760"/>
           </a:xfrm>
           <a:prstGeom prst="rect">
@@ -15013,651 +16599,7 @@
                 </a:solidFill>
                 <a:latin typeface="Segoe UI"/>
               </a:rPr>
-              <a:t>Domain adaptation research targets covariate shift by explicit scoping. Anomaly detection is dominated by concept shift.</a:t>
-            </a:r>
-          </a:p>
-        </p:txBody>
-      </p:sp>
-      <p:sp>
-        <p:nvSpPr>
-          <p:cNvPr id="11" name="Rectangle 10"/>
-          <p:cNvSpPr/>
-          <p:nvPr/>
-        </p:nvSpPr>
-        <p:spPr>
-          <a:xfrm>
-            <a:off x="777240" y="2606040"/>
-            <a:ext cx="10637215" cy="786384"/>
-          </a:xfrm>
-          <a:prstGeom prst="rect">
-            <a:avLst/>
-          </a:prstGeom>
-          <a:solidFill>
-            <a:srgbClr val="FFFFFF"/>
-          </a:solidFill>
-          <a:ln>
-            <a:noFill/>
-          </a:ln>
-          <a:effectLst/>
-        </p:spPr>
-        <p:style>
-          <a:lnRef idx="1">
-            <a:schemeClr val="accent1"/>
-          </a:lnRef>
-          <a:fillRef idx="3">
-            <a:schemeClr val="accent1"/>
-          </a:fillRef>
-          <a:effectRef idx="2">
-            <a:schemeClr val="accent1"/>
-          </a:effectRef>
-          <a:fontRef idx="minor">
-            <a:schemeClr val="lt1"/>
-          </a:fontRef>
-        </p:style>
-        <p:txBody>
-          <a:bodyPr rtlCol="0" anchor="ctr"/>
-          <a:lstStyle/>
-          <a:p>
-            <a:pPr algn="ctr"/>
-          </a:p>
-        </p:txBody>
-      </p:sp>
-      <p:sp>
-        <p:nvSpPr>
-          <p:cNvPr id="12" name="TextBox 11"/>
-          <p:cNvSpPr txBox="1"/>
-          <p:nvPr/>
-        </p:nvSpPr>
-        <p:spPr>
-          <a:xfrm>
-            <a:off x="1051560" y="2825496"/>
-            <a:ext cx="457200" cy="365760"/>
-          </a:xfrm>
-          <a:prstGeom prst="rect">
-            <a:avLst/>
-          </a:prstGeom>
-          <a:noFill/>
-        </p:spPr>
-        <p:txBody>
-          <a:bodyPr wrap="square" lIns="0" rIns="0" tIns="0" bIns="0">
-            <a:spAutoFit/>
-          </a:bodyPr>
-          <a:lstStyle/>
-          <a:p>
-            <a:pPr algn="l">
-              <a:lnSpc>
-                <a:spcPct val="100000"/>
-              </a:lnSpc>
-            </a:pPr>
-            <a:r>
-              <a:rPr sz="2200" b="1" i="0">
-                <a:solidFill>
-                  <a:srgbClr val="0D6B67"/>
-                </a:solidFill>
-                <a:latin typeface="Segoe UI"/>
-              </a:rPr>
-              <a:t>2</a:t>
-            </a:r>
-          </a:p>
-        </p:txBody>
-      </p:sp>
-      <p:sp>
-        <p:nvSpPr>
-          <p:cNvPr id="13" name="TextBox 12"/>
-          <p:cNvSpPr txBox="1"/>
-          <p:nvPr/>
-        </p:nvSpPr>
-        <p:spPr>
-          <a:xfrm>
-            <a:off x="1645919" y="2715768"/>
-            <a:ext cx="2286000" cy="274320"/>
-          </a:xfrm>
-          <a:prstGeom prst="rect">
-            <a:avLst/>
-          </a:prstGeom>
-          <a:noFill/>
-        </p:spPr>
-        <p:txBody>
-          <a:bodyPr wrap="square" lIns="0" rIns="0" tIns="0" bIns="0">
-            <a:spAutoFit/>
-          </a:bodyPr>
-          <a:lstStyle/>
-          <a:p>
-            <a:pPr algn="l">
-              <a:lnSpc>
-                <a:spcPct val="100000"/>
-              </a:lnSpc>
-            </a:pPr>
-            <a:r>
-              <a:rPr sz="1400" b="1" i="0">
-                <a:solidFill>
-                  <a:srgbClr val="141C1E"/>
-                </a:solidFill>
-                <a:latin typeface="Segoe UI"/>
-              </a:rPr>
-              <a:t>The method</a:t>
-            </a:r>
-          </a:p>
-        </p:txBody>
-      </p:sp>
-      <p:sp>
-        <p:nvSpPr>
-          <p:cNvPr id="14" name="TextBox 13"/>
-          <p:cNvSpPr txBox="1"/>
-          <p:nvPr/>
-        </p:nvSpPr>
-        <p:spPr>
-          <a:xfrm>
-            <a:off x="1645919" y="2990088"/>
-            <a:ext cx="9509760" cy="365760"/>
-          </a:xfrm>
-          <a:prstGeom prst="rect">
-            <a:avLst/>
-          </a:prstGeom>
-          <a:noFill/>
-        </p:spPr>
-        <p:txBody>
-          <a:bodyPr wrap="square" lIns="0" rIns="0" tIns="0" bIns="0">
-            <a:spAutoFit/>
-          </a:bodyPr>
-          <a:lstStyle/>
-          <a:p>
-            <a:pPr algn="l">
-              <a:lnSpc>
-                <a:spcPct val="120000"/>
-              </a:lnSpc>
-            </a:pPr>
-            <a:r>
-              <a:rPr sz="1350" b="0" i="0">
-                <a:solidFill>
-                  <a:srgbClr val="3A4A4C"/>
-                </a:solidFill>
-                <a:latin typeface="Segoe UI"/>
-              </a:rPr>
-              <a:t>Every model frozen; adaptation carried entirely by a sentence — which is what makes the claim identifiable.</a:t>
-            </a:r>
-          </a:p>
-        </p:txBody>
-      </p:sp>
-      <p:sp>
-        <p:nvSpPr>
-          <p:cNvPr id="15" name="Rectangle 14"/>
-          <p:cNvSpPr/>
-          <p:nvPr/>
-        </p:nvSpPr>
-        <p:spPr>
-          <a:xfrm>
-            <a:off x="777240" y="3429000"/>
-            <a:ext cx="10637215" cy="786384"/>
-          </a:xfrm>
-          <a:prstGeom prst="rect">
-            <a:avLst/>
-          </a:prstGeom>
-          <a:solidFill>
-            <a:srgbClr val="F5F7F7"/>
-          </a:solidFill>
-          <a:ln>
-            <a:noFill/>
-          </a:ln>
-          <a:effectLst/>
-        </p:spPr>
-        <p:style>
-          <a:lnRef idx="1">
-            <a:schemeClr val="accent1"/>
-          </a:lnRef>
-          <a:fillRef idx="3">
-            <a:schemeClr val="accent1"/>
-          </a:fillRef>
-          <a:effectRef idx="2">
-            <a:schemeClr val="accent1"/>
-          </a:effectRef>
-          <a:fontRef idx="minor">
-            <a:schemeClr val="lt1"/>
-          </a:fontRef>
-        </p:style>
-        <p:txBody>
-          <a:bodyPr rtlCol="0" anchor="ctr"/>
-          <a:lstStyle/>
-          <a:p>
-            <a:pPr algn="ctr"/>
-          </a:p>
-        </p:txBody>
-      </p:sp>
-      <p:sp>
-        <p:nvSpPr>
-          <p:cNvPr id="16" name="TextBox 15"/>
-          <p:cNvSpPr txBox="1"/>
-          <p:nvPr/>
-        </p:nvSpPr>
-        <p:spPr>
-          <a:xfrm>
-            <a:off x="1051560" y="3648456"/>
-            <a:ext cx="457200" cy="365760"/>
-          </a:xfrm>
-          <a:prstGeom prst="rect">
-            <a:avLst/>
-          </a:prstGeom>
-          <a:noFill/>
-        </p:spPr>
-        <p:txBody>
-          <a:bodyPr wrap="square" lIns="0" rIns="0" tIns="0" bIns="0">
-            <a:spAutoFit/>
-          </a:bodyPr>
-          <a:lstStyle/>
-          <a:p>
-            <a:pPr algn="l">
-              <a:lnSpc>
-                <a:spcPct val="100000"/>
-              </a:lnSpc>
-            </a:pPr>
-            <a:r>
-              <a:rPr sz="2200" b="1" i="0">
-                <a:solidFill>
-                  <a:srgbClr val="0D6B67"/>
-                </a:solidFill>
-                <a:latin typeface="Segoe UI"/>
-              </a:rPr>
-              <a:t>3</a:t>
-            </a:r>
-          </a:p>
-        </p:txBody>
-      </p:sp>
-      <p:sp>
-        <p:nvSpPr>
-          <p:cNvPr id="17" name="TextBox 16"/>
-          <p:cNvSpPr txBox="1"/>
-          <p:nvPr/>
-        </p:nvSpPr>
-        <p:spPr>
-          <a:xfrm>
-            <a:off x="1645919" y="3538728"/>
-            <a:ext cx="2286000" cy="274320"/>
-          </a:xfrm>
-          <a:prstGeom prst="rect">
-            <a:avLst/>
-          </a:prstGeom>
-          <a:noFill/>
-        </p:spPr>
-        <p:txBody>
-          <a:bodyPr wrap="square" lIns="0" rIns="0" tIns="0" bIns="0">
-            <a:spAutoFit/>
-          </a:bodyPr>
-          <a:lstStyle/>
-          <a:p>
-            <a:pPr algn="l">
-              <a:lnSpc>
-                <a:spcPct val="100000"/>
-              </a:lnSpc>
-            </a:pPr>
-            <a:r>
-              <a:rPr sz="1400" b="1" i="0">
-                <a:solidFill>
-                  <a:srgbClr val="141C1E"/>
-                </a:solidFill>
-                <a:latin typeface="Segoe UI"/>
-              </a:rPr>
-              <a:t>The result</a:t>
-            </a:r>
-          </a:p>
-        </p:txBody>
-      </p:sp>
-      <p:sp>
-        <p:nvSpPr>
-          <p:cNvPr id="18" name="TextBox 17"/>
-          <p:cNvSpPr txBox="1"/>
-          <p:nvPr/>
-        </p:nvSpPr>
-        <p:spPr>
-          <a:xfrm>
-            <a:off x="1645919" y="3813048"/>
-            <a:ext cx="9509760" cy="365760"/>
-          </a:xfrm>
-          <a:prstGeom prst="rect">
-            <a:avLst/>
-          </a:prstGeom>
-          <a:noFill/>
-        </p:spPr>
-        <p:txBody>
-          <a:bodyPr wrap="square" lIns="0" rIns="0" tIns="0" bIns="0">
-            <a:spAutoFit/>
-          </a:bodyPr>
-          <a:lstStyle/>
-          <a:p>
-            <a:pPr algn="l">
-              <a:lnSpc>
-                <a:spcPct val="120000"/>
-              </a:lnSpc>
-            </a:pPr>
-            <a:r>
-              <a:rPr sz="1350" b="0" i="0">
-                <a:solidFill>
-                  <a:srgbClr val="3A4A4C"/>
-                </a:solidFill>
-                <a:latin typeface="Segoe UI"/>
-              </a:rPr>
-              <a:t>0.734 AUROC on ShanghaiTech with no training, and a wrong description costs 0.105 — evidence the text is load-bearing.</a:t>
-            </a:r>
-          </a:p>
-        </p:txBody>
-      </p:sp>
-      <p:sp>
-        <p:nvSpPr>
-          <p:cNvPr id="19" name="Rectangle 18"/>
-          <p:cNvSpPr/>
-          <p:nvPr/>
-        </p:nvSpPr>
-        <p:spPr>
-          <a:xfrm>
-            <a:off x="777240" y="4251960"/>
-            <a:ext cx="10637215" cy="786384"/>
-          </a:xfrm>
-          <a:prstGeom prst="rect">
-            <a:avLst/>
-          </a:prstGeom>
-          <a:solidFill>
-            <a:srgbClr val="FFFFFF"/>
-          </a:solidFill>
-          <a:ln>
-            <a:noFill/>
-          </a:ln>
-          <a:effectLst/>
-        </p:spPr>
-        <p:style>
-          <a:lnRef idx="1">
-            <a:schemeClr val="accent1"/>
-          </a:lnRef>
-          <a:fillRef idx="3">
-            <a:schemeClr val="accent1"/>
-          </a:fillRef>
-          <a:effectRef idx="2">
-            <a:schemeClr val="accent1"/>
-          </a:effectRef>
-          <a:fontRef idx="minor">
-            <a:schemeClr val="lt1"/>
-          </a:fontRef>
-        </p:style>
-        <p:txBody>
-          <a:bodyPr rtlCol="0" anchor="ctr"/>
-          <a:lstStyle/>
-          <a:p>
-            <a:pPr algn="ctr"/>
-          </a:p>
-        </p:txBody>
-      </p:sp>
-      <p:sp>
-        <p:nvSpPr>
-          <p:cNvPr id="20" name="TextBox 19"/>
-          <p:cNvSpPr txBox="1"/>
-          <p:nvPr/>
-        </p:nvSpPr>
-        <p:spPr>
-          <a:xfrm>
-            <a:off x="1051560" y="4471416"/>
-            <a:ext cx="457200" cy="365760"/>
-          </a:xfrm>
-          <a:prstGeom prst="rect">
-            <a:avLst/>
-          </a:prstGeom>
-          <a:noFill/>
-        </p:spPr>
-        <p:txBody>
-          <a:bodyPr wrap="square" lIns="0" rIns="0" tIns="0" bIns="0">
-            <a:spAutoFit/>
-          </a:bodyPr>
-          <a:lstStyle/>
-          <a:p>
-            <a:pPr algn="l">
-              <a:lnSpc>
-                <a:spcPct val="100000"/>
-              </a:lnSpc>
-            </a:pPr>
-            <a:r>
-              <a:rPr sz="2200" b="1" i="0">
-                <a:solidFill>
-                  <a:srgbClr val="0D6B67"/>
-                </a:solidFill>
-                <a:latin typeface="Segoe UI"/>
-              </a:rPr>
-              <a:t>4</a:t>
-            </a:r>
-          </a:p>
-        </p:txBody>
-      </p:sp>
-      <p:sp>
-        <p:nvSpPr>
-          <p:cNvPr id="21" name="TextBox 20"/>
-          <p:cNvSpPr txBox="1"/>
-          <p:nvPr/>
-        </p:nvSpPr>
-        <p:spPr>
-          <a:xfrm>
-            <a:off x="1645919" y="4361688"/>
-            <a:ext cx="2286000" cy="274320"/>
-          </a:xfrm>
-          <a:prstGeom prst="rect">
-            <a:avLst/>
-          </a:prstGeom>
-          <a:noFill/>
-        </p:spPr>
-        <p:txBody>
-          <a:bodyPr wrap="square" lIns="0" rIns="0" tIns="0" bIns="0">
-            <a:spAutoFit/>
-          </a:bodyPr>
-          <a:lstStyle/>
-          <a:p>
-            <a:pPr algn="l">
-              <a:lnSpc>
-                <a:spcPct val="100000"/>
-              </a:lnSpc>
-            </a:pPr>
-            <a:r>
-              <a:rPr sz="1400" b="1" i="0">
-                <a:solidFill>
-                  <a:srgbClr val="141C1E"/>
-                </a:solidFill>
-                <a:latin typeface="Segoe UI"/>
-              </a:rPr>
-              <a:t>The finding</a:t>
-            </a:r>
-          </a:p>
-        </p:txBody>
-      </p:sp>
-      <p:sp>
-        <p:nvSpPr>
-          <p:cNvPr id="22" name="TextBox 21"/>
-          <p:cNvSpPr txBox="1"/>
-          <p:nvPr/>
-        </p:nvSpPr>
-        <p:spPr>
-          <a:xfrm>
-            <a:off x="1645919" y="4636008"/>
-            <a:ext cx="9509760" cy="365760"/>
-          </a:xfrm>
-          <a:prstGeom prst="rect">
-            <a:avLst/>
-          </a:prstGeom>
-          <a:noFill/>
-        </p:spPr>
-        <p:txBody>
-          <a:bodyPr wrap="square" lIns="0" rIns="0" tIns="0" bIns="0">
-            <a:spAutoFit/>
-          </a:bodyPr>
-          <a:lstStyle/>
-          <a:p>
-            <a:pPr algn="l">
-              <a:lnSpc>
-                <a:spcPct val="120000"/>
-              </a:lnSpc>
-            </a:pPr>
-            <a:r>
-              <a:rPr sz="1350" b="0" i="0">
-                <a:solidFill>
-                  <a:srgbClr val="3A4A4C"/>
-                </a:solidFill>
-                <a:latin typeface="Segoe UI"/>
-              </a:rPr>
-              <a:t>Where the description is injected dominates what it says, to the point of reversing the effect. Not in the literature.</a:t>
-            </a:r>
-          </a:p>
-        </p:txBody>
-      </p:sp>
-      <p:sp>
-        <p:nvSpPr>
-          <p:cNvPr id="23" name="Rectangle 22"/>
-          <p:cNvSpPr/>
-          <p:nvPr/>
-        </p:nvSpPr>
-        <p:spPr>
-          <a:xfrm>
-            <a:off x="777240" y="5074920"/>
-            <a:ext cx="10637215" cy="786384"/>
-          </a:xfrm>
-          <a:prstGeom prst="rect">
-            <a:avLst/>
-          </a:prstGeom>
-          <a:solidFill>
-            <a:srgbClr val="F5F7F7"/>
-          </a:solidFill>
-          <a:ln>
-            <a:noFill/>
-          </a:ln>
-          <a:effectLst/>
-        </p:spPr>
-        <p:style>
-          <a:lnRef idx="1">
-            <a:schemeClr val="accent1"/>
-          </a:lnRef>
-          <a:fillRef idx="3">
-            <a:schemeClr val="accent1"/>
-          </a:fillRef>
-          <a:effectRef idx="2">
-            <a:schemeClr val="accent1"/>
-          </a:effectRef>
-          <a:fontRef idx="minor">
-            <a:schemeClr val="lt1"/>
-          </a:fontRef>
-        </p:style>
-        <p:txBody>
-          <a:bodyPr rtlCol="0" anchor="ctr"/>
-          <a:lstStyle/>
-          <a:p>
-            <a:pPr algn="ctr"/>
-          </a:p>
-        </p:txBody>
-      </p:sp>
-      <p:sp>
-        <p:nvSpPr>
-          <p:cNvPr id="24" name="TextBox 23"/>
-          <p:cNvSpPr txBox="1"/>
-          <p:nvPr/>
-        </p:nvSpPr>
-        <p:spPr>
-          <a:xfrm>
-            <a:off x="1051560" y="5294376"/>
-            <a:ext cx="457200" cy="365760"/>
-          </a:xfrm>
-          <a:prstGeom prst="rect">
-            <a:avLst/>
-          </a:prstGeom>
-          <a:noFill/>
-        </p:spPr>
-        <p:txBody>
-          <a:bodyPr wrap="square" lIns="0" rIns="0" tIns="0" bIns="0">
-            <a:spAutoFit/>
-          </a:bodyPr>
-          <a:lstStyle/>
-          <a:p>
-            <a:pPr algn="l">
-              <a:lnSpc>
-                <a:spcPct val="100000"/>
-              </a:lnSpc>
-            </a:pPr>
-            <a:r>
-              <a:rPr sz="2200" b="1" i="0">
-                <a:solidFill>
-                  <a:srgbClr val="0D6B67"/>
-                </a:solidFill>
-                <a:latin typeface="Segoe UI"/>
-              </a:rPr>
-              <a:t>5</a:t>
-            </a:r>
-          </a:p>
-        </p:txBody>
-      </p:sp>
-      <p:sp>
-        <p:nvSpPr>
-          <p:cNvPr id="25" name="TextBox 24"/>
-          <p:cNvSpPr txBox="1"/>
-          <p:nvPr/>
-        </p:nvSpPr>
-        <p:spPr>
-          <a:xfrm>
-            <a:off x="1645919" y="5184648"/>
-            <a:ext cx="2286000" cy="274320"/>
-          </a:xfrm>
-          <a:prstGeom prst="rect">
-            <a:avLst/>
-          </a:prstGeom>
-          <a:noFill/>
-        </p:spPr>
-        <p:txBody>
-          <a:bodyPr wrap="square" lIns="0" rIns="0" tIns="0" bIns="0">
-            <a:spAutoFit/>
-          </a:bodyPr>
-          <a:lstStyle/>
-          <a:p>
-            <a:pPr algn="l">
-              <a:lnSpc>
-                <a:spcPct val="100000"/>
-              </a:lnSpc>
-            </a:pPr>
-            <a:r>
-              <a:rPr sz="1400" b="1" i="0">
-                <a:solidFill>
-                  <a:srgbClr val="141C1E"/>
-                </a:solidFill>
-                <a:latin typeface="Segoe UI"/>
-              </a:rPr>
-              <a:t>The boundary</a:t>
-            </a:r>
-          </a:p>
-        </p:txBody>
-      </p:sp>
-      <p:sp>
-        <p:nvSpPr>
-          <p:cNvPr id="26" name="TextBox 25"/>
-          <p:cNvSpPr txBox="1"/>
-          <p:nvPr/>
-        </p:nvSpPr>
-        <p:spPr>
-          <a:xfrm>
-            <a:off x="1645919" y="5458968"/>
-            <a:ext cx="9509760" cy="365760"/>
-          </a:xfrm>
-          <a:prstGeom prst="rect">
-            <a:avLst/>
-          </a:prstGeom>
-          <a:noFill/>
-        </p:spPr>
-        <p:txBody>
-          <a:bodyPr wrap="square" lIns="0" rIns="0" tIns="0" bIns="0">
-            <a:spAutoFit/>
-          </a:bodyPr>
-          <a:lstStyle/>
-          <a:p>
-            <a:pPr algn="l">
-              <a:lnSpc>
-                <a:spcPct val="120000"/>
-              </a:lnSpc>
-            </a:pPr>
-            <a:r>
-              <a:rPr sz="1350" b="0" i="0">
-                <a:solidFill>
-                  <a:srgbClr val="3A4A4C"/>
-                </a:solidFill>
-                <a:latin typeface="Segoe UI"/>
-              </a:rPr>
-              <a:t>It does not replicate on a single-scene benchmark. The claim is scoped, not abandoned — and we named the test that settles it.</a:t>
+              <a:t>It does not replicate on a single-scene benchmark, and a within-view control shows why: the sentence tells the model which scene it is in. The claim is scoped, and the scoping is measured.</a:t>
             </a:r>
           </a:p>
         </p:txBody>

--- a/docs/06_presentations/DA-ZVAD_Phase2_Review.pptx
+++ b/docs/06_presentations/DA-ZVAD_Phase2_Review.pptx
@@ -18329,7 +18329,7 @@
         <p:spPr>
           <a:xfrm>
             <a:off x="777240" y="1783080"/>
-            <a:ext cx="6858000" cy="4263216"/>
+            <a:ext cx="6858000" cy="3788685"/>
           </a:xfrm>
           <a:prstGeom prst="rect">
             <a:avLst/>

--- a/docs/06_presentations/DA-ZVAD_Phase2_Review.pptx
+++ b/docs/06_presentations/DA-ZVAD_Phase2_Review.pptx
@@ -5635,7 +5635,7 @@
                 </a:solidFill>
                 <a:latin typeface="Segoe UI"/>
               </a:rPr>
-              <a:t>13 camera views.  </a:t>
+              <a:t>12 camera views.  </a:t>
             </a:r>
             <a:r>
               <a:rPr sz="1600">
@@ -5736,7 +5736,7 @@
                 </a:solidFill>
                 <a:latin typeface="Segoe UI"/>
               </a:rPr>
-              <a:t>We pooled every frame from all 13 cameras into one ranking.</a:t>
+              <a:t>We pooled every frame from all 12 cameras into one ranking.</a:t>
             </a:r>
           </a:p>
         </p:txBody>
@@ -10150,7 +10150,7 @@
                           </a:solidFill>
                           <a:latin typeface="Segoe UI"/>
                         </a:rPr>
-                        <a:t>ShanghaiTech  (13 views)</a:t>
+                        <a:t>ShanghaiTech  (12 views)</a:t>
                       </a:r>
                     </a:p>
                   </a:txBody>
@@ -10827,7 +10827,7 @@
                 </a:solidFill>
                 <a:latin typeface="Segoe UI"/>
               </a:rPr>
-              <a:t>ShanghaiTech has 13 camera views; Avenue has one. A scene description has work to do only when there are several environments to tell apart. Testable: run the sweep inside a single ShanghaiTech view.</a:t>
+              <a:t>ShanghaiTech has 12 camera views; Avenue has one. A scene description has work to do only when there are several environments to tell apart. Testable: run the sweep inside a single ShanghaiTech view.</a:t>
             </a:r>
           </a:p>
         </p:txBody>
@@ -11089,7 +11089,7 @@
                 </a:solidFill>
                 <a:latin typeface="Segoe UI"/>
               </a:rPr>
-              <a:t>ShanghaiTech is thirteen single-view datasets stacked together. If the descriptor works by telling the model WHICH scene it is in, then confining the sweep to one camera view should reproduce Avenue's flat result.</a:t>
+              <a:t>ShanghaiTech is twelve single-view datasets stacked together. If the descriptor works by telling the model WHICH scene it is in, then confining the sweep to one camera view should reproduce Avenue's flat result.</a:t>
             </a:r>
           </a:p>
         </p:txBody>
@@ -11249,7 +11249,7 @@
                           </a:solidFill>
                           <a:latin typeface="Segoe UI"/>
                         </a:rPr>
-                        <a:t>13</a:t>
+                        <a:t>12</a:t>
                       </a:r>
                     </a:p>
                   </a:txBody>
@@ -20705,7 +20705,7 @@
                           </a:solidFill>
                           <a:latin typeface="Segoe UI"/>
                         </a:rPr>
-                        <a:t>ShanghaiTech (13 views) and CUHK Avenue (1 view)</a:t>
+                        <a:t>ShanghaiTech (12 views) and CUHK Avenue (1 view)</a:t>
                       </a:r>
                     </a:p>
                   </a:txBody>
